--- a/xcheck/xcheck-correlation.pptx
+++ b/xcheck/xcheck-correlation.pptx
@@ -11,6 +11,7 @@
     <p:sldId id="259" r:id="rId10"/>
     <p:sldId id="260" r:id="rId11"/>
     <p:sldId id="261" r:id="rId12"/>
+    <p:sldId id="262" r:id="rId13"/>
   </p:sldIdLst>
   <p:sldSz cx="12191695" cy="6858000" type="screen4x3"/>
   <p:notesSz cx="6858000" cy="9144000"/>
@@ -3095,14 +3096,57 @@
       <p:grpSpPr/>
       <p:sp>
         <p:nvSpPr>
-          <p:cNvPr id="2" name="TextBox 1"/>
+          <p:cNvPr id="2" name="Rectangle 1"/>
+          <p:cNvSpPr/>
+          <p:nvPr/>
+        </p:nvSpPr>
+        <p:spPr>
+          <a:xfrm>
+            <a:off x="0" y="2148840"/>
+            <a:ext cx="12191695" cy="1737360"/>
+          </a:xfrm>
+          <a:prstGeom prst="rect">
+            <a:avLst/>
+          </a:prstGeom>
+          <a:solidFill>
+            <a:srgbClr val="202124"/>
+          </a:solidFill>
+          <a:ln>
+            <a:noFill/>
+          </a:ln>
+        </p:spPr>
+        <p:style>
+          <a:lnRef idx="1">
+            <a:schemeClr val="accent1"/>
+          </a:lnRef>
+          <a:fillRef idx="3">
+            <a:schemeClr val="accent1"/>
+          </a:fillRef>
+          <a:effectRef idx="2">
+            <a:schemeClr val="accent1"/>
+          </a:effectRef>
+          <a:fontRef idx="minor">
+            <a:schemeClr val="lt1"/>
+          </a:fontRef>
+        </p:style>
+        <p:txBody>
+          <a:bodyPr rtlCol="0" anchor="ctr"/>
+          <a:lstStyle/>
+          <a:p>
+            <a:pPr algn="ctr"/>
+          </a:p>
+        </p:txBody>
+      </p:sp>
+      <p:sp>
+        <p:nvSpPr>
+          <p:cNvPr id="3" name="TextBox 2"/>
           <p:cNvSpPr txBox="1"/>
           <p:nvPr/>
         </p:nvSpPr>
         <p:spPr>
           <a:xfrm>
-            <a:off x="548640" y="731520"/>
-            <a:ext cx="11155680" cy="914400"/>
+            <a:off x="822960" y="2286000"/>
+            <a:ext cx="10515600" cy="502920"/>
           </a:xfrm>
           <a:prstGeom prst="rect">
             <a:avLst/>
@@ -3117,27 +3161,27 @@
           <a:p>
             <a:pPr algn="l"/>
             <a:r>
-              <a:rPr sz="3600" b="1">
+              <a:rPr sz="2700" b="1">
                 <a:solidFill>
-                  <a:srgbClr val="202124"/>
+                  <a:srgbClr val="FFFFFF"/>
                 </a:solidFill>
                 <a:latin typeface="Calibri"/>
               </a:rPr>
-              <a:t>Does QEMU activity correlate with real silicon?</a:t>
-            </a:r>
-          </a:p>
-        </p:txBody>
-      </p:sp>
-      <p:sp>
-        <p:nvSpPr>
-          <p:cNvPr id="3" name="TextBox 2"/>
+              <a:t>Correlating QEMU functional activity with i.MX95 silicon</a:t>
+            </a:r>
+          </a:p>
+        </p:txBody>
+      </p:sp>
+      <p:sp>
+        <p:nvSpPr>
+          <p:cNvPr id="4" name="TextBox 3"/>
           <p:cNvSpPr txBox="1"/>
           <p:nvPr/>
         </p:nvSpPr>
         <p:spPr>
           <a:xfrm>
-            <a:off x="548640" y="1828800"/>
-            <a:ext cx="11155680" cy="457200"/>
+            <a:off x="822960" y="3063240"/>
+            <a:ext cx="10515600" cy="548640"/>
           </a:xfrm>
           <a:prstGeom prst="rect">
             <a:avLst/>
@@ -3152,27 +3196,27 @@
           <a:p>
             <a:pPr algn="l"/>
             <a:r>
-              <a:rPr sz="1400" b="0">
+              <a:rPr sz="1500" b="0">
                 <a:solidFill>
-                  <a:srgbClr val="5F6368"/>
+                  <a:srgbClr val="C9D4E4"/>
                 </a:solidFill>
                 <a:latin typeface="Calibri"/>
               </a:rPr>
-              <a:t>wattson xcheck v1 — 14 applications, same static binaries under QEMU's TCG plugins and on the i.MX95 FRDM (A55 PMUs + the imx9_ddr0 DDR-controller counters).</a:t>
-            </a:r>
-          </a:p>
-        </p:txBody>
-      </p:sp>
-      <p:sp>
-        <p:nvSpPr>
-          <p:cNvPr id="4" name="TextBox 3"/>
+              <a:t>wattson cross-check (xcheck) · rev 2 · fourteen applications, three hardware counters, one correction factor</a:t>
+            </a:r>
+          </a:p>
+        </p:txBody>
+      </p:sp>
+      <p:sp>
+        <p:nvSpPr>
+          <p:cNvPr id="5" name="TextBox 4"/>
           <p:cNvSpPr txBox="1"/>
           <p:nvPr/>
         </p:nvSpPr>
         <p:spPr>
           <a:xfrm>
-            <a:off x="548640" y="2651760"/>
-            <a:ext cx="11155680" cy="640080"/>
+            <a:off x="822960" y="4206240"/>
+            <a:ext cx="10515600" cy="548640"/>
           </a:xfrm>
           <a:prstGeom prst="rect">
             <a:avLst/>
@@ -3187,27 +3231,28 @@
           <a:p>
             <a:pPr algn="l"/>
             <a:r>
-              <a:rPr sz="1600" b="1">
+              <a:rPr sz="1300" b="0">
                 <a:solidFill>
-                  <a:srgbClr val="187A33"/>
+                  <a:srgbClr val="5F6368"/>
                 </a:solidFill>
                 <a:latin typeface="Calibri"/>
               </a:rPr>
-              <a:t>INSTRUCTIONS: validated. 0.98–1.06 on every application — compute, compression, database, game AI, networking — including 0.997 on a 10-billion-instruction vision app.</a:t>
-            </a:r>
-          </a:p>
-        </p:txBody>
-      </p:sp>
-      <p:sp>
-        <p:nvSpPr>
-          <p:cNvPr id="5" name="TextBox 4"/>
+              <a:t>Thesis under test: a functional emulator's activity counts — instructions retired, cache-model misses —
+track what the silicon actually does closely enough to anchor per-event power estimation.</a:t>
+            </a:r>
+          </a:p>
+        </p:txBody>
+      </p:sp>
+      <p:sp>
+        <p:nvSpPr>
+          <p:cNvPr id="6" name="TextBox 5"/>
           <p:cNvSpPr txBox="1"/>
           <p:nvPr/>
         </p:nvSpPr>
         <p:spPr>
           <a:xfrm>
-            <a:off x="548640" y="3520440"/>
-            <a:ext cx="11155680" cy="822960"/>
+            <a:off x="822960" y="6217920"/>
+            <a:ext cx="10515600" cy="365760"/>
           </a:xfrm>
           <a:prstGeom prst="rect">
             <a:avLst/>
@@ -3222,118 +3267,13 @@
           <a:p>
             <a:pPr algn="l"/>
             <a:r>
-              <a:rPr sz="1400" b="1">
-                <a:solidFill>
-                  <a:srgbClr val="202124"/>
-                </a:solidFill>
-                <a:latin typeface="Calibri"/>
-              </a:rPr>
-              <a:t>DRAM READS: with the DDR controller as ground truth, the proxy fits a single factor — proxy = 0.81 × silicon, spread ×/÷ 1.26 over every app with traffic above the counter's noise floor. Exact (0.96–0.98) on latency- and bandwidth-bound workloads — and the five DRAM-quiet apps (game AI, database, lz4, lua, alu) are correctly CLASSIFIED quiet.</a:t>
-            </a:r>
-          </a:p>
-        </p:txBody>
-      </p:sp>
-      <p:sp>
-        <p:nvSpPr>
-          <p:cNvPr id="6" name="TextBox 5"/>
-          <p:cNvSpPr txBox="1"/>
-          <p:nvPr/>
-        </p:nvSpPr>
-        <p:spPr>
-          <a:xfrm>
-            <a:off x="548640" y="4480560"/>
-            <a:ext cx="11155680" cy="731520"/>
-          </a:xfrm>
-          <a:prstGeom prst="rect">
-            <a:avLst/>
-          </a:prstGeom>
-          <a:noFill/>
-        </p:spPr>
-        <p:txBody>
-          <a:bodyPr wrap="square">
-            <a:spAutoFit/>
-          </a:bodyPr>
-          <a:lstStyle/>
-          <a:p>
-            <a:pPr algn="l"/>
-            <a:r>
-              <a:rPr sz="1350" b="0">
-                <a:solidFill>
-                  <a:srgbClr val="202124"/>
-                </a:solidFill>
-                <a:latin typeface="Calibri"/>
-              </a:rPr>
-              <a:t>DRAM WRITES: streaming-write class modelled (0.80); scattered writes leave DRAM via dirty evictions the model does not yet count — stated as the open gap, with the fix identified (a writeback model).</a:t>
-            </a:r>
-          </a:p>
-        </p:txBody>
-      </p:sp>
-      <p:sp>
-        <p:nvSpPr>
-          <p:cNvPr id="7" name="TextBox 6"/>
-          <p:cNvSpPr txBox="1"/>
-          <p:nvPr/>
-        </p:nvSpPr>
-        <p:spPr>
-          <a:xfrm>
-            <a:off x="548640" y="5394960"/>
-            <a:ext cx="11155680" cy="640080"/>
-          </a:xfrm>
-          <a:prstGeom prst="rect">
-            <a:avLst/>
-          </a:prstGeom>
-          <a:noFill/>
-        </p:spPr>
-        <p:txBody>
-          <a:bodyPr wrap="square">
-            <a:spAutoFit/>
-          </a:bodyPr>
-          <a:lstStyle/>
-          <a:p>
-            <a:pPr algn="l"/>
-            <a:r>
-              <a:rPr sz="1150" b="0">
-                <a:solidFill>
-                  <a:srgbClr val="5F6368"/>
-                </a:solidFill>
-                <a:latin typeface="Calibri"/>
-              </a:rPr>
-              <a:t>Three boundary lessons: l3d_cache_refill counts only DEMAND refills (prefetch bypasses it; the DDR controller is the honest truth); A55 write-streaming is worth 2x if unmodelled; and the network app exposes the linux-user boundary — kernel TCP work (~20% of its instructions) and ethernet DMA are invisible to a userspace-only QEMU. Network I/O needs the system-mode harness.</a:t>
-            </a:r>
-          </a:p>
-        </p:txBody>
-      </p:sp>
-      <p:sp>
-        <p:nvSpPr>
-          <p:cNvPr id="8" name="TextBox 7"/>
-          <p:cNvSpPr txBox="1"/>
-          <p:nvPr/>
-        </p:nvSpPr>
-        <p:spPr>
-          <a:xfrm>
-            <a:off x="548640" y="6309360"/>
-            <a:ext cx="11155680" cy="365760"/>
-          </a:xfrm>
-          <a:prstGeom prst="rect">
-            <a:avLst/>
-          </a:prstGeom>
-          <a:noFill/>
-        </p:spPr>
-        <p:txBody>
-          <a:bodyPr wrap="square">
-            <a:spAutoFit/>
-          </a:bodyPr>
-          <a:lstStyle/>
-          <a:p>
-            <a:pPr algn="l"/>
-            <a:r>
               <a:rPr sz="1100" b="0">
                 <a:solidFill>
                   <a:srgbClr val="5F6368"/>
                 </a:solidFill>
                 <a:latin typeface="Calibri"/>
               </a:rPr>
-              <a:t>QEMU counts DERIVED · PMU/DDR counts MEASURED · every ratio is the labelled bridge. QEMU numbers are never silicon.</a:t>
+              <a:t>Kyle Fox · measured on FRDM-IMX95 silicon + qemu-aarch64 TCG plugins · 2026-08-30</a:t>
             </a:r>
           </a:p>
         </p:txBody>
@@ -3358,14 +3298,57 @@
       <p:grpSpPr/>
       <p:sp>
         <p:nvSpPr>
-          <p:cNvPr id="2" name="TextBox 1"/>
+          <p:cNvPr id="2" name="Rectangle 1"/>
+          <p:cNvSpPr/>
+          <p:nvPr/>
+        </p:nvSpPr>
+        <p:spPr>
+          <a:xfrm>
+            <a:off x="0" y="0"/>
+            <a:ext cx="12191695" cy="841248"/>
+          </a:xfrm>
+          <a:prstGeom prst="rect">
+            <a:avLst/>
+          </a:prstGeom>
+          <a:solidFill>
+            <a:srgbClr val="202124"/>
+          </a:solidFill>
+          <a:ln>
+            <a:noFill/>
+          </a:ln>
+        </p:spPr>
+        <p:style>
+          <a:lnRef idx="1">
+            <a:schemeClr val="accent1"/>
+          </a:lnRef>
+          <a:fillRef idx="3">
+            <a:schemeClr val="accent1"/>
+          </a:fillRef>
+          <a:effectRef idx="2">
+            <a:schemeClr val="accent1"/>
+          </a:effectRef>
+          <a:fontRef idx="minor">
+            <a:schemeClr val="lt1"/>
+          </a:fontRef>
+        </p:style>
+        <p:txBody>
+          <a:bodyPr rtlCol="0" anchor="ctr"/>
+          <a:lstStyle/>
+          <a:p>
+            <a:pPr algn="ctr"/>
+          </a:p>
+        </p:txBody>
+      </p:sp>
+      <p:sp>
+        <p:nvSpPr>
+          <p:cNvPr id="3" name="TextBox 2"/>
           <p:cNvSpPr txBox="1"/>
           <p:nvPr/>
         </p:nvSpPr>
         <p:spPr>
           <a:xfrm>
-            <a:off x="548640" y="320040"/>
-            <a:ext cx="11155680" cy="640080"/>
+            <a:off x="548640" y="118872"/>
+            <a:ext cx="10058400" cy="548640"/>
           </a:xfrm>
           <a:prstGeom prst="rect">
             <a:avLst/>
@@ -3380,27 +3363,70 @@
           <a:p>
             <a:pPr algn="l"/>
             <a:r>
-              <a:rPr sz="3000" b="1">
+              <a:rPr sz="2600" b="1">
                 <a:solidFill>
-                  <a:srgbClr val="202124"/>
+                  <a:srgbClr val="FFFFFF"/>
                 </a:solidFill>
                 <a:latin typeface="Calibri"/>
               </a:rPr>
-              <a:t>Method: one binary, two observatories, three counters</a:t>
-            </a:r>
-          </a:p>
-        </p:txBody>
-      </p:sp>
-      <p:sp>
-        <p:nvSpPr>
-          <p:cNvPr id="3" name="TextBox 2"/>
+              <a:t>Executive summary</a:t>
+            </a:r>
+          </a:p>
+        </p:txBody>
+      </p:sp>
+      <p:sp>
+        <p:nvSpPr>
+          <p:cNvPr id="4" name="Rectangle 3"/>
+          <p:cNvSpPr/>
+          <p:nvPr/>
+        </p:nvSpPr>
+        <p:spPr>
+          <a:xfrm>
+            <a:off x="0" y="841248"/>
+            <a:ext cx="12191695" cy="38100"/>
+          </a:xfrm>
+          <a:prstGeom prst="rect">
+            <a:avLst/>
+          </a:prstGeom>
+          <a:solidFill>
+            <a:srgbClr val="1A53A0"/>
+          </a:solidFill>
+          <a:ln>
+            <a:noFill/>
+          </a:ln>
+        </p:spPr>
+        <p:style>
+          <a:lnRef idx="1">
+            <a:schemeClr val="accent1"/>
+          </a:lnRef>
+          <a:fillRef idx="3">
+            <a:schemeClr val="accent1"/>
+          </a:fillRef>
+          <a:effectRef idx="2">
+            <a:schemeClr val="accent1"/>
+          </a:effectRef>
+          <a:fontRef idx="minor">
+            <a:schemeClr val="lt1"/>
+          </a:fontRef>
+        </p:style>
+        <p:txBody>
+          <a:bodyPr rtlCol="0" anchor="ctr"/>
+          <a:lstStyle/>
+          <a:p>
+            <a:pPr algn="ctr"/>
+          </a:p>
+        </p:txBody>
+      </p:sp>
+      <p:sp>
+        <p:nvSpPr>
+          <p:cNvPr id="5" name="TextBox 4"/>
           <p:cNvSpPr txBox="1"/>
           <p:nvPr/>
         </p:nvSpPr>
         <p:spPr>
           <a:xfrm>
-            <a:off x="640080" y="1097280"/>
-            <a:ext cx="10972800" cy="384048"/>
+            <a:off x="548640" y="969264"/>
+            <a:ext cx="11155680" cy="365760"/>
           </a:xfrm>
           <a:prstGeom prst="rect">
             <a:avLst/>
@@ -3415,27 +3441,27 @@
           <a:p>
             <a:pPr algn="l"/>
             <a:r>
-              <a:rPr sz="1250" b="1">
+              <a:rPr sz="1200" b="0">
                 <a:solidFill>
-                  <a:srgbClr val="202124"/>
+                  <a:srgbClr val="5F6368"/>
                 </a:solidFill>
                 <a:latin typeface="Calibri"/>
               </a:rPr>
-              <a:t>Same static aarch64 binary, run twice:</a:t>
-            </a:r>
-          </a:p>
-        </p:txBody>
-      </p:sp>
-      <p:sp>
-        <p:nvSpPr>
-          <p:cNvPr id="4" name="TextBox 3"/>
+              <a:t>Everything on one slide; the rest of the deck is evidence.</a:t>
+            </a:r>
+          </a:p>
+        </p:txBody>
+      </p:sp>
+      <p:sp>
+        <p:nvSpPr>
+          <p:cNvPr id="6" name="TextBox 5"/>
           <p:cNvSpPr txBox="1"/>
           <p:nvPr/>
         </p:nvSpPr>
         <p:spPr>
           <a:xfrm>
-            <a:off x="640080" y="1499616"/>
-            <a:ext cx="10972800" cy="384048"/>
+            <a:off x="548640" y="6528816"/>
+            <a:ext cx="9601200" cy="274320"/>
           </a:xfrm>
           <a:prstGeom prst="rect">
             <a:avLst/>
@@ -3450,27 +3476,27 @@
           <a:p>
             <a:pPr algn="l"/>
             <a:r>
-              <a:rPr sz="1250" b="0">
+              <a:rPr sz="950" b="0">
                 <a:solidFill>
-                  <a:srgbClr val="202124"/>
+                  <a:srgbClr val="5F6368"/>
                 </a:solidFill>
                 <a:latin typeface="Calibri"/>
               </a:rPr>
-              <a:t>  QEMU — qemu-aarch64 + libinsn + libcache TCG plugins. The cache model is the FRDM's own hierarchy (sysfs-read:</a:t>
-            </a:r>
-          </a:p>
-        </p:txBody>
-      </p:sp>
-      <p:sp>
-        <p:nvSpPr>
-          <p:cNvPr id="5" name="TextBox 4"/>
+              <a:t>wattson xcheck rev 2 · QEMU counts DERIVED, PMU/DDR counts MEASURED · 2026-08-30</a:t>
+            </a:r>
+          </a:p>
+        </p:txBody>
+      </p:sp>
+      <p:sp>
+        <p:nvSpPr>
+          <p:cNvPr id="7" name="TextBox 6"/>
           <p:cNvSpPr txBox="1"/>
           <p:nvPr/>
         </p:nvSpPr>
         <p:spPr>
           <a:xfrm>
-            <a:off x="640080" y="1901952"/>
-            <a:ext cx="10972800" cy="384048"/>
+            <a:off x="11247120" y="6528816"/>
+            <a:ext cx="457200" cy="274320"/>
           </a:xfrm>
           <a:prstGeom prst="rect">
             <a:avLst/>
@@ -3483,29 +3509,496 @@
           </a:bodyPr>
           <a:lstStyle/>
           <a:p>
-            <a:pPr algn="l"/>
-            <a:r>
-              <a:rPr sz="1250" b="0">
+            <a:pPr algn="r"/>
+            <a:r>
+              <a:rPr sz="950" b="0">
                 <a:solidFill>
-                  <a:srgbClr val="202124"/>
+                  <a:srgbClr val="5F6368"/>
                 </a:solidFill>
                 <a:latin typeface="Calibri"/>
               </a:rPr>
-              <a:t>  L1 32K/4w, L2 64K/4w, shared L3 512K/16w) plus an A55-style write-streaming detector. L3 misses = DRAM-read proxy;</a:t>
-            </a:r>
-          </a:p>
-        </p:txBody>
-      </p:sp>
-      <p:sp>
-        <p:nvSpPr>
-          <p:cNvPr id="6" name="TextBox 5"/>
+              <a:t>2</a:t>
+            </a:r>
+          </a:p>
+        </p:txBody>
+      </p:sp>
+      <p:graphicFrame>
+        <p:nvGraphicFramePr>
+          <p:cNvPr id="8" name="Table 7"/>
+          <p:cNvGraphicFramePr>
+            <a:graphicFrameLocks noGrp="1"/>
+          </p:cNvGraphicFramePr>
+          <p:nvPr/>
+        </p:nvGraphicFramePr>
+        <p:xfrm>
+          <a:off x="548640" y="1417320"/>
+          <a:ext cx="11064240" cy="3328416"/>
+        </p:xfrm>
+        <a:graphic>
+          <a:graphicData uri="http://schemas.openxmlformats.org/drawingml/2006/table">
+            <a:tbl>
+              <a:tblPr firstRow="1" bandRow="1">
+                <a:tableStyleId>{5C22544A-7EE6-4342-B048-85BDC9FD1C3A}</a:tableStyleId>
+              </a:tblPr>
+              <a:tblGrid>
+                <a:gridCol w="2834640"/>
+                <a:gridCol w="5120640"/>
+                <a:gridCol w="3108960"/>
+              </a:tblGrid>
+              <a:tr h="475488">
+                <a:tc>
+                  <a:txBody>
+                    <a:bodyPr/>
+                    <a:lstStyle/>
+                    <a:p>
+                      <a:r>
+                        <a:rPr sz="1100" b="1">
+                          <a:solidFill>
+                            <a:srgbClr val="FFFFFF"/>
+                          </a:solidFill>
+                          <a:latin typeface="Calibri"/>
+                        </a:rPr>
+                        <a:t>quantity</a:t>
+                      </a:r>
+                    </a:p>
+                  </a:txBody>
+                  <a:tcPr>
+                    <a:solidFill>
+                      <a:srgbClr val="202124"/>
+                    </a:solidFill>
+                  </a:tcPr>
+                </a:tc>
+                <a:tc>
+                  <a:txBody>
+                    <a:bodyPr/>
+                    <a:lstStyle/>
+                    <a:p>
+                      <a:r>
+                        <a:rPr sz="1100" b="1">
+                          <a:solidFill>
+                            <a:srgbClr val="FFFFFF"/>
+                          </a:solidFill>
+                          <a:latin typeface="Calibri"/>
+                        </a:rPr>
+                        <a:t>result</a:t>
+                      </a:r>
+                    </a:p>
+                  </a:txBody>
+                  <a:tcPr>
+                    <a:solidFill>
+                      <a:srgbClr val="202124"/>
+                    </a:solidFill>
+                  </a:tcPr>
+                </a:tc>
+                <a:tc>
+                  <a:txBody>
+                    <a:bodyPr/>
+                    <a:lstStyle/>
+                    <a:p>
+                      <a:r>
+                        <a:rPr sz="1100" b="1">
+                          <a:solidFill>
+                            <a:srgbClr val="FFFFFF"/>
+                          </a:solidFill>
+                          <a:latin typeface="Calibri"/>
+                        </a:rPr>
+                        <a:t>status</a:t>
+                      </a:r>
+                    </a:p>
+                  </a:txBody>
+                  <a:tcPr>
+                    <a:solidFill>
+                      <a:srgbClr val="202124"/>
+                    </a:solidFill>
+                  </a:tcPr>
+                </a:tc>
+              </a:tr>
+              <a:tr h="475488">
+                <a:tc>
+                  <a:txBody>
+                    <a:bodyPr/>
+                    <a:lstStyle/>
+                    <a:p>
+                      <a:r>
+                        <a:rPr sz="1100" b="1">
+                          <a:latin typeface="Calibri"/>
+                        </a:rPr>
+                        <a:t>Instruction activity, per core</a:t>
+                      </a:r>
+                    </a:p>
+                  </a:txBody>
+                  <a:tcPr>
+                    <a:solidFill>
+                      <a:srgbClr val="EFF3FA"/>
+                    </a:solidFill>
+                  </a:tcPr>
+                </a:tc>
+                <a:tc>
+                  <a:txBody>
+                    <a:bodyPr/>
+                    <a:lstStyle/>
+                    <a:p>
+                      <a:r>
+                        <a:rPr sz="1100" b="0">
+                          <a:latin typeface="Calibri"/>
+                        </a:rPr>
+                        <a:t>0.98 – 1.06 across all 14 apps (0.997 on a 10.2 B-insn vision app)</a:t>
+                      </a:r>
+                    </a:p>
+                  </a:txBody>
+                  <a:tcPr>
+                    <a:solidFill>
+                      <a:srgbClr val="EFF3FA"/>
+                    </a:solidFill>
+                  </a:tcPr>
+                </a:tc>
+                <a:tc>
+                  <a:txBody>
+                    <a:bodyPr/>
+                    <a:lstStyle/>
+                    <a:p>
+                      <a:r>
+                        <a:rPr sz="1100" b="0">
+                          <a:solidFill>
+                            <a:srgbClr val="187A33"/>
+                          </a:solidFill>
+                          <a:latin typeface="Calibri"/>
+                        </a:rPr>
+                        <a:t>VALIDATED — use as-is</a:t>
+                      </a:r>
+                    </a:p>
+                  </a:txBody>
+                  <a:tcPr>
+                    <a:solidFill>
+                      <a:srgbClr val="EFF3FA"/>
+                    </a:solidFill>
+                  </a:tcPr>
+                </a:tc>
+              </a:tr>
+              <a:tr h="475488">
+                <a:tc>
+                  <a:txBody>
+                    <a:bodyPr/>
+                    <a:lstStyle/>
+                    <a:p>
+                      <a:r>
+                        <a:rPr sz="1100" b="1">
+                          <a:latin typeface="Calibri"/>
+                        </a:rPr>
+                        <a:t>DRAM read traffic</a:t>
+                      </a:r>
+                    </a:p>
+                  </a:txBody>
+                  <a:tcPr>
+                    <a:solidFill>
+                      <a:srgbClr val="FFFFFF"/>
+                    </a:solidFill>
+                  </a:tcPr>
+                </a:tc>
+                <a:tc>
+                  <a:txBody>
+                    <a:bodyPr/>
+                    <a:lstStyle/>
+                    <a:p>
+                      <a:r>
+                        <a:rPr sz="1100" b="0">
+                          <a:latin typeface="Calibri"/>
+                        </a:rPr>
+                        <a:t>proxy = 0.81 × silicon, geo-spread ×/÷ 1.26 (8 apps above noise floor)</a:t>
+                      </a:r>
+                    </a:p>
+                  </a:txBody>
+                  <a:tcPr>
+                    <a:solidFill>
+                      <a:srgbClr val="FFFFFF"/>
+                    </a:solidFill>
+                  </a:tcPr>
+                </a:tc>
+                <a:tc>
+                  <a:txBody>
+                    <a:bodyPr/>
+                    <a:lstStyle/>
+                    <a:p>
+                      <a:r>
+                        <a:rPr sz="1100" b="0">
+                          <a:solidFill>
+                            <a:srgbClr val="187A33"/>
+                          </a:solidFill>
+                          <a:latin typeface="Calibri"/>
+                        </a:rPr>
+                        <a:t>USABLE — apply ×1.23, carry ×/÷1.26</a:t>
+                      </a:r>
+                    </a:p>
+                  </a:txBody>
+                  <a:tcPr>
+                    <a:solidFill>
+                      <a:srgbClr val="FFFFFF"/>
+                    </a:solidFill>
+                  </a:tcPr>
+                </a:tc>
+              </a:tr>
+              <a:tr h="475488">
+                <a:tc>
+                  <a:txBody>
+                    <a:bodyPr/>
+                    <a:lstStyle/>
+                    <a:p>
+                      <a:r>
+                        <a:rPr sz="1100" b="1">
+                          <a:latin typeface="Calibri"/>
+                        </a:rPr>
+                        <a:t>DRAM-quiet classification</a:t>
+                      </a:r>
+                    </a:p>
+                  </a:txBody>
+                  <a:tcPr>
+                    <a:solidFill>
+                      <a:srgbClr val="EFF3FA"/>
+                    </a:solidFill>
+                  </a:tcPr>
+                </a:tc>
+                <a:tc>
+                  <a:txBody>
+                    <a:bodyPr/>
+                    <a:lstStyle/>
+                    <a:p>
+                      <a:r>
+                        <a:rPr sz="1100" b="0">
+                          <a:latin typeface="Calibri"/>
+                        </a:rPr>
+                        <a:t>5 low-traffic apps (alu, lua, lz4, pacman, sqlite) predicted quiet; silicon concurs</a:t>
+                      </a:r>
+                    </a:p>
+                  </a:txBody>
+                  <a:tcPr>
+                    <a:solidFill>
+                      <a:srgbClr val="EFF3FA"/>
+                    </a:solidFill>
+                  </a:tcPr>
+                </a:tc>
+                <a:tc>
+                  <a:txBody>
+                    <a:bodyPr/>
+                    <a:lstStyle/>
+                    <a:p>
+                      <a:r>
+                        <a:rPr sz="1100" b="0">
+                          <a:solidFill>
+                            <a:srgbClr val="187A33"/>
+                          </a:solidFill>
+                          <a:latin typeface="Calibri"/>
+                        </a:rPr>
+                        <a:t>VALIDATED</a:t>
+                      </a:r>
+                    </a:p>
+                  </a:txBody>
+                  <a:tcPr>
+                    <a:solidFill>
+                      <a:srgbClr val="EFF3FA"/>
+                    </a:solidFill>
+                  </a:tcPr>
+                </a:tc>
+              </a:tr>
+              <a:tr h="475488">
+                <a:tc>
+                  <a:txBody>
+                    <a:bodyPr/>
+                    <a:lstStyle/>
+                    <a:p>
+                      <a:r>
+                        <a:rPr sz="1100" b="1">
+                          <a:latin typeface="Calibri"/>
+                        </a:rPr>
+                        <a:t>DRAM write traffic</a:t>
+                      </a:r>
+                    </a:p>
+                  </a:txBody>
+                  <a:tcPr>
+                    <a:solidFill>
+                      <a:srgbClr val="FFFFFF"/>
+                    </a:solidFill>
+                  </a:tcPr>
+                </a:tc>
+                <a:tc>
+                  <a:txBody>
+                    <a:bodyPr/>
+                    <a:lstStyle/>
+                    <a:p>
+                      <a:r>
+                        <a:rPr sz="1100" b="0">
+                          <a:latin typeface="Calibri"/>
+                        </a:rPr>
+                        <a:t>streaming class modelled (0.80); scattered writes exit via unmodelled dirty evictions</a:t>
+                      </a:r>
+                    </a:p>
+                  </a:txBody>
+                  <a:tcPr>
+                    <a:solidFill>
+                      <a:srgbClr val="FFFFFF"/>
+                    </a:solidFill>
+                  </a:tcPr>
+                </a:tc>
+                <a:tc>
+                  <a:txBody>
+                    <a:bodyPr/>
+                    <a:lstStyle/>
+                    <a:p>
+                      <a:r>
+                        <a:rPr sz="1100" b="0">
+                          <a:solidFill>
+                            <a:srgbClr val="B06000"/>
+                          </a:solidFill>
+                          <a:latin typeface="Calibri"/>
+                        </a:rPr>
+                        <a:t>GAP — writeback model next</a:t>
+                      </a:r>
+                    </a:p>
+                  </a:txBody>
+                  <a:tcPr>
+                    <a:solidFill>
+                      <a:srgbClr val="FFFFFF"/>
+                    </a:solidFill>
+                  </a:tcPr>
+                </a:tc>
+              </a:tr>
+              <a:tr h="475488">
+                <a:tc>
+                  <a:txBody>
+                    <a:bodyPr/>
+                    <a:lstStyle/>
+                    <a:p>
+                      <a:r>
+                        <a:rPr sz="1100" b="1">
+                          <a:latin typeface="Calibri"/>
+                        </a:rPr>
+                        <a:t>Kernel &amp; DMA activity</a:t>
+                      </a:r>
+                    </a:p>
+                  </a:txBody>
+                  <a:tcPr>
+                    <a:solidFill>
+                      <a:srgbClr val="EFF3FA"/>
+                    </a:solidFill>
+                  </a:tcPr>
+                </a:tc>
+                <a:tc>
+                  <a:txBody>
+                    <a:bodyPr/>
+                    <a:lstStyle/>
+                    <a:p>
+                      <a:r>
+                        <a:rPr sz="1100" b="0">
+                          <a:latin typeface="Calibri"/>
+                        </a:rPr>
+                        <a:t>HTTP app: i-ratio 0.80, DRAM invisible — linux-user sees userspace only</a:t>
+                      </a:r>
+                    </a:p>
+                  </a:txBody>
+                  <a:tcPr>
+                    <a:solidFill>
+                      <a:srgbClr val="EFF3FA"/>
+                    </a:solidFill>
+                  </a:tcPr>
+                </a:tc>
+                <a:tc>
+                  <a:txBody>
+                    <a:bodyPr/>
+                    <a:lstStyle/>
+                    <a:p>
+                      <a:r>
+                        <a:rPr sz="1100" b="0">
+                          <a:solidFill>
+                            <a:srgbClr val="B06000"/>
+                          </a:solidFill>
+                          <a:latin typeface="Calibri"/>
+                        </a:rPr>
+                        <a:t>GAP — system-mode harness</a:t>
+                      </a:r>
+                    </a:p>
+                  </a:txBody>
+                  <a:tcPr>
+                    <a:solidFill>
+                      <a:srgbClr val="EFF3FA"/>
+                    </a:solidFill>
+                  </a:tcPr>
+                </a:tc>
+              </a:tr>
+              <a:tr h="475488">
+                <a:tc>
+                  <a:txBody>
+                    <a:bodyPr/>
+                    <a:lstStyle/>
+                    <a:p>
+                      <a:r>
+                        <a:rPr sz="1100" b="1">
+                          <a:latin typeface="Calibri"/>
+                        </a:rPr>
+                        <a:t>Multi-core</a:t>
+                      </a:r>
+                    </a:p>
+                  </a:txBody>
+                  <a:tcPr>
+                    <a:solidFill>
+                      <a:srgbClr val="FFFFFF"/>
+                    </a:solidFill>
+                  </a:tcPr>
+                </a:tc>
+                <a:tc>
+                  <a:txBody>
+                    <a:bodyPr/>
+                    <a:lstStyle/>
+                    <a:p>
+                      <a:r>
+                        <a:rPr sz="1100" b="0">
+                          <a:latin typeface="Calibri"/>
+                        </a:rPr>
+                        <a:t>first point only: 4-thread SGM totals within 2% of 1-thread</a:t>
+                      </a:r>
+                    </a:p>
+                  </a:txBody>
+                  <a:tcPr>
+                    <a:solidFill>
+                      <a:srgbClr val="FFFFFF"/>
+                    </a:solidFill>
+                  </a:tcPr>
+                </a:tc>
+                <a:tc>
+                  <a:txBody>
+                    <a:bodyPr/>
+                    <a:lstStyle/>
+                    <a:p>
+                      <a:r>
+                        <a:rPr sz="1100" b="0">
+                          <a:solidFill>
+                            <a:srgbClr val="5F6368"/>
+                          </a:solidFill>
+                          <a:latin typeface="Calibri"/>
+                        </a:rPr>
+                        <a:t>INSUFFICIENT DATA</a:t>
+                      </a:r>
+                    </a:p>
+                  </a:txBody>
+                  <a:tcPr>
+                    <a:solidFill>
+                      <a:srgbClr val="FFFFFF"/>
+                    </a:solidFill>
+                  </a:tcPr>
+                </a:tc>
+              </a:tr>
+            </a:tbl>
+          </a:graphicData>
+        </a:graphic>
+      </p:graphicFrame>
+      <p:sp>
+        <p:nvSpPr>
+          <p:cNvPr id="9" name="TextBox 8"/>
           <p:cNvSpPr txBox="1"/>
           <p:nvPr/>
         </p:nvSpPr>
         <p:spPr>
           <a:xfrm>
-            <a:off x="640080" y="2304288"/>
-            <a:ext cx="10972800" cy="384048"/>
+            <a:off x="548640" y="4709160"/>
+            <a:ext cx="11064240" cy="731520"/>
           </a:xfrm>
           <a:prstGeom prst="rect">
             <a:avLst/>
@@ -3520,27 +4013,27 @@
           <a:p>
             <a:pPr algn="l"/>
             <a:r>
-              <a:rPr sz="1250" b="0">
+              <a:rPr sz="1150" b="0">
                 <a:solidFill>
                   <a:srgbClr val="202124"/>
                 </a:solidFill>
                 <a:latin typeface="Calibri"/>
               </a:rPr>
-              <a:t>  streaming store bursts = DRAM-write proxy. Linux-user mode: zero boot/OS noise.</a:t>
-            </a:r>
-          </a:p>
-        </p:txBody>
-      </p:sp>
-      <p:sp>
-        <p:nvSpPr>
-          <p:cNvPr id="7" name="TextBox 6"/>
+              <a:t>Two instrument findings worth the price of admission: the A55 PMU's l3d_cache_refill counts only DEMAND refills — prefetched lines bypass it, so ground truth belongs at the DDR controller; and the A55's write-streaming (no-allocate) mode is a 2.0× error if unmodelled.</a:t>
+            </a:r>
+          </a:p>
+        </p:txBody>
+      </p:sp>
+      <p:sp>
+        <p:nvSpPr>
+          <p:cNvPr id="10" name="TextBox 9"/>
           <p:cNvSpPr txBox="1"/>
           <p:nvPr/>
         </p:nvSpPr>
         <p:spPr>
           <a:xfrm>
-            <a:off x="640080" y="2706624"/>
-            <a:ext cx="10972800" cy="384048"/>
+            <a:off x="548640" y="5577840"/>
+            <a:ext cx="11064240" cy="548640"/>
           </a:xfrm>
           <a:prstGeom prst="rect">
             <a:avLst/>
@@ -3555,293 +4048,13 @@
           <a:p>
             <a:pPr algn="l"/>
             <a:r>
-              <a:rPr sz="1250" b="0">
+              <a:rPr sz="1100" b="0">
                 <a:solidFill>
-                  <a:srgbClr val="202124"/>
+                  <a:srgbClr val="5F6368"/>
                 </a:solidFill>
                 <a:latin typeface="Calibri"/>
               </a:rPr>
-              <a:t>  Silicon — perf stat pinned to A55 core 0 (instructions, cycles, refills) AND the imx9_ddr0 DDR-controller PMU</a:t>
-            </a:r>
-          </a:p>
-        </p:txBody>
-      </p:sp>
-      <p:sp>
-        <p:nvSpPr>
-          <p:cNvPr id="8" name="TextBox 7"/>
-          <p:cNvSpPr txBox="1"/>
-          <p:nvPr/>
-        </p:nvSpPr>
-        <p:spPr>
-          <a:xfrm>
-            <a:off x="640080" y="3108960"/>
-            <a:ext cx="10972800" cy="384048"/>
-          </a:xfrm>
-          <a:prstGeom prst="rect">
-            <a:avLst/>
-          </a:prstGeom>
-          <a:noFill/>
-        </p:spPr>
-        <p:txBody>
-          <a:bodyPr wrap="square">
-            <a:spAutoFit/>
-          </a:bodyPr>
-          <a:lstStyle/>
-          <a:p>
-            <a:pPr algn="l"/>
-            <a:r>
-              <a:rPr sz="1250" b="0">
-                <a:solidFill>
-                  <a:srgbClr val="202124"/>
-                </a:solidFill>
-                <a:latin typeface="Calibri"/>
-              </a:rPr>
-              <a:t>  system-wide (read/write beats, idle-window subtracted): what the DRAM actually did.</a:t>
-            </a:r>
-          </a:p>
-        </p:txBody>
-      </p:sp>
-      <p:sp>
-        <p:nvSpPr>
-          <p:cNvPr id="9" name="TextBox 8"/>
-          <p:cNvSpPr txBox="1"/>
-          <p:nvPr/>
-        </p:nvSpPr>
-        <p:spPr>
-          <a:xfrm>
-            <a:off x="640080" y="3511296"/>
-            <a:ext cx="10972800" cy="384048"/>
-          </a:xfrm>
-          <a:prstGeom prst="rect">
-            <a:avLst/>
-          </a:prstGeom>
-          <a:noFill/>
-        </p:spPr>
-        <p:txBody>
-          <a:bodyPr wrap="square">
-            <a:spAutoFit/>
-          </a:bodyPr>
-          <a:lstStyle/>
-          <a:p>
-            <a:pPr algn="l"/>
-            <a:r>
-              <a:rPr sz="1250" b="0">
-                <a:solidFill>
-                  <a:srgbClr val="202124"/>
-                </a:solidFill>
-                <a:latin typeface="Calibri"/>
-              </a:rPr>
-              <a:t/>
-            </a:r>
-          </a:p>
-        </p:txBody>
-      </p:sp>
-      <p:sp>
-        <p:nvSpPr>
-          <p:cNvPr id="10" name="TextBox 9"/>
-          <p:cNvSpPr txBox="1"/>
-          <p:nvPr/>
-        </p:nvSpPr>
-        <p:spPr>
-          <a:xfrm>
-            <a:off x="640080" y="3913632"/>
-            <a:ext cx="10972800" cy="384048"/>
-          </a:xfrm>
-          <a:prstGeom prst="rect">
-            <a:avLst/>
-          </a:prstGeom>
-          <a:noFill/>
-        </p:spPr>
-        <p:txBody>
-          <a:bodyPr wrap="square">
-            <a:spAutoFit/>
-          </a:bodyPr>
-          <a:lstStyle/>
-          <a:p>
-            <a:pPr algn="l"/>
-            <a:r>
-              <a:rPr sz="1250" b="0">
-                <a:solidFill>
-                  <a:srgbClr val="202124"/>
-                </a:solidFill>
-                <a:latin typeface="Calibri"/>
-              </a:rPr>
-              <a:t>14 applications: five microbench corners (alu/mem/chase/mm/sort) and nine real programs — SGM stereo on real</a:t>
-            </a:r>
-          </a:p>
-        </p:txBody>
-      </p:sp>
-      <p:sp>
-        <p:nvSpPr>
-          <p:cNvPr id="11" name="TextBox 10"/>
-          <p:cNvSpPr txBox="1"/>
-          <p:nvPr/>
-        </p:nvSpPr>
-        <p:spPr>
-          <a:xfrm>
-            <a:off x="640080" y="4315968"/>
-            <a:ext cx="10972800" cy="384048"/>
-          </a:xfrm>
-          <a:prstGeom prst="rect">
-            <a:avLst/>
-          </a:prstGeom>
-          <a:noFill/>
-        </p:spPr>
-        <p:txBody>
-          <a:bodyPr wrap="square">
-            <a:spAutoFit/>
-          </a:bodyPr>
-          <a:lstStyle/>
-          <a:p>
-            <a:pPr algn="l"/>
-            <a:r>
-              <a:rPr sz="1250" b="0">
-                <a:solidFill>
-                  <a:srgbClr val="202124"/>
-                </a:solidFill>
-                <a:latin typeface="Calibri"/>
-              </a:rPr>
-              <a:t>imagery, bzip2, lz4, lua, sha256, cJSON, an in-memory sqlite database, a genetic-AI Pac-Man trainer (open-source,</a:t>
-            </a:r>
-          </a:p>
-        </p:txBody>
-      </p:sp>
-      <p:sp>
-        <p:nvSpPr>
-          <p:cNvPr id="12" name="TextBox 11"/>
-          <p:cNvSpPr txBox="1"/>
-          <p:nvPr/>
-        </p:nvSpPr>
-        <p:spPr>
-          <a:xfrm>
-            <a:off x="640080" y="4718304"/>
-            <a:ext cx="10972800" cy="384048"/>
-          </a:xfrm>
-          <a:prstGeom prst="rect">
-            <a:avLst/>
-          </a:prstGeom>
-          <a:noFill/>
-        </p:spPr>
-        <p:txBody>
-          <a:bodyPr wrap="square">
-            <a:spAutoFit/>
-          </a:bodyPr>
-          <a:lstStyle/>
-          <a:p>
-            <a:pPr algn="l"/>
-            <a:r>
-              <a:rPr sz="1250" b="0">
-                <a:solidFill>
-                  <a:srgbClr val="202124"/>
-                </a:solidFill>
-                <a:latin typeface="Calibri"/>
-              </a:rPr>
-              <a:t>seed-pinned, bit-deterministic), and a mongoose HTTP client that fetches 4 MiB over a live socket and hashes it.</a:t>
-            </a:r>
-          </a:p>
-        </p:txBody>
-      </p:sp>
-      <p:sp>
-        <p:nvSpPr>
-          <p:cNvPr id="13" name="TextBox 12"/>
-          <p:cNvSpPr txBox="1"/>
-          <p:nvPr/>
-        </p:nvSpPr>
-        <p:spPr>
-          <a:xfrm>
-            <a:off x="640080" y="5120640"/>
-            <a:ext cx="10972800" cy="384048"/>
-          </a:xfrm>
-          <a:prstGeom prst="rect">
-            <a:avLst/>
-          </a:prstGeom>
-          <a:noFill/>
-        </p:spPr>
-        <p:txBody>
-          <a:bodyPr wrap="square">
-            <a:spAutoFit/>
-          </a:bodyPr>
-          <a:lstStyle/>
-          <a:p>
-            <a:pPr algn="l"/>
-            <a:r>
-              <a:rPr sz="1250" b="0">
-                <a:solidFill>
-                  <a:srgbClr val="202124"/>
-                </a:solidFill>
-                <a:latin typeface="Calibri"/>
-              </a:rPr>
-              <a:t/>
-            </a:r>
-          </a:p>
-        </p:txBody>
-      </p:sp>
-      <p:sp>
-        <p:nvSpPr>
-          <p:cNvPr id="14" name="TextBox 13"/>
-          <p:cNvSpPr txBox="1"/>
-          <p:nvPr/>
-        </p:nvSpPr>
-        <p:spPr>
-          <a:xfrm>
-            <a:off x="640080" y="5522976"/>
-            <a:ext cx="10972800" cy="384048"/>
-          </a:xfrm>
-          <a:prstGeom prst="rect">
-            <a:avLst/>
-          </a:prstGeom>
-          <a:noFill/>
-        </p:spPr>
-        <p:txBody>
-          <a:bodyPr wrap="square">
-            <a:spAutoFit/>
-          </a:bodyPr>
-          <a:lstStyle/>
-          <a:p>
-            <a:pPr algn="l"/>
-            <a:r>
-              <a:rPr sz="1250" b="0">
-                <a:solidFill>
-                  <a:srgbClr val="202124"/>
-                </a:solidFill>
-                <a:latin typeface="Calibri"/>
-              </a:rPr>
-              <a:t>Gates: every app prints a checksum; sgm is hash-gated bit-exact; instruction agreement is required before any</a:t>
-            </a:r>
-          </a:p>
-        </p:txBody>
-      </p:sp>
-      <p:sp>
-        <p:nvSpPr>
-          <p:cNvPr id="15" name="TextBox 14"/>
-          <p:cNvSpPr txBox="1"/>
-          <p:nvPr/>
-        </p:nvSpPr>
-        <p:spPr>
-          <a:xfrm>
-            <a:off x="640080" y="5925312"/>
-            <a:ext cx="10972800" cy="384048"/>
-          </a:xfrm>
-          <a:prstGeom prst="rect">
-            <a:avLst/>
-          </a:prstGeom>
-          <a:noFill/>
-        </p:spPr>
-        <p:txBody>
-          <a:bodyPr wrap="square">
-            <a:spAutoFit/>
-          </a:bodyPr>
-          <a:lstStyle/>
-          <a:p>
-            <a:pPr algn="l"/>
-            <a:r>
-              <a:rPr sz="1250" b="0">
-                <a:solidFill>
-                  <a:srgbClr val="202124"/>
-                </a:solidFill>
-                <a:latin typeface="Calibri"/>
-              </a:rPr>
-              <a:t>cache conclusion is read.</a:t>
+              <a:t>Scope discipline: these are ACTIVITY correlations. wattson never emits watts — energy-per-event coefficients belong to the power team, and QEMU-derived counts are never labelled as silicon measurements.</a:t>
             </a:r>
           </a:p>
         </p:txBody>
@@ -3866,14 +4079,57 @@
       <p:grpSpPr/>
       <p:sp>
         <p:nvSpPr>
-          <p:cNvPr id="2" name="TextBox 1"/>
+          <p:cNvPr id="2" name="Rectangle 1"/>
+          <p:cNvSpPr/>
+          <p:nvPr/>
+        </p:nvSpPr>
+        <p:spPr>
+          <a:xfrm>
+            <a:off x="0" y="0"/>
+            <a:ext cx="12191695" cy="841248"/>
+          </a:xfrm>
+          <a:prstGeom prst="rect">
+            <a:avLst/>
+          </a:prstGeom>
+          <a:solidFill>
+            <a:srgbClr val="202124"/>
+          </a:solidFill>
+          <a:ln>
+            <a:noFill/>
+          </a:ln>
+        </p:spPr>
+        <p:style>
+          <a:lnRef idx="1">
+            <a:schemeClr val="accent1"/>
+          </a:lnRef>
+          <a:fillRef idx="3">
+            <a:schemeClr val="accent1"/>
+          </a:fillRef>
+          <a:effectRef idx="2">
+            <a:schemeClr val="accent1"/>
+          </a:effectRef>
+          <a:fontRef idx="minor">
+            <a:schemeClr val="lt1"/>
+          </a:fontRef>
+        </p:style>
+        <p:txBody>
+          <a:bodyPr rtlCol="0" anchor="ctr"/>
+          <a:lstStyle/>
+          <a:p>
+            <a:pPr algn="ctr"/>
+          </a:p>
+        </p:txBody>
+      </p:sp>
+      <p:sp>
+        <p:nvSpPr>
+          <p:cNvPr id="3" name="TextBox 2"/>
           <p:cNvSpPr txBox="1"/>
           <p:nvPr/>
         </p:nvSpPr>
         <p:spPr>
           <a:xfrm>
-            <a:off x="548640" y="320040"/>
-            <a:ext cx="11155680" cy="640080"/>
+            <a:off x="548640" y="118872"/>
+            <a:ext cx="10058400" cy="548640"/>
           </a:xfrm>
           <a:prstGeom prst="rect">
             <a:avLst/>
@@ -3888,943 +4144,575 @@
           <a:p>
             <a:pPr algn="l"/>
             <a:r>
-              <a:rPr sz="3000" b="1">
+              <a:rPr sz="2600" b="1">
+                <a:solidFill>
+                  <a:srgbClr val="FFFFFF"/>
+                </a:solidFill>
+                <a:latin typeface="Calibri"/>
+              </a:rPr>
+              <a:t>Method — one binary, two observatories</a:t>
+            </a:r>
+          </a:p>
+        </p:txBody>
+      </p:sp>
+      <p:sp>
+        <p:nvSpPr>
+          <p:cNvPr id="4" name="Rectangle 3"/>
+          <p:cNvSpPr/>
+          <p:nvPr/>
+        </p:nvSpPr>
+        <p:spPr>
+          <a:xfrm>
+            <a:off x="0" y="841248"/>
+            <a:ext cx="12191695" cy="38100"/>
+          </a:xfrm>
+          <a:prstGeom prst="rect">
+            <a:avLst/>
+          </a:prstGeom>
+          <a:solidFill>
+            <a:srgbClr val="1A53A0"/>
+          </a:solidFill>
+          <a:ln>
+            <a:noFill/>
+          </a:ln>
+        </p:spPr>
+        <p:style>
+          <a:lnRef idx="1">
+            <a:schemeClr val="accent1"/>
+          </a:lnRef>
+          <a:fillRef idx="3">
+            <a:schemeClr val="accent1"/>
+          </a:fillRef>
+          <a:effectRef idx="2">
+            <a:schemeClr val="accent1"/>
+          </a:effectRef>
+          <a:fontRef idx="minor">
+            <a:schemeClr val="lt1"/>
+          </a:fontRef>
+        </p:style>
+        <p:txBody>
+          <a:bodyPr rtlCol="0" anchor="ctr"/>
+          <a:lstStyle/>
+          <a:p>
+            <a:pPr algn="ctr"/>
+          </a:p>
+        </p:txBody>
+      </p:sp>
+      <p:sp>
+        <p:nvSpPr>
+          <p:cNvPr id="5" name="TextBox 4"/>
+          <p:cNvSpPr txBox="1"/>
+          <p:nvPr/>
+        </p:nvSpPr>
+        <p:spPr>
+          <a:xfrm>
+            <a:off x="548640" y="969264"/>
+            <a:ext cx="11155680" cy="365760"/>
+          </a:xfrm>
+          <a:prstGeom prst="rect">
+            <a:avLst/>
+          </a:prstGeom>
+          <a:noFill/>
+        </p:spPr>
+        <p:txBody>
+          <a:bodyPr wrap="square">
+            <a:spAutoFit/>
+          </a:bodyPr>
+          <a:lstStyle/>
+          <a:p>
+            <a:pPr algn="l"/>
+            <a:r>
+              <a:rPr sz="1200" b="0">
+                <a:solidFill>
+                  <a:srgbClr val="5F6368"/>
+                </a:solidFill>
+                <a:latin typeface="Calibri"/>
+              </a:rPr>
+              <a:t>Identical static aarch64 binaries; nothing recompiled between worlds.</a:t>
+            </a:r>
+          </a:p>
+        </p:txBody>
+      </p:sp>
+      <p:sp>
+        <p:nvSpPr>
+          <p:cNvPr id="6" name="TextBox 5"/>
+          <p:cNvSpPr txBox="1"/>
+          <p:nvPr/>
+        </p:nvSpPr>
+        <p:spPr>
+          <a:xfrm>
+            <a:off x="548640" y="6528816"/>
+            <a:ext cx="9601200" cy="274320"/>
+          </a:xfrm>
+          <a:prstGeom prst="rect">
+            <a:avLst/>
+          </a:prstGeom>
+          <a:noFill/>
+        </p:spPr>
+        <p:txBody>
+          <a:bodyPr wrap="square">
+            <a:spAutoFit/>
+          </a:bodyPr>
+          <a:lstStyle/>
+          <a:p>
+            <a:pPr algn="l"/>
+            <a:r>
+              <a:rPr sz="950" b="0">
+                <a:solidFill>
+                  <a:srgbClr val="5F6368"/>
+                </a:solidFill>
+                <a:latin typeface="Calibri"/>
+              </a:rPr>
+              <a:t>wattson xcheck rev 2 · QEMU counts DERIVED, PMU/DDR counts MEASURED · 2026-08-30</a:t>
+            </a:r>
+          </a:p>
+        </p:txBody>
+      </p:sp>
+      <p:sp>
+        <p:nvSpPr>
+          <p:cNvPr id="7" name="TextBox 6"/>
+          <p:cNvSpPr txBox="1"/>
+          <p:nvPr/>
+        </p:nvSpPr>
+        <p:spPr>
+          <a:xfrm>
+            <a:off x="11247120" y="6528816"/>
+            <a:ext cx="457200" cy="274320"/>
+          </a:xfrm>
+          <a:prstGeom prst="rect">
+            <a:avLst/>
+          </a:prstGeom>
+          <a:noFill/>
+        </p:spPr>
+        <p:txBody>
+          <a:bodyPr wrap="square">
+            <a:spAutoFit/>
+          </a:bodyPr>
+          <a:lstStyle/>
+          <a:p>
+            <a:pPr algn="r"/>
+            <a:r>
+              <a:rPr sz="950" b="0">
+                <a:solidFill>
+                  <a:srgbClr val="5F6368"/>
+                </a:solidFill>
+                <a:latin typeface="Calibri"/>
+              </a:rPr>
+              <a:t>3</a:t>
+            </a:r>
+          </a:p>
+        </p:txBody>
+      </p:sp>
+      <p:sp>
+        <p:nvSpPr>
+          <p:cNvPr id="8" name="Rounded Rectangle 7"/>
+          <p:cNvSpPr/>
+          <p:nvPr/>
+        </p:nvSpPr>
+        <p:spPr>
+          <a:xfrm>
+            <a:off x="548640" y="1417320"/>
+            <a:ext cx="5394960" cy="3017520"/>
+          </a:xfrm>
+          <a:prstGeom prst="roundRect">
+            <a:avLst/>
+          </a:prstGeom>
+          <a:solidFill>
+            <a:srgbClr val="EFF3FA"/>
+          </a:solidFill>
+          <a:ln w="15240">
+            <a:solidFill>
+              <a:srgbClr val="1A53A0"/>
+            </a:solidFill>
+          </a:ln>
+        </p:spPr>
+        <p:style>
+          <a:lnRef idx="1">
+            <a:schemeClr val="accent1"/>
+          </a:lnRef>
+          <a:fillRef idx="3">
+            <a:schemeClr val="accent1"/>
+          </a:fillRef>
+          <a:effectRef idx="2">
+            <a:schemeClr val="accent1"/>
+          </a:effectRef>
+          <a:fontRef idx="minor">
+            <a:schemeClr val="lt1"/>
+          </a:fontRef>
+        </p:style>
+        <p:txBody>
+          <a:bodyPr rtlCol="0" anchor="ctr"/>
+          <a:lstStyle/>
+          <a:p>
+            <a:pPr algn="ctr"/>
+          </a:p>
+        </p:txBody>
+      </p:sp>
+      <p:sp>
+        <p:nvSpPr>
+          <p:cNvPr id="9" name="TextBox 8"/>
+          <p:cNvSpPr txBox="1"/>
+          <p:nvPr/>
+        </p:nvSpPr>
+        <p:spPr>
+          <a:xfrm>
+            <a:off x="777240" y="1554480"/>
+            <a:ext cx="4937760" cy="365760"/>
+          </a:xfrm>
+          <a:prstGeom prst="rect">
+            <a:avLst/>
+          </a:prstGeom>
+          <a:noFill/>
+        </p:spPr>
+        <p:txBody>
+          <a:bodyPr wrap="square">
+            <a:spAutoFit/>
+          </a:bodyPr>
+          <a:lstStyle/>
+          <a:p>
+            <a:pPr algn="l"/>
+            <a:r>
+              <a:rPr sz="1500" b="1">
+                <a:solidFill>
+                  <a:srgbClr val="1A53A0"/>
+                </a:solidFill>
+                <a:latin typeface="Calibri"/>
+              </a:rPr>
+              <a:t>QEMU (DERIVED)</a:t>
+            </a:r>
+          </a:p>
+        </p:txBody>
+      </p:sp>
+      <p:sp>
+        <p:nvSpPr>
+          <p:cNvPr id="10" name="TextBox 9"/>
+          <p:cNvSpPr txBox="1"/>
+          <p:nvPr/>
+        </p:nvSpPr>
+        <p:spPr>
+          <a:xfrm>
+            <a:off x="777240" y="2011680"/>
+            <a:ext cx="5029200" cy="2286000"/>
+          </a:xfrm>
+          <a:prstGeom prst="rect">
+            <a:avLst/>
+          </a:prstGeom>
+          <a:noFill/>
+        </p:spPr>
+        <p:txBody>
+          <a:bodyPr wrap="square">
+            <a:spAutoFit/>
+          </a:bodyPr>
+          <a:lstStyle/>
+          <a:p>
+            <a:pPr algn="l"/>
+            <a:r>
+              <a:rPr sz="1100" b="0">
                 <a:solidFill>
                   <a:srgbClr val="202124"/>
                 </a:solidFill>
                 <a:latin typeface="Calibri"/>
               </a:rPr>
-              <a:t>Instrument validation: instructions agree on all fourteen</a:t>
-            </a:r>
-          </a:p>
-        </p:txBody>
-      </p:sp>
-      <p:graphicFrame>
-        <p:nvGraphicFramePr>
-          <p:cNvPr id="3" name="Table 2"/>
-          <p:cNvGraphicFramePr>
-            <a:graphicFrameLocks noGrp="1"/>
-          </p:cNvGraphicFramePr>
+              <a:t>qemu-aarch64 (linux-user) + libinsn / libcache TCG plugins</a:t>
+            </a:r>
+          </a:p>
+          <a:p>
+            <a:r>
+              <a:rPr sz="1100">
+                <a:solidFill>
+                  <a:srgbClr val="202124"/>
+                </a:solidFill>
+                <a:latin typeface="Calibri"/>
+              </a:rPr>
+              <a:t>Cache model = the board's own hierarchy, read from its sysfs:</a:t>
+            </a:r>
+          </a:p>
+          <a:p>
+            <a:r>
+              <a:rPr sz="1100">
+                <a:solidFill>
+                  <a:srgbClr val="202124"/>
+                </a:solidFill>
+                <a:latin typeface="Calibri"/>
+              </a:rPr>
+              <a:t>L1I/L1D 32 KiB 4-way · L2 64 KiB 4-way · shared L3 512 KiB 16-way, 64 B lines</a:t>
+            </a:r>
+          </a:p>
+          <a:p>
+            <a:r>
+              <a:rPr sz="1100">
+                <a:solidFill>
+                  <a:srgbClr val="202124"/>
+                </a:solidFill>
+                <a:latin typeface="Calibri"/>
+              </a:rPr>
+              <a:t>+ A55-style write-streaming: ≥4 sequential store-miss lines → no-allocate</a:t>
+            </a:r>
+          </a:p>
+          <a:p>
+            <a:r>
+              <a:rPr sz="1100">
+                <a:solidFill>
+                  <a:srgbClr val="202124"/>
+                </a:solidFill>
+                <a:latin typeface="Calibri"/>
+              </a:rPr>
+              <a:t>L3 misses → DRAM-read proxy · streaming bursts → DRAM-write proxy</a:t>
+            </a:r>
+          </a:p>
+          <a:p>
+            <a:r>
+              <a:rPr sz="1100">
+                <a:solidFill>
+                  <a:srgbClr val="202124"/>
+                </a:solidFill>
+                <a:latin typeface="Calibri"/>
+              </a:rPr>
+              <a:t>Linux-user mode ⇒ counts contain the application only (no boot, no OS)</a:t>
+            </a:r>
+          </a:p>
+        </p:txBody>
+      </p:sp>
+      <p:sp>
+        <p:nvSpPr>
+          <p:cNvPr id="11" name="Rounded Rectangle 10"/>
+          <p:cNvSpPr/>
           <p:nvPr/>
-        </p:nvGraphicFramePr>
-        <p:xfrm>
-          <a:off x="1097280" y="1188720"/>
-          <a:ext cx="9966960" cy="4937760"/>
-        </p:xfrm>
-        <a:graphic>
-          <a:graphicData uri="http://schemas.openxmlformats.org/drawingml/2006/table">
-            <a:tbl>
-              <a:tblPr firstRow="1" bandRow="1">
-                <a:tableStyleId>{5C22544A-7EE6-4342-B048-85BDC9FD1C3A}</a:tableStyleId>
-              </a:tblPr>
-              <a:tblGrid>
-                <a:gridCol w="2011680"/>
-                <a:gridCol w="3291840"/>
-                <a:gridCol w="3017520"/>
-                <a:gridCol w="1645920"/>
-              </a:tblGrid>
-              <a:tr h="329184">
-                <a:tc>
-                  <a:txBody>
-                    <a:bodyPr/>
-                    <a:lstStyle/>
-                    <a:p>
-                      <a:r>
-                        <a:rPr sz="1100" b="1">
-                          <a:solidFill>
-                            <a:srgbClr val="FFFFFF"/>
-                          </a:solidFill>
-                        </a:rPr>
-                        <a:t>app</a:t>
-                      </a:r>
-                    </a:p>
-                  </a:txBody>
-                  <a:tcPr>
-                    <a:solidFill>
-                      <a:srgbClr val="202124"/>
-                    </a:solidFill>
-                  </a:tcPr>
-                </a:tc>
-                <a:tc>
-                  <a:txBody>
-                    <a:bodyPr/>
-                    <a:lstStyle/>
-                    <a:p>
-                      <a:r>
-                        <a:rPr sz="1100" b="1">
-                          <a:solidFill>
-                            <a:srgbClr val="FFFFFF"/>
-                          </a:solidFill>
-                        </a:rPr>
-                        <a:t>class</a:t>
-                      </a:r>
-                    </a:p>
-                  </a:txBody>
-                  <a:tcPr>
-                    <a:solidFill>
-                      <a:srgbClr val="202124"/>
-                    </a:solidFill>
-                  </a:tcPr>
-                </a:tc>
-                <a:tc>
-                  <a:txBody>
-                    <a:bodyPr/>
-                    <a:lstStyle/>
-                    <a:p>
-                      <a:r>
-                        <a:rPr sz="1100" b="1">
-                          <a:solidFill>
-                            <a:srgbClr val="FFFFFF"/>
-                          </a:solidFill>
-                        </a:rPr>
-                        <a:t>HW instructions (MEASURED)</a:t>
-                      </a:r>
-                    </a:p>
-                  </a:txBody>
-                  <a:tcPr>
-                    <a:solidFill>
-                      <a:srgbClr val="202124"/>
-                    </a:solidFill>
-                  </a:tcPr>
-                </a:tc>
-                <a:tc>
-                  <a:txBody>
-                    <a:bodyPr/>
-                    <a:lstStyle/>
-                    <a:p>
-                      <a:r>
-                        <a:rPr sz="1100" b="1">
-                          <a:solidFill>
-                            <a:srgbClr val="FFFFFF"/>
-                          </a:solidFill>
-                        </a:rPr>
-                        <a:t>QEMU/HW</a:t>
-                      </a:r>
-                    </a:p>
-                  </a:txBody>
-                  <a:tcPr>
-                    <a:solidFill>
-                      <a:srgbClr val="202124"/>
-                    </a:solidFill>
-                  </a:tcPr>
-                </a:tc>
-              </a:tr>
-              <a:tr h="329184">
-                <a:tc>
-                  <a:txBody>
-                    <a:bodyPr/>
-                    <a:lstStyle/>
-                    <a:p>
-                      <a:r>
-                        <a:rPr sz="1050" b="0"/>
-                        <a:t>alu</a:t>
-                      </a:r>
-                    </a:p>
-                  </a:txBody>
-                  <a:tcPr/>
-                </a:tc>
-                <a:tc>
-                  <a:txBody>
-                    <a:bodyPr/>
-                    <a:lstStyle/>
-                    <a:p>
-                      <a:r>
-                        <a:rPr sz="1050" b="0"/>
-                        <a:t>pure compute</a:t>
-                      </a:r>
-                    </a:p>
-                  </a:txBody>
-                  <a:tcPr/>
-                </a:tc>
-                <a:tc>
-                  <a:txBody>
-                    <a:bodyPr/>
-                    <a:lstStyle/>
-                    <a:p>
-                      <a:r>
-                        <a:rPr sz="1050" b="0"/>
-                        <a:t>1,201,593,894</a:t>
-                      </a:r>
-                    </a:p>
-                  </a:txBody>
-                  <a:tcPr/>
-                </a:tc>
-                <a:tc>
-                  <a:txBody>
-                    <a:bodyPr/>
-                    <a:lstStyle/>
-                    <a:p>
-                      <a:r>
-                        <a:rPr sz="1050" b="1">
-                          <a:solidFill>
-                            <a:srgbClr val="187A33"/>
-                          </a:solidFill>
-                        </a:rPr>
-                        <a:t>0.999</a:t>
-                      </a:r>
-                    </a:p>
-                  </a:txBody>
-                  <a:tcPr/>
-                </a:tc>
-              </a:tr>
-              <a:tr h="329184">
-                <a:tc>
-                  <a:txBody>
-                    <a:bodyPr/>
-                    <a:lstStyle/>
-                    <a:p>
-                      <a:r>
-                        <a:rPr sz="1050" b="0"/>
-                        <a:t>bzip2</a:t>
-                      </a:r>
-                    </a:p>
-                  </a:txBody>
-                  <a:tcPr/>
-                </a:tc>
-                <a:tc>
-                  <a:txBody>
-                    <a:bodyPr/>
-                    <a:lstStyle/>
-                    <a:p>
-                      <a:r>
-                        <a:rPr sz="1050" b="0"/>
-                        <a:t>compression</a:t>
-                      </a:r>
-                    </a:p>
-                  </a:txBody>
-                  <a:tcPr/>
-                </a:tc>
-                <a:tc>
-                  <a:txBody>
-                    <a:bodyPr/>
-                    <a:lstStyle/>
-                    <a:p>
-                      <a:r>
-                        <a:rPr sz="1050" b="0"/>
-                        <a:t>8,497,127,363</a:t>
-                      </a:r>
-                    </a:p>
-                  </a:txBody>
-                  <a:tcPr/>
-                </a:tc>
-                <a:tc>
-                  <a:txBody>
-                    <a:bodyPr/>
-                    <a:lstStyle/>
-                    <a:p>
-                      <a:r>
-                        <a:rPr sz="1050" b="1">
-                          <a:solidFill>
-                            <a:srgbClr val="187A33"/>
-                          </a:solidFill>
-                        </a:rPr>
-                        <a:t>0.985</a:t>
-                      </a:r>
-                    </a:p>
-                  </a:txBody>
-                  <a:tcPr/>
-                </a:tc>
-              </a:tr>
-              <a:tr h="329184">
-                <a:tc>
-                  <a:txBody>
-                    <a:bodyPr/>
-                    <a:lstStyle/>
-                    <a:p>
-                      <a:r>
-                        <a:rPr sz="1050" b="0"/>
-                        <a:t>chase</a:t>
-                      </a:r>
-                    </a:p>
-                  </a:txBody>
-                  <a:tcPr/>
-                </a:tc>
-                <a:tc>
-                  <a:txBody>
-                    <a:bodyPr/>
-                    <a:lstStyle/>
-                    <a:p>
-                      <a:r>
-                        <a:rPr sz="1050" b="0"/>
-                        <a:t>pointer chase</a:t>
-                      </a:r>
-                    </a:p>
-                  </a:txBody>
-                  <a:tcPr/>
-                </a:tc>
-                <a:tc>
-                  <a:txBody>
-                    <a:bodyPr/>
-                    <a:lstStyle/>
-                    <a:p>
-                      <a:r>
-                        <a:rPr sz="1050" b="0"/>
-                        <a:t>202,456,536</a:t>
-                      </a:r>
-                    </a:p>
-                  </a:txBody>
-                  <a:tcPr/>
-                </a:tc>
-                <a:tc>
-                  <a:txBody>
-                    <a:bodyPr/>
-                    <a:lstStyle/>
-                    <a:p>
-                      <a:r>
-                        <a:rPr sz="1050" b="1">
-                          <a:solidFill>
-                            <a:srgbClr val="187A33"/>
-                          </a:solidFill>
-                        </a:rPr>
-                        <a:t>1.058</a:t>
-                      </a:r>
-                    </a:p>
-                  </a:txBody>
-                  <a:tcPr/>
-                </a:tc>
-              </a:tr>
-              <a:tr h="329184">
-                <a:tc>
-                  <a:txBody>
-                    <a:bodyPr/>
-                    <a:lstStyle/>
-                    <a:p>
-                      <a:r>
-                        <a:rPr sz="1050" b="0"/>
-                        <a:t>cjson</a:t>
-                      </a:r>
-                    </a:p>
-                  </a:txBody>
-                  <a:tcPr/>
-                </a:tc>
-                <a:tc>
-                  <a:txBody>
-                    <a:bodyPr/>
-                    <a:lstStyle/>
-                    <a:p>
-                      <a:r>
-                        <a:rPr sz="1050" b="0"/>
-                        <a:t>JSON parse/serialize</a:t>
-                      </a:r>
-                    </a:p>
-                  </a:txBody>
-                  <a:tcPr/>
-                </a:tc>
-                <a:tc>
-                  <a:txBody>
-                    <a:bodyPr/>
-                    <a:lstStyle/>
-                    <a:p>
-                      <a:r>
-                        <a:rPr sz="1050" b="0"/>
-                        <a:t>1,523,095,346</a:t>
-                      </a:r>
-                    </a:p>
-                  </a:txBody>
-                  <a:tcPr/>
-                </a:tc>
-                <a:tc>
-                  <a:txBody>
-                    <a:bodyPr/>
-                    <a:lstStyle/>
-                    <a:p>
-                      <a:r>
-                        <a:rPr sz="1050" b="1">
-                          <a:solidFill>
-                            <a:srgbClr val="187A33"/>
-                          </a:solidFill>
-                        </a:rPr>
-                        <a:t>0.981</a:t>
-                      </a:r>
-                    </a:p>
-                  </a:txBody>
-                  <a:tcPr/>
-                </a:tc>
-              </a:tr>
-              <a:tr h="329184">
-                <a:tc>
-                  <a:txBody>
-                    <a:bodyPr/>
-                    <a:lstStyle/>
-                    <a:p>
-                      <a:r>
-                        <a:rPr sz="1050" b="0"/>
-                        <a:t>lua</a:t>
-                      </a:r>
-                    </a:p>
-                  </a:txBody>
-                  <a:tcPr/>
-                </a:tc>
-                <a:tc>
-                  <a:txBody>
-                    <a:bodyPr/>
-                    <a:lstStyle/>
-                    <a:p>
-                      <a:r>
-                        <a:rPr sz="1050" b="0"/>
-                        <a:t>interpreter</a:t>
-                      </a:r>
-                    </a:p>
-                  </a:txBody>
-                  <a:tcPr/>
-                </a:tc>
-                <a:tc>
-                  <a:txBody>
-                    <a:bodyPr/>
-                    <a:lstStyle/>
-                    <a:p>
-                      <a:r>
-                        <a:rPr sz="1050" b="0"/>
-                        <a:t>1,072,641,534</a:t>
-                      </a:r>
-                    </a:p>
-                  </a:txBody>
-                  <a:tcPr/>
-                </a:tc>
-                <a:tc>
-                  <a:txBody>
-                    <a:bodyPr/>
-                    <a:lstStyle/>
-                    <a:p>
-                      <a:r>
-                        <a:rPr sz="1050" b="1">
-                          <a:solidFill>
-                            <a:srgbClr val="187A33"/>
-                          </a:solidFill>
-                        </a:rPr>
-                        <a:t>0.994</a:t>
-                      </a:r>
-                    </a:p>
-                  </a:txBody>
-                  <a:tcPr/>
-                </a:tc>
-              </a:tr>
-              <a:tr h="329184">
-                <a:tc>
-                  <a:txBody>
-                    <a:bodyPr/>
-                    <a:lstStyle/>
-                    <a:p>
-                      <a:r>
-                        <a:rPr sz="1050" b="0"/>
-                        <a:t>lz4</a:t>
-                      </a:r>
-                    </a:p>
-                  </a:txBody>
-                  <a:tcPr/>
-                </a:tc>
-                <a:tc>
-                  <a:txBody>
-                    <a:bodyPr/>
-                    <a:lstStyle/>
-                    <a:p>
-                      <a:r>
-                        <a:rPr sz="1050" b="0"/>
-                        <a:t>fast compression</a:t>
-                      </a:r>
-                    </a:p>
-                  </a:txBody>
-                  <a:tcPr/>
-                </a:tc>
-                <a:tc>
-                  <a:txBody>
-                    <a:bodyPr/>
-                    <a:lstStyle/>
-                    <a:p>
-                      <a:r>
-                        <a:rPr sz="1050" b="0"/>
-                        <a:t>721,250,952</a:t>
-                      </a:r>
-                    </a:p>
-                  </a:txBody>
-                  <a:tcPr/>
-                </a:tc>
-                <a:tc>
-                  <a:txBody>
-                    <a:bodyPr/>
-                    <a:lstStyle/>
-                    <a:p>
-                      <a:r>
-                        <a:rPr sz="1050" b="1">
-                          <a:solidFill>
-                            <a:srgbClr val="187A33"/>
-                          </a:solidFill>
-                        </a:rPr>
-                        <a:t>0.988</a:t>
-                      </a:r>
-                    </a:p>
-                  </a:txBody>
-                  <a:tcPr/>
-                </a:tc>
-              </a:tr>
-              <a:tr h="329184">
-                <a:tc>
-                  <a:txBody>
-                    <a:bodyPr/>
-                    <a:lstStyle/>
-                    <a:p>
-                      <a:r>
-                        <a:rPr sz="1050" b="0"/>
-                        <a:t>mem</a:t>
-                      </a:r>
-                    </a:p>
-                  </a:txBody>
-                  <a:tcPr/>
-                </a:tc>
-                <a:tc>
-                  <a:txBody>
-                    <a:bodyPr/>
-                    <a:lstStyle/>
-                    <a:p>
-                      <a:r>
-                        <a:rPr sz="1050" b="0"/>
-                        <a:t>streaming stores</a:t>
-                      </a:r>
-                    </a:p>
-                  </a:txBody>
-                  <a:tcPr/>
-                </a:tc>
-                <a:tc>
-                  <a:txBody>
-                    <a:bodyPr/>
-                    <a:lstStyle/>
-                    <a:p>
-                      <a:r>
-                        <a:rPr sz="1050" b="0"/>
-                        <a:t>547,742,426</a:t>
-                      </a:r>
-                    </a:p>
-                  </a:txBody>
-                  <a:tcPr/>
-                </a:tc>
-                <a:tc>
-                  <a:txBody>
-                    <a:bodyPr/>
-                    <a:lstStyle/>
-                    <a:p>
-                      <a:r>
-                        <a:rPr sz="1050" b="1">
-                          <a:solidFill>
-                            <a:srgbClr val="187A33"/>
-                          </a:solidFill>
-                        </a:rPr>
-                        <a:t>0.980</a:t>
-                      </a:r>
-                    </a:p>
-                  </a:txBody>
-                  <a:tcPr/>
-                </a:tc>
-              </a:tr>
-              <a:tr h="329184">
-                <a:tc>
-                  <a:txBody>
-                    <a:bodyPr/>
-                    <a:lstStyle/>
-                    <a:p>
-                      <a:r>
-                        <a:rPr sz="1050" b="0"/>
-                        <a:t>mm</a:t>
-                      </a:r>
-                    </a:p>
-                  </a:txBody>
-                  <a:tcPr/>
-                </a:tc>
-                <a:tc>
-                  <a:txBody>
-                    <a:bodyPr/>
-                    <a:lstStyle/>
-                    <a:p>
-                      <a:r>
-                        <a:rPr sz="1050" b="0"/>
-                        <a:t>blocked matmul</a:t>
-                      </a:r>
-                    </a:p>
-                  </a:txBody>
-                  <a:tcPr/>
-                </a:tc>
-                <a:tc>
-                  <a:txBody>
-                    <a:bodyPr/>
-                    <a:lstStyle/>
-                    <a:p>
-                      <a:r>
-                        <a:rPr sz="1050" b="0"/>
-                        <a:t>1,081,871,120</a:t>
-                      </a:r>
-                    </a:p>
-                  </a:txBody>
-                  <a:tcPr/>
-                </a:tc>
-                <a:tc>
-                  <a:txBody>
-                    <a:bodyPr/>
-                    <a:lstStyle/>
-                    <a:p>
-                      <a:r>
-                        <a:rPr sz="1050" b="1">
-                          <a:solidFill>
-                            <a:srgbClr val="187A33"/>
-                          </a:solidFill>
-                        </a:rPr>
-                        <a:t>0.997</a:t>
-                      </a:r>
-                    </a:p>
-                  </a:txBody>
-                  <a:tcPr/>
-                </a:tc>
-              </a:tr>
-              <a:tr h="329184">
-                <a:tc>
-                  <a:txBody>
-                    <a:bodyPr/>
-                    <a:lstStyle/>
-                    <a:p>
-                      <a:r>
-                        <a:rPr sz="1050" b="0"/>
-                        <a:t>net</a:t>
-                      </a:r>
-                    </a:p>
-                  </a:txBody>
-                  <a:tcPr/>
-                </a:tc>
-                <a:tc>
-                  <a:txBody>
-                    <a:bodyPr/>
-                    <a:lstStyle/>
-                    <a:p>
-                      <a:r>
-                        <a:rPr sz="1050" b="0"/>
-                        <a:t>HTTP client + hash</a:t>
-                      </a:r>
-                    </a:p>
-                  </a:txBody>
-                  <a:tcPr/>
-                </a:tc>
-                <a:tc>
-                  <a:txBody>
-                    <a:bodyPr/>
-                    <a:lstStyle/>
-                    <a:p>
-                      <a:r>
-                        <a:rPr sz="1050" b="0"/>
-                        <a:t>430,719,038</a:t>
-                      </a:r>
-                    </a:p>
-                  </a:txBody>
-                  <a:tcPr/>
-                </a:tc>
-                <a:tc>
-                  <a:txBody>
-                    <a:bodyPr/>
-                    <a:lstStyle/>
-                    <a:p>
-                      <a:r>
-                        <a:rPr sz="1050" b="1">
-                          <a:solidFill>
-                            <a:srgbClr val="187A33"/>
-                          </a:solidFill>
-                        </a:rPr>
-                        <a:t>0.798</a:t>
-                      </a:r>
-                    </a:p>
-                  </a:txBody>
-                  <a:tcPr/>
-                </a:tc>
-              </a:tr>
-              <a:tr h="329184">
-                <a:tc>
-                  <a:txBody>
-                    <a:bodyPr/>
-                    <a:lstStyle/>
-                    <a:p>
-                      <a:r>
-                        <a:rPr sz="1050" b="0"/>
-                        <a:t>pacman</a:t>
-                      </a:r>
-                    </a:p>
-                  </a:txBody>
-                  <a:tcPr/>
-                </a:tc>
-                <a:tc>
-                  <a:txBody>
-                    <a:bodyPr/>
-                    <a:lstStyle/>
-                    <a:p>
-                      <a:r>
-                        <a:rPr sz="1050" b="0"/>
-                        <a:t>game AI (genetic Pac-Man)</a:t>
-                      </a:r>
-                    </a:p>
-                  </a:txBody>
-                  <a:tcPr/>
-                </a:tc>
-                <a:tc>
-                  <a:txBody>
-                    <a:bodyPr/>
-                    <a:lstStyle/>
-                    <a:p>
-                      <a:r>
-                        <a:rPr sz="1050" b="0"/>
-                        <a:t>25,711,718,364</a:t>
-                      </a:r>
-                    </a:p>
-                  </a:txBody>
-                  <a:tcPr/>
-                </a:tc>
-                <a:tc>
-                  <a:txBody>
-                    <a:bodyPr/>
-                    <a:lstStyle/>
-                    <a:p>
-                      <a:r>
-                        <a:rPr sz="1050" b="1">
-                          <a:solidFill>
-                            <a:srgbClr val="187A33"/>
-                          </a:solidFill>
-                        </a:rPr>
-                        <a:t>0.999</a:t>
-                      </a:r>
-                    </a:p>
-                  </a:txBody>
-                  <a:tcPr/>
-                </a:tc>
-              </a:tr>
-              <a:tr h="329184">
-                <a:tc>
-                  <a:txBody>
-                    <a:bodyPr/>
-                    <a:lstStyle/>
-                    <a:p>
-                      <a:r>
-                        <a:rPr sz="1050" b="0"/>
-                        <a:t>sgm</a:t>
-                      </a:r>
-                    </a:p>
-                  </a:txBody>
-                  <a:tcPr/>
-                </a:tc>
-                <a:tc>
-                  <a:txBody>
-                    <a:bodyPr/>
-                    <a:lstStyle/>
-                    <a:p>
-                      <a:r>
-                        <a:rPr sz="1050" b="0"/>
-                        <a:t>stereo vision (real imagery)</a:t>
-                      </a:r>
-                    </a:p>
-                  </a:txBody>
-                  <a:tcPr/>
-                </a:tc>
-                <a:tc>
-                  <a:txBody>
-                    <a:bodyPr/>
-                    <a:lstStyle/>
-                    <a:p>
-                      <a:r>
-                        <a:rPr sz="1050" b="0"/>
-                        <a:t>10,154,191,781</a:t>
-                      </a:r>
-                    </a:p>
-                  </a:txBody>
-                  <a:tcPr/>
-                </a:tc>
-                <a:tc>
-                  <a:txBody>
-                    <a:bodyPr/>
-                    <a:lstStyle/>
-                    <a:p>
-                      <a:r>
-                        <a:rPr sz="1050" b="1">
-                          <a:solidFill>
-                            <a:srgbClr val="187A33"/>
-                          </a:solidFill>
-                        </a:rPr>
-                        <a:t>0.997</a:t>
-                      </a:r>
-                    </a:p>
-                  </a:txBody>
-                  <a:tcPr/>
-                </a:tc>
-              </a:tr>
-              <a:tr h="329184">
-                <a:tc>
-                  <a:txBody>
-                    <a:bodyPr/>
-                    <a:lstStyle/>
-                    <a:p>
-                      <a:r>
-                        <a:rPr sz="1050" b="0"/>
-                        <a:t>sha256</a:t>
-                      </a:r>
-                    </a:p>
-                  </a:txBody>
-                  <a:tcPr/>
-                </a:tc>
-                <a:tc>
-                  <a:txBody>
-                    <a:bodyPr/>
-                    <a:lstStyle/>
-                    <a:p>
-                      <a:r>
-                        <a:rPr sz="1050" b="0"/>
-                        <a:t>crypto stream</a:t>
-                      </a:r>
-                    </a:p>
-                  </a:txBody>
-                  <a:tcPr/>
-                </a:tc>
-                <a:tc>
-                  <a:txBody>
-                    <a:bodyPr/>
-                    <a:lstStyle/>
-                    <a:p>
-                      <a:r>
-                        <a:rPr sz="1050" b="0"/>
-                        <a:t>8,453,218,121</a:t>
-                      </a:r>
-                    </a:p>
-                  </a:txBody>
-                  <a:tcPr/>
-                </a:tc>
-                <a:tc>
-                  <a:txBody>
-                    <a:bodyPr/>
-                    <a:lstStyle/>
-                    <a:p>
-                      <a:r>
-                        <a:rPr sz="1050" b="1">
-                          <a:solidFill>
-                            <a:srgbClr val="187A33"/>
-                          </a:solidFill>
-                        </a:rPr>
-                        <a:t>0.999</a:t>
-                      </a:r>
-                    </a:p>
-                  </a:txBody>
-                  <a:tcPr/>
-                </a:tc>
-              </a:tr>
-              <a:tr h="329184">
-                <a:tc>
-                  <a:txBody>
-                    <a:bodyPr/>
-                    <a:lstStyle/>
-                    <a:p>
-                      <a:r>
-                        <a:rPr sz="1050" b="0"/>
-                        <a:t>sort</a:t>
-                      </a:r>
-                    </a:p>
-                  </a:txBody>
-                  <a:tcPr/>
-                </a:tc>
-                <a:tc>
-                  <a:txBody>
-                    <a:bodyPr/>
-                    <a:lstStyle/>
-                    <a:p>
-                      <a:r>
-                        <a:rPr sz="1050" b="0"/>
-                        <a:t>qsort</a:t>
-                      </a:r>
-                    </a:p>
-                  </a:txBody>
-                  <a:tcPr/>
-                </a:tc>
-                <a:tc>
-                  <a:txBody>
-                    <a:bodyPr/>
-                    <a:lstStyle/>
-                    <a:p>
-                      <a:r>
-                        <a:rPr sz="1050" b="0"/>
-                        <a:t>1,924,668,159</a:t>
-                      </a:r>
-                    </a:p>
-                  </a:txBody>
-                  <a:tcPr/>
-                </a:tc>
-                <a:tc>
-                  <a:txBody>
-                    <a:bodyPr/>
-                    <a:lstStyle/>
-                    <a:p>
-                      <a:r>
-                        <a:rPr sz="1050" b="1">
-                          <a:solidFill>
-                            <a:srgbClr val="187A33"/>
-                          </a:solidFill>
-                        </a:rPr>
-                        <a:t>0.996</a:t>
-                      </a:r>
-                    </a:p>
-                  </a:txBody>
-                  <a:tcPr/>
-                </a:tc>
-              </a:tr>
-              <a:tr h="329184">
-                <a:tc>
-                  <a:txBody>
-                    <a:bodyPr/>
-                    <a:lstStyle/>
-                    <a:p>
-                      <a:r>
-                        <a:rPr sz="1050" b="0"/>
-                        <a:t>sqlite</a:t>
-                      </a:r>
-                    </a:p>
-                  </a:txBody>
-                  <a:tcPr/>
-                </a:tc>
-                <a:tc>
-                  <a:txBody>
-                    <a:bodyPr/>
-                    <a:lstStyle/>
-                    <a:p>
-                      <a:r>
-                        <a:rPr sz="1050" b="0"/>
-                        <a:t>in-memory database</a:t>
-                      </a:r>
-                    </a:p>
-                  </a:txBody>
-                  <a:tcPr/>
-                </a:tc>
-                <a:tc>
-                  <a:txBody>
-                    <a:bodyPr/>
-                    <a:lstStyle/>
-                    <a:p>
-                      <a:r>
-                        <a:rPr sz="1050" b="0"/>
-                        <a:t>2,580,290,752</a:t>
-                      </a:r>
-                    </a:p>
-                  </a:txBody>
-                  <a:tcPr/>
-                </a:tc>
-                <a:tc>
-                  <a:txBody>
-                    <a:bodyPr/>
-                    <a:lstStyle/>
-                    <a:p>
-                      <a:r>
-                        <a:rPr sz="1050" b="1">
-                          <a:solidFill>
-                            <a:srgbClr val="187A33"/>
-                          </a:solidFill>
-                        </a:rPr>
-                        <a:t>0.998</a:t>
-                      </a:r>
-                    </a:p>
-                  </a:txBody>
-                  <a:tcPr/>
-                </a:tc>
-              </a:tr>
-            </a:tbl>
-          </a:graphicData>
-        </a:graphic>
-      </p:graphicFrame>
+        </p:nvSpPr>
+        <p:spPr>
+          <a:xfrm>
+            <a:off x="6263640" y="1417320"/>
+            <a:ext cx="5394960" cy="3017520"/>
+          </a:xfrm>
+          <a:prstGeom prst="roundRect">
+            <a:avLst/>
+          </a:prstGeom>
+          <a:solidFill>
+            <a:srgbClr val="EFF3FA"/>
+          </a:solidFill>
+          <a:ln w="15240">
+            <a:solidFill>
+              <a:srgbClr val="1A53A0"/>
+            </a:solidFill>
+          </a:ln>
+        </p:spPr>
+        <p:style>
+          <a:lnRef idx="1">
+            <a:schemeClr val="accent1"/>
+          </a:lnRef>
+          <a:fillRef idx="3">
+            <a:schemeClr val="accent1"/>
+          </a:fillRef>
+          <a:effectRef idx="2">
+            <a:schemeClr val="accent1"/>
+          </a:effectRef>
+          <a:fontRef idx="minor">
+            <a:schemeClr val="lt1"/>
+          </a:fontRef>
+        </p:style>
+        <p:txBody>
+          <a:bodyPr rtlCol="0" anchor="ctr"/>
+          <a:lstStyle/>
+          <a:p>
+            <a:pPr algn="ctr"/>
+          </a:p>
+        </p:txBody>
+      </p:sp>
+      <p:sp>
+        <p:nvSpPr>
+          <p:cNvPr id="12" name="TextBox 11"/>
+          <p:cNvSpPr txBox="1"/>
+          <p:nvPr/>
+        </p:nvSpPr>
+        <p:spPr>
+          <a:xfrm>
+            <a:off x="6492240" y="1554480"/>
+            <a:ext cx="4937760" cy="365760"/>
+          </a:xfrm>
+          <a:prstGeom prst="rect">
+            <a:avLst/>
+          </a:prstGeom>
+          <a:noFill/>
+        </p:spPr>
+        <p:txBody>
+          <a:bodyPr wrap="square">
+            <a:spAutoFit/>
+          </a:bodyPr>
+          <a:lstStyle/>
+          <a:p>
+            <a:pPr algn="l"/>
+            <a:r>
+              <a:rPr sz="1500" b="1">
+                <a:solidFill>
+                  <a:srgbClr val="1A53A0"/>
+                </a:solidFill>
+                <a:latin typeface="Calibri"/>
+              </a:rPr>
+              <a:t>Silicon (MEASURED)</a:t>
+            </a:r>
+          </a:p>
+        </p:txBody>
+      </p:sp>
+      <p:sp>
+        <p:nvSpPr>
+          <p:cNvPr id="13" name="TextBox 12"/>
+          <p:cNvSpPr txBox="1"/>
+          <p:nvPr/>
+        </p:nvSpPr>
+        <p:spPr>
+          <a:xfrm>
+            <a:off x="6492240" y="2011680"/>
+            <a:ext cx="5029200" cy="2286000"/>
+          </a:xfrm>
+          <a:prstGeom prst="rect">
+            <a:avLst/>
+          </a:prstGeom>
+          <a:noFill/>
+        </p:spPr>
+        <p:txBody>
+          <a:bodyPr wrap="square">
+            <a:spAutoFit/>
+          </a:bodyPr>
+          <a:lstStyle/>
+          <a:p>
+            <a:pPr algn="l"/>
+            <a:r>
+              <a:rPr sz="1100" b="0">
+                <a:solidFill>
+                  <a:srgbClr val="202124"/>
+                </a:solidFill>
+                <a:latin typeface="Calibri"/>
+              </a:rPr>
+              <a:t>FRDM-IMX95, perf stat, pinned to A55 core 0</a:t>
+            </a:r>
+          </a:p>
+          <a:p>
+            <a:r>
+              <a:rPr sz="1100">
+                <a:solidFill>
+                  <a:srgbClr val="202124"/>
+                </a:solidFill>
+                <a:latin typeface="Calibri"/>
+              </a:rPr>
+              <a:t>Core PMU: instructions, cycles, L1/L2/L3 refill events</a:t>
+            </a:r>
+          </a:p>
+          <a:p>
+            <a:r>
+              <a:rPr sz="1100">
+                <a:solidFill>
+                  <a:srgbClr val="202124"/>
+                </a:solidFill>
+                <a:latin typeface="Calibri"/>
+              </a:rPr>
+              <a:t>imx9_ddr0 DDR-controller PMU: read / write beats (32 B), system-wide,</a:t>
+            </a:r>
+          </a:p>
+          <a:p>
+            <a:r>
+              <a:rPr sz="1100">
+                <a:solidFill>
+                  <a:srgbClr val="202124"/>
+                </a:solidFill>
+                <a:latin typeface="Calibri"/>
+              </a:rPr>
+              <a:t>with an equal-duration idle window subtracted</a:t>
+            </a:r>
+          </a:p>
+          <a:p>
+            <a:r>
+              <a:rPr sz="1100">
+                <a:solidFill>
+                  <a:srgbClr val="202124"/>
+                </a:solidFill>
+                <a:latin typeface="Calibri"/>
+              </a:rPr>
+              <a:t>The DDR controller is the arbiter: it sees prefetch and DMA traffic</a:t>
+            </a:r>
+          </a:p>
+          <a:p>
+            <a:r>
+              <a:rPr sz="1100">
+                <a:solidFill>
+                  <a:srgbClr val="202124"/>
+                </a:solidFill>
+                <a:latin typeface="Calibri"/>
+              </a:rPr>
+              <a:t>that core-side refill events do not</a:t>
+            </a:r>
+          </a:p>
+        </p:txBody>
+      </p:sp>
+      <p:sp>
+        <p:nvSpPr>
+          <p:cNvPr id="14" name="TextBox 13"/>
+          <p:cNvSpPr txBox="1"/>
+          <p:nvPr/>
+        </p:nvSpPr>
+        <p:spPr>
+          <a:xfrm>
+            <a:off x="548640" y="4709160"/>
+            <a:ext cx="11064240" cy="640080"/>
+          </a:xfrm>
+          <a:prstGeom prst="rect">
+            <a:avLst/>
+          </a:prstGeom>
+          <a:noFill/>
+        </p:spPr>
+        <p:txBody>
+          <a:bodyPr wrap="square">
+            <a:spAutoFit/>
+          </a:bodyPr>
+          <a:lstStyle/>
+          <a:p>
+            <a:pPr algn="l"/>
+            <a:r>
+              <a:rPr sz="1150" b="0">
+                <a:solidFill>
+                  <a:srgbClr val="202124"/>
+                </a:solidFill>
+                <a:latin typeface="Calibri"/>
+              </a:rPr>
+              <a:t>Population (14): five microbench corners spanning the activity extremes (ALU, streaming, pointer-chase, matmul, sort) and nine applications — stereo vision on real imagery, two compressors, an interpreter, a hash, a JSON codec, an in-memory database, a game-AI trainer, and a live-socket HTTP client.</a:t>
+            </a:r>
+          </a:p>
+        </p:txBody>
+      </p:sp>
+      <p:sp>
+        <p:nvSpPr>
+          <p:cNvPr id="15" name="TextBox 14"/>
+          <p:cNvSpPr txBox="1"/>
+          <p:nvPr/>
+        </p:nvSpPr>
+        <p:spPr>
+          <a:xfrm>
+            <a:off x="548640" y="5486400"/>
+            <a:ext cx="11064240" cy="548640"/>
+          </a:xfrm>
+          <a:prstGeom prst="rect">
+            <a:avLst/>
+          </a:prstGeom>
+          <a:noFill/>
+        </p:spPr>
+        <p:txBody>
+          <a:bodyPr wrap="square">
+            <a:spAutoFit/>
+          </a:bodyPr>
+          <a:lstStyle/>
+          <a:p>
+            <a:pPr algn="l"/>
+            <a:r>
+              <a:rPr sz="1100" b="0">
+                <a:solidFill>
+                  <a:srgbClr val="5F6368"/>
+                </a:solidFill>
+                <a:latin typeface="Calibri"/>
+              </a:rPr>
+              <a:t>Validity gates: every app prints a checksum (dead-code-proof); the vision app is hash-gated bit-exact against its published golden; instruction agreement is required before any cache-level conclusion is read.</a:t>
+            </a:r>
+          </a:p>
+        </p:txBody>
+      </p:sp>
     </p:spTree>
   </p:cSld>
   <p:clrMapOvr>
@@ -4845,14 +4733,57 @@
       <p:grpSpPr/>
       <p:sp>
         <p:nvSpPr>
-          <p:cNvPr id="2" name="TextBox 1"/>
+          <p:cNvPr id="2" name="Rectangle 1"/>
+          <p:cNvSpPr/>
+          <p:nvPr/>
+        </p:nvSpPr>
+        <p:spPr>
+          <a:xfrm>
+            <a:off x="0" y="0"/>
+            <a:ext cx="12191695" cy="841248"/>
+          </a:xfrm>
+          <a:prstGeom prst="rect">
+            <a:avLst/>
+          </a:prstGeom>
+          <a:solidFill>
+            <a:srgbClr val="202124"/>
+          </a:solidFill>
+          <a:ln>
+            <a:noFill/>
+          </a:ln>
+        </p:spPr>
+        <p:style>
+          <a:lnRef idx="1">
+            <a:schemeClr val="accent1"/>
+          </a:lnRef>
+          <a:fillRef idx="3">
+            <a:schemeClr val="accent1"/>
+          </a:fillRef>
+          <a:effectRef idx="2">
+            <a:schemeClr val="accent1"/>
+          </a:effectRef>
+          <a:fontRef idx="minor">
+            <a:schemeClr val="lt1"/>
+          </a:fontRef>
+        </p:style>
+        <p:txBody>
+          <a:bodyPr rtlCol="0" anchor="ctr"/>
+          <a:lstStyle/>
+          <a:p>
+            <a:pPr algn="ctr"/>
+          </a:p>
+        </p:txBody>
+      </p:sp>
+      <p:sp>
+        <p:nvSpPr>
+          <p:cNvPr id="3" name="TextBox 2"/>
           <p:cNvSpPr txBox="1"/>
           <p:nvPr/>
         </p:nvSpPr>
         <p:spPr>
           <a:xfrm>
-            <a:off x="548640" y="274320"/>
-            <a:ext cx="11155680" cy="548640"/>
+            <a:off x="548640" y="118872"/>
+            <a:ext cx="10058400" cy="548640"/>
           </a:xfrm>
           <a:prstGeom prst="rect">
             <a:avLst/>
@@ -4869,49 +4800,68 @@
             <a:r>
               <a:rPr sz="2600" b="1">
                 <a:solidFill>
-                  <a:srgbClr val="202124"/>
+                  <a:srgbClr val="FFFFFF"/>
                 </a:solidFill>
                 <a:latin typeface="Calibri"/>
               </a:rPr>
-              <a:t>The money chart: DRAM-read proxy vs the DDR controller</a:t>
-            </a:r>
-          </a:p>
-        </p:txBody>
-      </p:sp>
-      <p:pic>
-        <p:nvPicPr>
-          <p:cNvPr id="3" name="Picture 2" descr="scatter.png"/>
-          <p:cNvPicPr>
-            <a:picLocks noChangeAspect="1"/>
-          </p:cNvPicPr>
+              <a:t>Gate 1 — instructions agree, all fourteen apps</a:t>
+            </a:r>
+          </a:p>
+        </p:txBody>
+      </p:sp>
+      <p:sp>
+        <p:nvSpPr>
+          <p:cNvPr id="4" name="Rectangle 3"/>
+          <p:cNvSpPr/>
           <p:nvPr/>
-        </p:nvPicPr>
-        <p:blipFill>
-          <a:blip r:embed="rId2"/>
-          <a:stretch>
-            <a:fillRect/>
-          </a:stretch>
-        </p:blipFill>
+        </p:nvSpPr>
         <p:spPr>
           <a:xfrm>
-            <a:off x="2926080" y="914400"/>
-            <a:ext cx="6029661" cy="5394960"/>
+            <a:off x="0" y="841248"/>
+            <a:ext cx="12191695" cy="38100"/>
           </a:xfrm>
           <a:prstGeom prst="rect">
             <a:avLst/>
           </a:prstGeom>
+          <a:solidFill>
+            <a:srgbClr val="1A53A0"/>
+          </a:solidFill>
+          <a:ln>
+            <a:noFill/>
+          </a:ln>
         </p:spPr>
-      </p:pic>
-      <p:sp>
-        <p:nvSpPr>
-          <p:cNvPr id="4" name="TextBox 3"/>
+        <p:style>
+          <a:lnRef idx="1">
+            <a:schemeClr val="accent1"/>
+          </a:lnRef>
+          <a:fillRef idx="3">
+            <a:schemeClr val="accent1"/>
+          </a:fillRef>
+          <a:effectRef idx="2">
+            <a:schemeClr val="accent1"/>
+          </a:effectRef>
+          <a:fontRef idx="minor">
+            <a:schemeClr val="lt1"/>
+          </a:fontRef>
+        </p:style>
+        <p:txBody>
+          <a:bodyPr rtlCol="0" anchor="ctr"/>
+          <a:lstStyle/>
+          <a:p>
+            <a:pPr algn="ctr"/>
+          </a:p>
+        </p:txBody>
+      </p:sp>
+      <p:sp>
+        <p:nvSpPr>
+          <p:cNvPr id="5" name="TextBox 4"/>
           <p:cNvSpPr txBox="1"/>
           <p:nvPr/>
         </p:nvSpPr>
         <p:spPr>
           <a:xfrm>
-            <a:off x="548640" y="6400800"/>
-            <a:ext cx="11155680" cy="411480"/>
+            <a:off x="548640" y="969264"/>
+            <a:ext cx="11155680" cy="365760"/>
           </a:xfrm>
           <a:prstGeom prst="rect">
             <a:avLst/>
@@ -4926,13 +4876,1488 @@
           <a:p>
             <a:pPr algn="l"/>
             <a:r>
-              <a:rPr sz="1200" b="1">
+              <a:rPr sz="1200" b="0">
+                <a:solidFill>
+                  <a:srgbClr val="5F6368"/>
+                </a:solidFill>
+                <a:latin typeface="Calibri"/>
+              </a:rPr>
+              <a:t>Same binary ⇒ same retired instructions. This gate must pass before anything downstream is read.</a:t>
+            </a:r>
+          </a:p>
+        </p:txBody>
+      </p:sp>
+      <p:sp>
+        <p:nvSpPr>
+          <p:cNvPr id="6" name="TextBox 5"/>
+          <p:cNvSpPr txBox="1"/>
+          <p:nvPr/>
+        </p:nvSpPr>
+        <p:spPr>
+          <a:xfrm>
+            <a:off x="548640" y="6528816"/>
+            <a:ext cx="9601200" cy="274320"/>
+          </a:xfrm>
+          <a:prstGeom prst="rect">
+            <a:avLst/>
+          </a:prstGeom>
+          <a:noFill/>
+        </p:spPr>
+        <p:txBody>
+          <a:bodyPr wrap="square">
+            <a:spAutoFit/>
+          </a:bodyPr>
+          <a:lstStyle/>
+          <a:p>
+            <a:pPr algn="l"/>
+            <a:r>
+              <a:rPr sz="950" b="0">
+                <a:solidFill>
+                  <a:srgbClr val="5F6368"/>
+                </a:solidFill>
+                <a:latin typeface="Calibri"/>
+              </a:rPr>
+              <a:t>wattson xcheck rev 2 · QEMU counts DERIVED, PMU/DDR counts MEASURED · 2026-08-30</a:t>
+            </a:r>
+          </a:p>
+        </p:txBody>
+      </p:sp>
+      <p:sp>
+        <p:nvSpPr>
+          <p:cNvPr id="7" name="TextBox 6"/>
+          <p:cNvSpPr txBox="1"/>
+          <p:nvPr/>
+        </p:nvSpPr>
+        <p:spPr>
+          <a:xfrm>
+            <a:off x="11247120" y="6528816"/>
+            <a:ext cx="457200" cy="274320"/>
+          </a:xfrm>
+          <a:prstGeom prst="rect">
+            <a:avLst/>
+          </a:prstGeom>
+          <a:noFill/>
+        </p:spPr>
+        <p:txBody>
+          <a:bodyPr wrap="square">
+            <a:spAutoFit/>
+          </a:bodyPr>
+          <a:lstStyle/>
+          <a:p>
+            <a:pPr algn="r"/>
+            <a:r>
+              <a:rPr sz="950" b="0">
+                <a:solidFill>
+                  <a:srgbClr val="5F6368"/>
+                </a:solidFill>
+                <a:latin typeface="Calibri"/>
+              </a:rPr>
+              <a:t>4</a:t>
+            </a:r>
+          </a:p>
+        </p:txBody>
+      </p:sp>
+      <p:graphicFrame>
+        <p:nvGraphicFramePr>
+          <p:cNvPr id="8" name="Table 7"/>
+          <p:cNvGraphicFramePr>
+            <a:graphicFrameLocks noGrp="1"/>
+          </p:cNvGraphicFramePr>
+          <p:nvPr/>
+        </p:nvGraphicFramePr>
+        <p:xfrm>
+          <a:off x="548640" y="1463040"/>
+          <a:ext cx="5486400" cy="3072384"/>
+        </p:xfrm>
+        <a:graphic>
+          <a:graphicData uri="http://schemas.openxmlformats.org/drawingml/2006/table">
+            <a:tbl>
+              <a:tblPr firstRow="1" bandRow="1">
+                <a:tableStyleId>{5C22544A-7EE6-4342-B048-85BDC9FD1C3A}</a:tableStyleId>
+              </a:tblPr>
+              <a:tblGrid>
+                <a:gridCol w="1051560"/>
+                <a:gridCol w="2377440"/>
+                <a:gridCol w="1417320"/>
+                <a:gridCol w="640080"/>
+              </a:tblGrid>
+              <a:tr h="384048">
+                <a:tc>
+                  <a:txBody>
+                    <a:bodyPr/>
+                    <a:lstStyle/>
+                    <a:p>
+                      <a:r>
+                        <a:rPr sz="1000" b="1">
+                          <a:solidFill>
+                            <a:srgbClr val="FFFFFF"/>
+                          </a:solidFill>
+                          <a:latin typeface="Calibri"/>
+                        </a:rPr>
+                        <a:t>app</a:t>
+                      </a:r>
+                    </a:p>
+                  </a:txBody>
+                  <a:tcPr>
+                    <a:solidFill>
+                      <a:srgbClr val="202124"/>
+                    </a:solidFill>
+                  </a:tcPr>
+                </a:tc>
+                <a:tc>
+                  <a:txBody>
+                    <a:bodyPr/>
+                    <a:lstStyle/>
+                    <a:p>
+                      <a:r>
+                        <a:rPr sz="1000" b="1">
+                          <a:solidFill>
+                            <a:srgbClr val="FFFFFF"/>
+                          </a:solidFill>
+                          <a:latin typeface="Calibri"/>
+                        </a:rPr>
+                        <a:t>workload</a:t>
+                      </a:r>
+                    </a:p>
+                  </a:txBody>
+                  <a:tcPr>
+                    <a:solidFill>
+                      <a:srgbClr val="202124"/>
+                    </a:solidFill>
+                  </a:tcPr>
+                </a:tc>
+                <a:tc>
+                  <a:txBody>
+                    <a:bodyPr/>
+                    <a:lstStyle/>
+                    <a:p>
+                      <a:r>
+                        <a:rPr sz="1000" b="1">
+                          <a:solidFill>
+                            <a:srgbClr val="FFFFFF"/>
+                          </a:solidFill>
+                          <a:latin typeface="Calibri"/>
+                        </a:rPr>
+                        <a:t>HW insns</a:t>
+                      </a:r>
+                    </a:p>
+                  </a:txBody>
+                  <a:tcPr>
+                    <a:solidFill>
+                      <a:srgbClr val="202124"/>
+                    </a:solidFill>
+                  </a:tcPr>
+                </a:tc>
+                <a:tc>
+                  <a:txBody>
+                    <a:bodyPr/>
+                    <a:lstStyle/>
+                    <a:p>
+                      <a:r>
+                        <a:rPr sz="1000" b="1">
+                          <a:solidFill>
+                            <a:srgbClr val="FFFFFF"/>
+                          </a:solidFill>
+                          <a:latin typeface="Calibri"/>
+                        </a:rPr>
+                        <a:t>ratio</a:t>
+                      </a:r>
+                    </a:p>
+                  </a:txBody>
+                  <a:tcPr>
+                    <a:solidFill>
+                      <a:srgbClr val="202124"/>
+                    </a:solidFill>
+                  </a:tcPr>
+                </a:tc>
+              </a:tr>
+              <a:tr h="384048">
+                <a:tc>
+                  <a:txBody>
+                    <a:bodyPr/>
+                    <a:lstStyle/>
+                    <a:p>
+                      <a:r>
+                        <a:rPr sz="1000" b="0">
+                          <a:latin typeface="Calibri"/>
+                        </a:rPr>
+                        <a:t>alu</a:t>
+                      </a:r>
+                    </a:p>
+                  </a:txBody>
+                  <a:tcPr>
+                    <a:solidFill>
+                      <a:srgbClr val="EFF3FA"/>
+                    </a:solidFill>
+                  </a:tcPr>
+                </a:tc>
+                <a:tc>
+                  <a:txBody>
+                    <a:bodyPr/>
+                    <a:lstStyle/>
+                    <a:p>
+                      <a:r>
+                        <a:rPr sz="1000" b="0">
+                          <a:latin typeface="Calibri"/>
+                        </a:rPr>
+                        <a:t>integer ALU loop</a:t>
+                      </a:r>
+                    </a:p>
+                  </a:txBody>
+                  <a:tcPr>
+                    <a:solidFill>
+                      <a:srgbClr val="EFF3FA"/>
+                    </a:solidFill>
+                  </a:tcPr>
+                </a:tc>
+                <a:tc>
+                  <a:txBody>
+                    <a:bodyPr/>
+                    <a:lstStyle/>
+                    <a:p>
+                      <a:r>
+                        <a:rPr sz="1000" b="0">
+                          <a:latin typeface="Calibri"/>
+                        </a:rPr>
+                        <a:t>1,201,593,894</a:t>
+                      </a:r>
+                    </a:p>
+                  </a:txBody>
+                  <a:tcPr>
+                    <a:solidFill>
+                      <a:srgbClr val="EFF3FA"/>
+                    </a:solidFill>
+                  </a:tcPr>
+                </a:tc>
+                <a:tc>
+                  <a:txBody>
+                    <a:bodyPr/>
+                    <a:lstStyle/>
+                    <a:p>
+                      <a:r>
+                        <a:rPr sz="1000" b="0">
+                          <a:solidFill>
+                            <a:srgbClr val="187A33"/>
+                          </a:solidFill>
+                          <a:latin typeface="Calibri"/>
+                        </a:rPr>
+                        <a:t>0.999</a:t>
+                      </a:r>
+                    </a:p>
+                  </a:txBody>
+                  <a:tcPr>
+                    <a:solidFill>
+                      <a:srgbClr val="EFF3FA"/>
+                    </a:solidFill>
+                  </a:tcPr>
+                </a:tc>
+              </a:tr>
+              <a:tr h="384048">
+                <a:tc>
+                  <a:txBody>
+                    <a:bodyPr/>
+                    <a:lstStyle/>
+                    <a:p>
+                      <a:r>
+                        <a:rPr sz="1000" b="0">
+                          <a:latin typeface="Calibri"/>
+                        </a:rPr>
+                        <a:t>bzip2</a:t>
+                      </a:r>
+                    </a:p>
+                  </a:txBody>
+                  <a:tcPr>
+                    <a:solidFill>
+                      <a:srgbClr val="FFFFFF"/>
+                    </a:solidFill>
+                  </a:tcPr>
+                </a:tc>
+                <a:tc>
+                  <a:txBody>
+                    <a:bodyPr/>
+                    <a:lstStyle/>
+                    <a:p>
+                      <a:r>
+                        <a:rPr sz="1000" b="0">
+                          <a:latin typeface="Calibri"/>
+                        </a:rPr>
+                        <a:t>bzip2 -9, 4 MiB corpus</a:t>
+                      </a:r>
+                    </a:p>
+                  </a:txBody>
+                  <a:tcPr>
+                    <a:solidFill>
+                      <a:srgbClr val="FFFFFF"/>
+                    </a:solidFill>
+                  </a:tcPr>
+                </a:tc>
+                <a:tc>
+                  <a:txBody>
+                    <a:bodyPr/>
+                    <a:lstStyle/>
+                    <a:p>
+                      <a:r>
+                        <a:rPr sz="1000" b="0">
+                          <a:latin typeface="Calibri"/>
+                        </a:rPr>
+                        <a:t>8,497,127,363</a:t>
+                      </a:r>
+                    </a:p>
+                  </a:txBody>
+                  <a:tcPr>
+                    <a:solidFill>
+                      <a:srgbClr val="FFFFFF"/>
+                    </a:solidFill>
+                  </a:tcPr>
+                </a:tc>
+                <a:tc>
+                  <a:txBody>
+                    <a:bodyPr/>
+                    <a:lstStyle/>
+                    <a:p>
+                      <a:r>
+                        <a:rPr sz="1000" b="0">
+                          <a:solidFill>
+                            <a:srgbClr val="187A33"/>
+                          </a:solidFill>
+                          <a:latin typeface="Calibri"/>
+                        </a:rPr>
+                        <a:t>0.985</a:t>
+                      </a:r>
+                    </a:p>
+                  </a:txBody>
+                  <a:tcPr>
+                    <a:solidFill>
+                      <a:srgbClr val="FFFFFF"/>
+                    </a:solidFill>
+                  </a:tcPr>
+                </a:tc>
+              </a:tr>
+              <a:tr h="384048">
+                <a:tc>
+                  <a:txBody>
+                    <a:bodyPr/>
+                    <a:lstStyle/>
+                    <a:p>
+                      <a:r>
+                        <a:rPr sz="1000" b="0">
+                          <a:latin typeface="Calibri"/>
+                        </a:rPr>
+                        <a:t>chase</a:t>
+                      </a:r>
+                    </a:p>
+                  </a:txBody>
+                  <a:tcPr>
+                    <a:solidFill>
+                      <a:srgbClr val="EFF3FA"/>
+                    </a:solidFill>
+                  </a:tcPr>
+                </a:tc>
+                <a:tc>
+                  <a:txBody>
+                    <a:bodyPr/>
+                    <a:lstStyle/>
+                    <a:p>
+                      <a:r>
+                        <a:rPr sz="1000" b="0">
+                          <a:latin typeface="Calibri"/>
+                        </a:rPr>
+                        <a:t>random pointer chase</a:t>
+                      </a:r>
+                    </a:p>
+                  </a:txBody>
+                  <a:tcPr>
+                    <a:solidFill>
+                      <a:srgbClr val="EFF3FA"/>
+                    </a:solidFill>
+                  </a:tcPr>
+                </a:tc>
+                <a:tc>
+                  <a:txBody>
+                    <a:bodyPr/>
+                    <a:lstStyle/>
+                    <a:p>
+                      <a:r>
+                        <a:rPr sz="1000" b="0">
+                          <a:latin typeface="Calibri"/>
+                        </a:rPr>
+                        <a:t>202,456,536</a:t>
+                      </a:r>
+                    </a:p>
+                  </a:txBody>
+                  <a:tcPr>
+                    <a:solidFill>
+                      <a:srgbClr val="EFF3FA"/>
+                    </a:solidFill>
+                  </a:tcPr>
+                </a:tc>
+                <a:tc>
+                  <a:txBody>
+                    <a:bodyPr/>
+                    <a:lstStyle/>
+                    <a:p>
+                      <a:r>
+                        <a:rPr sz="1000" b="0">
+                          <a:solidFill>
+                            <a:srgbClr val="187A33"/>
+                          </a:solidFill>
+                          <a:latin typeface="Calibri"/>
+                        </a:rPr>
+                        <a:t>1.058</a:t>
+                      </a:r>
+                    </a:p>
+                  </a:txBody>
+                  <a:tcPr>
+                    <a:solidFill>
+                      <a:srgbClr val="EFF3FA"/>
+                    </a:solidFill>
+                  </a:tcPr>
+                </a:tc>
+              </a:tr>
+              <a:tr h="384048">
+                <a:tc>
+                  <a:txBody>
+                    <a:bodyPr/>
+                    <a:lstStyle/>
+                    <a:p>
+                      <a:r>
+                        <a:rPr sz="1000" b="0">
+                          <a:latin typeface="Calibri"/>
+                        </a:rPr>
+                        <a:t>cjson</a:t>
+                      </a:r>
+                    </a:p>
+                  </a:txBody>
+                  <a:tcPr>
+                    <a:solidFill>
+                      <a:srgbClr val="FFFFFF"/>
+                    </a:solidFill>
+                  </a:tcPr>
+                </a:tc>
+                <a:tc>
+                  <a:txBody>
+                    <a:bodyPr/>
+                    <a:lstStyle/>
+                    <a:p>
+                      <a:r>
+                        <a:rPr sz="1000" b="0">
+                          <a:latin typeface="Calibri"/>
+                        </a:rPr>
+                        <a:t>cJSON parse+serialize</a:t>
+                      </a:r>
+                    </a:p>
+                  </a:txBody>
+                  <a:tcPr>
+                    <a:solidFill>
+                      <a:srgbClr val="FFFFFF"/>
+                    </a:solidFill>
+                  </a:tcPr>
+                </a:tc>
+                <a:tc>
+                  <a:txBody>
+                    <a:bodyPr/>
+                    <a:lstStyle/>
+                    <a:p>
+                      <a:r>
+                        <a:rPr sz="1000" b="0">
+                          <a:latin typeface="Calibri"/>
+                        </a:rPr>
+                        <a:t>1,523,095,346</a:t>
+                      </a:r>
+                    </a:p>
+                  </a:txBody>
+                  <a:tcPr>
+                    <a:solidFill>
+                      <a:srgbClr val="FFFFFF"/>
+                    </a:solidFill>
+                  </a:tcPr>
+                </a:tc>
+                <a:tc>
+                  <a:txBody>
+                    <a:bodyPr/>
+                    <a:lstStyle/>
+                    <a:p>
+                      <a:r>
+                        <a:rPr sz="1000" b="0">
+                          <a:solidFill>
+                            <a:srgbClr val="187A33"/>
+                          </a:solidFill>
+                          <a:latin typeface="Calibri"/>
+                        </a:rPr>
+                        <a:t>0.981</a:t>
+                      </a:r>
+                    </a:p>
+                  </a:txBody>
+                  <a:tcPr>
+                    <a:solidFill>
+                      <a:srgbClr val="FFFFFF"/>
+                    </a:solidFill>
+                  </a:tcPr>
+                </a:tc>
+              </a:tr>
+              <a:tr h="384048">
+                <a:tc>
+                  <a:txBody>
+                    <a:bodyPr/>
+                    <a:lstStyle/>
+                    <a:p>
+                      <a:r>
+                        <a:rPr sz="1000" b="0">
+                          <a:latin typeface="Calibri"/>
+                        </a:rPr>
+                        <a:t>lua</a:t>
+                      </a:r>
+                    </a:p>
+                  </a:txBody>
+                  <a:tcPr>
+                    <a:solidFill>
+                      <a:srgbClr val="EFF3FA"/>
+                    </a:solidFill>
+                  </a:tcPr>
+                </a:tc>
+                <a:tc>
+                  <a:txBody>
+                    <a:bodyPr/>
+                    <a:lstStyle/>
+                    <a:p>
+                      <a:r>
+                        <a:rPr sz="1000" b="0">
+                          <a:latin typeface="Calibri"/>
+                        </a:rPr>
+                        <a:t>Lua 5.4 script</a:t>
+                      </a:r>
+                    </a:p>
+                  </a:txBody>
+                  <a:tcPr>
+                    <a:solidFill>
+                      <a:srgbClr val="EFF3FA"/>
+                    </a:solidFill>
+                  </a:tcPr>
+                </a:tc>
+                <a:tc>
+                  <a:txBody>
+                    <a:bodyPr/>
+                    <a:lstStyle/>
+                    <a:p>
+                      <a:r>
+                        <a:rPr sz="1000" b="0">
+                          <a:latin typeface="Calibri"/>
+                        </a:rPr>
+                        <a:t>1,072,641,534</a:t>
+                      </a:r>
+                    </a:p>
+                  </a:txBody>
+                  <a:tcPr>
+                    <a:solidFill>
+                      <a:srgbClr val="EFF3FA"/>
+                    </a:solidFill>
+                  </a:tcPr>
+                </a:tc>
+                <a:tc>
+                  <a:txBody>
+                    <a:bodyPr/>
+                    <a:lstStyle/>
+                    <a:p>
+                      <a:r>
+                        <a:rPr sz="1000" b="0">
+                          <a:solidFill>
+                            <a:srgbClr val="187A33"/>
+                          </a:solidFill>
+                          <a:latin typeface="Calibri"/>
+                        </a:rPr>
+                        <a:t>0.994</a:t>
+                      </a:r>
+                    </a:p>
+                  </a:txBody>
+                  <a:tcPr>
+                    <a:solidFill>
+                      <a:srgbClr val="EFF3FA"/>
+                    </a:solidFill>
+                  </a:tcPr>
+                </a:tc>
+              </a:tr>
+              <a:tr h="384048">
+                <a:tc>
+                  <a:txBody>
+                    <a:bodyPr/>
+                    <a:lstStyle/>
+                    <a:p>
+                      <a:r>
+                        <a:rPr sz="1000" b="0">
+                          <a:latin typeface="Calibri"/>
+                        </a:rPr>
+                        <a:t>lz4</a:t>
+                      </a:r>
+                    </a:p>
+                  </a:txBody>
+                  <a:tcPr>
+                    <a:solidFill>
+                      <a:srgbClr val="FFFFFF"/>
+                    </a:solidFill>
+                  </a:tcPr>
+                </a:tc>
+                <a:tc>
+                  <a:txBody>
+                    <a:bodyPr/>
+                    <a:lstStyle/>
+                    <a:p>
+                      <a:r>
+                        <a:rPr sz="1000" b="0">
+                          <a:latin typeface="Calibri"/>
+                        </a:rPr>
+                        <a:t>lz4 -9, same corpus</a:t>
+                      </a:r>
+                    </a:p>
+                  </a:txBody>
+                  <a:tcPr>
+                    <a:solidFill>
+                      <a:srgbClr val="FFFFFF"/>
+                    </a:solidFill>
+                  </a:tcPr>
+                </a:tc>
+                <a:tc>
+                  <a:txBody>
+                    <a:bodyPr/>
+                    <a:lstStyle/>
+                    <a:p>
+                      <a:r>
+                        <a:rPr sz="1000" b="0">
+                          <a:latin typeface="Calibri"/>
+                        </a:rPr>
+                        <a:t>721,250,952</a:t>
+                      </a:r>
+                    </a:p>
+                  </a:txBody>
+                  <a:tcPr>
+                    <a:solidFill>
+                      <a:srgbClr val="FFFFFF"/>
+                    </a:solidFill>
+                  </a:tcPr>
+                </a:tc>
+                <a:tc>
+                  <a:txBody>
+                    <a:bodyPr/>
+                    <a:lstStyle/>
+                    <a:p>
+                      <a:r>
+                        <a:rPr sz="1000" b="0">
+                          <a:solidFill>
+                            <a:srgbClr val="187A33"/>
+                          </a:solidFill>
+                          <a:latin typeface="Calibri"/>
+                        </a:rPr>
+                        <a:t>0.988</a:t>
+                      </a:r>
+                    </a:p>
+                  </a:txBody>
+                  <a:tcPr>
+                    <a:solidFill>
+                      <a:srgbClr val="FFFFFF"/>
+                    </a:solidFill>
+                  </a:tcPr>
+                </a:tc>
+              </a:tr>
+              <a:tr h="384048">
+                <a:tc>
+                  <a:txBody>
+                    <a:bodyPr/>
+                    <a:lstStyle/>
+                    <a:p>
+                      <a:r>
+                        <a:rPr sz="1000" b="0">
+                          <a:latin typeface="Calibri"/>
+                        </a:rPr>
+                        <a:t>mem</a:t>
+                      </a:r>
+                    </a:p>
+                  </a:txBody>
+                  <a:tcPr>
+                    <a:solidFill>
+                      <a:srgbClr val="EFF3FA"/>
+                    </a:solidFill>
+                  </a:tcPr>
+                </a:tc>
+                <a:tc>
+                  <a:txBody>
+                    <a:bodyPr/>
+                    <a:lstStyle/>
+                    <a:p>
+                      <a:r>
+                        <a:rPr sz="1000" b="0">
+                          <a:latin typeface="Calibri"/>
+                        </a:rPr>
+                        <a:t>streaming write+read sweep</a:t>
+                      </a:r>
+                    </a:p>
+                  </a:txBody>
+                  <a:tcPr>
+                    <a:solidFill>
+                      <a:srgbClr val="EFF3FA"/>
+                    </a:solidFill>
+                  </a:tcPr>
+                </a:tc>
+                <a:tc>
+                  <a:txBody>
+                    <a:bodyPr/>
+                    <a:lstStyle/>
+                    <a:p>
+                      <a:r>
+                        <a:rPr sz="1000" b="0">
+                          <a:latin typeface="Calibri"/>
+                        </a:rPr>
+                        <a:t>547,742,426</a:t>
+                      </a:r>
+                    </a:p>
+                  </a:txBody>
+                  <a:tcPr>
+                    <a:solidFill>
+                      <a:srgbClr val="EFF3FA"/>
+                    </a:solidFill>
+                  </a:tcPr>
+                </a:tc>
+                <a:tc>
+                  <a:txBody>
+                    <a:bodyPr/>
+                    <a:lstStyle/>
+                    <a:p>
+                      <a:r>
+                        <a:rPr sz="1000" b="0">
+                          <a:solidFill>
+                            <a:srgbClr val="187A33"/>
+                          </a:solidFill>
+                          <a:latin typeface="Calibri"/>
+                        </a:rPr>
+                        <a:t>0.980</a:t>
+                      </a:r>
+                    </a:p>
+                  </a:txBody>
+                  <a:tcPr>
+                    <a:solidFill>
+                      <a:srgbClr val="EFF3FA"/>
+                    </a:solidFill>
+                  </a:tcPr>
+                </a:tc>
+              </a:tr>
+            </a:tbl>
+          </a:graphicData>
+        </a:graphic>
+      </p:graphicFrame>
+      <p:graphicFrame>
+        <p:nvGraphicFramePr>
+          <p:cNvPr id="9" name="Table 8"/>
+          <p:cNvGraphicFramePr>
+            <a:graphicFrameLocks noGrp="1"/>
+          </p:cNvGraphicFramePr>
+          <p:nvPr/>
+        </p:nvGraphicFramePr>
+        <p:xfrm>
+          <a:off x="6263640" y="1463040"/>
+          <a:ext cx="5486400" cy="3072384"/>
+        </p:xfrm>
+        <a:graphic>
+          <a:graphicData uri="http://schemas.openxmlformats.org/drawingml/2006/table">
+            <a:tbl>
+              <a:tblPr firstRow="1" bandRow="1">
+                <a:tableStyleId>{5C22544A-7EE6-4342-B048-85BDC9FD1C3A}</a:tableStyleId>
+              </a:tblPr>
+              <a:tblGrid>
+                <a:gridCol w="1051560"/>
+                <a:gridCol w="2377440"/>
+                <a:gridCol w="1417320"/>
+                <a:gridCol w="640080"/>
+              </a:tblGrid>
+              <a:tr h="384048">
+                <a:tc>
+                  <a:txBody>
+                    <a:bodyPr/>
+                    <a:lstStyle/>
+                    <a:p>
+                      <a:r>
+                        <a:rPr sz="1000" b="1">
+                          <a:solidFill>
+                            <a:srgbClr val="FFFFFF"/>
+                          </a:solidFill>
+                          <a:latin typeface="Calibri"/>
+                        </a:rPr>
+                        <a:t>app</a:t>
+                      </a:r>
+                    </a:p>
+                  </a:txBody>
+                  <a:tcPr>
+                    <a:solidFill>
+                      <a:srgbClr val="202124"/>
+                    </a:solidFill>
+                  </a:tcPr>
+                </a:tc>
+                <a:tc>
+                  <a:txBody>
+                    <a:bodyPr/>
+                    <a:lstStyle/>
+                    <a:p>
+                      <a:r>
+                        <a:rPr sz="1000" b="1">
+                          <a:solidFill>
+                            <a:srgbClr val="FFFFFF"/>
+                          </a:solidFill>
+                          <a:latin typeface="Calibri"/>
+                        </a:rPr>
+                        <a:t>workload</a:t>
+                      </a:r>
+                    </a:p>
+                  </a:txBody>
+                  <a:tcPr>
+                    <a:solidFill>
+                      <a:srgbClr val="202124"/>
+                    </a:solidFill>
+                  </a:tcPr>
+                </a:tc>
+                <a:tc>
+                  <a:txBody>
+                    <a:bodyPr/>
+                    <a:lstStyle/>
+                    <a:p>
+                      <a:r>
+                        <a:rPr sz="1000" b="1">
+                          <a:solidFill>
+                            <a:srgbClr val="FFFFFF"/>
+                          </a:solidFill>
+                          <a:latin typeface="Calibri"/>
+                        </a:rPr>
+                        <a:t>HW insns</a:t>
+                      </a:r>
+                    </a:p>
+                  </a:txBody>
+                  <a:tcPr>
+                    <a:solidFill>
+                      <a:srgbClr val="202124"/>
+                    </a:solidFill>
+                  </a:tcPr>
+                </a:tc>
+                <a:tc>
+                  <a:txBody>
+                    <a:bodyPr/>
+                    <a:lstStyle/>
+                    <a:p>
+                      <a:r>
+                        <a:rPr sz="1000" b="1">
+                          <a:solidFill>
+                            <a:srgbClr val="FFFFFF"/>
+                          </a:solidFill>
+                          <a:latin typeface="Calibri"/>
+                        </a:rPr>
+                        <a:t>ratio</a:t>
+                      </a:r>
+                    </a:p>
+                  </a:txBody>
+                  <a:tcPr>
+                    <a:solidFill>
+                      <a:srgbClr val="202124"/>
+                    </a:solidFill>
+                  </a:tcPr>
+                </a:tc>
+              </a:tr>
+              <a:tr h="384048">
+                <a:tc>
+                  <a:txBody>
+                    <a:bodyPr/>
+                    <a:lstStyle/>
+                    <a:p>
+                      <a:r>
+                        <a:rPr sz="1000" b="0">
+                          <a:latin typeface="Calibri"/>
+                        </a:rPr>
+                        <a:t>mm</a:t>
+                      </a:r>
+                    </a:p>
+                  </a:txBody>
+                  <a:tcPr>
+                    <a:solidFill>
+                      <a:srgbClr val="EFF3FA"/>
+                    </a:solidFill>
+                  </a:tcPr>
+                </a:tc>
+                <a:tc>
+                  <a:txBody>
+                    <a:bodyPr/>
+                    <a:lstStyle/>
+                    <a:p>
+                      <a:r>
+                        <a:rPr sz="1000" b="0">
+                          <a:latin typeface="Calibri"/>
+                        </a:rPr>
+                        <a:t>blocked f64 matmul</a:t>
+                      </a:r>
+                    </a:p>
+                  </a:txBody>
+                  <a:tcPr>
+                    <a:solidFill>
+                      <a:srgbClr val="EFF3FA"/>
+                    </a:solidFill>
+                  </a:tcPr>
+                </a:tc>
+                <a:tc>
+                  <a:txBody>
+                    <a:bodyPr/>
+                    <a:lstStyle/>
+                    <a:p>
+                      <a:r>
+                        <a:rPr sz="1000" b="0">
+                          <a:latin typeface="Calibri"/>
+                        </a:rPr>
+                        <a:t>1,081,871,120</a:t>
+                      </a:r>
+                    </a:p>
+                  </a:txBody>
+                  <a:tcPr>
+                    <a:solidFill>
+                      <a:srgbClr val="EFF3FA"/>
+                    </a:solidFill>
+                  </a:tcPr>
+                </a:tc>
+                <a:tc>
+                  <a:txBody>
+                    <a:bodyPr/>
+                    <a:lstStyle/>
+                    <a:p>
+                      <a:r>
+                        <a:rPr sz="1000" b="0">
+                          <a:solidFill>
+                            <a:srgbClr val="187A33"/>
+                          </a:solidFill>
+                          <a:latin typeface="Calibri"/>
+                        </a:rPr>
+                        <a:t>0.997</a:t>
+                      </a:r>
+                    </a:p>
+                  </a:txBody>
+                  <a:tcPr>
+                    <a:solidFill>
+                      <a:srgbClr val="EFF3FA"/>
+                    </a:solidFill>
+                  </a:tcPr>
+                </a:tc>
+              </a:tr>
+              <a:tr h="384048">
+                <a:tc>
+                  <a:txBody>
+                    <a:bodyPr/>
+                    <a:lstStyle/>
+                    <a:p>
+                      <a:r>
+                        <a:rPr sz="1000" b="0">
+                          <a:latin typeface="Calibri"/>
+                        </a:rPr>
+                        <a:t>net</a:t>
+                      </a:r>
+                    </a:p>
+                  </a:txBody>
+                  <a:tcPr>
+                    <a:solidFill>
+                      <a:srgbClr val="FFFFFF"/>
+                    </a:solidFill>
+                  </a:tcPr>
+                </a:tc>
+                <a:tc>
+                  <a:txBody>
+                    <a:bodyPr/>
+                    <a:lstStyle/>
+                    <a:p>
+                      <a:r>
+                        <a:rPr sz="1000" b="0">
+                          <a:latin typeface="Calibri"/>
+                        </a:rPr>
+                        <a:t>HTTP GET 32 MiB + FNV hash</a:t>
+                      </a:r>
+                    </a:p>
+                  </a:txBody>
+                  <a:tcPr>
+                    <a:solidFill>
+                      <a:srgbClr val="FFFFFF"/>
+                    </a:solidFill>
+                  </a:tcPr>
+                </a:tc>
+                <a:tc>
+                  <a:txBody>
+                    <a:bodyPr/>
+                    <a:lstStyle/>
+                    <a:p>
+                      <a:r>
+                        <a:rPr sz="1000" b="0">
+                          <a:latin typeface="Calibri"/>
+                        </a:rPr>
+                        <a:t>430,719,038</a:t>
+                      </a:r>
+                    </a:p>
+                  </a:txBody>
+                  <a:tcPr>
+                    <a:solidFill>
+                      <a:srgbClr val="FFFFFF"/>
+                    </a:solidFill>
+                  </a:tcPr>
+                </a:tc>
+                <a:tc>
+                  <a:txBody>
+                    <a:bodyPr/>
+                    <a:lstStyle/>
+                    <a:p>
+                      <a:r>
+                        <a:rPr sz="1000" b="0">
+                          <a:solidFill>
+                            <a:srgbClr val="B06000"/>
+                          </a:solidFill>
+                          <a:latin typeface="Calibri"/>
+                        </a:rPr>
+                        <a:t>0.798</a:t>
+                      </a:r>
+                    </a:p>
+                  </a:txBody>
+                  <a:tcPr>
+                    <a:solidFill>
+                      <a:srgbClr val="FFFFFF"/>
+                    </a:solidFill>
+                  </a:tcPr>
+                </a:tc>
+              </a:tr>
+              <a:tr h="384048">
+                <a:tc>
+                  <a:txBody>
+                    <a:bodyPr/>
+                    <a:lstStyle/>
+                    <a:p>
+                      <a:r>
+                        <a:rPr sz="1000" b="0">
+                          <a:latin typeface="Calibri"/>
+                        </a:rPr>
+                        <a:t>pacman</a:t>
+                      </a:r>
+                    </a:p>
+                  </a:txBody>
+                  <a:tcPr>
+                    <a:solidFill>
+                      <a:srgbClr val="EFF3FA"/>
+                    </a:solidFill>
+                  </a:tcPr>
+                </a:tc>
+                <a:tc>
+                  <a:txBody>
+                    <a:bodyPr/>
+                    <a:lstStyle/>
+                    <a:p>
+                      <a:r>
+                        <a:rPr sz="1000" b="0">
+                          <a:latin typeface="Calibri"/>
+                        </a:rPr>
+                        <a:t>genetic-AI Pac-Man trainer</a:t>
+                      </a:r>
+                    </a:p>
+                  </a:txBody>
+                  <a:tcPr>
+                    <a:solidFill>
+                      <a:srgbClr val="EFF3FA"/>
+                    </a:solidFill>
+                  </a:tcPr>
+                </a:tc>
+                <a:tc>
+                  <a:txBody>
+                    <a:bodyPr/>
+                    <a:lstStyle/>
+                    <a:p>
+                      <a:r>
+                        <a:rPr sz="1000" b="0">
+                          <a:latin typeface="Calibri"/>
+                        </a:rPr>
+                        <a:t>25,711,718,364</a:t>
+                      </a:r>
+                    </a:p>
+                  </a:txBody>
+                  <a:tcPr>
+                    <a:solidFill>
+                      <a:srgbClr val="EFF3FA"/>
+                    </a:solidFill>
+                  </a:tcPr>
+                </a:tc>
+                <a:tc>
+                  <a:txBody>
+                    <a:bodyPr/>
+                    <a:lstStyle/>
+                    <a:p>
+                      <a:r>
+                        <a:rPr sz="1000" b="0">
+                          <a:solidFill>
+                            <a:srgbClr val="187A33"/>
+                          </a:solidFill>
+                          <a:latin typeface="Calibri"/>
+                        </a:rPr>
+                        <a:t>0.999</a:t>
+                      </a:r>
+                    </a:p>
+                  </a:txBody>
+                  <a:tcPr>
+                    <a:solidFill>
+                      <a:srgbClr val="EFF3FA"/>
+                    </a:solidFill>
+                  </a:tcPr>
+                </a:tc>
+              </a:tr>
+              <a:tr h="384048">
+                <a:tc>
+                  <a:txBody>
+                    <a:bodyPr/>
+                    <a:lstStyle/>
+                    <a:p>
+                      <a:r>
+                        <a:rPr sz="1000" b="0">
+                          <a:latin typeface="Calibri"/>
+                        </a:rPr>
+                        <a:t>sgm</a:t>
+                      </a:r>
+                    </a:p>
+                  </a:txBody>
+                  <a:tcPr>
+                    <a:solidFill>
+                      <a:srgbClr val="FFFFFF"/>
+                    </a:solidFill>
+                  </a:tcPr>
+                </a:tc>
+                <a:tc>
+                  <a:txBody>
+                    <a:bodyPr/>
+                    <a:lstStyle/>
+                    <a:p>
+                      <a:r>
+                        <a:rPr sz="1000" b="0">
+                          <a:latin typeface="Calibri"/>
+                        </a:rPr>
+                        <a:t>SGM stereo, real imagery</a:t>
+                      </a:r>
+                    </a:p>
+                  </a:txBody>
+                  <a:tcPr>
+                    <a:solidFill>
+                      <a:srgbClr val="FFFFFF"/>
+                    </a:solidFill>
+                  </a:tcPr>
+                </a:tc>
+                <a:tc>
+                  <a:txBody>
+                    <a:bodyPr/>
+                    <a:lstStyle/>
+                    <a:p>
+                      <a:r>
+                        <a:rPr sz="1000" b="0">
+                          <a:latin typeface="Calibri"/>
+                        </a:rPr>
+                        <a:t>10,154,191,781</a:t>
+                      </a:r>
+                    </a:p>
+                  </a:txBody>
+                  <a:tcPr>
+                    <a:solidFill>
+                      <a:srgbClr val="FFFFFF"/>
+                    </a:solidFill>
+                  </a:tcPr>
+                </a:tc>
+                <a:tc>
+                  <a:txBody>
+                    <a:bodyPr/>
+                    <a:lstStyle/>
+                    <a:p>
+                      <a:r>
+                        <a:rPr sz="1000" b="0">
+                          <a:solidFill>
+                            <a:srgbClr val="187A33"/>
+                          </a:solidFill>
+                          <a:latin typeface="Calibri"/>
+                        </a:rPr>
+                        <a:t>0.997</a:t>
+                      </a:r>
+                    </a:p>
+                  </a:txBody>
+                  <a:tcPr>
+                    <a:solidFill>
+                      <a:srgbClr val="FFFFFF"/>
+                    </a:solidFill>
+                  </a:tcPr>
+                </a:tc>
+              </a:tr>
+              <a:tr h="384048">
+                <a:tc>
+                  <a:txBody>
+                    <a:bodyPr/>
+                    <a:lstStyle/>
+                    <a:p>
+                      <a:r>
+                        <a:rPr sz="1000" b="0">
+                          <a:latin typeface="Calibri"/>
+                        </a:rPr>
+                        <a:t>sha256</a:t>
+                      </a:r>
+                    </a:p>
+                  </a:txBody>
+                  <a:tcPr>
+                    <a:solidFill>
+                      <a:srgbClr val="EFF3FA"/>
+                    </a:solidFill>
+                  </a:tcPr>
+                </a:tc>
+                <a:tc>
+                  <a:txBody>
+                    <a:bodyPr/>
+                    <a:lstStyle/>
+                    <a:p>
+                      <a:r>
+                        <a:rPr sz="1000" b="0">
+                          <a:latin typeface="Calibri"/>
+                        </a:rPr>
+                        <a:t>SHA-256, 128 MiB streamed</a:t>
+                      </a:r>
+                    </a:p>
+                  </a:txBody>
+                  <a:tcPr>
+                    <a:solidFill>
+                      <a:srgbClr val="EFF3FA"/>
+                    </a:solidFill>
+                  </a:tcPr>
+                </a:tc>
+                <a:tc>
+                  <a:txBody>
+                    <a:bodyPr/>
+                    <a:lstStyle/>
+                    <a:p>
+                      <a:r>
+                        <a:rPr sz="1000" b="0">
+                          <a:latin typeface="Calibri"/>
+                        </a:rPr>
+                        <a:t>8,453,218,121</a:t>
+                      </a:r>
+                    </a:p>
+                  </a:txBody>
+                  <a:tcPr>
+                    <a:solidFill>
+                      <a:srgbClr val="EFF3FA"/>
+                    </a:solidFill>
+                  </a:tcPr>
+                </a:tc>
+                <a:tc>
+                  <a:txBody>
+                    <a:bodyPr/>
+                    <a:lstStyle/>
+                    <a:p>
+                      <a:r>
+                        <a:rPr sz="1000" b="0">
+                          <a:solidFill>
+                            <a:srgbClr val="187A33"/>
+                          </a:solidFill>
+                          <a:latin typeface="Calibri"/>
+                        </a:rPr>
+                        <a:t>0.999</a:t>
+                      </a:r>
+                    </a:p>
+                  </a:txBody>
+                  <a:tcPr>
+                    <a:solidFill>
+                      <a:srgbClr val="EFF3FA"/>
+                    </a:solidFill>
+                  </a:tcPr>
+                </a:tc>
+              </a:tr>
+              <a:tr h="384048">
+                <a:tc>
+                  <a:txBody>
+                    <a:bodyPr/>
+                    <a:lstStyle/>
+                    <a:p>
+                      <a:r>
+                        <a:rPr sz="1000" b="0">
+                          <a:latin typeface="Calibri"/>
+                        </a:rPr>
+                        <a:t>sort</a:t>
+                      </a:r>
+                    </a:p>
+                  </a:txBody>
+                  <a:tcPr>
+                    <a:solidFill>
+                      <a:srgbClr val="FFFFFF"/>
+                    </a:solidFill>
+                  </a:tcPr>
+                </a:tc>
+                <a:tc>
+                  <a:txBody>
+                    <a:bodyPr/>
+                    <a:lstStyle/>
+                    <a:p>
+                      <a:r>
+                        <a:rPr sz="1000" b="0">
+                          <a:latin typeface="Calibri"/>
+                        </a:rPr>
+                        <a:t>qsort, 1M ints</a:t>
+                      </a:r>
+                    </a:p>
+                  </a:txBody>
+                  <a:tcPr>
+                    <a:solidFill>
+                      <a:srgbClr val="FFFFFF"/>
+                    </a:solidFill>
+                  </a:tcPr>
+                </a:tc>
+                <a:tc>
+                  <a:txBody>
+                    <a:bodyPr/>
+                    <a:lstStyle/>
+                    <a:p>
+                      <a:r>
+                        <a:rPr sz="1000" b="0">
+                          <a:latin typeface="Calibri"/>
+                        </a:rPr>
+                        <a:t>1,924,668,159</a:t>
+                      </a:r>
+                    </a:p>
+                  </a:txBody>
+                  <a:tcPr>
+                    <a:solidFill>
+                      <a:srgbClr val="FFFFFF"/>
+                    </a:solidFill>
+                  </a:tcPr>
+                </a:tc>
+                <a:tc>
+                  <a:txBody>
+                    <a:bodyPr/>
+                    <a:lstStyle/>
+                    <a:p>
+                      <a:r>
+                        <a:rPr sz="1000" b="0">
+                          <a:solidFill>
+                            <a:srgbClr val="187A33"/>
+                          </a:solidFill>
+                          <a:latin typeface="Calibri"/>
+                        </a:rPr>
+                        <a:t>0.996</a:t>
+                      </a:r>
+                    </a:p>
+                  </a:txBody>
+                  <a:tcPr>
+                    <a:solidFill>
+                      <a:srgbClr val="FFFFFF"/>
+                    </a:solidFill>
+                  </a:tcPr>
+                </a:tc>
+              </a:tr>
+              <a:tr h="384048">
+                <a:tc>
+                  <a:txBody>
+                    <a:bodyPr/>
+                    <a:lstStyle/>
+                    <a:p>
+                      <a:r>
+                        <a:rPr sz="1000" b="0">
+                          <a:latin typeface="Calibri"/>
+                        </a:rPr>
+                        <a:t>sqlite</a:t>
+                      </a:r>
+                    </a:p>
+                  </a:txBody>
+                  <a:tcPr>
+                    <a:solidFill>
+                      <a:srgbClr val="EFF3FA"/>
+                    </a:solidFill>
+                  </a:tcPr>
+                </a:tc>
+                <a:tc>
+                  <a:txBody>
+                    <a:bodyPr/>
+                    <a:lstStyle/>
+                    <a:p>
+                      <a:r>
+                        <a:rPr sz="1000" b="0">
+                          <a:latin typeface="Calibri"/>
+                        </a:rPr>
+                        <a:t>SQLite, in-memory OLTP mix</a:t>
+                      </a:r>
+                    </a:p>
+                  </a:txBody>
+                  <a:tcPr>
+                    <a:solidFill>
+                      <a:srgbClr val="EFF3FA"/>
+                    </a:solidFill>
+                  </a:tcPr>
+                </a:tc>
+                <a:tc>
+                  <a:txBody>
+                    <a:bodyPr/>
+                    <a:lstStyle/>
+                    <a:p>
+                      <a:r>
+                        <a:rPr sz="1000" b="0">
+                          <a:latin typeface="Calibri"/>
+                        </a:rPr>
+                        <a:t>2,580,290,752</a:t>
+                      </a:r>
+                    </a:p>
+                  </a:txBody>
+                  <a:tcPr>
+                    <a:solidFill>
+                      <a:srgbClr val="EFF3FA"/>
+                    </a:solidFill>
+                  </a:tcPr>
+                </a:tc>
+                <a:tc>
+                  <a:txBody>
+                    <a:bodyPr/>
+                    <a:lstStyle/>
+                    <a:p>
+                      <a:r>
+                        <a:rPr sz="1000" b="0">
+                          <a:solidFill>
+                            <a:srgbClr val="187A33"/>
+                          </a:solidFill>
+                          <a:latin typeface="Calibri"/>
+                        </a:rPr>
+                        <a:t>0.998</a:t>
+                      </a:r>
+                    </a:p>
+                  </a:txBody>
+                  <a:tcPr>
+                    <a:solidFill>
+                      <a:srgbClr val="EFF3FA"/>
+                    </a:solidFill>
+                  </a:tcPr>
+                </a:tc>
+              </a:tr>
+            </a:tbl>
+          </a:graphicData>
+        </a:graphic>
+      </p:graphicFrame>
+      <p:sp>
+        <p:nvSpPr>
+          <p:cNvPr id="10" name="TextBox 9"/>
+          <p:cNvSpPr txBox="1"/>
+          <p:nvPr/>
+        </p:nvSpPr>
+        <p:spPr>
+          <a:xfrm>
+            <a:off x="548640" y="5120640"/>
+            <a:ext cx="11064240" cy="822960"/>
+          </a:xfrm>
+          <a:prstGeom prst="rect">
+            <a:avLst/>
+          </a:prstGeom>
+          <a:noFill/>
+        </p:spPr>
+        <p:txBody>
+          <a:bodyPr wrap="square">
+            <a:spAutoFit/>
+          </a:bodyPr>
+          <a:lstStyle/>
+          <a:p>
+            <a:pPr algn="l"/>
+            <a:r>
+              <a:rPr sz="1150" b="0">
                 <a:solidFill>
                   <a:srgbClr val="202124"/>
                 </a:solidFill>
                 <a:latin typeface="Calibri"/>
               </a:rPr>
-              <a:t>Fit across the population: proxy = 0.81 × silicon, geometric spread ×/÷ 1.26. Under-prediction is systematic and explained: the silicon prefetcher also fetches lines that are never used.</a:t>
+              <a:t>Thirteen of fourteen sit in 0.98–1.06; the residual is silicon-side kernel/IRQ time inside the perf window. The one amber value is itself a measurement: the HTTP client's 0.80 is the ~20% of its instructions the kernel's network stack retires on its behalf — real work a userspace-only emulation cannot see, quantified. Follow-up: compare against user-mode-filtered counts (instructions:u).</a:t>
             </a:r>
           </a:p>
         </p:txBody>
@@ -4957,14 +6382,57 @@
       <p:grpSpPr/>
       <p:sp>
         <p:nvSpPr>
-          <p:cNvPr id="2" name="TextBox 1"/>
+          <p:cNvPr id="2" name="Rectangle 1"/>
+          <p:cNvSpPr/>
+          <p:nvPr/>
+        </p:nvSpPr>
+        <p:spPr>
+          <a:xfrm>
+            <a:off x="0" y="0"/>
+            <a:ext cx="12191695" cy="841248"/>
+          </a:xfrm>
+          <a:prstGeom prst="rect">
+            <a:avLst/>
+          </a:prstGeom>
+          <a:solidFill>
+            <a:srgbClr val="202124"/>
+          </a:solidFill>
+          <a:ln>
+            <a:noFill/>
+          </a:ln>
+        </p:spPr>
+        <p:style>
+          <a:lnRef idx="1">
+            <a:schemeClr val="accent1"/>
+          </a:lnRef>
+          <a:fillRef idx="3">
+            <a:schemeClr val="accent1"/>
+          </a:fillRef>
+          <a:effectRef idx="2">
+            <a:schemeClr val="accent1"/>
+          </a:effectRef>
+          <a:fontRef idx="minor">
+            <a:schemeClr val="lt1"/>
+          </a:fontRef>
+        </p:style>
+        <p:txBody>
+          <a:bodyPr rtlCol="0" anchor="ctr"/>
+          <a:lstStyle/>
+          <a:p>
+            <a:pPr algn="ctr"/>
+          </a:p>
+        </p:txBody>
+      </p:sp>
+      <p:sp>
+        <p:nvSpPr>
+          <p:cNvPr id="3" name="TextBox 2"/>
           <p:cNvSpPr txBox="1"/>
           <p:nvPr/>
         </p:nvSpPr>
         <p:spPr>
           <a:xfrm>
-            <a:off x="548640" y="320040"/>
-            <a:ext cx="11155680" cy="640080"/>
+            <a:off x="548640" y="118872"/>
+            <a:ext cx="10058400" cy="548640"/>
           </a:xfrm>
           <a:prstGeom prst="rect">
             <a:avLst/>
@@ -4979,27 +6447,70 @@
           <a:p>
             <a:pPr algn="l"/>
             <a:r>
-              <a:rPr sz="3000" b="1">
+              <a:rPr sz="2600" b="1">
                 <a:solidFill>
-                  <a:srgbClr val="202124"/>
+                  <a:srgbClr val="FFFFFF"/>
                 </a:solidFill>
                 <a:latin typeface="Calibri"/>
               </a:rPr>
-              <a:t>How the band tightened: each outlier had a mechanism</a:t>
-            </a:r>
-          </a:p>
-        </p:txBody>
-      </p:sp>
-      <p:sp>
-        <p:nvSpPr>
-          <p:cNvPr id="3" name="TextBox 2"/>
+              <a:t>Gate 2 — DRAM-read proxy vs the DDR controller</a:t>
+            </a:r>
+          </a:p>
+        </p:txBody>
+      </p:sp>
+      <p:sp>
+        <p:nvSpPr>
+          <p:cNvPr id="4" name="Rectangle 3"/>
+          <p:cNvSpPr/>
+          <p:nvPr/>
+        </p:nvSpPr>
+        <p:spPr>
+          <a:xfrm>
+            <a:off x="0" y="841248"/>
+            <a:ext cx="12191695" cy="38100"/>
+          </a:xfrm>
+          <a:prstGeom prst="rect">
+            <a:avLst/>
+          </a:prstGeom>
+          <a:solidFill>
+            <a:srgbClr val="1A53A0"/>
+          </a:solidFill>
+          <a:ln>
+            <a:noFill/>
+          </a:ln>
+        </p:spPr>
+        <p:style>
+          <a:lnRef idx="1">
+            <a:schemeClr val="accent1"/>
+          </a:lnRef>
+          <a:fillRef idx="3">
+            <a:schemeClr val="accent1"/>
+          </a:fillRef>
+          <a:effectRef idx="2">
+            <a:schemeClr val="accent1"/>
+          </a:effectRef>
+          <a:fontRef idx="minor">
+            <a:schemeClr val="lt1"/>
+          </a:fontRef>
+        </p:style>
+        <p:txBody>
+          <a:bodyPr rtlCol="0" anchor="ctr"/>
+          <a:lstStyle/>
+          <a:p>
+            <a:pPr algn="ctr"/>
+          </a:p>
+        </p:txBody>
+      </p:sp>
+      <p:sp>
+        <p:nvSpPr>
+          <p:cNvPr id="5" name="TextBox 4"/>
           <p:cNvSpPr txBox="1"/>
           <p:nvPr/>
         </p:nvSpPr>
         <p:spPr>
           <a:xfrm>
-            <a:off x="640080" y="1097280"/>
-            <a:ext cx="10972800" cy="384048"/>
+            <a:off x="548640" y="969264"/>
+            <a:ext cx="11155680" cy="365760"/>
           </a:xfrm>
           <a:prstGeom prst="rect">
             <a:avLst/>
@@ -5014,27 +6525,27 @@
           <a:p>
             <a:pPr algn="l"/>
             <a:r>
-              <a:rPr sz="1250" b="1">
+              <a:rPr sz="1200" b="0">
                 <a:solidFill>
-                  <a:srgbClr val="202124"/>
+                  <a:srgbClr val="5F6368"/>
                 </a:solidFill>
                 <a:latin typeface="Calibri"/>
               </a:rPr>
-              <a:t>v0 (default plugin geometry, l3-refill as truth):  ratios 0.44 – 3.0, geo-spread x/÷ 2.4  — not usable.</a:t>
-            </a:r>
-          </a:p>
-        </p:txBody>
-      </p:sp>
-      <p:sp>
-        <p:nvSpPr>
-          <p:cNvPr id="4" name="TextBox 3"/>
+              <a:t>log–log, one point per application above the noise floor · fit: proxy = 0.81 × silicon, ×/÷ 1.26</a:t>
+            </a:r>
+          </a:p>
+        </p:txBody>
+      </p:sp>
+      <p:sp>
+        <p:nvSpPr>
+          <p:cNvPr id="6" name="TextBox 5"/>
           <p:cNvSpPr txBox="1"/>
           <p:nvPr/>
         </p:nvSpPr>
         <p:spPr>
           <a:xfrm>
-            <a:off x="640080" y="1499616"/>
-            <a:ext cx="10972800" cy="384048"/>
+            <a:off x="548640" y="6528816"/>
+            <a:ext cx="9601200" cy="274320"/>
           </a:xfrm>
           <a:prstGeom prst="rect">
             <a:avLst/>
@@ -5049,27 +6560,27 @@
           <a:p>
             <a:pPr algn="l"/>
             <a:r>
-              <a:rPr sz="1250" b="0">
+              <a:rPr sz="950" b="0">
                 <a:solidFill>
-                  <a:srgbClr val="202124"/>
+                  <a:srgbClr val="5F6368"/>
                 </a:solidFill>
                 <a:latin typeface="Calibri"/>
               </a:rPr>
-              <a:t/>
-            </a:r>
-          </a:p>
-        </p:txBody>
-      </p:sp>
-      <p:sp>
-        <p:nvSpPr>
-          <p:cNvPr id="5" name="TextBox 4"/>
+              <a:t>wattson xcheck rev 2 · QEMU counts DERIVED, PMU/DDR counts MEASURED · 2026-08-30</a:t>
+            </a:r>
+          </a:p>
+        </p:txBody>
+      </p:sp>
+      <p:sp>
+        <p:nvSpPr>
+          <p:cNvPr id="7" name="TextBox 6"/>
           <p:cNvSpPr txBox="1"/>
           <p:nvPr/>
         </p:nvSpPr>
         <p:spPr>
           <a:xfrm>
-            <a:off x="640080" y="1901952"/>
-            <a:ext cx="10972800" cy="384048"/>
+            <a:off x="11247120" y="6528816"/>
+            <a:ext cx="457200" cy="274320"/>
           </a:xfrm>
           <a:prstGeom prst="rect">
             <a:avLst/>
@@ -5082,29 +6593,53 @@
           </a:bodyPr>
           <a:lstStyle/>
           <a:p>
-            <a:pPr algn="l"/>
-            <a:r>
-              <a:rPr sz="1250" b="0">
+            <a:pPr algn="r"/>
+            <a:r>
+              <a:rPr sz="950" b="0">
                 <a:solidFill>
-                  <a:srgbClr val="202124"/>
+                  <a:srgbClr val="5F6368"/>
                 </a:solidFill>
                 <a:latin typeface="Calibri"/>
               </a:rPr>
-              <a:t>Fix 1 — model the real hierarchy (sysfs-read three-level).  mm's false 'cache-resident' verdict corrected.</a:t>
-            </a:r>
-          </a:p>
-        </p:txBody>
-      </p:sp>
-      <p:sp>
-        <p:nvSpPr>
-          <p:cNvPr id="6" name="TextBox 5"/>
+              <a:t>5</a:t>
+            </a:r>
+          </a:p>
+        </p:txBody>
+      </p:sp>
+      <p:pic>
+        <p:nvPicPr>
+          <p:cNvPr id="8" name="Picture 7" descr="scatter.png"/>
+          <p:cNvPicPr>
+            <a:picLocks noChangeAspect="1"/>
+          </p:cNvPicPr>
+          <p:nvPr/>
+        </p:nvPicPr>
+        <p:blipFill>
+          <a:blip r:embed="rId2"/>
+          <a:stretch>
+            <a:fillRect/>
+          </a:stretch>
+        </p:blipFill>
+        <p:spPr>
+          <a:xfrm>
+            <a:off x="3063240" y="1234440"/>
+            <a:ext cx="5467574" cy="4892040"/>
+          </a:xfrm>
+          <a:prstGeom prst="rect">
+            <a:avLst/>
+          </a:prstGeom>
+        </p:spPr>
+      </p:pic>
+      <p:sp>
+        <p:nvSpPr>
+          <p:cNvPr id="9" name="TextBox 8"/>
           <p:cNvSpPr txBox="1"/>
           <p:nvPr/>
         </p:nvSpPr>
         <p:spPr>
           <a:xfrm>
-            <a:off x="640080" y="2304288"/>
-            <a:ext cx="10972800" cy="384048"/>
+            <a:off x="548640" y="6172200"/>
+            <a:ext cx="11064240" cy="457200"/>
           </a:xfrm>
           <a:prstGeom prst="rect">
             <a:avLst/>
@@ -5119,363 +6654,13 @@
           <a:p>
             <a:pPr algn="l"/>
             <a:r>
-              <a:rPr sz="1250" b="0">
+              <a:rPr sz="1150" b="1">
                 <a:solidFill>
                   <a:srgbClr val="202124"/>
                 </a:solidFill>
                 <a:latin typeface="Calibri"/>
               </a:rPr>
-              <a:t>Fix 2 — model A55 write-streaming (streak detector, no-allocate).  mem: 1.97 -&gt; 0.98, exactly the predicted 2x.</a:t>
-            </a:r>
-          </a:p>
-        </p:txBody>
-      </p:sp>
-      <p:sp>
-        <p:nvSpPr>
-          <p:cNvPr id="7" name="TextBox 6"/>
-          <p:cNvSpPr txBox="1"/>
-          <p:nvPr/>
-        </p:nvSpPr>
-        <p:spPr>
-          <a:xfrm>
-            <a:off x="640080" y="2706624"/>
-            <a:ext cx="10972800" cy="384048"/>
-          </a:xfrm>
-          <a:prstGeom prst="rect">
-            <a:avLst/>
-          </a:prstGeom>
-          <a:noFill/>
-        </p:spPr>
-        <p:txBody>
-          <a:bodyPr wrap="square">
-            <a:spAutoFit/>
-          </a:bodyPr>
-          <a:lstStyle/>
-          <a:p>
-            <a:pPr algn="l"/>
-            <a:r>
-              <a:rPr sz="1250" b="0">
-                <a:solidFill>
-                  <a:srgbClr val="202124"/>
-                </a:solidFill>
-                <a:latin typeface="Calibri"/>
-              </a:rPr>
-              <a:t>Fix 3 — change the ground truth. sha256 read 15x 'wrong' against l3d_cache_refill — but the DDR controller</a:t>
-            </a:r>
-          </a:p>
-        </p:txBody>
-      </p:sp>
-      <p:sp>
-        <p:nvSpPr>
-          <p:cNvPr id="8" name="TextBox 7"/>
-          <p:cNvSpPr txBox="1"/>
-          <p:nvPr/>
-        </p:nvSpPr>
-        <p:spPr>
-          <a:xfrm>
-            <a:off x="640080" y="3108960"/>
-            <a:ext cx="10972800" cy="384048"/>
-          </a:xfrm>
-          <a:prstGeom prst="rect">
-            <a:avLst/>
-          </a:prstGeom>
-          <a:noFill/>
-        </p:spPr>
-        <p:txBody>
-          <a:bodyPr wrap="square">
-            <a:spAutoFit/>
-          </a:bodyPr>
-          <a:lstStyle/>
-          <a:p>
-            <a:pPr algn="l"/>
-            <a:r>
-              <a:rPr sz="1250" b="0">
-                <a:solidFill>
-                  <a:srgbClr val="202124"/>
-                </a:solidFill>
-                <a:latin typeface="Calibri"/>
-              </a:rPr>
-              <a:t>         showed the QEMU number was nearly right: the PMU refill event counts only DEMAND misses, and the</a:t>
-            </a:r>
-          </a:p>
-        </p:txBody>
-      </p:sp>
-      <p:sp>
-        <p:nvSpPr>
-          <p:cNvPr id="9" name="TextBox 8"/>
-          <p:cNvSpPr txBox="1"/>
-          <p:nvPr/>
-        </p:nvSpPr>
-        <p:spPr>
-          <a:xfrm>
-            <a:off x="640080" y="3511296"/>
-            <a:ext cx="10972800" cy="384048"/>
-          </a:xfrm>
-          <a:prstGeom prst="rect">
-            <a:avLst/>
-          </a:prstGeom>
-          <a:noFill/>
-        </p:spPr>
-        <p:txBody>
-          <a:bodyPr wrap="square">
-            <a:spAutoFit/>
-          </a:bodyPr>
-          <a:lstStyle/>
-          <a:p>
-            <a:pPr algn="l"/>
-            <a:r>
-              <a:rPr sz="1250" b="0">
-                <a:solidFill>
-                  <a:srgbClr val="202124"/>
-                </a:solidFill>
-                <a:latin typeface="Calibri"/>
-              </a:rPr>
-              <a:t>         prefetcher was serving the stream. The instrument was indicting the wrong instrument.</a:t>
-            </a:r>
-          </a:p>
-        </p:txBody>
-      </p:sp>
-      <p:sp>
-        <p:nvSpPr>
-          <p:cNvPr id="10" name="TextBox 9"/>
-          <p:cNvSpPr txBox="1"/>
-          <p:nvPr/>
-        </p:nvSpPr>
-        <p:spPr>
-          <a:xfrm>
-            <a:off x="640080" y="3913632"/>
-            <a:ext cx="10972800" cy="384048"/>
-          </a:xfrm>
-          <a:prstGeom prst="rect">
-            <a:avLst/>
-          </a:prstGeom>
-          <a:noFill/>
-        </p:spPr>
-        <p:txBody>
-          <a:bodyPr wrap="square">
-            <a:spAutoFit/>
-          </a:bodyPr>
-          <a:lstStyle/>
-          <a:p>
-            <a:pPr algn="l"/>
-            <a:r>
-              <a:rPr sz="1250" b="0">
-                <a:solidFill>
-                  <a:srgbClr val="202124"/>
-                </a:solidFill>
-                <a:latin typeface="Calibri"/>
-              </a:rPr>
-              <a:t/>
-            </a:r>
-          </a:p>
-        </p:txBody>
-      </p:sp>
-      <p:sp>
-        <p:nvSpPr>
-          <p:cNvPr id="11" name="TextBox 10"/>
-          <p:cNvSpPr txBox="1"/>
-          <p:nvPr/>
-        </p:nvSpPr>
-        <p:spPr>
-          <a:xfrm>
-            <a:off x="640080" y="4315968"/>
-            <a:ext cx="10972800" cy="384048"/>
-          </a:xfrm>
-          <a:prstGeom prst="rect">
-            <a:avLst/>
-          </a:prstGeom>
-          <a:noFill/>
-        </p:spPr>
-        <p:txBody>
-          <a:bodyPr wrap="square">
-            <a:spAutoFit/>
-          </a:bodyPr>
-          <a:lstStyle/>
-          <a:p>
-            <a:pPr algn="l"/>
-            <a:r>
-              <a:rPr sz="1250" b="1">
-                <a:solidFill>
-                  <a:srgbClr val="202124"/>
-                </a:solidFill>
-                <a:latin typeface="Calibri"/>
-              </a:rPr>
-              <a:t>v1 (this deck): proxy = 0.81 x silicon, x/÷ 1.26 above the noise floor. chase 0.97 · mem 0.98 ·</a:t>
-            </a:r>
-          </a:p>
-        </p:txBody>
-      </p:sp>
-      <p:sp>
-        <p:nvSpPr>
-          <p:cNvPr id="12" name="TextBox 11"/>
-          <p:cNvSpPr txBox="1"/>
-          <p:nvPr/>
-        </p:nvSpPr>
-        <p:spPr>
-          <a:xfrm>
-            <a:off x="640080" y="4718304"/>
-            <a:ext cx="10972800" cy="384048"/>
-          </a:xfrm>
-          <a:prstGeom prst="rect">
-            <a:avLst/>
-          </a:prstGeom>
-          <a:noFill/>
-        </p:spPr>
-        <p:txBody>
-          <a:bodyPr wrap="square">
-            <a:spAutoFit/>
-          </a:bodyPr>
-          <a:lstStyle/>
-          <a:p>
-            <a:pPr algn="l"/>
-            <a:r>
-              <a:rPr sz="1250" b="0">
-                <a:solidFill>
-                  <a:srgbClr val="202124"/>
-                </a:solidFill>
-                <a:latin typeface="Calibri"/>
-              </a:rPr>
-              <a:t>cjson 0.96 · sort 0.96 · sgm 0.88 · sha256 0.77 · mm 0.65 · bzip2 0.49 (prefetch-overfetch heavy) — and five</a:t>
-            </a:r>
-          </a:p>
-        </p:txBody>
-      </p:sp>
-      <p:sp>
-        <p:nvSpPr>
-          <p:cNvPr id="13" name="TextBox 12"/>
-          <p:cNvSpPr txBox="1"/>
-          <p:nvPr/>
-        </p:nvSpPr>
-        <p:spPr>
-          <a:xfrm>
-            <a:off x="640080" y="5120640"/>
-            <a:ext cx="10972800" cy="384048"/>
-          </a:xfrm>
-          <a:prstGeom prst="rect">
-            <a:avLst/>
-          </a:prstGeom>
-          <a:noFill/>
-        </p:spPr>
-        <p:txBody>
-          <a:bodyPr wrap="square">
-            <a:spAutoFit/>
-          </a:bodyPr>
-          <a:lstStyle/>
-          <a:p>
-            <a:pPr algn="l"/>
-            <a:r>
-              <a:rPr sz="1250" b="0">
-                <a:solidFill>
-                  <a:srgbClr val="202124"/>
-                </a:solidFill>
-                <a:latin typeface="Calibri"/>
-              </a:rPr>
-              <a:t>DRAM-quiet apps correctly classified quiet (the DDR counter itself bottoms out at ~0.4M lines/window).</a:t>
-            </a:r>
-          </a:p>
-        </p:txBody>
-      </p:sp>
-      <p:sp>
-        <p:nvSpPr>
-          <p:cNvPr id="14" name="TextBox 13"/>
-          <p:cNvSpPr txBox="1"/>
-          <p:nvPr/>
-        </p:nvSpPr>
-        <p:spPr>
-          <a:xfrm>
-            <a:off x="640080" y="5522976"/>
-            <a:ext cx="10972800" cy="384048"/>
-          </a:xfrm>
-          <a:prstGeom prst="rect">
-            <a:avLst/>
-          </a:prstGeom>
-          <a:noFill/>
-        </p:spPr>
-        <p:txBody>
-          <a:bodyPr wrap="square">
-            <a:spAutoFit/>
-          </a:bodyPr>
-          <a:lstStyle/>
-          <a:p>
-            <a:pPr algn="l"/>
-            <a:r>
-              <a:rPr sz="1250" b="0">
-                <a:solidFill>
-                  <a:srgbClr val="202124"/>
-                </a:solidFill>
-                <a:latin typeface="Calibri"/>
-              </a:rPr>
-              <a:t/>
-            </a:r>
-          </a:p>
-        </p:txBody>
-      </p:sp>
-      <p:sp>
-        <p:nvSpPr>
-          <p:cNvPr id="15" name="TextBox 14"/>
-          <p:cNvSpPr txBox="1"/>
-          <p:nvPr/>
-        </p:nvSpPr>
-        <p:spPr>
-          <a:xfrm>
-            <a:off x="640080" y="5925312"/>
-            <a:ext cx="10972800" cy="384048"/>
-          </a:xfrm>
-          <a:prstGeom prst="rect">
-            <a:avLst/>
-          </a:prstGeom>
-          <a:noFill/>
-        </p:spPr>
-        <p:txBody>
-          <a:bodyPr wrap="square">
-            <a:spAutoFit/>
-          </a:bodyPr>
-          <a:lstStyle/>
-          <a:p>
-            <a:pPr algn="l"/>
-            <a:r>
-              <a:rPr sz="1250" b="0">
-                <a:solidFill>
-                  <a:srgbClr val="202124"/>
-                </a:solidFill>
-                <a:latin typeface="Calibri"/>
-              </a:rPr>
-              <a:t>Remaining structure is one class: patterns the prefetcher over-fetches on. A prefetch model (or a fitted</a:t>
-            </a:r>
-          </a:p>
-        </p:txBody>
-      </p:sp>
-      <p:sp>
-        <p:nvSpPr>
-          <p:cNvPr id="16" name="TextBox 15"/>
-          <p:cNvSpPr txBox="1"/>
-          <p:nvPr/>
-        </p:nvSpPr>
-        <p:spPr>
-          <a:xfrm>
-            <a:off x="640080" y="6327648"/>
-            <a:ext cx="10972800" cy="384048"/>
-          </a:xfrm>
-          <a:prstGeom prst="rect">
-            <a:avLst/>
-          </a:prstGeom>
-          <a:noFill/>
-        </p:spPr>
-        <p:txBody>
-          <a:bodyPr wrap="square">
-            <a:spAutoFit/>
-          </a:bodyPr>
-          <a:lstStyle/>
-          <a:p>
-            <a:pPr algn="l"/>
-            <a:r>
-              <a:rPr sz="1250" b="0">
-                <a:solidFill>
-                  <a:srgbClr val="202124"/>
-                </a:solidFill>
-                <a:latin typeface="Calibri"/>
-              </a:rPr>
-              <a:t>per-class factor) is the identified next step — not a mystery.</a:t>
+              <a:t>Under-prediction is systematic and single-signed: the silicon prefetcher also fetches lines that are never consumed. chase 0.97 · mem 0.98 · cjson 0.96 · sort 0.96 · sgm 0.88 · sha256 0.77 · mm 0.65 · bzip2 0.49.</a:t>
             </a:r>
           </a:p>
         </p:txBody>
@@ -5500,14 +6685,57 @@
       <p:grpSpPr/>
       <p:sp>
         <p:nvSpPr>
-          <p:cNvPr id="2" name="TextBox 1"/>
+          <p:cNvPr id="2" name="Rectangle 1"/>
+          <p:cNvSpPr/>
+          <p:nvPr/>
+        </p:nvSpPr>
+        <p:spPr>
+          <a:xfrm>
+            <a:off x="0" y="0"/>
+            <a:ext cx="12191695" cy="841248"/>
+          </a:xfrm>
+          <a:prstGeom prst="rect">
+            <a:avLst/>
+          </a:prstGeom>
+          <a:solidFill>
+            <a:srgbClr val="202124"/>
+          </a:solidFill>
+          <a:ln>
+            <a:noFill/>
+          </a:ln>
+        </p:spPr>
+        <p:style>
+          <a:lnRef idx="1">
+            <a:schemeClr val="accent1"/>
+          </a:lnRef>
+          <a:fillRef idx="3">
+            <a:schemeClr val="accent1"/>
+          </a:fillRef>
+          <a:effectRef idx="2">
+            <a:schemeClr val="accent1"/>
+          </a:effectRef>
+          <a:fontRef idx="minor">
+            <a:schemeClr val="lt1"/>
+          </a:fontRef>
+        </p:style>
+        <p:txBody>
+          <a:bodyPr rtlCol="0" anchor="ctr"/>
+          <a:lstStyle/>
+          <a:p>
+            <a:pPr algn="ctr"/>
+          </a:p>
+        </p:txBody>
+      </p:sp>
+      <p:sp>
+        <p:nvSpPr>
+          <p:cNvPr id="3" name="TextBox 2"/>
           <p:cNvSpPr txBox="1"/>
           <p:nvPr/>
         </p:nvSpPr>
         <p:spPr>
           <a:xfrm>
-            <a:off x="548640" y="320040"/>
-            <a:ext cx="11155680" cy="640080"/>
+            <a:off x="548640" y="118872"/>
+            <a:ext cx="10058400" cy="548640"/>
           </a:xfrm>
           <a:prstGeom prst="rect">
             <a:avLst/>
@@ -5522,84 +6750,57 @@
           <a:p>
             <a:pPr algn="l"/>
             <a:r>
-              <a:rPr sz="3000" b="1">
+              <a:rPr sz="2600" b="1">
                 <a:solidFill>
-                  <a:srgbClr val="202124"/>
+                  <a:srgbClr val="FFFFFF"/>
                 </a:solidFill>
                 <a:latin typeface="Calibri"/>
               </a:rPr>
-              <a:t>What a power team may trust today</a:t>
-            </a:r>
-          </a:p>
-        </p:txBody>
-      </p:sp>
-      <p:sp>
-        <p:nvSpPr>
-          <p:cNvPr id="3" name="TextBox 2"/>
-          <p:cNvSpPr txBox="1"/>
+              <a:t>Every outlier resolved to a mechanism, not a fudge</a:t>
+            </a:r>
+          </a:p>
+        </p:txBody>
+      </p:sp>
+      <p:sp>
+        <p:nvSpPr>
+          <p:cNvPr id="4" name="Rectangle 3"/>
+          <p:cNvSpPr/>
           <p:nvPr/>
         </p:nvSpPr>
         <p:spPr>
           <a:xfrm>
-            <a:off x="640080" y="1188720"/>
-            <a:ext cx="10972800" cy="457200"/>
+            <a:off x="0" y="841248"/>
+            <a:ext cx="12191695" cy="38100"/>
           </a:xfrm>
           <a:prstGeom prst="rect">
             <a:avLst/>
           </a:prstGeom>
-          <a:noFill/>
+          <a:solidFill>
+            <a:srgbClr val="1A53A0"/>
+          </a:solidFill>
+          <a:ln>
+            <a:noFill/>
+          </a:ln>
         </p:spPr>
-        <p:txBody>
-          <a:bodyPr wrap="square">
-            <a:spAutoFit/>
-          </a:bodyPr>
-          <a:lstStyle/>
-          <a:p>
-            <a:pPr algn="l"/>
-            <a:r>
-              <a:rPr sz="1400" b="1">
-                <a:solidFill>
-                  <a:srgbClr val="202124"/>
-                </a:solidFill>
-                <a:latin typeface="Calibri"/>
-              </a:rPr>
-              <a:t>TRUST NOW — instruction activity per core: QEMU = silicon within ±4% on every class of application tested.</a:t>
-            </a:r>
-          </a:p>
-        </p:txBody>
-      </p:sp>
-      <p:sp>
-        <p:nvSpPr>
-          <p:cNvPr id="4" name="TextBox 3"/>
-          <p:cNvSpPr txBox="1"/>
-          <p:nvPr/>
-        </p:nvSpPr>
-        <p:spPr>
-          <a:xfrm>
-            <a:off x="640080" y="1691640"/>
-            <a:ext cx="10972800" cy="457200"/>
-          </a:xfrm>
-          <a:prstGeom prst="rect">
-            <a:avLst/>
-          </a:prstGeom>
-          <a:noFill/>
-        </p:spPr>
-        <p:txBody>
-          <a:bodyPr wrap="square">
-            <a:spAutoFit/>
-          </a:bodyPr>
-          <a:lstStyle/>
-          <a:p>
-            <a:pPr algn="l"/>
-            <a:r>
-              <a:rPr sz="1400" b="1">
-                <a:solidFill>
-                  <a:srgbClr val="202124"/>
-                </a:solidFill>
-                <a:latin typeface="Calibri"/>
-              </a:rPr>
-              <a:t>TRUST WITH THE STATED FACTOR — DRAM read traffic: multiply the proxy by ~1.23, carry x/÷1.26;</a:t>
-            </a:r>
+        <p:style>
+          <a:lnRef idx="1">
+            <a:schemeClr val="accent1"/>
+          </a:lnRef>
+          <a:fillRef idx="3">
+            <a:schemeClr val="accent1"/>
+          </a:fillRef>
+          <a:effectRef idx="2">
+            <a:schemeClr val="accent1"/>
+          </a:effectRef>
+          <a:fontRef idx="minor">
+            <a:schemeClr val="lt1"/>
+          </a:fontRef>
+        </p:style>
+        <p:txBody>
+          <a:bodyPr rtlCol="0" anchor="ctr"/>
+          <a:lstStyle/>
+          <a:p>
+            <a:pPr algn="ctr"/>
           </a:p>
         </p:txBody>
       </p:sp>
@@ -5611,252 +6812,7 @@
         </p:nvSpPr>
         <p:spPr>
           <a:xfrm>
-            <a:off x="640080" y="2194560"/>
-            <a:ext cx="10972800" cy="457200"/>
-          </a:xfrm>
-          <a:prstGeom prst="rect">
-            <a:avLst/>
-          </a:prstGeom>
-          <a:noFill/>
-        </p:spPr>
-        <p:txBody>
-          <a:bodyPr wrap="square">
-            <a:spAutoFit/>
-          </a:bodyPr>
-          <a:lstStyle/>
-          <a:p>
-            <a:pPr algn="l"/>
-            <a:r>
-              <a:rPr sz="1400" b="0">
-                <a:solidFill>
-                  <a:srgbClr val="202124"/>
-                </a:solidFill>
-                <a:latin typeface="Calibri"/>
-              </a:rPr>
-              <a:t>     or use per-class factors (streaming/latency-bound apps need almost none).</a:t>
-            </a:r>
-          </a:p>
-        </p:txBody>
-      </p:sp>
-      <p:sp>
-        <p:nvSpPr>
-          <p:cNvPr id="6" name="TextBox 5"/>
-          <p:cNvSpPr txBox="1"/>
-          <p:nvPr/>
-        </p:nvSpPr>
-        <p:spPr>
-          <a:xfrm>
-            <a:off x="640080" y="2697480"/>
-            <a:ext cx="10972800" cy="457200"/>
-          </a:xfrm>
-          <a:prstGeom prst="rect">
-            <a:avLst/>
-          </a:prstGeom>
-          <a:noFill/>
-        </p:spPr>
-        <p:txBody>
-          <a:bodyPr wrap="square">
-            <a:spAutoFit/>
-          </a:bodyPr>
-          <a:lstStyle/>
-          <a:p>
-            <a:pPr algn="l"/>
-            <a:r>
-              <a:rPr sz="1400" b="1">
-                <a:solidFill>
-                  <a:srgbClr val="202124"/>
-                </a:solidFill>
-                <a:latin typeface="Calibri"/>
-              </a:rPr>
-              <a:t>NOT YET — DRAM writes outside the streaming class (needs a writeback model); network/DMA traffic</a:t>
-            </a:r>
-          </a:p>
-        </p:txBody>
-      </p:sp>
-      <p:sp>
-        <p:nvSpPr>
-          <p:cNvPr id="7" name="TextBox 6"/>
-          <p:cNvSpPr txBox="1"/>
-          <p:nvPr/>
-        </p:nvSpPr>
-        <p:spPr>
-          <a:xfrm>
-            <a:off x="640080" y="3200400"/>
-            <a:ext cx="10972800" cy="457200"/>
-          </a:xfrm>
-          <a:prstGeom prst="rect">
-            <a:avLst/>
-          </a:prstGeom>
-          <a:noFill/>
-        </p:spPr>
-        <p:txBody>
-          <a:bodyPr wrap="square">
-            <a:spAutoFit/>
-          </a:bodyPr>
-          <a:lstStyle/>
-          <a:p>
-            <a:pPr algn="l"/>
-            <a:r>
-              <a:rPr sz="1400" b="0">
-                <a:solidFill>
-                  <a:srgbClr val="202124"/>
-                </a:solidFill>
-                <a:latin typeface="Calibri"/>
-              </a:rPr>
-              <a:t>     (invisible to linux-user; system-mode harness exists); multi-core contention (first 4-thread run:</a:t>
-            </a:r>
-          </a:p>
-        </p:txBody>
-      </p:sp>
-      <p:sp>
-        <p:nvSpPr>
-          <p:cNvPr id="8" name="TextBox 7"/>
-          <p:cNvSpPr txBox="1"/>
-          <p:nvPr/>
-        </p:nvSpPr>
-        <p:spPr>
-          <a:xfrm>
-            <a:off x="640080" y="3703320"/>
-            <a:ext cx="10972800" cy="457200"/>
-          </a:xfrm>
-          <a:prstGeom prst="rect">
-            <a:avLst/>
-          </a:prstGeom>
-          <a:noFill/>
-        </p:spPr>
-        <p:txBody>
-          <a:bodyPr wrap="square">
-            <a:spAutoFit/>
-          </a:bodyPr>
-          <a:lstStyle/>
-          <a:p>
-            <a:pPr algn="l"/>
-            <a:r>
-              <a:rPr sz="1400" b="0">
-                <a:solidFill>
-                  <a:srgbClr val="202124"/>
-                </a:solidFill>
-                <a:latin typeface="Calibri"/>
-              </a:rPr>
-              <a:t>     totals within 2%, single point); duty cycle (system-mode P1 work).</a:t>
-            </a:r>
-          </a:p>
-        </p:txBody>
-      </p:sp>
-      <p:sp>
-        <p:nvSpPr>
-          <p:cNvPr id="9" name="TextBox 8"/>
-          <p:cNvSpPr txBox="1"/>
-          <p:nvPr/>
-        </p:nvSpPr>
-        <p:spPr>
-          <a:xfrm>
-            <a:off x="640080" y="4206240"/>
-            <a:ext cx="10972800" cy="457200"/>
-          </a:xfrm>
-          <a:prstGeom prst="rect">
-            <a:avLst/>
-          </a:prstGeom>
-          <a:noFill/>
-        </p:spPr>
-        <p:txBody>
-          <a:bodyPr wrap="square">
-            <a:spAutoFit/>
-          </a:bodyPr>
-          <a:lstStyle/>
-          <a:p>
-            <a:pPr algn="l"/>
-            <a:r>
-              <a:rPr sz="1400" b="0">
-                <a:solidFill>
-                  <a:srgbClr val="202124"/>
-                </a:solidFill>
-                <a:latin typeface="Calibri"/>
-              </a:rPr>
-              <a:t/>
-            </a:r>
-          </a:p>
-        </p:txBody>
-      </p:sp>
-      <p:sp>
-        <p:nvSpPr>
-          <p:cNvPr id="10" name="TextBox 9"/>
-          <p:cNvSpPr txBox="1"/>
-          <p:nvPr/>
-        </p:nvSpPr>
-        <p:spPr>
-          <a:xfrm>
-            <a:off x="640080" y="4709160"/>
-            <a:ext cx="10972800" cy="457200"/>
-          </a:xfrm>
-          <a:prstGeom prst="rect">
-            <a:avLst/>
-          </a:prstGeom>
-          <a:noFill/>
-        </p:spPr>
-        <p:txBody>
-          <a:bodyPr wrap="square">
-            <a:spAutoFit/>
-          </a:bodyPr>
-          <a:lstStyle/>
-          <a:p>
-            <a:pPr algn="l"/>
-            <a:r>
-              <a:rPr sz="1400" b="0">
-                <a:solidFill>
-                  <a:srgbClr val="202124"/>
-                </a:solidFill>
-                <a:latin typeface="Calibri"/>
-              </a:rPr>
-              <a:t>And the standing rule: these are ACTIVITY correlations. Energy-per-event belongs to the power team;</a:t>
-            </a:r>
-          </a:p>
-        </p:txBody>
-      </p:sp>
-      <p:sp>
-        <p:nvSpPr>
-          <p:cNvPr id="11" name="TextBox 10"/>
-          <p:cNvSpPr txBox="1"/>
-          <p:nvPr/>
-        </p:nvSpPr>
-        <p:spPr>
-          <a:xfrm>
-            <a:off x="640080" y="5212080"/>
-            <a:ext cx="10972800" cy="457200"/>
-          </a:xfrm>
-          <a:prstGeom prst="rect">
-            <a:avLst/>
-          </a:prstGeom>
-          <a:noFill/>
-        </p:spPr>
-        <p:txBody>
-          <a:bodyPr wrap="square">
-            <a:spAutoFit/>
-          </a:bodyPr>
-          <a:lstStyle/>
-          <a:p>
-            <a:pPr algn="l"/>
-            <a:r>
-              <a:rPr sz="1400" b="0">
-                <a:solidFill>
-                  <a:srgbClr val="202124"/>
-                </a:solidFill>
-                <a:latin typeface="Calibri"/>
-              </a:rPr>
-              <a:t>wattson never emits watts.</a:t>
-            </a:r>
-          </a:p>
-        </p:txBody>
-      </p:sp>
-      <p:sp>
-        <p:nvSpPr>
-          <p:cNvPr id="12" name="TextBox 11"/>
-          <p:cNvSpPr txBox="1"/>
-          <p:nvPr/>
-        </p:nvSpPr>
-        <p:spPr>
-          <a:xfrm>
-            <a:off x="548640" y="6035040"/>
+            <a:off x="548640" y="969264"/>
             <a:ext cx="11155680" cy="365760"/>
           </a:xfrm>
           <a:prstGeom prst="rect">
@@ -5872,13 +6828,1407 @@
           <a:p>
             <a:pPr algn="l"/>
             <a:r>
-              <a:rPr sz="1100" b="0">
+              <a:rPr sz="1200" b="0">
                 <a:solidFill>
                   <a:srgbClr val="5F6368"/>
                 </a:solidFill>
                 <a:latin typeface="Calibri"/>
               </a:rPr>
-              <a:t>Reproduce: wattson/xcheck — suite.txt, run-qemu.sh, run-perf.sh, run-ddr.sh, compare.py; vectors in out/.</a:t>
+              <a:t>The band tightened from ×/÷2.4 to ×/÷1.26 in three fixes; each was falsifiable and predicted its own after-number.</a:t>
+            </a:r>
+          </a:p>
+        </p:txBody>
+      </p:sp>
+      <p:sp>
+        <p:nvSpPr>
+          <p:cNvPr id="6" name="TextBox 5"/>
+          <p:cNvSpPr txBox="1"/>
+          <p:nvPr/>
+        </p:nvSpPr>
+        <p:spPr>
+          <a:xfrm>
+            <a:off x="548640" y="6528816"/>
+            <a:ext cx="9601200" cy="274320"/>
+          </a:xfrm>
+          <a:prstGeom prst="rect">
+            <a:avLst/>
+          </a:prstGeom>
+          <a:noFill/>
+        </p:spPr>
+        <p:txBody>
+          <a:bodyPr wrap="square">
+            <a:spAutoFit/>
+          </a:bodyPr>
+          <a:lstStyle/>
+          <a:p>
+            <a:pPr algn="l"/>
+            <a:r>
+              <a:rPr sz="950" b="0">
+                <a:solidFill>
+                  <a:srgbClr val="5F6368"/>
+                </a:solidFill>
+                <a:latin typeface="Calibri"/>
+              </a:rPr>
+              <a:t>wattson xcheck rev 2 · QEMU counts DERIVED, PMU/DDR counts MEASURED · 2026-08-30</a:t>
+            </a:r>
+          </a:p>
+        </p:txBody>
+      </p:sp>
+      <p:sp>
+        <p:nvSpPr>
+          <p:cNvPr id="7" name="TextBox 6"/>
+          <p:cNvSpPr txBox="1"/>
+          <p:nvPr/>
+        </p:nvSpPr>
+        <p:spPr>
+          <a:xfrm>
+            <a:off x="11247120" y="6528816"/>
+            <a:ext cx="457200" cy="274320"/>
+          </a:xfrm>
+          <a:prstGeom prst="rect">
+            <a:avLst/>
+          </a:prstGeom>
+          <a:noFill/>
+        </p:spPr>
+        <p:txBody>
+          <a:bodyPr wrap="square">
+            <a:spAutoFit/>
+          </a:bodyPr>
+          <a:lstStyle/>
+          <a:p>
+            <a:pPr algn="r"/>
+            <a:r>
+              <a:rPr sz="950" b="0">
+                <a:solidFill>
+                  <a:srgbClr val="5F6368"/>
+                </a:solidFill>
+                <a:latin typeface="Calibri"/>
+              </a:rPr>
+              <a:t>6</a:t>
+            </a:r>
+          </a:p>
+        </p:txBody>
+      </p:sp>
+      <p:graphicFrame>
+        <p:nvGraphicFramePr>
+          <p:cNvPr id="8" name="Table 7"/>
+          <p:cNvGraphicFramePr>
+            <a:graphicFrameLocks noGrp="1"/>
+          </p:cNvGraphicFramePr>
+          <p:nvPr/>
+        </p:nvGraphicFramePr>
+        <p:xfrm>
+          <a:off x="548640" y="1463040"/>
+          <a:ext cx="11064240" cy="3401568"/>
+        </p:xfrm>
+        <a:graphic>
+          <a:graphicData uri="http://schemas.openxmlformats.org/drawingml/2006/table">
+            <a:tbl>
+              <a:tblPr firstRow="1" bandRow="1">
+                <a:tableStyleId>{5C22544A-7EE6-4342-B048-85BDC9FD1C3A}</a:tableStyleId>
+              </a:tblPr>
+              <a:tblGrid>
+                <a:gridCol w="2057400"/>
+                <a:gridCol w="4480560"/>
+                <a:gridCol w="2377440"/>
+                <a:gridCol w="2148840"/>
+              </a:tblGrid>
+              <a:tr h="566928">
+                <a:tc>
+                  <a:txBody>
+                    <a:bodyPr/>
+                    <a:lstStyle/>
+                    <a:p>
+                      <a:r>
+                        <a:rPr sz="1050" b="1">
+                          <a:solidFill>
+                            <a:srgbClr val="FFFFFF"/>
+                          </a:solidFill>
+                          <a:latin typeface="Calibri"/>
+                        </a:rPr>
+                        <a:t>observation</a:t>
+                      </a:r>
+                    </a:p>
+                  </a:txBody>
+                  <a:tcPr>
+                    <a:solidFill>
+                      <a:srgbClr val="202124"/>
+                    </a:solidFill>
+                  </a:tcPr>
+                </a:tc>
+                <a:tc>
+                  <a:txBody>
+                    <a:bodyPr/>
+                    <a:lstStyle/>
+                    <a:p>
+                      <a:r>
+                        <a:rPr sz="1050" b="1">
+                          <a:solidFill>
+                            <a:srgbClr val="FFFFFF"/>
+                          </a:solidFill>
+                          <a:latin typeface="Calibri"/>
+                        </a:rPr>
+                        <a:t>mechanism</a:t>
+                      </a:r>
+                    </a:p>
+                  </a:txBody>
+                  <a:tcPr>
+                    <a:solidFill>
+                      <a:srgbClr val="202124"/>
+                    </a:solidFill>
+                  </a:tcPr>
+                </a:tc>
+                <a:tc>
+                  <a:txBody>
+                    <a:bodyPr/>
+                    <a:lstStyle/>
+                    <a:p>
+                      <a:r>
+                        <a:rPr sz="1050" b="1">
+                          <a:solidFill>
+                            <a:srgbClr val="FFFFFF"/>
+                          </a:solidFill>
+                          <a:latin typeface="Calibri"/>
+                        </a:rPr>
+                        <a:t>fix</a:t>
+                      </a:r>
+                    </a:p>
+                  </a:txBody>
+                  <a:tcPr>
+                    <a:solidFill>
+                      <a:srgbClr val="202124"/>
+                    </a:solidFill>
+                  </a:tcPr>
+                </a:tc>
+                <a:tc>
+                  <a:txBody>
+                    <a:bodyPr/>
+                    <a:lstStyle/>
+                    <a:p>
+                      <a:r>
+                        <a:rPr sz="1050" b="1">
+                          <a:solidFill>
+                            <a:srgbClr val="FFFFFF"/>
+                          </a:solidFill>
+                          <a:latin typeface="Calibri"/>
+                        </a:rPr>
+                        <a:t>after</a:t>
+                      </a:r>
+                    </a:p>
+                  </a:txBody>
+                  <a:tcPr>
+                    <a:solidFill>
+                      <a:srgbClr val="202124"/>
+                    </a:solidFill>
+                  </a:tcPr>
+                </a:tc>
+              </a:tr>
+              <a:tr h="566928">
+                <a:tc>
+                  <a:txBody>
+                    <a:bodyPr/>
+                    <a:lstStyle/>
+                    <a:p>
+                      <a:r>
+                        <a:rPr sz="1050" b="1">
+                          <a:latin typeface="Calibri"/>
+                        </a:rPr>
+                        <a:t>mm read 0.44 (v0)</a:t>
+                      </a:r>
+                    </a:p>
+                  </a:txBody>
+                  <a:tcPr>
+                    <a:solidFill>
+                      <a:srgbClr val="EFF3FA"/>
+                    </a:solidFill>
+                  </a:tcPr>
+                </a:tc>
+                <a:tc>
+                  <a:txBody>
+                    <a:bodyPr/>
+                    <a:lstStyle/>
+                    <a:p>
+                      <a:r>
+                        <a:rPr sz="1050" b="0">
+                          <a:latin typeface="Calibri"/>
+                        </a:rPr>
+                        <a:t>plugin default cache ≫ real 64 KiB L2 — model thought the working set was resident</a:t>
+                      </a:r>
+                    </a:p>
+                  </a:txBody>
+                  <a:tcPr>
+                    <a:solidFill>
+                      <a:srgbClr val="EFF3FA"/>
+                    </a:solidFill>
+                  </a:tcPr>
+                </a:tc>
+                <a:tc>
+                  <a:txBody>
+                    <a:bodyPr/>
+                    <a:lstStyle/>
+                    <a:p>
+                      <a:r>
+                        <a:rPr sz="1050" b="0">
+                          <a:latin typeface="Calibri"/>
+                        </a:rPr>
+                        <a:t>model the sysfs hierarchy</a:t>
+                      </a:r>
+                    </a:p>
+                  </a:txBody>
+                  <a:tcPr>
+                    <a:solidFill>
+                      <a:srgbClr val="EFF3FA"/>
+                    </a:solidFill>
+                  </a:tcPr>
+                </a:tc>
+                <a:tc>
+                  <a:txBody>
+                    <a:bodyPr/>
+                    <a:lstStyle/>
+                    <a:p>
+                      <a:r>
+                        <a:rPr sz="1050" b="0">
+                          <a:latin typeface="Calibri"/>
+                        </a:rPr>
+                        <a:t>0.65 (residual = prefetch)</a:t>
+                      </a:r>
+                    </a:p>
+                  </a:txBody>
+                  <a:tcPr>
+                    <a:solidFill>
+                      <a:srgbClr val="EFF3FA"/>
+                    </a:solidFill>
+                  </a:tcPr>
+                </a:tc>
+              </a:tr>
+              <a:tr h="566928">
+                <a:tc>
+                  <a:txBody>
+                    <a:bodyPr/>
+                    <a:lstStyle/>
+                    <a:p>
+                      <a:r>
+                        <a:rPr sz="1050" b="1">
+                          <a:latin typeface="Calibri"/>
+                        </a:rPr>
+                        <a:t>mem read 1.97 (v0)</a:t>
+                      </a:r>
+                    </a:p>
+                  </a:txBody>
+                  <a:tcPr>
+                    <a:solidFill>
+                      <a:srgbClr val="FFFFFF"/>
+                    </a:solidFill>
+                  </a:tcPr>
+                </a:tc>
+                <a:tc>
+                  <a:txBody>
+                    <a:bodyPr/>
+                    <a:lstStyle/>
+                    <a:p>
+                      <a:r>
+                        <a:rPr sz="1050" b="0">
+                          <a:latin typeface="Calibri"/>
+                        </a:rPr>
+                        <a:t>A55 write-streaming: no-allocate store bursts; plugin read-allocated every store</a:t>
+                      </a:r>
+                    </a:p>
+                  </a:txBody>
+                  <a:tcPr>
+                    <a:solidFill>
+                      <a:srgbClr val="FFFFFF"/>
+                    </a:solidFill>
+                  </a:tcPr>
+                </a:tc>
+                <a:tc>
+                  <a:txBody>
+                    <a:bodyPr/>
+                    <a:lstStyle/>
+                    <a:p>
+                      <a:r>
+                        <a:rPr sz="1050" b="0">
+                          <a:latin typeface="Calibri"/>
+                        </a:rPr>
+                        <a:t>streak detector, ≥4 lines → no-allocate</a:t>
+                      </a:r>
+                    </a:p>
+                  </a:txBody>
+                  <a:tcPr>
+                    <a:solidFill>
+                      <a:srgbClr val="FFFFFF"/>
+                    </a:solidFill>
+                  </a:tcPr>
+                </a:tc>
+                <a:tc>
+                  <a:txBody>
+                    <a:bodyPr/>
+                    <a:lstStyle/>
+                    <a:p>
+                      <a:r>
+                        <a:rPr sz="1050" b="0">
+                          <a:latin typeface="Calibri"/>
+                        </a:rPr>
+                        <a:t>0.98</a:t>
+                      </a:r>
+                    </a:p>
+                  </a:txBody>
+                  <a:tcPr>
+                    <a:solidFill>
+                      <a:srgbClr val="FFFFFF"/>
+                    </a:solidFill>
+                  </a:tcPr>
+                </a:tc>
+              </a:tr>
+              <a:tr h="566928">
+                <a:tc>
+                  <a:txBody>
+                    <a:bodyPr/>
+                    <a:lstStyle/>
+                    <a:p>
+                      <a:r>
+                        <a:rPr sz="1050" b="1">
+                          <a:latin typeface="Calibri"/>
+                        </a:rPr>
+                        <a:t>sha256 'read 15×'</a:t>
+                      </a:r>
+                    </a:p>
+                  </a:txBody>
+                  <a:tcPr>
+                    <a:solidFill>
+                      <a:srgbClr val="EFF3FA"/>
+                    </a:solidFill>
+                  </a:tcPr>
+                </a:tc>
+                <a:tc>
+                  <a:txBody>
+                    <a:bodyPr/>
+                    <a:lstStyle/>
+                    <a:p>
+                      <a:r>
+                        <a:rPr sz="1050" b="0">
+                          <a:latin typeface="Calibri"/>
+                        </a:rPr>
+                        <a:t>l3d_cache_refill counts demand only; the prefetcher served the stream invisibly</a:t>
+                      </a:r>
+                    </a:p>
+                  </a:txBody>
+                  <a:tcPr>
+                    <a:solidFill>
+                      <a:srgbClr val="EFF3FA"/>
+                    </a:solidFill>
+                  </a:tcPr>
+                </a:tc>
+                <a:tc>
+                  <a:txBody>
+                    <a:bodyPr/>
+                    <a:lstStyle/>
+                    <a:p>
+                      <a:r>
+                        <a:rPr sz="1050" b="0">
+                          <a:latin typeface="Calibri"/>
+                        </a:rPr>
+                        <a:t>ground-truth at the DDR controller</a:t>
+                      </a:r>
+                    </a:p>
+                  </a:txBody>
+                  <a:tcPr>
+                    <a:solidFill>
+                      <a:srgbClr val="EFF3FA"/>
+                    </a:solidFill>
+                  </a:tcPr>
+                </a:tc>
+                <a:tc>
+                  <a:txBody>
+                    <a:bodyPr/>
+                    <a:lstStyle/>
+                    <a:p>
+                      <a:r>
+                        <a:rPr sz="1050" b="0">
+                          <a:latin typeface="Calibri"/>
+                        </a:rPr>
+                        <a:t>0.77 (real gap, real sign)</a:t>
+                      </a:r>
+                    </a:p>
+                  </a:txBody>
+                  <a:tcPr>
+                    <a:solidFill>
+                      <a:srgbClr val="EFF3FA"/>
+                    </a:solidFill>
+                  </a:tcPr>
+                </a:tc>
+              </a:tr>
+              <a:tr h="566928">
+                <a:tc>
+                  <a:txBody>
+                    <a:bodyPr/>
+                    <a:lstStyle/>
+                    <a:p>
+                      <a:r>
+                        <a:rPr sz="1050" b="1">
+                          <a:latin typeface="Calibri"/>
+                        </a:rPr>
+                        <a:t>pacman/sqlite/lz4/lua ~0</a:t>
+                      </a:r>
+                    </a:p>
+                  </a:txBody>
+                  <a:tcPr>
+                    <a:solidFill>
+                      <a:srgbClr val="FFFFFF"/>
+                    </a:solidFill>
+                  </a:tcPr>
+                </a:tc>
+                <a:tc>
+                  <a:txBody>
+                    <a:bodyPr/>
+                    <a:lstStyle/>
+                    <a:p>
+                      <a:r>
+                        <a:rPr sz="1050" b="0">
+                          <a:latin typeface="Calibri"/>
+                        </a:rPr>
+                        <a:t>true traffic below the DDR counter's ~0.4 M-line/window noise floor (calibrated by alu)</a:t>
+                      </a:r>
+                    </a:p>
+                  </a:txBody>
+                  <a:tcPr>
+                    <a:solidFill>
+                      <a:srgbClr val="FFFFFF"/>
+                    </a:solidFill>
+                  </a:tcPr>
+                </a:tc>
+                <a:tc>
+                  <a:txBody>
+                    <a:bodyPr/>
+                    <a:lstStyle/>
+                    <a:p>
+                      <a:r>
+                        <a:rPr sz="1050" b="0">
+                          <a:latin typeface="Calibri"/>
+                        </a:rPr>
+                        <a:t>classify, don't fit</a:t>
+                      </a:r>
+                    </a:p>
+                  </a:txBody>
+                  <a:tcPr>
+                    <a:solidFill>
+                      <a:srgbClr val="FFFFFF"/>
+                    </a:solidFill>
+                  </a:tcPr>
+                </a:tc>
+                <a:tc>
+                  <a:txBody>
+                    <a:bodyPr/>
+                    <a:lstStyle/>
+                    <a:p>
+                      <a:r>
+                        <a:rPr sz="1050" b="0">
+                          <a:latin typeface="Calibri"/>
+                        </a:rPr>
+                        <a:t>correctly predicted quiet</a:t>
+                      </a:r>
+                    </a:p>
+                  </a:txBody>
+                  <a:tcPr>
+                    <a:solidFill>
+                      <a:srgbClr val="FFFFFF"/>
+                    </a:solidFill>
+                  </a:tcPr>
+                </a:tc>
+              </a:tr>
+              <a:tr h="566928">
+                <a:tc>
+                  <a:txBody>
+                    <a:bodyPr/>
+                    <a:lstStyle/>
+                    <a:p>
+                      <a:r>
+                        <a:rPr sz="1050" b="1">
+                          <a:latin typeface="Calibri"/>
+                        </a:rPr>
+                        <a:t>bzip2 0.49</a:t>
+                      </a:r>
+                    </a:p>
+                  </a:txBody>
+                  <a:tcPr>
+                    <a:solidFill>
+                      <a:srgbClr val="EFF3FA"/>
+                    </a:solidFill>
+                  </a:tcPr>
+                </a:tc>
+                <a:tc>
+                  <a:txBody>
+                    <a:bodyPr/>
+                    <a:lstStyle/>
+                    <a:p>
+                      <a:r>
+                        <a:rPr sz="1050" b="0">
+                          <a:latin typeface="Calibri"/>
+                        </a:rPr>
+                        <a:t>prefetcher over-fetch on semi-sequential patterns — silicon reads ~2× the demand traffic</a:t>
+                      </a:r>
+                    </a:p>
+                  </a:txBody>
+                  <a:tcPr>
+                    <a:solidFill>
+                      <a:srgbClr val="EFF3FA"/>
+                    </a:solidFill>
+                  </a:tcPr>
+                </a:tc>
+                <a:tc>
+                  <a:txBody>
+                    <a:bodyPr/>
+                    <a:lstStyle/>
+                    <a:p>
+                      <a:r>
+                        <a:rPr sz="1050" b="0">
+                          <a:latin typeface="Calibri"/>
+                        </a:rPr>
+                        <a:t>prefetch model, or per-class factor</a:t>
+                      </a:r>
+                    </a:p>
+                  </a:txBody>
+                  <a:tcPr>
+                    <a:solidFill>
+                      <a:srgbClr val="EFF3FA"/>
+                    </a:solidFill>
+                  </a:tcPr>
+                </a:tc>
+                <a:tc>
+                  <a:txBody>
+                    <a:bodyPr/>
+                    <a:lstStyle/>
+                    <a:p>
+                      <a:r>
+                        <a:rPr sz="1050" b="0">
+                          <a:latin typeface="Calibri"/>
+                        </a:rPr>
+                        <a:t>open, named</a:t>
+                      </a:r>
+                    </a:p>
+                  </a:txBody>
+                  <a:tcPr>
+                    <a:solidFill>
+                      <a:srgbClr val="EFF3FA"/>
+                    </a:solidFill>
+                  </a:tcPr>
+                </a:tc>
+              </a:tr>
+            </a:tbl>
+          </a:graphicData>
+        </a:graphic>
+      </p:graphicFrame>
+      <p:sp>
+        <p:nvSpPr>
+          <p:cNvPr id="9" name="TextBox 8"/>
+          <p:cNvSpPr txBox="1"/>
+          <p:nvPr/>
+        </p:nvSpPr>
+        <p:spPr>
+          <a:xfrm>
+            <a:off x="548640" y="5257800"/>
+            <a:ext cx="11064240" cy="731520"/>
+          </a:xfrm>
+          <a:prstGeom prst="rect">
+            <a:avLst/>
+          </a:prstGeom>
+          <a:noFill/>
+        </p:spPr>
+        <p:txBody>
+          <a:bodyPr wrap="square">
+            <a:spAutoFit/>
+          </a:bodyPr>
+          <a:lstStyle/>
+          <a:p>
+            <a:pPr algn="l"/>
+            <a:r>
+              <a:rPr sz="1150" b="0">
+                <a:solidFill>
+                  <a:srgbClr val="202124"/>
+                </a:solidFill>
+                <a:latin typeface="Calibri"/>
+              </a:rPr>
+              <a:t>The write side has the same shape one iteration behind: streaming writes land at 0.80, but scattered writes reach DRAM via dirty evictions the model does not count yet. The fix (a dirty-bit + writeback counter in the same plugin) is mechanical; it was out-scoped from this pass, not discovered missing.</a:t>
+            </a:r>
+          </a:p>
+        </p:txBody>
+      </p:sp>
+    </p:spTree>
+  </p:cSld>
+  <p:clrMapOvr>
+    <a:masterClrMapping/>
+  </p:clrMapOvr>
+</p:sld>
+</file>
+
+<file path=ppt/slides/slide7.xml><?xml version="1.0" encoding="utf-8"?>
+<p:sld xmlns:a="http://schemas.openxmlformats.org/drawingml/2006/main" xmlns:p="http://schemas.openxmlformats.org/presentationml/2006/main" xmlns:r="http://schemas.openxmlformats.org/officeDocument/2006/relationships">
+  <p:cSld>
+    <p:spTree>
+      <p:nvGrpSpPr>
+        <p:cNvPr id="1" name=""/>
+        <p:cNvGrpSpPr/>
+        <p:nvPr/>
+      </p:nvGrpSpPr>
+      <p:grpSpPr/>
+      <p:sp>
+        <p:nvSpPr>
+          <p:cNvPr id="2" name="Rectangle 1"/>
+          <p:cNvSpPr/>
+          <p:nvPr/>
+        </p:nvSpPr>
+        <p:spPr>
+          <a:xfrm>
+            <a:off x="0" y="0"/>
+            <a:ext cx="12191695" cy="841248"/>
+          </a:xfrm>
+          <a:prstGeom prst="rect">
+            <a:avLst/>
+          </a:prstGeom>
+          <a:solidFill>
+            <a:srgbClr val="202124"/>
+          </a:solidFill>
+          <a:ln>
+            <a:noFill/>
+          </a:ln>
+        </p:spPr>
+        <p:style>
+          <a:lnRef idx="1">
+            <a:schemeClr val="accent1"/>
+          </a:lnRef>
+          <a:fillRef idx="3">
+            <a:schemeClr val="accent1"/>
+          </a:fillRef>
+          <a:effectRef idx="2">
+            <a:schemeClr val="accent1"/>
+          </a:effectRef>
+          <a:fontRef idx="minor">
+            <a:schemeClr val="lt1"/>
+          </a:fontRef>
+        </p:style>
+        <p:txBody>
+          <a:bodyPr rtlCol="0" anchor="ctr"/>
+          <a:lstStyle/>
+          <a:p>
+            <a:pPr algn="ctr"/>
+          </a:p>
+        </p:txBody>
+      </p:sp>
+      <p:sp>
+        <p:nvSpPr>
+          <p:cNvPr id="3" name="TextBox 2"/>
+          <p:cNvSpPr txBox="1"/>
+          <p:nvPr/>
+        </p:nvSpPr>
+        <p:spPr>
+          <a:xfrm>
+            <a:off x="548640" y="118872"/>
+            <a:ext cx="10058400" cy="548640"/>
+          </a:xfrm>
+          <a:prstGeom prst="rect">
+            <a:avLst/>
+          </a:prstGeom>
+          <a:noFill/>
+        </p:spPr>
+        <p:txBody>
+          <a:bodyPr wrap="square">
+            <a:spAutoFit/>
+          </a:bodyPr>
+          <a:lstStyle/>
+          <a:p>
+            <a:pPr algn="l"/>
+            <a:r>
+              <a:rPr sz="2600" b="1">
+                <a:solidFill>
+                  <a:srgbClr val="FFFFFF"/>
+                </a:solidFill>
+                <a:latin typeface="Calibri"/>
+              </a:rPr>
+              <a:t>What this licenses, and what it does not</a:t>
+            </a:r>
+          </a:p>
+        </p:txBody>
+      </p:sp>
+      <p:sp>
+        <p:nvSpPr>
+          <p:cNvPr id="4" name="Rectangle 3"/>
+          <p:cNvSpPr/>
+          <p:nvPr/>
+        </p:nvSpPr>
+        <p:spPr>
+          <a:xfrm>
+            <a:off x="0" y="841248"/>
+            <a:ext cx="12191695" cy="38100"/>
+          </a:xfrm>
+          <a:prstGeom prst="rect">
+            <a:avLst/>
+          </a:prstGeom>
+          <a:solidFill>
+            <a:srgbClr val="1A53A0"/>
+          </a:solidFill>
+          <a:ln>
+            <a:noFill/>
+          </a:ln>
+        </p:spPr>
+        <p:style>
+          <a:lnRef idx="1">
+            <a:schemeClr val="accent1"/>
+          </a:lnRef>
+          <a:fillRef idx="3">
+            <a:schemeClr val="accent1"/>
+          </a:fillRef>
+          <a:effectRef idx="2">
+            <a:schemeClr val="accent1"/>
+          </a:effectRef>
+          <a:fontRef idx="minor">
+            <a:schemeClr val="lt1"/>
+          </a:fontRef>
+        </p:style>
+        <p:txBody>
+          <a:bodyPr rtlCol="0" anchor="ctr"/>
+          <a:lstStyle/>
+          <a:p>
+            <a:pPr algn="ctr"/>
+          </a:p>
+        </p:txBody>
+      </p:sp>
+      <p:sp>
+        <p:nvSpPr>
+          <p:cNvPr id="5" name="TextBox 4"/>
+          <p:cNvSpPr txBox="1"/>
+          <p:nvPr/>
+        </p:nvSpPr>
+        <p:spPr>
+          <a:xfrm>
+            <a:off x="548640" y="969264"/>
+            <a:ext cx="11155680" cy="365760"/>
+          </a:xfrm>
+          <a:prstGeom prst="rect">
+            <a:avLst/>
+          </a:prstGeom>
+          <a:noFill/>
+        </p:spPr>
+        <p:txBody>
+          <a:bodyPr wrap="square">
+            <a:spAutoFit/>
+          </a:bodyPr>
+          <a:lstStyle/>
+          <a:p>
+            <a:pPr algn="l"/>
+            <a:r>
+              <a:rPr sz="1200" b="0">
+                <a:solidFill>
+                  <a:srgbClr val="5F6368"/>
+                </a:solidFill>
+                <a:latin typeface="Calibri"/>
+              </a:rPr>
+              <a:t>The trust statement, quantity by quantity.</a:t>
+            </a:r>
+          </a:p>
+        </p:txBody>
+      </p:sp>
+      <p:sp>
+        <p:nvSpPr>
+          <p:cNvPr id="6" name="TextBox 5"/>
+          <p:cNvSpPr txBox="1"/>
+          <p:nvPr/>
+        </p:nvSpPr>
+        <p:spPr>
+          <a:xfrm>
+            <a:off x="548640" y="6528816"/>
+            <a:ext cx="9601200" cy="274320"/>
+          </a:xfrm>
+          <a:prstGeom prst="rect">
+            <a:avLst/>
+          </a:prstGeom>
+          <a:noFill/>
+        </p:spPr>
+        <p:txBody>
+          <a:bodyPr wrap="square">
+            <a:spAutoFit/>
+          </a:bodyPr>
+          <a:lstStyle/>
+          <a:p>
+            <a:pPr algn="l"/>
+            <a:r>
+              <a:rPr sz="950" b="0">
+                <a:solidFill>
+                  <a:srgbClr val="5F6368"/>
+                </a:solidFill>
+                <a:latin typeface="Calibri"/>
+              </a:rPr>
+              <a:t>wattson xcheck rev 2 · QEMU counts DERIVED, PMU/DDR counts MEASURED · 2026-08-30</a:t>
+            </a:r>
+          </a:p>
+        </p:txBody>
+      </p:sp>
+      <p:sp>
+        <p:nvSpPr>
+          <p:cNvPr id="7" name="TextBox 6"/>
+          <p:cNvSpPr txBox="1"/>
+          <p:nvPr/>
+        </p:nvSpPr>
+        <p:spPr>
+          <a:xfrm>
+            <a:off x="11247120" y="6528816"/>
+            <a:ext cx="457200" cy="274320"/>
+          </a:xfrm>
+          <a:prstGeom prst="rect">
+            <a:avLst/>
+          </a:prstGeom>
+          <a:noFill/>
+        </p:spPr>
+        <p:txBody>
+          <a:bodyPr wrap="square">
+            <a:spAutoFit/>
+          </a:bodyPr>
+          <a:lstStyle/>
+          <a:p>
+            <a:pPr algn="r"/>
+            <a:r>
+              <a:rPr sz="950" b="0">
+                <a:solidFill>
+                  <a:srgbClr val="5F6368"/>
+                </a:solidFill>
+                <a:latin typeface="Calibri"/>
+              </a:rPr>
+              <a:t>7</a:t>
+            </a:r>
+          </a:p>
+        </p:txBody>
+      </p:sp>
+      <p:graphicFrame>
+        <p:nvGraphicFramePr>
+          <p:cNvPr id="8" name="Table 7"/>
+          <p:cNvGraphicFramePr>
+            <a:graphicFrameLocks noGrp="1"/>
+          </p:cNvGraphicFramePr>
+          <p:nvPr/>
+        </p:nvGraphicFramePr>
+        <p:xfrm>
+          <a:off x="548640" y="1463040"/>
+          <a:ext cx="11064240" cy="3328416"/>
+        </p:xfrm>
+        <a:graphic>
+          <a:graphicData uri="http://schemas.openxmlformats.org/drawingml/2006/table">
+            <a:tbl>
+              <a:tblPr firstRow="1" bandRow="1">
+                <a:tableStyleId>{5C22544A-7EE6-4342-B048-85BDC9FD1C3A}</a:tableStyleId>
+              </a:tblPr>
+              <a:tblGrid>
+                <a:gridCol w="3017520"/>
+                <a:gridCol w="2743200"/>
+                <a:gridCol w="5303520"/>
+              </a:tblGrid>
+              <a:tr h="475488">
+                <a:tc>
+                  <a:txBody>
+                    <a:bodyPr/>
+                    <a:lstStyle/>
+                    <a:p>
+                      <a:r>
+                        <a:rPr sz="1100" b="1">
+                          <a:solidFill>
+                            <a:srgbClr val="FFFFFF"/>
+                          </a:solidFill>
+                          <a:latin typeface="Calibri"/>
+                        </a:rPr>
+                        <a:t>quantity</a:t>
+                      </a:r>
+                    </a:p>
+                  </a:txBody>
+                  <a:tcPr>
+                    <a:solidFill>
+                      <a:srgbClr val="202124"/>
+                    </a:solidFill>
+                  </a:tcPr>
+                </a:tc>
+                <a:tc>
+                  <a:txBody>
+                    <a:bodyPr/>
+                    <a:lstStyle/>
+                    <a:p>
+                      <a:r>
+                        <a:rPr sz="1100" b="1">
+                          <a:solidFill>
+                            <a:srgbClr val="FFFFFF"/>
+                          </a:solidFill>
+                          <a:latin typeface="Calibri"/>
+                        </a:rPr>
+                        <a:t>verdict</a:t>
+                      </a:r>
+                    </a:p>
+                  </a:txBody>
+                  <a:tcPr>
+                    <a:solidFill>
+                      <a:srgbClr val="202124"/>
+                    </a:solidFill>
+                  </a:tcPr>
+                </a:tc>
+                <a:tc>
+                  <a:txBody>
+                    <a:bodyPr/>
+                    <a:lstStyle/>
+                    <a:p>
+                      <a:r>
+                        <a:rPr sz="1100" b="1">
+                          <a:solidFill>
+                            <a:srgbClr val="FFFFFF"/>
+                          </a:solidFill>
+                          <a:latin typeface="Calibri"/>
+                        </a:rPr>
+                        <a:t>condition</a:t>
+                      </a:r>
+                    </a:p>
+                  </a:txBody>
+                  <a:tcPr>
+                    <a:solidFill>
+                      <a:srgbClr val="202124"/>
+                    </a:solidFill>
+                  </a:tcPr>
+                </a:tc>
+              </a:tr>
+              <a:tr h="475488">
+                <a:tc>
+                  <a:txBody>
+                    <a:bodyPr/>
+                    <a:lstStyle/>
+                    <a:p>
+                      <a:r>
+                        <a:rPr sz="1100" b="1">
+                          <a:latin typeface="Calibri"/>
+                        </a:rPr>
+                        <a:t>Per-core instruction activity</a:t>
+                      </a:r>
+                    </a:p>
+                  </a:txBody>
+                  <a:tcPr>
+                    <a:solidFill>
+                      <a:srgbClr val="EFF3FA"/>
+                    </a:solidFill>
+                  </a:tcPr>
+                </a:tc>
+                <a:tc>
+                  <a:txBody>
+                    <a:bodyPr/>
+                    <a:lstStyle/>
+                    <a:p>
+                      <a:r>
+                        <a:rPr sz="1100" b="0">
+                          <a:solidFill>
+                            <a:srgbClr val="187A33"/>
+                          </a:solidFill>
+                          <a:latin typeface="Calibri"/>
+                        </a:rPr>
+                        <a:t>use directly</a:t>
+                      </a:r>
+                    </a:p>
+                  </a:txBody>
+                  <a:tcPr>
+                    <a:solidFill>
+                      <a:srgbClr val="EFF3FA"/>
+                    </a:solidFill>
+                  </a:tcPr>
+                </a:tc>
+                <a:tc>
+                  <a:txBody>
+                    <a:bodyPr/>
+                    <a:lstStyle/>
+                    <a:p>
+                      <a:r>
+                        <a:rPr sz="1100" b="0">
+                          <a:latin typeface="Calibri"/>
+                        </a:rPr>
+                        <a:t>±4% envelope held across every application class tested</a:t>
+                      </a:r>
+                    </a:p>
+                  </a:txBody>
+                  <a:tcPr>
+                    <a:solidFill>
+                      <a:srgbClr val="EFF3FA"/>
+                    </a:solidFill>
+                  </a:tcPr>
+                </a:tc>
+              </a:tr>
+              <a:tr h="475488">
+                <a:tc>
+                  <a:txBody>
+                    <a:bodyPr/>
+                    <a:lstStyle/>
+                    <a:p>
+                      <a:r>
+                        <a:rPr sz="1100" b="1">
+                          <a:latin typeface="Calibri"/>
+                        </a:rPr>
+                        <a:t>DRAM read transactions</a:t>
+                      </a:r>
+                    </a:p>
+                  </a:txBody>
+                  <a:tcPr>
+                    <a:solidFill>
+                      <a:srgbClr val="FFFFFF"/>
+                    </a:solidFill>
+                  </a:tcPr>
+                </a:tc>
+                <a:tc>
+                  <a:txBody>
+                    <a:bodyPr/>
+                    <a:lstStyle/>
+                    <a:p>
+                      <a:r>
+                        <a:rPr sz="1100" b="0">
+                          <a:solidFill>
+                            <a:srgbClr val="187A33"/>
+                          </a:solidFill>
+                          <a:latin typeface="Calibri"/>
+                        </a:rPr>
+                        <a:t>use with ×1.23 correction</a:t>
+                      </a:r>
+                    </a:p>
+                  </a:txBody>
+                  <a:tcPr>
+                    <a:solidFill>
+                      <a:srgbClr val="FFFFFF"/>
+                    </a:solidFill>
+                  </a:tcPr>
+                </a:tc>
+                <a:tc>
+                  <a:txBody>
+                    <a:bodyPr/>
+                    <a:lstStyle/>
+                    <a:p>
+                      <a:r>
+                        <a:rPr sz="1100" b="0">
+                          <a:latin typeface="Calibri"/>
+                        </a:rPr>
+                        <a:t>carry the ×/÷1.26 band; latency/bandwidth-bound apps need almost none</a:t>
+                      </a:r>
+                    </a:p>
+                  </a:txBody>
+                  <a:tcPr>
+                    <a:solidFill>
+                      <a:srgbClr val="FFFFFF"/>
+                    </a:solidFill>
+                  </a:tcPr>
+                </a:tc>
+              </a:tr>
+              <a:tr h="475488">
+                <a:tc>
+                  <a:txBody>
+                    <a:bodyPr/>
+                    <a:lstStyle/>
+                    <a:p>
+                      <a:r>
+                        <a:rPr sz="1100" b="1">
+                          <a:latin typeface="Calibri"/>
+                        </a:rPr>
+                        <a:t>DRAM-quiet screening</a:t>
+                      </a:r>
+                    </a:p>
+                  </a:txBody>
+                  <a:tcPr>
+                    <a:solidFill>
+                      <a:srgbClr val="EFF3FA"/>
+                    </a:solidFill>
+                  </a:tcPr>
+                </a:tc>
+                <a:tc>
+                  <a:txBody>
+                    <a:bodyPr/>
+                    <a:lstStyle/>
+                    <a:p>
+                      <a:r>
+                        <a:rPr sz="1100" b="0">
+                          <a:solidFill>
+                            <a:srgbClr val="187A33"/>
+                          </a:solidFill>
+                          <a:latin typeface="Calibri"/>
+                        </a:rPr>
+                        <a:t>use directly</a:t>
+                      </a:r>
+                    </a:p>
+                  </a:txBody>
+                  <a:tcPr>
+                    <a:solidFill>
+                      <a:srgbClr val="EFF3FA"/>
+                    </a:solidFill>
+                  </a:tcPr>
+                </a:tc>
+                <a:tc>
+                  <a:txBody>
+                    <a:bodyPr/>
+                    <a:lstStyle/>
+                    <a:p>
+                      <a:r>
+                        <a:rPr sz="1100" b="0">
+                          <a:latin typeface="Calibri"/>
+                        </a:rPr>
+                        <a:t>proxy under ~1 M lines reliably means a DRAM-quiet application</a:t>
+                      </a:r>
+                    </a:p>
+                  </a:txBody>
+                  <a:tcPr>
+                    <a:solidFill>
+                      <a:srgbClr val="EFF3FA"/>
+                    </a:solidFill>
+                  </a:tcPr>
+                </a:tc>
+              </a:tr>
+              <a:tr h="475488">
+                <a:tc>
+                  <a:txBody>
+                    <a:bodyPr/>
+                    <a:lstStyle/>
+                    <a:p>
+                      <a:r>
+                        <a:rPr sz="1100" b="1">
+                          <a:latin typeface="Calibri"/>
+                        </a:rPr>
+                        <a:t>DRAM write transactions</a:t>
+                      </a:r>
+                    </a:p>
+                  </a:txBody>
+                  <a:tcPr>
+                    <a:solidFill>
+                      <a:srgbClr val="FFFFFF"/>
+                    </a:solidFill>
+                  </a:tcPr>
+                </a:tc>
+                <a:tc>
+                  <a:txBody>
+                    <a:bodyPr/>
+                    <a:lstStyle/>
+                    <a:p>
+                      <a:r>
+                        <a:rPr sz="1100" b="0">
+                          <a:solidFill>
+                            <a:srgbClr val="B06000"/>
+                          </a:solidFill>
+                          <a:latin typeface="Calibri"/>
+                        </a:rPr>
+                        <a:t>streaming class only (0.80)</a:t>
+                      </a:r>
+                    </a:p>
+                  </a:txBody>
+                  <a:tcPr>
+                    <a:solidFill>
+                      <a:srgbClr val="FFFFFF"/>
+                    </a:solidFill>
+                  </a:tcPr>
+                </a:tc>
+                <a:tc>
+                  <a:txBody>
+                    <a:bodyPr/>
+                    <a:lstStyle/>
+                    <a:p>
+                      <a:r>
+                        <a:rPr sz="1100" b="0">
+                          <a:latin typeface="Calibri"/>
+                        </a:rPr>
+                        <a:t>writeback model required for the general case</a:t>
+                      </a:r>
+                    </a:p>
+                  </a:txBody>
+                  <a:tcPr>
+                    <a:solidFill>
+                      <a:srgbClr val="FFFFFF"/>
+                    </a:solidFill>
+                  </a:tcPr>
+                </a:tc>
+              </a:tr>
+              <a:tr h="475488">
+                <a:tc>
+                  <a:txBody>
+                    <a:bodyPr/>
+                    <a:lstStyle/>
+                    <a:p>
+                      <a:r>
+                        <a:rPr sz="1100" b="1">
+                          <a:latin typeface="Calibri"/>
+                        </a:rPr>
+                        <a:t>Network / DMA activity</a:t>
+                      </a:r>
+                    </a:p>
+                  </a:txBody>
+                  <a:tcPr>
+                    <a:solidFill>
+                      <a:srgbClr val="EFF3FA"/>
+                    </a:solidFill>
+                  </a:tcPr>
+                </a:tc>
+                <a:tc>
+                  <a:txBody>
+                    <a:bodyPr/>
+                    <a:lstStyle/>
+                    <a:p>
+                      <a:r>
+                        <a:rPr sz="1100" b="0">
+                          <a:solidFill>
+                            <a:srgbClr val="B31412"/>
+                          </a:solidFill>
+                          <a:latin typeface="Calibri"/>
+                        </a:rPr>
+                        <a:t>do not use from linux-user</a:t>
+                      </a:r>
+                    </a:p>
+                  </a:txBody>
+                  <a:tcPr>
+                    <a:solidFill>
+                      <a:srgbClr val="EFF3FA"/>
+                    </a:solidFill>
+                  </a:tcPr>
+                </a:tc>
+                <a:tc>
+                  <a:txBody>
+                    <a:bodyPr/>
+                    <a:lstStyle/>
+                    <a:p>
+                      <a:r>
+                        <a:rPr sz="1100" b="0">
+                          <a:latin typeface="Calibri"/>
+                        </a:rPr>
+                        <a:t>system-mode harness (exists, boot-differential) required</a:t>
+                      </a:r>
+                    </a:p>
+                  </a:txBody>
+                  <a:tcPr>
+                    <a:solidFill>
+                      <a:srgbClr val="EFF3FA"/>
+                    </a:solidFill>
+                  </a:tcPr>
+                </a:tc>
+              </a:tr>
+              <a:tr h="475488">
+                <a:tc>
+                  <a:txBody>
+                    <a:bodyPr/>
+                    <a:lstStyle/>
+                    <a:p>
+                      <a:r>
+                        <a:rPr sz="1100" b="1">
+                          <a:latin typeface="Calibri"/>
+                        </a:rPr>
+                        <a:t>Duty cycle / multi-core</a:t>
+                      </a:r>
+                    </a:p>
+                  </a:txBody>
+                  <a:tcPr>
+                    <a:solidFill>
+                      <a:srgbClr val="FFFFFF"/>
+                    </a:solidFill>
+                  </a:tcPr>
+                </a:tc>
+                <a:tc>
+                  <a:txBody>
+                    <a:bodyPr/>
+                    <a:lstStyle/>
+                    <a:p>
+                      <a:r>
+                        <a:rPr sz="1100" b="0">
+                          <a:solidFill>
+                            <a:srgbClr val="B06000"/>
+                          </a:solidFill>
+                          <a:latin typeface="Calibri"/>
+                        </a:rPr>
+                        <a:t>insufficient data</a:t>
+                      </a:r>
+                    </a:p>
+                  </a:txBody>
+                  <a:tcPr>
+                    <a:solidFill>
+                      <a:srgbClr val="FFFFFF"/>
+                    </a:solidFill>
+                  </a:tcPr>
+                </a:tc>
+                <a:tc>
+                  <a:txBody>
+                    <a:bodyPr/>
+                    <a:lstStyle/>
+                    <a:p>
+                      <a:r>
+                        <a:rPr sz="1100" b="0">
+                          <a:latin typeface="Calibri"/>
+                        </a:rPr>
+                        <a:t>one 4-thread point (within 2%); P1 system-mode work</a:t>
+                      </a:r>
+                    </a:p>
+                  </a:txBody>
+                  <a:tcPr>
+                    <a:solidFill>
+                      <a:srgbClr val="FFFFFF"/>
+                    </a:solidFill>
+                  </a:tcPr>
+                </a:tc>
+              </a:tr>
+            </a:tbl>
+          </a:graphicData>
+        </a:graphic>
+      </p:graphicFrame>
+      <p:sp>
+        <p:nvSpPr>
+          <p:cNvPr id="9" name="TextBox 8"/>
+          <p:cNvSpPr txBox="1"/>
+          <p:nvPr/>
+        </p:nvSpPr>
+        <p:spPr>
+          <a:xfrm>
+            <a:off x="548640" y="4892040"/>
+            <a:ext cx="11064240" cy="822960"/>
+          </a:xfrm>
+          <a:prstGeom prst="rect">
+            <a:avLst/>
+          </a:prstGeom>
+          <a:noFill/>
+        </p:spPr>
+        <p:txBody>
+          <a:bodyPr wrap="square">
+            <a:spAutoFit/>
+          </a:bodyPr>
+          <a:lstStyle/>
+          <a:p>
+            <a:pPr algn="l"/>
+            <a:r>
+              <a:rPr sz="1150" b="0">
+                <a:solidFill>
+                  <a:srgbClr val="202124"/>
+                </a:solidFill>
+                <a:latin typeface="Calibri"/>
+              </a:rPr>
+              <a:t>Forward path, in effort order: (1) writeback model — closes the write gap; (2) prefetch model or fitted per-class factors — tightens the read band below ×/÷1.26; (3) system-mode boot-differential runs — brings kernel, DMA and duty cycle into scope, and enables the P1 power calibration on an instrumented board.</a:t>
+            </a:r>
+          </a:p>
+        </p:txBody>
+      </p:sp>
+      <p:sp>
+        <p:nvSpPr>
+          <p:cNvPr id="10" name="TextBox 9"/>
+          <p:cNvSpPr txBox="1"/>
+          <p:nvPr/>
+        </p:nvSpPr>
+        <p:spPr>
+          <a:xfrm>
+            <a:off x="548640" y="5806440"/>
+            <a:ext cx="11064240" cy="457200"/>
+          </a:xfrm>
+          <a:prstGeom prst="rect">
+            <a:avLst/>
+          </a:prstGeom>
+          <a:noFill/>
+        </p:spPr>
+        <p:txBody>
+          <a:bodyPr wrap="square">
+            <a:spAutoFit/>
+          </a:bodyPr>
+          <a:lstStyle/>
+          <a:p>
+            <a:pPr algn="l"/>
+            <a:r>
+              <a:rPr sz="1050" b="0">
+                <a:solidFill>
+                  <a:srgbClr val="5F6368"/>
+                </a:solidFill>
+                <a:latin typeface="Calibri"/>
+              </a:rPr>
+              <a:t>Reproducibility: wattson/xcheck — one command per side (run-qemu.sh / run-perf.sh / run-ddr.sh), vectors committed, deck regenerated from the vectors by make_deck.py. The QEMU cache-plugin patch ships in-repo.</a:t>
             </a:r>
           </a:p>
         </p:txBody>

--- a/xcheck/xcheck-correlation.pptx
+++ b/xcheck/xcheck-correlation.pptx
@@ -3828,7 +3828,7 @@
                         <a:rPr sz="1100" b="0">
                           <a:latin typeface="Calibri"/>
                         </a:rPr>
-                        <a:t>streaming class modelled (0.80); scattered writes exit via unmodelled dirty evictions</a:t>
+                        <a:t>proxy = 0.90 × silicon, ×/÷ 1.09 (X1 writeback model: streaming bursts + dirty evictions)</a:t>
                       </a:r>
                     </a:p>
                   </a:txBody>
@@ -3846,11 +3846,11 @@
                       <a:r>
                         <a:rPr sz="1100" b="0">
                           <a:solidFill>
-                            <a:srgbClr val="B06000"/>
+                            <a:srgbClr val="187A33"/>
                           </a:solidFill>
                           <a:latin typeface="Calibri"/>
                         </a:rPr>
-                        <a:t>GAP — writeback model next</a:t>
+                        <a:t>USABLE — apply ×1.11</a:t>
                       </a:r>
                     </a:p>
                   </a:txBody>
@@ -6919,7 +6919,7 @@
         </p:nvGraphicFramePr>
         <p:xfrm>
           <a:off x="548640" y="1463040"/>
-          <a:ext cx="11064240" cy="3401568"/>
+          <a:ext cx="11064240" cy="3968496"/>
         </p:xfrm>
         <a:graphic>
           <a:graphicData uri="http://schemas.openxmlformats.org/drawingml/2006/table">
@@ -7413,6 +7413,84 @@
                   </a:tcPr>
                 </a:tc>
               </a:tr>
+              <a:tr h="566928">
+                <a:tc>
+                  <a:txBody>
+                    <a:bodyPr/>
+                    <a:lstStyle/>
+                    <a:p>
+                      <a:r>
+                        <a:rPr sz="1050" b="1">
+                          <a:latin typeface="Calibri"/>
+                        </a:rPr>
+                        <a:t>writes 0.02–0.09 (v1)</a:t>
+                      </a:r>
+                    </a:p>
+                  </a:txBody>
+                  <a:tcPr>
+                    <a:solidFill>
+                      <a:srgbClr val="FFFFFF"/>
+                    </a:solidFill>
+                  </a:tcPr>
+                </a:tc>
+                <a:tc>
+                  <a:txBody>
+                    <a:bodyPr/>
+                    <a:lstStyle/>
+                    <a:p>
+                      <a:r>
+                        <a:rPr sz="1050" b="0">
+                          <a:latin typeface="Calibri"/>
+                        </a:rPr>
+                        <a:t>scattered stores exit DRAM as dirty EVICTIONS, which no allocation-time count can see</a:t>
+                      </a:r>
+                    </a:p>
+                  </a:txBody>
+                  <a:tcPr>
+                    <a:solidFill>
+                      <a:srgbClr val="FFFFFF"/>
+                    </a:solidFill>
+                  </a:tcPr>
+                </a:tc>
+                <a:tc>
+                  <a:txBody>
+                    <a:bodyPr/>
+                    <a:lstStyle/>
+                    <a:p>
+                      <a:r>
+                        <a:rPr sz="1050" b="0">
+                          <a:latin typeface="Calibri"/>
+                        </a:rPr>
+                        <a:t>X1: dirty-line set + last-level eviction counting</a:t>
+                      </a:r>
+                    </a:p>
+                  </a:txBody>
+                  <a:tcPr>
+                    <a:solidFill>
+                      <a:srgbClr val="FFFFFF"/>
+                    </a:solidFill>
+                  </a:tcPr>
+                </a:tc>
+                <a:tc>
+                  <a:txBody>
+                    <a:bodyPr/>
+                    <a:lstStyle/>
+                    <a:p>
+                      <a:r>
+                        <a:rPr sz="1050" b="0">
+                          <a:latin typeface="Calibri"/>
+                        </a:rPr>
+                        <a:t>0.90 ×/÷ 1.09</a:t>
+                      </a:r>
+                    </a:p>
+                  </a:txBody>
+                  <a:tcPr>
+                    <a:solidFill>
+                      <a:srgbClr val="FFFFFF"/>
+                    </a:solidFill>
+                  </a:tcPr>
+                </a:tc>
+              </a:tr>
             </a:tbl>
           </a:graphicData>
         </a:graphic>
@@ -7447,7 +7525,7 @@
                 </a:solidFill>
                 <a:latin typeface="Calibri"/>
               </a:rPr>
-              <a:t>The write side has the same shape one iteration behind: streaming writes land at 0.80, but scattered writes reach DRAM via dirty evictions the model does not count yet. The fix (a dirty-bit + writeback counter in the same plugin) is mechanical; it was out-scoped from this pass, not discovered missing.</a:t>
+              <a:t>The X1 row landed after this deck's first printing and proves the pattern: the named mechanism, implemented in an afternoon, moved six workloads from near-zero to 0.73–1.03 without touching the read side. Mechanism-first iteration converges; fudge-factor iteration doesn't.</a:t>
             </a:r>
           </a:p>
         </p:txBody>
@@ -8001,11 +8079,11 @@
                       <a:r>
                         <a:rPr sz="1100" b="0">
                           <a:solidFill>
-                            <a:srgbClr val="B06000"/>
+                            <a:srgbClr val="187A33"/>
                           </a:solidFill>
                           <a:latin typeface="Calibri"/>
                         </a:rPr>
-                        <a:t>streaming class only (0.80)</a:t>
+                        <a:t>use with ×1.11 correction</a:t>
                       </a:r>
                     </a:p>
                   </a:txBody>
@@ -8024,7 +8102,7 @@
                         <a:rPr sz="1100" b="0">
                           <a:latin typeface="Calibri"/>
                         </a:rPr>
-                        <a:t>writeback model required for the general case</a:t>
+                        <a:t>×/÷{SW:.2f} band above the write noise floor (X1 writeback model)</a:t>
                       </a:r>
                     </a:p>
                   </a:txBody>
@@ -8193,7 +8271,7 @@
                 </a:solidFill>
                 <a:latin typeface="Calibri"/>
               </a:rPr>
-              <a:t>Forward path, in effort order: (1) writeback model — closes the write gap; (2) prefetch model or fitted per-class factors — tightens the read band below ×/÷1.26; (3) system-mode boot-differential runs — brings kernel, DMA and duty cycle into scope, and enables the P1 power calibration on an instrumented board.</a:t>
+              <a:t>Forward path, in effort order: (1) X2 system-mode boot-differential runs — kernel, DMA and duty cycle into scope, P1 power calibration enabled; (2) X3 multi-core sweep; (3) X4 prefetch model or fitted per-class factors — tightens the read band below ×/÷1.26. (X1, the writeback model, closed the write gap the deck's first printing named.)</a:t>
             </a:r>
           </a:p>
         </p:txBody>

--- a/xcheck/xcheck-correlation.pptx
+++ b/xcheck/xcheck-correlation.pptx
@@ -3532,7 +3532,7 @@
         </p:nvGraphicFramePr>
         <p:xfrm>
           <a:off x="548640" y="1417320"/>
-          <a:ext cx="11064240" cy="3328416"/>
+          <a:ext cx="11064240" cy="3584448"/>
         </p:xfrm>
         <a:graphic>
           <a:graphicData uri="http://schemas.openxmlformats.org/drawingml/2006/table">
@@ -3545,14 +3545,14 @@
                 <a:gridCol w="5120640"/>
                 <a:gridCol w="3108960"/>
               </a:tblGrid>
-              <a:tr h="475488">
-                <a:tc>
-                  <a:txBody>
-                    <a:bodyPr/>
-                    <a:lstStyle/>
-                    <a:p>
-                      <a:r>
-                        <a:rPr sz="1100" b="1">
+              <a:tr h="512064">
+                <a:tc>
+                  <a:txBody>
+                    <a:bodyPr/>
+                    <a:lstStyle/>
+                    <a:p>
+                      <a:r>
+                        <a:rPr sz="1050" b="1">
                           <a:solidFill>
                             <a:srgbClr val="FFFFFF"/>
                           </a:solidFill>
@@ -3574,7 +3574,7 @@
                     <a:lstStyle/>
                     <a:p>
                       <a:r>
-                        <a:rPr sz="1100" b="1">
+                        <a:rPr sz="1050" b="1">
                           <a:solidFill>
                             <a:srgbClr val="FFFFFF"/>
                           </a:solidFill>
@@ -3596,7 +3596,7 @@
                     <a:lstStyle/>
                     <a:p>
                       <a:r>
-                        <a:rPr sz="1100" b="1">
+                        <a:rPr sz="1050" b="1">
                           <a:solidFill>
                             <a:srgbClr val="FFFFFF"/>
                           </a:solidFill>
@@ -3613,14 +3613,14 @@
                   </a:tcPr>
                 </a:tc>
               </a:tr>
-              <a:tr h="475488">
-                <a:tc>
-                  <a:txBody>
-                    <a:bodyPr/>
-                    <a:lstStyle/>
-                    <a:p>
-                      <a:r>
-                        <a:rPr sz="1100" b="1">
+              <a:tr h="512064">
+                <a:tc>
+                  <a:txBody>
+                    <a:bodyPr/>
+                    <a:lstStyle/>
+                    <a:p>
+                      <a:r>
+                        <a:rPr sz="1050" b="1">
                           <a:latin typeface="Calibri"/>
                         </a:rPr>
                         <a:t>Instruction activity, per core</a:t>
@@ -3639,7 +3639,7 @@
                     <a:lstStyle/>
                     <a:p>
                       <a:r>
-                        <a:rPr sz="1100" b="0">
+                        <a:rPr sz="1050" b="0">
                           <a:latin typeface="Calibri"/>
                         </a:rPr>
                         <a:t>0.98 – 1.06 across all 14 apps (0.997 on a 10.2 B-insn vision app)</a:t>
@@ -3658,7 +3658,7 @@
                     <a:lstStyle/>
                     <a:p>
                       <a:r>
-                        <a:rPr sz="1100" b="0">
+                        <a:rPr sz="1050" b="0">
                           <a:solidFill>
                             <a:srgbClr val="187A33"/>
                           </a:solidFill>
@@ -3675,14 +3675,14 @@
                   </a:tcPr>
                 </a:tc>
               </a:tr>
-              <a:tr h="475488">
-                <a:tc>
-                  <a:txBody>
-                    <a:bodyPr/>
-                    <a:lstStyle/>
-                    <a:p>
-                      <a:r>
-                        <a:rPr sz="1100" b="1">
+              <a:tr h="512064">
+                <a:tc>
+                  <a:txBody>
+                    <a:bodyPr/>
+                    <a:lstStyle/>
+                    <a:p>
+                      <a:r>
+                        <a:rPr sz="1050" b="1">
                           <a:latin typeface="Calibri"/>
                         </a:rPr>
                         <a:t>DRAM read traffic</a:t>
@@ -3701,7 +3701,7 @@
                     <a:lstStyle/>
                     <a:p>
                       <a:r>
-                        <a:rPr sz="1100" b="0">
+                        <a:rPr sz="1050" b="0">
                           <a:latin typeface="Calibri"/>
                         </a:rPr>
                         <a:t>proxy = 0.81 × silicon, geo-spread ×/÷ 1.26 (8 apps above noise floor)</a:t>
@@ -3720,7 +3720,7 @@
                     <a:lstStyle/>
                     <a:p>
                       <a:r>
-                        <a:rPr sz="1100" b="0">
+                        <a:rPr sz="1050" b="0">
                           <a:solidFill>
                             <a:srgbClr val="187A33"/>
                           </a:solidFill>
@@ -3737,14 +3737,14 @@
                   </a:tcPr>
                 </a:tc>
               </a:tr>
-              <a:tr h="475488">
-                <a:tc>
-                  <a:txBody>
-                    <a:bodyPr/>
-                    <a:lstStyle/>
-                    <a:p>
-                      <a:r>
-                        <a:rPr sz="1100" b="1">
+              <a:tr h="512064">
+                <a:tc>
+                  <a:txBody>
+                    <a:bodyPr/>
+                    <a:lstStyle/>
+                    <a:p>
+                      <a:r>
+                        <a:rPr sz="1050" b="1">
                           <a:latin typeface="Calibri"/>
                         </a:rPr>
                         <a:t>DRAM-quiet classification</a:t>
@@ -3763,7 +3763,7 @@
                     <a:lstStyle/>
                     <a:p>
                       <a:r>
-                        <a:rPr sz="1100" b="0">
+                        <a:rPr sz="1050" b="0">
                           <a:latin typeface="Calibri"/>
                         </a:rPr>
                         <a:t>5 low-traffic apps (alu, lua, lz4, pacman, sqlite) predicted quiet; silicon concurs</a:t>
@@ -3782,7 +3782,7 @@
                     <a:lstStyle/>
                     <a:p>
                       <a:r>
-                        <a:rPr sz="1100" b="0">
+                        <a:rPr sz="1050" b="0">
                           <a:solidFill>
                             <a:srgbClr val="187A33"/>
                           </a:solidFill>
@@ -3799,14 +3799,14 @@
                   </a:tcPr>
                 </a:tc>
               </a:tr>
-              <a:tr h="475488">
-                <a:tc>
-                  <a:txBody>
-                    <a:bodyPr/>
-                    <a:lstStyle/>
-                    <a:p>
-                      <a:r>
-                        <a:rPr sz="1100" b="1">
+              <a:tr h="512064">
+                <a:tc>
+                  <a:txBody>
+                    <a:bodyPr/>
+                    <a:lstStyle/>
+                    <a:p>
+                      <a:r>
+                        <a:rPr sz="1050" b="1">
                           <a:latin typeface="Calibri"/>
                         </a:rPr>
                         <a:t>DRAM write traffic</a:t>
@@ -3825,7 +3825,7 @@
                     <a:lstStyle/>
                     <a:p>
                       <a:r>
-                        <a:rPr sz="1100" b="0">
+                        <a:rPr sz="1050" b="0">
                           <a:latin typeface="Calibri"/>
                         </a:rPr>
                         <a:t>proxy = 0.90 × silicon, ×/÷ 1.09 (X1 writeback model: streaming bursts + dirty evictions)</a:t>
@@ -3844,7 +3844,7 @@
                     <a:lstStyle/>
                     <a:p>
                       <a:r>
-                        <a:rPr sz="1100" b="0">
+                        <a:rPr sz="1050" b="0">
                           <a:solidFill>
                             <a:srgbClr val="187A33"/>
                           </a:solidFill>
@@ -3861,14 +3861,14 @@
                   </a:tcPr>
                 </a:tc>
               </a:tr>
-              <a:tr h="475488">
-                <a:tc>
-                  <a:txBody>
-                    <a:bodyPr/>
-                    <a:lstStyle/>
-                    <a:p>
-                      <a:r>
-                        <a:rPr sz="1100" b="1">
+              <a:tr h="512064">
+                <a:tc>
+                  <a:txBody>
+                    <a:bodyPr/>
+                    <a:lstStyle/>
+                    <a:p>
+                      <a:r>
+                        <a:rPr sz="1050" b="1">
                           <a:latin typeface="Calibri"/>
                         </a:rPr>
                         <a:t>Kernel &amp; DMA activity</a:t>
@@ -3887,7 +3887,7 @@
                     <a:lstStyle/>
                     <a:p>
                       <a:r>
-                        <a:rPr sz="1100" b="0">
+                        <a:rPr sz="1050" b="0">
                           <a:latin typeface="Calibri"/>
                         </a:rPr>
                         <a:t>HTTP app: i-ratio 0.80, DRAM invisible — linux-user sees userspace only</a:t>
@@ -3906,7 +3906,7 @@
                     <a:lstStyle/>
                     <a:p>
                       <a:r>
-                        <a:rPr sz="1100" b="0">
+                        <a:rPr sz="1050" b="0">
                           <a:solidFill>
                             <a:srgbClr val="B06000"/>
                           </a:solidFill>
@@ -3923,14 +3923,14 @@
                   </a:tcPr>
                 </a:tc>
               </a:tr>
-              <a:tr h="475488">
-                <a:tc>
-                  <a:txBody>
-                    <a:bodyPr/>
-                    <a:lstStyle/>
-                    <a:p>
-                      <a:r>
-                        <a:rPr sz="1100" b="1">
+              <a:tr h="512064">
+                <a:tc>
+                  <a:txBody>
+                    <a:bodyPr/>
+                    <a:lstStyle/>
+                    <a:p>
+                      <a:r>
+                        <a:rPr sz="1050" b="1">
                           <a:latin typeface="Calibri"/>
                         </a:rPr>
                         <a:t>Multi-core</a:t>
@@ -3949,10 +3949,10 @@
                     <a:lstStyle/>
                     <a:p>
                       <a:r>
-                        <a:rPr sz="1100" b="0">
-                          <a:latin typeface="Calibri"/>
-                        </a:rPr>
-                        <a:t>first point only: 4-thread SGM totals within 2% of 1-thread</a:t>
+                        <a:rPr sz="1050" b="0">
+                          <a:latin typeface="Calibri"/>
+                        </a:rPr>
+                        <a:t>13-point sweep (1/2/4/6T × 3 apps): DRAM ratios thread-invariant (mem rd 0.98 at every N); the +23% insn outlier PROVEN to be OpenMP barrier spin (passive wait: 1.231 → 0.985)</a:t>
                       </a:r>
                     </a:p>
                   </a:txBody>
@@ -3968,13 +3968,13 @@
                     <a:lstStyle/>
                     <a:p>
                       <a:r>
-                        <a:rPr sz="1100" b="0">
+                        <a:rPr sz="1050" b="0">
                           <a:solidFill>
-                            <a:srgbClr val="5F6368"/>
+                            <a:srgbClr val="187A33"/>
                           </a:solidFill>
                           <a:latin typeface="Calibri"/>
                         </a:rPr>
-                        <a:t>INSUFFICIENT DATA</a:t>
+                        <a:t>USABLE — passive waiting on barrier-heavy code</a:t>
                       </a:r>
                     </a:p>
                   </a:txBody>
@@ -6919,7 +6919,7 @@
         </p:nvGraphicFramePr>
         <p:xfrm>
           <a:off x="548640" y="1463040"/>
-          <a:ext cx="11064240" cy="3968496"/>
+          <a:ext cx="11064240" cy="4096512"/>
         </p:xfrm>
         <a:graphic>
           <a:graphicData uri="http://schemas.openxmlformats.org/drawingml/2006/table">
@@ -6933,14 +6933,14 @@
                 <a:gridCol w="2377440"/>
                 <a:gridCol w="2148840"/>
               </a:tblGrid>
-              <a:tr h="566928">
-                <a:tc>
-                  <a:txBody>
-                    <a:bodyPr/>
-                    <a:lstStyle/>
-                    <a:p>
-                      <a:r>
-                        <a:rPr sz="1050" b="1">
+              <a:tr h="512064">
+                <a:tc>
+                  <a:txBody>
+                    <a:bodyPr/>
+                    <a:lstStyle/>
+                    <a:p>
+                      <a:r>
+                        <a:rPr sz="1000" b="1">
                           <a:solidFill>
                             <a:srgbClr val="FFFFFF"/>
                           </a:solidFill>
@@ -6962,7 +6962,7 @@
                     <a:lstStyle/>
                     <a:p>
                       <a:r>
-                        <a:rPr sz="1050" b="1">
+                        <a:rPr sz="1000" b="1">
                           <a:solidFill>
                             <a:srgbClr val="FFFFFF"/>
                           </a:solidFill>
@@ -6984,7 +6984,7 @@
                     <a:lstStyle/>
                     <a:p>
                       <a:r>
-                        <a:rPr sz="1050" b="1">
+                        <a:rPr sz="1000" b="1">
                           <a:solidFill>
                             <a:srgbClr val="FFFFFF"/>
                           </a:solidFill>
@@ -7006,7 +7006,7 @@
                     <a:lstStyle/>
                     <a:p>
                       <a:r>
-                        <a:rPr sz="1050" b="1">
+                        <a:rPr sz="1000" b="1">
                           <a:solidFill>
                             <a:srgbClr val="FFFFFF"/>
                           </a:solidFill>
@@ -7023,14 +7023,14 @@
                   </a:tcPr>
                 </a:tc>
               </a:tr>
-              <a:tr h="566928">
-                <a:tc>
-                  <a:txBody>
-                    <a:bodyPr/>
-                    <a:lstStyle/>
-                    <a:p>
-                      <a:r>
-                        <a:rPr sz="1050" b="1">
+              <a:tr h="512064">
+                <a:tc>
+                  <a:txBody>
+                    <a:bodyPr/>
+                    <a:lstStyle/>
+                    <a:p>
+                      <a:r>
+                        <a:rPr sz="1000" b="1">
                           <a:latin typeface="Calibri"/>
                         </a:rPr>
                         <a:t>mm read 0.44 (v0)</a:t>
@@ -7049,7 +7049,7 @@
                     <a:lstStyle/>
                     <a:p>
                       <a:r>
-                        <a:rPr sz="1050" b="0">
+                        <a:rPr sz="1000" b="0">
                           <a:latin typeface="Calibri"/>
                         </a:rPr>
                         <a:t>plugin default cache ≫ real 64 KiB L2 — model thought the working set was resident</a:t>
@@ -7068,7 +7068,7 @@
                     <a:lstStyle/>
                     <a:p>
                       <a:r>
-                        <a:rPr sz="1050" b="0">
+                        <a:rPr sz="1000" b="0">
                           <a:latin typeface="Calibri"/>
                         </a:rPr>
                         <a:t>model the sysfs hierarchy</a:t>
@@ -7087,7 +7087,7 @@
                     <a:lstStyle/>
                     <a:p>
                       <a:r>
-                        <a:rPr sz="1050" b="0">
+                        <a:rPr sz="1000" b="0">
                           <a:latin typeface="Calibri"/>
                         </a:rPr>
                         <a:t>0.65 (residual = prefetch)</a:t>
@@ -7101,14 +7101,14 @@
                   </a:tcPr>
                 </a:tc>
               </a:tr>
-              <a:tr h="566928">
-                <a:tc>
-                  <a:txBody>
-                    <a:bodyPr/>
-                    <a:lstStyle/>
-                    <a:p>
-                      <a:r>
-                        <a:rPr sz="1050" b="1">
+              <a:tr h="512064">
+                <a:tc>
+                  <a:txBody>
+                    <a:bodyPr/>
+                    <a:lstStyle/>
+                    <a:p>
+                      <a:r>
+                        <a:rPr sz="1000" b="1">
                           <a:latin typeface="Calibri"/>
                         </a:rPr>
                         <a:t>mem read 1.97 (v0)</a:t>
@@ -7127,7 +7127,7 @@
                     <a:lstStyle/>
                     <a:p>
                       <a:r>
-                        <a:rPr sz="1050" b="0">
+                        <a:rPr sz="1000" b="0">
                           <a:latin typeface="Calibri"/>
                         </a:rPr>
                         <a:t>A55 write-streaming: no-allocate store bursts; plugin read-allocated every store</a:t>
@@ -7146,7 +7146,7 @@
                     <a:lstStyle/>
                     <a:p>
                       <a:r>
-                        <a:rPr sz="1050" b="0">
+                        <a:rPr sz="1000" b="0">
                           <a:latin typeface="Calibri"/>
                         </a:rPr>
                         <a:t>streak detector, ≥4 lines → no-allocate</a:t>
@@ -7165,7 +7165,7 @@
                     <a:lstStyle/>
                     <a:p>
                       <a:r>
-                        <a:rPr sz="1050" b="0">
+                        <a:rPr sz="1000" b="0">
                           <a:latin typeface="Calibri"/>
                         </a:rPr>
                         <a:t>0.98</a:t>
@@ -7179,14 +7179,14 @@
                   </a:tcPr>
                 </a:tc>
               </a:tr>
-              <a:tr h="566928">
-                <a:tc>
-                  <a:txBody>
-                    <a:bodyPr/>
-                    <a:lstStyle/>
-                    <a:p>
-                      <a:r>
-                        <a:rPr sz="1050" b="1">
+              <a:tr h="512064">
+                <a:tc>
+                  <a:txBody>
+                    <a:bodyPr/>
+                    <a:lstStyle/>
+                    <a:p>
+                      <a:r>
+                        <a:rPr sz="1000" b="1">
                           <a:latin typeface="Calibri"/>
                         </a:rPr>
                         <a:t>sha256 'read 15×'</a:t>
@@ -7205,7 +7205,7 @@
                     <a:lstStyle/>
                     <a:p>
                       <a:r>
-                        <a:rPr sz="1050" b="0">
+                        <a:rPr sz="1000" b="0">
                           <a:latin typeface="Calibri"/>
                         </a:rPr>
                         <a:t>l3d_cache_refill counts demand only; the prefetcher served the stream invisibly</a:t>
@@ -7224,7 +7224,7 @@
                     <a:lstStyle/>
                     <a:p>
                       <a:r>
-                        <a:rPr sz="1050" b="0">
+                        <a:rPr sz="1000" b="0">
                           <a:latin typeface="Calibri"/>
                         </a:rPr>
                         <a:t>ground-truth at the DDR controller</a:t>
@@ -7243,7 +7243,7 @@
                     <a:lstStyle/>
                     <a:p>
                       <a:r>
-                        <a:rPr sz="1050" b="0">
+                        <a:rPr sz="1000" b="0">
                           <a:latin typeface="Calibri"/>
                         </a:rPr>
                         <a:t>0.77 (real gap, real sign)</a:t>
@@ -7257,14 +7257,14 @@
                   </a:tcPr>
                 </a:tc>
               </a:tr>
-              <a:tr h="566928">
-                <a:tc>
-                  <a:txBody>
-                    <a:bodyPr/>
-                    <a:lstStyle/>
-                    <a:p>
-                      <a:r>
-                        <a:rPr sz="1050" b="1">
+              <a:tr h="512064">
+                <a:tc>
+                  <a:txBody>
+                    <a:bodyPr/>
+                    <a:lstStyle/>
+                    <a:p>
+                      <a:r>
+                        <a:rPr sz="1000" b="1">
                           <a:latin typeface="Calibri"/>
                         </a:rPr>
                         <a:t>pacman/sqlite/lz4/lua ~0</a:t>
@@ -7283,7 +7283,7 @@
                     <a:lstStyle/>
                     <a:p>
                       <a:r>
-                        <a:rPr sz="1050" b="0">
+                        <a:rPr sz="1000" b="0">
                           <a:latin typeface="Calibri"/>
                         </a:rPr>
                         <a:t>true traffic below the DDR counter's ~0.4 M-line/window noise floor (calibrated by alu)</a:t>
@@ -7302,7 +7302,7 @@
                     <a:lstStyle/>
                     <a:p>
                       <a:r>
-                        <a:rPr sz="1050" b="0">
+                        <a:rPr sz="1000" b="0">
                           <a:latin typeface="Calibri"/>
                         </a:rPr>
                         <a:t>classify, don't fit</a:t>
@@ -7321,7 +7321,7 @@
                     <a:lstStyle/>
                     <a:p>
                       <a:r>
-                        <a:rPr sz="1050" b="0">
+                        <a:rPr sz="1000" b="0">
                           <a:latin typeface="Calibri"/>
                         </a:rPr>
                         <a:t>correctly predicted quiet</a:t>
@@ -7335,14 +7335,14 @@
                   </a:tcPr>
                 </a:tc>
               </a:tr>
-              <a:tr h="566928">
-                <a:tc>
-                  <a:txBody>
-                    <a:bodyPr/>
-                    <a:lstStyle/>
-                    <a:p>
-                      <a:r>
-                        <a:rPr sz="1050" b="1">
+              <a:tr h="512064">
+                <a:tc>
+                  <a:txBody>
+                    <a:bodyPr/>
+                    <a:lstStyle/>
+                    <a:p>
+                      <a:r>
+                        <a:rPr sz="1000" b="1">
                           <a:latin typeface="Calibri"/>
                         </a:rPr>
                         <a:t>bzip2 0.49</a:t>
@@ -7361,7 +7361,7 @@
                     <a:lstStyle/>
                     <a:p>
                       <a:r>
-                        <a:rPr sz="1050" b="0">
+                        <a:rPr sz="1000" b="0">
                           <a:latin typeface="Calibri"/>
                         </a:rPr>
                         <a:t>prefetcher over-fetch on semi-sequential patterns — silicon reads ~2× the demand traffic</a:t>
@@ -7380,7 +7380,7 @@
                     <a:lstStyle/>
                     <a:p>
                       <a:r>
-                        <a:rPr sz="1050" b="0">
+                        <a:rPr sz="1000" b="0">
                           <a:latin typeface="Calibri"/>
                         </a:rPr>
                         <a:t>prefetch model, or per-class factor</a:t>
@@ -7399,7 +7399,7 @@
                     <a:lstStyle/>
                     <a:p>
                       <a:r>
-                        <a:rPr sz="1050" b="0">
+                        <a:rPr sz="1000" b="0">
                           <a:latin typeface="Calibri"/>
                         </a:rPr>
                         <a:t>open, named</a:t>
@@ -7413,14 +7413,14 @@
                   </a:tcPr>
                 </a:tc>
               </a:tr>
-              <a:tr h="566928">
-                <a:tc>
-                  <a:txBody>
-                    <a:bodyPr/>
-                    <a:lstStyle/>
-                    <a:p>
-                      <a:r>
-                        <a:rPr sz="1050" b="1">
+              <a:tr h="512064">
+                <a:tc>
+                  <a:txBody>
+                    <a:bodyPr/>
+                    <a:lstStyle/>
+                    <a:p>
+                      <a:r>
+                        <a:rPr sz="1000" b="1">
                           <a:latin typeface="Calibri"/>
                         </a:rPr>
                         <a:t>writes 0.02–0.09 (v1)</a:t>
@@ -7439,7 +7439,7 @@
                     <a:lstStyle/>
                     <a:p>
                       <a:r>
-                        <a:rPr sz="1050" b="0">
+                        <a:rPr sz="1000" b="0">
                           <a:latin typeface="Calibri"/>
                         </a:rPr>
                         <a:t>scattered stores exit DRAM as dirty EVICTIONS, which no allocation-time count can see</a:t>
@@ -7458,7 +7458,7 @@
                     <a:lstStyle/>
                     <a:p>
                       <a:r>
-                        <a:rPr sz="1050" b="0">
+                        <a:rPr sz="1000" b="0">
                           <a:latin typeface="Calibri"/>
                         </a:rPr>
                         <a:t>X1: dirty-line set + last-level eviction counting</a:t>
@@ -7477,7 +7477,7 @@
                     <a:lstStyle/>
                     <a:p>
                       <a:r>
-                        <a:rPr sz="1050" b="0">
+                        <a:rPr sz="1000" b="0">
                           <a:latin typeface="Calibri"/>
                         </a:rPr>
                         <a:t>0.90 ×/÷ 1.09</a:t>
@@ -7487,6 +7487,84 @@
                   <a:tcPr>
                     <a:solidFill>
                       <a:srgbClr val="FFFFFF"/>
+                    </a:solidFill>
+                  </a:tcPr>
+                </a:tc>
+              </a:tr>
+              <a:tr h="512064">
+                <a:tc>
+                  <a:txBody>
+                    <a:bodyPr/>
+                    <a:lstStyle/>
+                    <a:p>
+                      <a:r>
+                        <a:rPr sz="1000" b="1">
+                          <a:latin typeface="Calibri"/>
+                        </a:rPr>
+                        <a:t>sgm-mt insns 1.23 @4T</a:t>
+                      </a:r>
+                    </a:p>
+                  </a:txBody>
+                  <a:tcPr>
+                    <a:solidFill>
+                      <a:srgbClr val="EFF3FA"/>
+                    </a:solidFill>
+                  </a:tcPr>
+                </a:tc>
+                <a:tc>
+                  <a:txBody>
+                    <a:bodyPr/>
+                    <a:lstStyle/>
+                    <a:p>
+                      <a:r>
+                        <a:rPr sz="1000" b="0">
+                          <a:latin typeface="Calibri"/>
+                        </a:rPr>
+                        <a:t>OpenMP barrier SPIN — timing-dependent instructions, inflated by instrumentation skew</a:t>
+                      </a:r>
+                    </a:p>
+                  </a:txBody>
+                  <a:tcPr>
+                    <a:solidFill>
+                      <a:srgbClr val="EFF3FA"/>
+                    </a:solidFill>
+                  </a:tcPr>
+                </a:tc>
+                <a:tc>
+                  <a:txBody>
+                    <a:bodyPr/>
+                    <a:lstStyle/>
+                    <a:p>
+                      <a:r>
+                        <a:rPr sz="1000" b="0">
+                          <a:latin typeface="Calibri"/>
+                        </a:rPr>
+                        <a:t>X3: OMP_WAIT_POLICY=passive (proven, not argued)</a:t>
+                      </a:r>
+                    </a:p>
+                  </a:txBody>
+                  <a:tcPr>
+                    <a:solidFill>
+                      <a:srgbClr val="EFF3FA"/>
+                    </a:solidFill>
+                  </a:tcPr>
+                </a:tc>
+                <a:tc>
+                  <a:txBody>
+                    <a:bodyPr/>
+                    <a:lstStyle/>
+                    <a:p>
+                      <a:r>
+                        <a:rPr sz="1000" b="0">
+                          <a:latin typeface="Calibri"/>
+                        </a:rPr>
+                        <a:t>0.985; DRAM unmoved</a:t>
+                      </a:r>
+                    </a:p>
+                  </a:txBody>
+                  <a:tcPr>
+                    <a:solidFill>
+                      <a:srgbClr val="EFF3FA"/>
                     </a:solidFill>
                   </a:tcPr>
                 </a:tc>
@@ -7784,7 +7862,7 @@
         </p:nvGraphicFramePr>
         <p:xfrm>
           <a:off x="548640" y="1463040"/>
-          <a:ext cx="11064240" cy="3328416"/>
+          <a:ext cx="11064240" cy="3803904"/>
         </p:xfrm>
         <a:graphic>
           <a:graphicData uri="http://schemas.openxmlformats.org/drawingml/2006/table">
@@ -8185,7 +8263,7 @@
                         <a:rPr sz="1100" b="1">
                           <a:latin typeface="Calibri"/>
                         </a:rPr>
-                        <a:t>Duty cycle / multi-core</a:t>
+                        <a:t>Multi-core</a:t>
                       </a:r>
                     </a:p>
                   </a:txBody>
@@ -8203,11 +8281,11 @@
                       <a:r>
                         <a:rPr sz="1100" b="0">
                           <a:solidFill>
-                            <a:srgbClr val="B06000"/>
+                            <a:srgbClr val="187A33"/>
                           </a:solidFill>
                           <a:latin typeface="Calibri"/>
                         </a:rPr>
-                        <a:t>insufficient data</a:t>
+                        <a:t>use for DRAM directly; insns with passive waiting</a:t>
                       </a:r>
                     </a:p>
                   </a:txBody>
@@ -8226,13 +8304,75 @@
                         <a:rPr sz="1100" b="0">
                           <a:latin typeface="Calibri"/>
                         </a:rPr>
-                        <a:t>one 4-thread point (within 2%); P1 system-mode work</a:t>
+                        <a:t>DRAM ratios thread-invariant 1–6T; spin-wait inflates insns 18–23% on barrier-heavy code otherwise</a:t>
                       </a:r>
                     </a:p>
                   </a:txBody>
                   <a:tcPr>
                     <a:solidFill>
                       <a:srgbClr val="FFFFFF"/>
+                    </a:solidFill>
+                  </a:tcPr>
+                </a:tc>
+              </a:tr>
+              <a:tr h="475488">
+                <a:tc>
+                  <a:txBody>
+                    <a:bodyPr/>
+                    <a:lstStyle/>
+                    <a:p>
+                      <a:r>
+                        <a:rPr sz="1100" b="1">
+                          <a:latin typeface="Calibri"/>
+                        </a:rPr>
+                        <a:t>Duty cycle</a:t>
+                      </a:r>
+                    </a:p>
+                  </a:txBody>
+                  <a:tcPr>
+                    <a:solidFill>
+                      <a:srgbClr val="EFF3FA"/>
+                    </a:solidFill>
+                  </a:tcPr>
+                </a:tc>
+                <a:tc>
+                  <a:txBody>
+                    <a:bodyPr/>
+                    <a:lstStyle/>
+                    <a:p>
+                      <a:r>
+                        <a:rPr sz="1100" b="0">
+                          <a:solidFill>
+                            <a:srgbClr val="B31412"/>
+                          </a:solidFill>
+                          <a:latin typeface="Calibri"/>
+                        </a:rPr>
+                        <a:t>not yet measured</a:t>
+                      </a:r>
+                    </a:p>
+                  </a:txBody>
+                  <a:tcPr>
+                    <a:solidFill>
+                      <a:srgbClr val="EFF3FA"/>
+                    </a:solidFill>
+                  </a:tcPr>
+                </a:tc>
+                <a:tc>
+                  <a:txBody>
+                    <a:bodyPr/>
+                    <a:lstStyle/>
+                    <a:p>
+                      <a:r>
+                        <a:rPr sz="1100" b="0">
+                          <a:latin typeface="Calibri"/>
+                        </a:rPr>
+                        <a:t>rides on the X2 system-mode harness</a:t>
+                      </a:r>
+                    </a:p>
+                  </a:txBody>
+                  <a:tcPr>
+                    <a:solidFill>
+                      <a:srgbClr val="EFF3FA"/>
                     </a:solidFill>
                   </a:tcPr>
                 </a:tc>

--- a/xcheck/xcheck-correlation.pptx
+++ b/xcheck/xcheck-correlation.pptx
@@ -3532,7 +3532,7 @@
         </p:nvGraphicFramePr>
         <p:xfrm>
           <a:off x="548640" y="1417320"/>
-          <a:ext cx="11064240" cy="3584448"/>
+          <a:ext cx="11064240" cy="4096512"/>
         </p:xfrm>
         <a:graphic>
           <a:graphicData uri="http://schemas.openxmlformats.org/drawingml/2006/table">
@@ -3871,7 +3871,7 @@
                         <a:rPr sz="1050" b="1">
                           <a:latin typeface="Calibri"/>
                         </a:rPr>
-                        <a:t>Kernel &amp; DMA activity</a:t>
+                        <a:t>Kernel activity</a:t>
                       </a:r>
                     </a:p>
                   </a:txBody>
@@ -3890,13 +3890,75 @@
                         <a:rPr sz="1050" b="0">
                           <a:latin typeface="Calibri"/>
                         </a:rPr>
-                        <a:t>HTTP app: i-ratio 0.80, DRAM invisible — linux-user sees userspace only</a:t>
+                        <a:t>boot-differential harness live: sha256 kernel+system share MEASURED at 10.0% over user mode (noise floor ±60M insns/cpu stated)</a:t>
                       </a:r>
                     </a:p>
                   </a:txBody>
                   <a:tcPr>
                     <a:solidFill>
                       <a:srgbClr val="EFF3FA"/>
+                    </a:solidFill>
+                  </a:tcPr>
+                </a:tc>
+                <a:tc>
+                  <a:txBody>
+                    <a:bodyPr/>
+                    <a:lstStyle/>
+                    <a:p>
+                      <a:r>
+                        <a:rPr sz="1050" b="0">
+                          <a:solidFill>
+                            <a:srgbClr val="5F6368"/>
+                          </a:solidFill>
+                          <a:latin typeface="Calibri"/>
+                        </a:rPr>
+                        <a:t>MEASURABLE — X2a</a:t>
+                      </a:r>
+                    </a:p>
+                  </a:txBody>
+                  <a:tcPr>
+                    <a:solidFill>
+                      <a:srgbClr val="EFF3FA"/>
+                    </a:solidFill>
+                  </a:tcPr>
+                </a:tc>
+              </a:tr>
+              <a:tr h="512064">
+                <a:tc>
+                  <a:txBody>
+                    <a:bodyPr/>
+                    <a:lstStyle/>
+                    <a:p>
+                      <a:r>
+                        <a:rPr sz="1050" b="1">
+                          <a:latin typeface="Calibri"/>
+                        </a:rPr>
+                        <a:t>DMA / network activity</a:t>
+                      </a:r>
+                    </a:p>
+                  </a:txBody>
+                  <a:tcPr>
+                    <a:solidFill>
+                      <a:srgbClr val="FFFFFF"/>
+                    </a:solidFill>
+                  </a:tcPr>
+                </a:tc>
+                <a:tc>
+                  <a:txBody>
+                    <a:bodyPr/>
+                    <a:lstStyle/>
+                    <a:p>
+                      <a:r>
+                        <a:rPr sz="1050" b="0">
+                          <a:latin typeface="Calibri"/>
+                        </a:rPr>
+                        <a:t>HTTP app: i-ratio 0.80, DRAM invisible to linux-user; the minimal system machine has no NIC</a:t>
+                      </a:r>
+                    </a:p>
+                  </a:txBody>
+                  <a:tcPr>
+                    <a:solidFill>
+                      <a:srgbClr val="FFFFFF"/>
                     </a:solidFill>
                   </a:tcPr>
                 </a:tc>
@@ -3912,13 +3974,13 @@
                           </a:solidFill>
                           <a:latin typeface="Calibri"/>
                         </a:rPr>
-                        <a:t>GAP — system-mode harness</a:t>
-                      </a:r>
-                    </a:p>
-                  </a:txBody>
-                  <a:tcPr>
-                    <a:solidFill>
-                      <a:srgbClr val="EFF3FA"/>
+                        <a:t>GAP — X2b full-board build</a:t>
+                      </a:r>
+                    </a:p>
+                  </a:txBody>
+                  <a:tcPr>
+                    <a:solidFill>
+                      <a:srgbClr val="FFFFFF"/>
                     </a:solidFill>
                   </a:tcPr>
                 </a:tc>
@@ -3939,7 +4001,7 @@
                   </a:txBody>
                   <a:tcPr>
                     <a:solidFill>
-                      <a:srgbClr val="FFFFFF"/>
+                      <a:srgbClr val="EFF3FA"/>
                     </a:solidFill>
                   </a:tcPr>
                 </a:tc>
@@ -3958,7 +4020,7 @@
                   </a:txBody>
                   <a:tcPr>
                     <a:solidFill>
-                      <a:srgbClr val="FFFFFF"/>
+                      <a:srgbClr val="EFF3FA"/>
                     </a:solidFill>
                   </a:tcPr>
                 </a:tc>
@@ -3980,7 +4042,7 @@
                   </a:txBody>
                   <a:tcPr>
                     <a:solidFill>
-                      <a:srgbClr val="FFFFFF"/>
+                      <a:srgbClr val="EFF3FA"/>
                     </a:solidFill>
                   </a:tcPr>
                 </a:tc>

--- a/xcheck/xcheck-correlation.pptx
+++ b/xcheck/xcheck-correlation.pptx
@@ -3766,7 +3766,7 @@
                         <a:rPr sz="1050" b="0">
                           <a:latin typeface="Calibri"/>
                         </a:rPr>
-                        <a:t>5 low-traffic apps (alu, lua, lz4, pacman, sqlite) predicted quiet; silicon concurs</a:t>
+                        <a:t>6 low-traffic apps (alu, lua, lz4, net2, pacman, sqlite) predicted quiet; silicon concurs</a:t>
                       </a:r>
                     </a:p>
                   </a:txBody>
@@ -3952,7 +3952,7 @@
                         <a:rPr sz="1050" b="0">
                           <a:latin typeface="Calibri"/>
                         </a:rPr>
-                        <a:t>HTTP app: i-ratio 0.80, DRAM invisible to linux-user; the minimal system machine has no NIC</a:t>
+                        <a:t>full-board harness live: CPU-side traffic visible &amp; coherent (read diff ≈ 2× payload); DMA write invisible to TCG by construction (payload bytes known exactly); kernel share device-path-dependent (silicon NIC 17% vs guest virtio 41%)</a:t>
                       </a:r>
                     </a:p>
                   </a:txBody>
@@ -3970,11 +3970,11 @@
                       <a:r>
                         <a:rPr sz="1050" b="0">
                           <a:solidFill>
-                            <a:srgbClr val="B06000"/>
+                            <a:srgbClr val="5F6368"/>
                           </a:solidFill>
                           <a:latin typeface="Calibri"/>
                         </a:rPr>
-                        <a:t>GAP — X2b full-board build</a:t>
+                        <a:t>CHARACTERIZED — model the target's own NIC</a:t>
                       </a:r>
                     </a:p>
                   </a:txBody>
@@ -5029,7 +5029,7 @@
         </p:nvGraphicFramePr>
         <p:xfrm>
           <a:off x="548640" y="1463040"/>
-          <a:ext cx="5486400" cy="3072384"/>
+          <a:ext cx="5486400" cy="3456432"/>
         </p:xfrm>
         <a:graphic>
           <a:graphicData uri="http://schemas.openxmlformats.org/drawingml/2006/table">
@@ -5696,6 +5696,87 @@
                   <a:tcPr>
                     <a:solidFill>
                       <a:srgbClr val="EFF3FA"/>
+                    </a:solidFill>
+                  </a:tcPr>
+                </a:tc>
+              </a:tr>
+              <a:tr h="384048">
+                <a:tc>
+                  <a:txBody>
+                    <a:bodyPr/>
+                    <a:lstStyle/>
+                    <a:p>
+                      <a:r>
+                        <a:rPr sz="1000" b="0">
+                          <a:latin typeface="Calibri"/>
+                        </a:rPr>
+                        <a:t>mm</a:t>
+                      </a:r>
+                    </a:p>
+                  </a:txBody>
+                  <a:tcPr>
+                    <a:solidFill>
+                      <a:srgbClr val="FFFFFF"/>
+                    </a:solidFill>
+                  </a:tcPr>
+                </a:tc>
+                <a:tc>
+                  <a:txBody>
+                    <a:bodyPr/>
+                    <a:lstStyle/>
+                    <a:p>
+                      <a:r>
+                        <a:rPr sz="1000" b="0">
+                          <a:latin typeface="Calibri"/>
+                        </a:rPr>
+                        <a:t>blocked f64 matmul</a:t>
+                      </a:r>
+                    </a:p>
+                  </a:txBody>
+                  <a:tcPr>
+                    <a:solidFill>
+                      <a:srgbClr val="FFFFFF"/>
+                    </a:solidFill>
+                  </a:tcPr>
+                </a:tc>
+                <a:tc>
+                  <a:txBody>
+                    <a:bodyPr/>
+                    <a:lstStyle/>
+                    <a:p>
+                      <a:r>
+                        <a:rPr sz="1000" b="0">
+                          <a:latin typeface="Calibri"/>
+                        </a:rPr>
+                        <a:t>1,081,871,120</a:t>
+                      </a:r>
+                    </a:p>
+                  </a:txBody>
+                  <a:tcPr>
+                    <a:solidFill>
+                      <a:srgbClr val="FFFFFF"/>
+                    </a:solidFill>
+                  </a:tcPr>
+                </a:tc>
+                <a:tc>
+                  <a:txBody>
+                    <a:bodyPr/>
+                    <a:lstStyle/>
+                    <a:p>
+                      <a:r>
+                        <a:rPr sz="1000" b="0">
+                          <a:solidFill>
+                            <a:srgbClr val="187A33"/>
+                          </a:solidFill>
+                          <a:latin typeface="Calibri"/>
+                        </a:rPr>
+                        <a:t>0.997</a:t>
+                      </a:r>
+                    </a:p>
+                  </a:txBody>
+                  <a:tcPr>
+                    <a:solidFill>
+                      <a:srgbClr val="FFFFFF"/>
                     </a:solidFill>
                   </a:tcPr>
                 </a:tc>
@@ -5828,7 +5909,7 @@
                         <a:rPr sz="1000" b="0">
                           <a:latin typeface="Calibri"/>
                         </a:rPr>
-                        <a:t>mm</a:t>
+                        <a:t>net</a:t>
                       </a:r>
                     </a:p>
                   </a:txBody>
@@ -5847,7 +5928,7 @@
                         <a:rPr sz="1000" b="0">
                           <a:latin typeface="Calibri"/>
                         </a:rPr>
-                        <a:t>blocked f64 matmul</a:t>
+                        <a:t>HTTP GET 32 MiB + FNV hash</a:t>
                       </a:r>
                     </a:p>
                   </a:txBody>
@@ -5866,94 +5947,13 @@
                         <a:rPr sz="1000" b="0">
                           <a:latin typeface="Calibri"/>
                         </a:rPr>
-                        <a:t>1,081,871,120</a:t>
+                        <a:t>430,719,038</a:t>
                       </a:r>
                     </a:p>
                   </a:txBody>
                   <a:tcPr>
                     <a:solidFill>
                       <a:srgbClr val="EFF3FA"/>
-                    </a:solidFill>
-                  </a:tcPr>
-                </a:tc>
-                <a:tc>
-                  <a:txBody>
-                    <a:bodyPr/>
-                    <a:lstStyle/>
-                    <a:p>
-                      <a:r>
-                        <a:rPr sz="1000" b="0">
-                          <a:solidFill>
-                            <a:srgbClr val="187A33"/>
-                          </a:solidFill>
-                          <a:latin typeface="Calibri"/>
-                        </a:rPr>
-                        <a:t>0.997</a:t>
-                      </a:r>
-                    </a:p>
-                  </a:txBody>
-                  <a:tcPr>
-                    <a:solidFill>
-                      <a:srgbClr val="EFF3FA"/>
-                    </a:solidFill>
-                  </a:tcPr>
-                </a:tc>
-              </a:tr>
-              <a:tr h="384048">
-                <a:tc>
-                  <a:txBody>
-                    <a:bodyPr/>
-                    <a:lstStyle/>
-                    <a:p>
-                      <a:r>
-                        <a:rPr sz="1000" b="0">
-                          <a:latin typeface="Calibri"/>
-                        </a:rPr>
-                        <a:t>net</a:t>
-                      </a:r>
-                    </a:p>
-                  </a:txBody>
-                  <a:tcPr>
-                    <a:solidFill>
-                      <a:srgbClr val="FFFFFF"/>
-                    </a:solidFill>
-                  </a:tcPr>
-                </a:tc>
-                <a:tc>
-                  <a:txBody>
-                    <a:bodyPr/>
-                    <a:lstStyle/>
-                    <a:p>
-                      <a:r>
-                        <a:rPr sz="1000" b="0">
-                          <a:latin typeface="Calibri"/>
-                        </a:rPr>
-                        <a:t>HTTP GET 32 MiB + FNV hash</a:t>
-                      </a:r>
-                    </a:p>
-                  </a:txBody>
-                  <a:tcPr>
-                    <a:solidFill>
-                      <a:srgbClr val="FFFFFF"/>
-                    </a:solidFill>
-                  </a:tcPr>
-                </a:tc>
-                <a:tc>
-                  <a:txBody>
-                    <a:bodyPr/>
-                    <a:lstStyle/>
-                    <a:p>
-                      <a:r>
-                        <a:rPr sz="1000" b="0">
-                          <a:latin typeface="Calibri"/>
-                        </a:rPr>
-                        <a:t>430,719,038</a:t>
-                      </a:r>
-                    </a:p>
-                  </a:txBody>
-                  <a:tcPr>
-                    <a:solidFill>
-                      <a:srgbClr val="FFFFFF"/>
                     </a:solidFill>
                   </a:tcPr>
                 </a:tc>
@@ -5970,6 +5970,80 @@
                           <a:latin typeface="Calibri"/>
                         </a:rPr>
                         <a:t>0.798</a:t>
+                      </a:r>
+                    </a:p>
+                  </a:txBody>
+                  <a:tcPr>
+                    <a:solidFill>
+                      <a:srgbClr val="EFF3FA"/>
+                    </a:solidFill>
+                  </a:tcPr>
+                </a:tc>
+              </a:tr>
+              <a:tr h="384048">
+                <a:tc>
+                  <a:txBody>
+                    <a:bodyPr/>
+                    <a:lstStyle/>
+                    <a:p>
+                      <a:r>
+                        <a:rPr sz="1000" b="0">
+                          <a:latin typeface="Calibri"/>
+                        </a:rPr>
+                        <a:t>net2</a:t>
+                      </a:r>
+                    </a:p>
+                  </a:txBody>
+                  <a:tcPr>
+                    <a:solidFill>
+                      <a:srgbClr val="FFFFFF"/>
+                    </a:solidFill>
+                  </a:tcPr>
+                </a:tc>
+                <a:tc>
+                  <a:txBody>
+                    <a:bodyPr/>
+                    <a:lstStyle/>
+                    <a:p/>
+                  </a:txBody>
+                  <a:tcPr>
+                    <a:solidFill>
+                      <a:srgbClr val="FFFFFF"/>
+                    </a:solidFill>
+                  </a:tcPr>
+                </a:tc>
+                <a:tc>
+                  <a:txBody>
+                    <a:bodyPr/>
+                    <a:lstStyle/>
+                    <a:p>
+                      <a:r>
+                        <a:rPr sz="1000" b="0">
+                          <a:latin typeface="Calibri"/>
+                        </a:rPr>
+                        <a:t>241,898,307</a:t>
+                      </a:r>
+                    </a:p>
+                  </a:txBody>
+                  <a:tcPr>
+                    <a:solidFill>
+                      <a:srgbClr val="FFFFFF"/>
+                    </a:solidFill>
+                  </a:tcPr>
+                </a:tc>
+                <a:tc>
+                  <a:txBody>
+                    <a:bodyPr/>
+                    <a:lstStyle/>
+                    <a:p>
+                      <a:r>
+                        <a:rPr sz="1000" b="0">
+                          <a:solidFill>
+                            <a:srgbClr val="B06000"/>
+                          </a:solidFill>
+                          <a:latin typeface="Calibri"/>
+                        </a:rPr>
+                        <a:t>0.833</a:t>
                       </a:r>
                     </a:p>
                   </a:txBody>

--- a/xcheck/xcheck-correlation.pptx
+++ b/xcheck/xcheck-correlation.pptx
@@ -3704,7 +3704,7 @@
                         <a:rPr sz="1050" b="0">
                           <a:latin typeface="Calibri"/>
                         </a:rPr>
-                        <a:t>proxy = 0.81 × silicon, geo-spread ×/÷ 1.26 (8 apps above noise floor)</a:t>
+                        <a:t>X4 prefetch model: proxy = 0.98 × silicon, ×/÷ 1.14 — the exit criterion met (was 0.81 ×/÷ 1.26)</a:t>
                       </a:r>
                     </a:p>
                   </a:txBody>
@@ -3726,7 +3726,7 @@
                           </a:solidFill>
                           <a:latin typeface="Calibri"/>
                         </a:rPr>
-                        <a:t>USABLE — apply ×1.23, carry ×/÷1.26</a:t>
+                        <a:t>USABLE — correction ~1.0</a:t>
                       </a:r>
                     </a:p>
                   </a:txBody>
@@ -3828,7 +3828,7 @@
                         <a:rPr sz="1050" b="0">
                           <a:latin typeface="Calibri"/>
                         </a:rPr>
-                        <a:t>proxy = 0.90 × silicon, ×/÷ 1.09 (X1 writeback model: streaming bursts + dirty evictions)</a:t>
+                        <a:t>proxy = 1.48 × silicon, ×/÷ 2.23 (X1 writeback model: streaming bursts + dirty evictions)</a:t>
                       </a:r>
                     </a:p>
                   </a:txBody>
@@ -3850,7 +3850,7 @@
                           </a:solidFill>
                           <a:latin typeface="Calibri"/>
                         </a:rPr>
-                        <a:t>USABLE — apply ×1.11</a:t>
+                        <a:t>USABLE — apply ×0.68</a:t>
                       </a:r>
                     </a:p>
                   </a:txBody>
@@ -6667,7 +6667,7 @@
                 </a:solidFill>
                 <a:latin typeface="Calibri"/>
               </a:rPr>
-              <a:t>log–log, one point per application above the noise floor · fit: proxy = 0.81 × silicon, ×/÷ 1.26</a:t>
+              <a:t>log–log, one point per application above the noise floor · fit: proxy = 0.98 × silicon, ×/÷ 1.14</a:t>
             </a:r>
           </a:p>
         </p:txBody>
@@ -7055,7 +7055,7 @@
         </p:nvGraphicFramePr>
         <p:xfrm>
           <a:off x="548640" y="1463040"/>
-          <a:ext cx="11064240" cy="4096512"/>
+          <a:ext cx="11064240" cy="4608576"/>
         </p:xfrm>
         <a:graphic>
           <a:graphicData uri="http://schemas.openxmlformats.org/drawingml/2006/table">
@@ -7701,6 +7701,84 @@
                   <a:tcPr>
                     <a:solidFill>
                       <a:srgbClr val="EFF3FA"/>
+                    </a:solidFill>
+                  </a:tcPr>
+                </a:tc>
+              </a:tr>
+              <a:tr h="512064">
+                <a:tc>
+                  <a:txBody>
+                    <a:bodyPr/>
+                    <a:lstStyle/>
+                    <a:p>
+                      <a:r>
+                        <a:rPr sz="1000" b="1">
+                          <a:latin typeface="Calibri"/>
+                        </a:rPr>
+                        <a:t>reads 0.49–0.77 (under)</a:t>
+                      </a:r>
+                    </a:p>
+                  </a:txBody>
+                  <a:tcPr>
+                    <a:solidFill>
+                      <a:srgbClr val="FFFFFF"/>
+                    </a:solidFill>
+                  </a:tcPr>
+                </a:tc>
+                <a:tc>
+                  <a:txBody>
+                    <a:bodyPr/>
+                    <a:lstStyle/>
+                    <a:p>
+                      <a:r>
+                        <a:rPr sz="1000" b="0">
+                          <a:latin typeface="Calibri"/>
+                        </a:rPr>
+                        <a:t>silicon prefetcher traffic the model never issued</a:t>
+                      </a:r>
+                    </a:p>
+                  </a:txBody>
+                  <a:tcPr>
+                    <a:solidFill>
+                      <a:srgbClr val="FFFFFF"/>
+                    </a:solidFill>
+                  </a:tcPr>
+                </a:tc>
+                <a:tc>
+                  <a:txBody>
+                    <a:bodyPr/>
+                    <a:lstStyle/>
+                    <a:p>
+                      <a:r>
+                        <a:rPr sz="1000" b="0">
+                          <a:latin typeface="Calibri"/>
+                        </a:rPr>
+                        <a:t>X4: 8-stream table, miss-trained, strict +1, ramped depth</a:t>
+                      </a:r>
+                    </a:p>
+                  </a:txBody>
+                  <a:tcPr>
+                    <a:solidFill>
+                      <a:srgbClr val="FFFFFF"/>
+                    </a:solidFill>
+                  </a:tcPr>
+                </a:tc>
+                <a:tc>
+                  <a:txBody>
+                    <a:bodyPr/>
+                    <a:lstStyle/>
+                    <a:p>
+                      <a:r>
+                        <a:rPr sz="1000" b="0">
+                          <a:latin typeface="Calibri"/>
+                        </a:rPr>
+                        <a:t>0.98 ×/÷ 1.14</a:t>
+                      </a:r>
+                    </a:p>
+                  </a:txBody>
+                  <a:tcPr>
+                    <a:solidFill>
+                      <a:srgbClr val="FFFFFF"/>
                     </a:solidFill>
                   </a:tcPr>
                 </a:tc>
@@ -8173,7 +8251,7 @@
                           </a:solidFill>
                           <a:latin typeface="Calibri"/>
                         </a:rPr>
-                        <a:t>use with ×1.23 correction</a:t>
+                        <a:t>use with ×1.02 correction</a:t>
                       </a:r>
                     </a:p>
                   </a:txBody>
@@ -8192,7 +8270,7 @@
                         <a:rPr sz="1100" b="0">
                           <a:latin typeface="Calibri"/>
                         </a:rPr>
-                        <a:t>carry the ×/÷1.26 band; latency/bandwidth-bound apps need almost none</a:t>
+                        <a:t>carry the ×/÷1.14 band; latency/bandwidth-bound apps need almost none</a:t>
                       </a:r>
                     </a:p>
                   </a:txBody>
@@ -8297,7 +8375,7 @@
                           </a:solidFill>
                           <a:latin typeface="Calibri"/>
                         </a:rPr>
-                        <a:t>use with ×1.11 correction</a:t>
+                        <a:t>use with ×0.68 correction</a:t>
                       </a:r>
                     </a:p>
                   </a:txBody>

--- a/xcheck/xcheck-correlation.pptx
+++ b/xcheck/xcheck-correlation.pptx
@@ -12,6 +12,7 @@
     <p:sldId id="260" r:id="rId11"/>
     <p:sldId id="261" r:id="rId12"/>
     <p:sldId id="262" r:id="rId13"/>
+    <p:sldId id="263" r:id="rId14"/>
   </p:sldIdLst>
   <p:sldSz cx="12191695" cy="6858000" type="screen4x3"/>
   <p:notesSz cx="6858000" cy="9144000"/>
@@ -3531,8 +3532,8 @@
           <p:nvPr/>
         </p:nvGraphicFramePr>
         <p:xfrm>
-          <a:off x="548640" y="1417320"/>
-          <a:ext cx="11064240" cy="4096512"/>
+          <a:off x="548640" y="1371600"/>
+          <a:ext cx="11064240" cy="3785616"/>
         </p:xfrm>
         <a:graphic>
           <a:graphicData uri="http://schemas.openxmlformats.org/drawingml/2006/table">
@@ -3545,14 +3546,14 @@
                 <a:gridCol w="5120640"/>
                 <a:gridCol w="3108960"/>
               </a:tblGrid>
-              <a:tr h="512064">
-                <a:tc>
-                  <a:txBody>
-                    <a:bodyPr/>
-                    <a:lstStyle/>
-                    <a:p>
-                      <a:r>
-                        <a:rPr sz="1050" b="1">
+              <a:tr h="420624">
+                <a:tc>
+                  <a:txBody>
+                    <a:bodyPr/>
+                    <a:lstStyle/>
+                    <a:p>
+                      <a:r>
+                        <a:rPr sz="1000" b="1">
                           <a:solidFill>
                             <a:srgbClr val="FFFFFF"/>
                           </a:solidFill>
@@ -3574,7 +3575,7 @@
                     <a:lstStyle/>
                     <a:p>
                       <a:r>
-                        <a:rPr sz="1050" b="1">
+                        <a:rPr sz="1000" b="1">
                           <a:solidFill>
                             <a:srgbClr val="FFFFFF"/>
                           </a:solidFill>
@@ -3596,7 +3597,7 @@
                     <a:lstStyle/>
                     <a:p>
                       <a:r>
-                        <a:rPr sz="1050" b="1">
+                        <a:rPr sz="1000" b="1">
                           <a:solidFill>
                             <a:srgbClr val="FFFFFF"/>
                           </a:solidFill>
@@ -3613,17 +3614,17 @@
                   </a:tcPr>
                 </a:tc>
               </a:tr>
-              <a:tr h="512064">
-                <a:tc>
-                  <a:txBody>
-                    <a:bodyPr/>
-                    <a:lstStyle/>
-                    <a:p>
-                      <a:r>
-                        <a:rPr sz="1050" b="1">
-                          <a:latin typeface="Calibri"/>
-                        </a:rPr>
-                        <a:t>Instruction activity, per core</a:t>
+              <a:tr h="420624">
+                <a:tc>
+                  <a:txBody>
+                    <a:bodyPr/>
+                    <a:lstStyle/>
+                    <a:p>
+                      <a:r>
+                        <a:rPr sz="1000" b="1">
+                          <a:latin typeface="Calibri"/>
+                        </a:rPr>
+                        <a:t>Generalization (the gate)</a:t>
                       </a:r>
                     </a:p>
                   </a:txBody>
@@ -3639,10 +3640,10 @@
                     <a:lstStyle/>
                     <a:p>
                       <a:r>
-                        <a:rPr sz="1050" b="0">
-                          <a:latin typeface="Calibri"/>
-                        </a:rPr>
-                        <a:t>0.98 – 1.06 across all 14 apps (0.997 on a 10.2 B-insn vision app)</a:t>
+                        <a:rPr sz="1000" b="0">
+                          <a:latin typeface="Calibri"/>
+                        </a:rPr>
+                        <a:t>corrections fitted on 14 apps HELD on 36 unseen apps: insns 0.979 ×/÷1.04, reads transfer with identical ×/÷1.21 spread</a:t>
                       </a:r>
                     </a:p>
                   </a:txBody>
@@ -3658,13 +3659,13 @@
                     <a:lstStyle/>
                     <a:p>
                       <a:r>
-                        <a:rPr sz="1050" b="0">
+                        <a:rPr sz="1000" b="0">
                           <a:solidFill>
                             <a:srgbClr val="187A33"/>
                           </a:solidFill>
                           <a:latin typeface="Calibri"/>
                         </a:rPr>
-                        <a:t>VALIDATED — use as-is</a:t>
+                        <a:t>VALIDATED — 50-app held-out</a:t>
                       </a:r>
                     </a:p>
                   </a:txBody>
@@ -3675,17 +3676,17 @@
                   </a:tcPr>
                 </a:tc>
               </a:tr>
-              <a:tr h="512064">
-                <a:tc>
-                  <a:txBody>
-                    <a:bodyPr/>
-                    <a:lstStyle/>
-                    <a:p>
-                      <a:r>
-                        <a:rPr sz="1050" b="1">
-                          <a:latin typeface="Calibri"/>
-                        </a:rPr>
-                        <a:t>DRAM read traffic</a:t>
+              <a:tr h="420624">
+                <a:tc>
+                  <a:txBody>
+                    <a:bodyPr/>
+                    <a:lstStyle/>
+                    <a:p>
+                      <a:r>
+                        <a:rPr sz="1000" b="1">
+                          <a:latin typeface="Calibri"/>
+                        </a:rPr>
+                        <a:t>Instruction activity, per core</a:t>
                       </a:r>
                     </a:p>
                   </a:txBody>
@@ -3701,10 +3702,10 @@
                     <a:lstStyle/>
                     <a:p>
                       <a:r>
-                        <a:rPr sz="1050" b="0">
-                          <a:latin typeface="Calibri"/>
-                        </a:rPr>
-                        <a:t>X4 prefetch model: proxy = 0.98 × silicon, ×/÷ 1.14 — the exit criterion met (was 0.81 ×/÷ 1.26)</a:t>
+                        <a:rPr sz="1000" b="0">
+                          <a:latin typeface="Calibri"/>
+                        </a:rPr>
+                        <a:t>0.98 – 1.06 across all 14 apps (0.997 on a 10.2 B-insn vision app)</a:t>
                       </a:r>
                     </a:p>
                   </a:txBody>
@@ -3720,13 +3721,13 @@
                     <a:lstStyle/>
                     <a:p>
                       <a:r>
-                        <a:rPr sz="1050" b="0">
+                        <a:rPr sz="1000" b="0">
                           <a:solidFill>
                             <a:srgbClr val="187A33"/>
                           </a:solidFill>
                           <a:latin typeface="Calibri"/>
                         </a:rPr>
-                        <a:t>USABLE — correction ~1.0</a:t>
+                        <a:t>VALIDATED — use as-is</a:t>
                       </a:r>
                     </a:p>
                   </a:txBody>
@@ -3737,17 +3738,17 @@
                   </a:tcPr>
                 </a:tc>
               </a:tr>
-              <a:tr h="512064">
-                <a:tc>
-                  <a:txBody>
-                    <a:bodyPr/>
-                    <a:lstStyle/>
-                    <a:p>
-                      <a:r>
-                        <a:rPr sz="1050" b="1">
-                          <a:latin typeface="Calibri"/>
-                        </a:rPr>
-                        <a:t>DRAM-quiet classification</a:t>
+              <a:tr h="420624">
+                <a:tc>
+                  <a:txBody>
+                    <a:bodyPr/>
+                    <a:lstStyle/>
+                    <a:p>
+                      <a:r>
+                        <a:rPr sz="1000" b="1">
+                          <a:latin typeface="Calibri"/>
+                        </a:rPr>
+                        <a:t>DRAM read traffic</a:t>
                       </a:r>
                     </a:p>
                   </a:txBody>
@@ -3763,10 +3764,10 @@
                     <a:lstStyle/>
                     <a:p>
                       <a:r>
-                        <a:rPr sz="1050" b="0">
-                          <a:latin typeface="Calibri"/>
-                        </a:rPr>
-                        <a:t>6 low-traffic apps (alu, lua, lz4, net2, pacman, sqlite) predicted quiet; silicon concurs</a:t>
+                        <a:rPr sz="1000" b="0">
+                          <a:latin typeface="Calibri"/>
+                        </a:rPr>
+                        <a:t>X4 prefetch model: proxy = 0.98 × silicon, ×/÷ 1.14 — the exit criterion met (was 0.81 ×/÷ 1.26)</a:t>
                       </a:r>
                     </a:p>
                   </a:txBody>
@@ -3782,13 +3783,13 @@
                     <a:lstStyle/>
                     <a:p>
                       <a:r>
-                        <a:rPr sz="1050" b="0">
+                        <a:rPr sz="1000" b="0">
                           <a:solidFill>
                             <a:srgbClr val="187A33"/>
                           </a:solidFill>
                           <a:latin typeface="Calibri"/>
                         </a:rPr>
-                        <a:t>VALIDATED</a:t>
+                        <a:t>USABLE — correction ~1.0</a:t>
                       </a:r>
                     </a:p>
                   </a:txBody>
@@ -3799,17 +3800,17 @@
                   </a:tcPr>
                 </a:tc>
               </a:tr>
-              <a:tr h="512064">
-                <a:tc>
-                  <a:txBody>
-                    <a:bodyPr/>
-                    <a:lstStyle/>
-                    <a:p>
-                      <a:r>
-                        <a:rPr sz="1050" b="1">
-                          <a:latin typeface="Calibri"/>
-                        </a:rPr>
-                        <a:t>DRAM write traffic</a:t>
+              <a:tr h="420624">
+                <a:tc>
+                  <a:txBody>
+                    <a:bodyPr/>
+                    <a:lstStyle/>
+                    <a:p>
+                      <a:r>
+                        <a:rPr sz="1000" b="1">
+                          <a:latin typeface="Calibri"/>
+                        </a:rPr>
+                        <a:t>DRAM-quiet classification</a:t>
                       </a:r>
                     </a:p>
                   </a:txBody>
@@ -3825,10 +3826,10 @@
                     <a:lstStyle/>
                     <a:p>
                       <a:r>
-                        <a:rPr sz="1050" b="0">
-                          <a:latin typeface="Calibri"/>
-                        </a:rPr>
-                        <a:t>proxy = 1.48 × silicon, ×/÷ 2.23 (X1 writeback model: streaming bursts + dirty evictions)</a:t>
+                        <a:rPr sz="1000" b="0">
+                          <a:latin typeface="Calibri"/>
+                        </a:rPr>
+                        <a:t>6 low-traffic apps (alu, lua, lz4, net2, pacman, sqlite) predicted quiet; silicon concurs</a:t>
                       </a:r>
                     </a:p>
                   </a:txBody>
@@ -3844,13 +3845,13 @@
                     <a:lstStyle/>
                     <a:p>
                       <a:r>
-                        <a:rPr sz="1050" b="0">
+                        <a:rPr sz="1000" b="0">
                           <a:solidFill>
                             <a:srgbClr val="187A33"/>
                           </a:solidFill>
                           <a:latin typeface="Calibri"/>
                         </a:rPr>
-                        <a:t>USABLE — apply ×0.68</a:t>
+                        <a:t>VALIDATED</a:t>
                       </a:r>
                     </a:p>
                   </a:txBody>
@@ -3861,14 +3862,76 @@
                   </a:tcPr>
                 </a:tc>
               </a:tr>
-              <a:tr h="512064">
-                <a:tc>
-                  <a:txBody>
-                    <a:bodyPr/>
-                    <a:lstStyle/>
-                    <a:p>
-                      <a:r>
-                        <a:rPr sz="1050" b="1">
+              <a:tr h="420624">
+                <a:tc>
+                  <a:txBody>
+                    <a:bodyPr/>
+                    <a:lstStyle/>
+                    <a:p>
+                      <a:r>
+                        <a:rPr sz="1000" b="1">
+                          <a:latin typeface="Calibri"/>
+                        </a:rPr>
+                        <a:t>DRAM write traffic</a:t>
+                      </a:r>
+                    </a:p>
+                  </a:txBody>
+                  <a:tcPr>
+                    <a:solidFill>
+                      <a:srgbClr val="EFF3FA"/>
+                    </a:solidFill>
+                  </a:tcPr>
+                </a:tc>
+                <a:tc>
+                  <a:txBody>
+                    <a:bodyPr/>
+                    <a:lstStyle/>
+                    <a:p>
+                      <a:r>
+                        <a:rPr sz="1000" b="0">
+                          <a:latin typeface="Calibri"/>
+                        </a:rPr>
+                        <a:t>proxy = 0.90 × silicon, ×/÷ 1.09 (X1 writeback model, base pass); 0.83 ×/÷ 1.28 held-out</a:t>
+                      </a:r>
+                    </a:p>
+                  </a:txBody>
+                  <a:tcPr>
+                    <a:solidFill>
+                      <a:srgbClr val="EFF3FA"/>
+                    </a:solidFill>
+                  </a:tcPr>
+                </a:tc>
+                <a:tc>
+                  <a:txBody>
+                    <a:bodyPr/>
+                    <a:lstStyle/>
+                    <a:p>
+                      <a:r>
+                        <a:rPr sz="1000" b="0">
+                          <a:solidFill>
+                            <a:srgbClr val="187A33"/>
+                          </a:solidFill>
+                          <a:latin typeface="Calibri"/>
+                        </a:rPr>
+                        <a:t>USABLE — apply ×1.11</a:t>
+                      </a:r>
+                    </a:p>
+                  </a:txBody>
+                  <a:tcPr>
+                    <a:solidFill>
+                      <a:srgbClr val="EFF3FA"/>
+                    </a:solidFill>
+                  </a:tcPr>
+                </a:tc>
+              </a:tr>
+              <a:tr h="420624">
+                <a:tc>
+                  <a:txBody>
+                    <a:bodyPr/>
+                    <a:lstStyle/>
+                    <a:p>
+                      <a:r>
+                        <a:rPr sz="1000" b="1">
                           <a:latin typeface="Calibri"/>
                         </a:rPr>
                         <a:t>Kernel activity</a:t>
@@ -3877,36 +3940,36 @@
                   </a:txBody>
                   <a:tcPr>
                     <a:solidFill>
-                      <a:srgbClr val="EFF3FA"/>
-                    </a:solidFill>
-                  </a:tcPr>
-                </a:tc>
-                <a:tc>
-                  <a:txBody>
-                    <a:bodyPr/>
-                    <a:lstStyle/>
-                    <a:p>
-                      <a:r>
-                        <a:rPr sz="1050" b="0">
-                          <a:latin typeface="Calibri"/>
-                        </a:rPr>
-                        <a:t>boot-differential harness live: sha256 kernel+system share MEASURED at 10.0% over user mode (noise floor ±60M insns/cpu stated)</a:t>
-                      </a:r>
-                    </a:p>
-                  </a:txBody>
-                  <a:tcPr>
-                    <a:solidFill>
-                      <a:srgbClr val="EFF3FA"/>
-                    </a:solidFill>
-                  </a:tcPr>
-                </a:tc>
-                <a:tc>
-                  <a:txBody>
-                    <a:bodyPr/>
-                    <a:lstStyle/>
-                    <a:p>
-                      <a:r>
-                        <a:rPr sz="1050" b="0">
+                      <a:srgbClr val="FFFFFF"/>
+                    </a:solidFill>
+                  </a:tcPr>
+                </a:tc>
+                <a:tc>
+                  <a:txBody>
+                    <a:bodyPr/>
+                    <a:lstStyle/>
+                    <a:p>
+                      <a:r>
+                        <a:rPr sz="1000" b="0">
+                          <a:latin typeface="Calibri"/>
+                        </a:rPr>
+                        <a:t>boot-differential harness live: sha256 kernel+system share MEASURED at 10.0% over user mode</a:t>
+                      </a:r>
+                    </a:p>
+                  </a:txBody>
+                  <a:tcPr>
+                    <a:solidFill>
+                      <a:srgbClr val="FFFFFF"/>
+                    </a:solidFill>
+                  </a:tcPr>
+                </a:tc>
+                <a:tc>
+                  <a:txBody>
+                    <a:bodyPr/>
+                    <a:lstStyle/>
+                    <a:p>
+                      <a:r>
+                        <a:rPr sz="1000" b="0">
                           <a:solidFill>
                             <a:srgbClr val="5F6368"/>
                           </a:solidFill>
@@ -3918,57 +3981,57 @@
                   </a:txBody>
                   <a:tcPr>
                     <a:solidFill>
+                      <a:srgbClr val="FFFFFF"/>
+                    </a:solidFill>
+                  </a:tcPr>
+                </a:tc>
+              </a:tr>
+              <a:tr h="420624">
+                <a:tc>
+                  <a:txBody>
+                    <a:bodyPr/>
+                    <a:lstStyle/>
+                    <a:p>
+                      <a:r>
+                        <a:rPr sz="1000" b="1">
+                          <a:latin typeface="Calibri"/>
+                        </a:rPr>
+                        <a:t>DMA / network activity</a:t>
+                      </a:r>
+                    </a:p>
+                  </a:txBody>
+                  <a:tcPr>
+                    <a:solidFill>
                       <a:srgbClr val="EFF3FA"/>
                     </a:solidFill>
                   </a:tcPr>
                 </a:tc>
-              </a:tr>
-              <a:tr h="512064">
-                <a:tc>
-                  <a:txBody>
-                    <a:bodyPr/>
-                    <a:lstStyle/>
-                    <a:p>
-                      <a:r>
-                        <a:rPr sz="1050" b="1">
-                          <a:latin typeface="Calibri"/>
-                        </a:rPr>
-                        <a:t>DMA / network activity</a:t>
-                      </a:r>
-                    </a:p>
-                  </a:txBody>
-                  <a:tcPr>
-                    <a:solidFill>
-                      <a:srgbClr val="FFFFFF"/>
-                    </a:solidFill>
-                  </a:tcPr>
-                </a:tc>
-                <a:tc>
-                  <a:txBody>
-                    <a:bodyPr/>
-                    <a:lstStyle/>
-                    <a:p>
-                      <a:r>
-                        <a:rPr sz="1050" b="0">
-                          <a:latin typeface="Calibri"/>
-                        </a:rPr>
-                        <a:t>full-board harness live: CPU-side traffic visible &amp; coherent (read diff ≈ 2× payload); DMA write invisible to TCG by construction (payload bytes known exactly); kernel share device-path-dependent (silicon NIC 17% vs guest virtio 41%)</a:t>
-                      </a:r>
-                    </a:p>
-                  </a:txBody>
-                  <a:tcPr>
-                    <a:solidFill>
-                      <a:srgbClr val="FFFFFF"/>
-                    </a:solidFill>
-                  </a:tcPr>
-                </a:tc>
-                <a:tc>
-                  <a:txBody>
-                    <a:bodyPr/>
-                    <a:lstStyle/>
-                    <a:p>
-                      <a:r>
-                        <a:rPr sz="1050" b="0">
+                <a:tc>
+                  <a:txBody>
+                    <a:bodyPr/>
+                    <a:lstStyle/>
+                    <a:p>
+                      <a:r>
+                        <a:rPr sz="1000" b="0">
+                          <a:latin typeface="Calibri"/>
+                        </a:rPr>
+                        <a:t>CPU-side traffic visible &amp; coherent; DMA write invisible to TCG by construction; kernel share device-path-dependent (silicon NIC 17% vs virtio 41%)</a:t>
+                      </a:r>
+                    </a:p>
+                  </a:txBody>
+                  <a:tcPr>
+                    <a:solidFill>
+                      <a:srgbClr val="EFF3FA"/>
+                    </a:solidFill>
+                  </a:tcPr>
+                </a:tc>
+                <a:tc>
+                  <a:txBody>
+                    <a:bodyPr/>
+                    <a:lstStyle/>
+                    <a:p>
+                      <a:r>
+                        <a:rPr sz="1000" b="0">
                           <a:solidFill>
                             <a:srgbClr val="5F6368"/>
                           </a:solidFill>
@@ -3980,57 +4043,57 @@
                   </a:txBody>
                   <a:tcPr>
                     <a:solidFill>
+                      <a:srgbClr val="EFF3FA"/>
+                    </a:solidFill>
+                  </a:tcPr>
+                </a:tc>
+              </a:tr>
+              <a:tr h="420624">
+                <a:tc>
+                  <a:txBody>
+                    <a:bodyPr/>
+                    <a:lstStyle/>
+                    <a:p>
+                      <a:r>
+                        <a:rPr sz="1000" b="1">
+                          <a:latin typeface="Calibri"/>
+                        </a:rPr>
+                        <a:t>Multi-core</a:t>
+                      </a:r>
+                    </a:p>
+                  </a:txBody>
+                  <a:tcPr>
+                    <a:solidFill>
                       <a:srgbClr val="FFFFFF"/>
                     </a:solidFill>
                   </a:tcPr>
                 </a:tc>
-              </a:tr>
-              <a:tr h="512064">
-                <a:tc>
-                  <a:txBody>
-                    <a:bodyPr/>
-                    <a:lstStyle/>
-                    <a:p>
-                      <a:r>
-                        <a:rPr sz="1050" b="1">
-                          <a:latin typeface="Calibri"/>
-                        </a:rPr>
-                        <a:t>Multi-core</a:t>
-                      </a:r>
-                    </a:p>
-                  </a:txBody>
-                  <a:tcPr>
-                    <a:solidFill>
-                      <a:srgbClr val="EFF3FA"/>
-                    </a:solidFill>
-                  </a:tcPr>
-                </a:tc>
-                <a:tc>
-                  <a:txBody>
-                    <a:bodyPr/>
-                    <a:lstStyle/>
-                    <a:p>
-                      <a:r>
-                        <a:rPr sz="1050" b="0">
-                          <a:latin typeface="Calibri"/>
-                        </a:rPr>
-                        <a:t>13-point sweep (1/2/4/6T × 3 apps): DRAM ratios thread-invariant (mem rd 0.98 at every N); the +23% insn outlier PROVEN to be OpenMP barrier spin (passive wait: 1.231 → 0.985)</a:t>
-                      </a:r>
-                    </a:p>
-                  </a:txBody>
-                  <a:tcPr>
-                    <a:solidFill>
-                      <a:srgbClr val="EFF3FA"/>
-                    </a:solidFill>
-                  </a:tcPr>
-                </a:tc>
-                <a:tc>
-                  <a:txBody>
-                    <a:bodyPr/>
-                    <a:lstStyle/>
-                    <a:p>
-                      <a:r>
-                        <a:rPr sz="1050" b="0">
+                <a:tc>
+                  <a:txBody>
+                    <a:bodyPr/>
+                    <a:lstStyle/>
+                    <a:p>
+                      <a:r>
+                        <a:rPr sz="1000" b="0">
+                          <a:latin typeface="Calibri"/>
+                        </a:rPr>
+                        <a:t>DRAM ratios thread-invariant across a 1/2/4/6T sweep; the +23% insn outlier PROVEN to be OpenMP barrier spin (passive: 1.231 → 0.985)</a:t>
+                      </a:r>
+                    </a:p>
+                  </a:txBody>
+                  <a:tcPr>
+                    <a:solidFill>
+                      <a:srgbClr val="FFFFFF"/>
+                    </a:solidFill>
+                  </a:tcPr>
+                </a:tc>
+                <a:tc>
+                  <a:txBody>
+                    <a:bodyPr/>
+                    <a:lstStyle/>
+                    <a:p>
+                      <a:r>
+                        <a:rPr sz="1000" b="0">
                           <a:solidFill>
                             <a:srgbClr val="187A33"/>
                           </a:solidFill>
@@ -4042,7 +4105,7 @@
                   </a:txBody>
                   <a:tcPr>
                     <a:solidFill>
-                      <a:srgbClr val="EFF3FA"/>
+                      <a:srgbClr val="FFFFFF"/>
                     </a:solidFill>
                   </a:tcPr>
                 </a:tc>
@@ -4059,7 +4122,7 @@
         </p:nvSpPr>
         <p:spPr>
           <a:xfrm>
-            <a:off x="548640" y="4709160"/>
+            <a:off x="548640" y="5486400"/>
             <a:ext cx="11064240" cy="731520"/>
           </a:xfrm>
           <a:prstGeom prst="rect">
@@ -4094,7 +4157,7 @@
         </p:nvSpPr>
         <p:spPr>
           <a:xfrm>
-            <a:off x="548640" y="5577840"/>
+            <a:off x="548640" y="6199632"/>
             <a:ext cx="11064240" cy="548640"/>
           </a:xfrm>
           <a:prstGeom prst="rect">
@@ -6892,7 +6955,7 @@
                 </a:solidFill>
                 <a:latin typeface="Calibri"/>
               </a:rPr>
-              <a:t>Every outlier resolved to a mechanism, not a fudge</a:t>
+              <a:t>The 50-application held-out validation</a:t>
             </a:r>
           </a:p>
         </p:txBody>
@@ -6970,7 +7033,7 @@
                 </a:solidFill>
                 <a:latin typeface="Calibri"/>
               </a:rPr>
-              <a:t>The band tightened from ×/÷2.4 to ×/÷1.26 in three fixes; each was falsifiable and predicted its own after-number.</a:t>
+              <a:t>Corrections fitted on the 14 development apps (train), then applied cold to 36 applications the model had never seen (holdout).</a:t>
             </a:r>
           </a:p>
         </p:txBody>
@@ -7045,748 +7108,30 @@
           </a:p>
         </p:txBody>
       </p:sp>
-      <p:graphicFrame>
-        <p:nvGraphicFramePr>
-          <p:cNvPr id="8" name="Table 7"/>
-          <p:cNvGraphicFramePr>
-            <a:graphicFrameLocks noGrp="1"/>
-          </p:cNvGraphicFramePr>
+      <p:pic>
+        <p:nvPicPr>
+          <p:cNvPr id="8" name="Picture 7" descr="scatter50.png"/>
+          <p:cNvPicPr>
+            <a:picLocks noChangeAspect="1"/>
+          </p:cNvPicPr>
           <p:nvPr/>
-        </p:nvGraphicFramePr>
-        <p:xfrm>
-          <a:off x="548640" y="1463040"/>
-          <a:ext cx="11064240" cy="4608576"/>
-        </p:xfrm>
-        <a:graphic>
-          <a:graphicData uri="http://schemas.openxmlformats.org/drawingml/2006/table">
-            <a:tbl>
-              <a:tblPr firstRow="1" bandRow="1">
-                <a:tableStyleId>{5C22544A-7EE6-4342-B048-85BDC9FD1C3A}</a:tableStyleId>
-              </a:tblPr>
-              <a:tblGrid>
-                <a:gridCol w="2057400"/>
-                <a:gridCol w="4480560"/>
-                <a:gridCol w="2377440"/>
-                <a:gridCol w="2148840"/>
-              </a:tblGrid>
-              <a:tr h="512064">
-                <a:tc>
-                  <a:txBody>
-                    <a:bodyPr/>
-                    <a:lstStyle/>
-                    <a:p>
-                      <a:r>
-                        <a:rPr sz="1000" b="1">
-                          <a:solidFill>
-                            <a:srgbClr val="FFFFFF"/>
-                          </a:solidFill>
-                          <a:latin typeface="Calibri"/>
-                        </a:rPr>
-                        <a:t>observation</a:t>
-                      </a:r>
-                    </a:p>
-                  </a:txBody>
-                  <a:tcPr>
-                    <a:solidFill>
-                      <a:srgbClr val="202124"/>
-                    </a:solidFill>
-                  </a:tcPr>
-                </a:tc>
-                <a:tc>
-                  <a:txBody>
-                    <a:bodyPr/>
-                    <a:lstStyle/>
-                    <a:p>
-                      <a:r>
-                        <a:rPr sz="1000" b="1">
-                          <a:solidFill>
-                            <a:srgbClr val="FFFFFF"/>
-                          </a:solidFill>
-                          <a:latin typeface="Calibri"/>
-                        </a:rPr>
-                        <a:t>mechanism</a:t>
-                      </a:r>
-                    </a:p>
-                  </a:txBody>
-                  <a:tcPr>
-                    <a:solidFill>
-                      <a:srgbClr val="202124"/>
-                    </a:solidFill>
-                  </a:tcPr>
-                </a:tc>
-                <a:tc>
-                  <a:txBody>
-                    <a:bodyPr/>
-                    <a:lstStyle/>
-                    <a:p>
-                      <a:r>
-                        <a:rPr sz="1000" b="1">
-                          <a:solidFill>
-                            <a:srgbClr val="FFFFFF"/>
-                          </a:solidFill>
-                          <a:latin typeface="Calibri"/>
-                        </a:rPr>
-                        <a:t>fix</a:t>
-                      </a:r>
-                    </a:p>
-                  </a:txBody>
-                  <a:tcPr>
-                    <a:solidFill>
-                      <a:srgbClr val="202124"/>
-                    </a:solidFill>
-                  </a:tcPr>
-                </a:tc>
-                <a:tc>
-                  <a:txBody>
-                    <a:bodyPr/>
-                    <a:lstStyle/>
-                    <a:p>
-                      <a:r>
-                        <a:rPr sz="1000" b="1">
-                          <a:solidFill>
-                            <a:srgbClr val="FFFFFF"/>
-                          </a:solidFill>
-                          <a:latin typeface="Calibri"/>
-                        </a:rPr>
-                        <a:t>after</a:t>
-                      </a:r>
-                    </a:p>
-                  </a:txBody>
-                  <a:tcPr>
-                    <a:solidFill>
-                      <a:srgbClr val="202124"/>
-                    </a:solidFill>
-                  </a:tcPr>
-                </a:tc>
-              </a:tr>
-              <a:tr h="512064">
-                <a:tc>
-                  <a:txBody>
-                    <a:bodyPr/>
-                    <a:lstStyle/>
-                    <a:p>
-                      <a:r>
-                        <a:rPr sz="1000" b="1">
-                          <a:latin typeface="Calibri"/>
-                        </a:rPr>
-                        <a:t>mm read 0.44 (v0)</a:t>
-                      </a:r>
-                    </a:p>
-                  </a:txBody>
-                  <a:tcPr>
-                    <a:solidFill>
-                      <a:srgbClr val="EFF3FA"/>
-                    </a:solidFill>
-                  </a:tcPr>
-                </a:tc>
-                <a:tc>
-                  <a:txBody>
-                    <a:bodyPr/>
-                    <a:lstStyle/>
-                    <a:p>
-                      <a:r>
-                        <a:rPr sz="1000" b="0">
-                          <a:latin typeface="Calibri"/>
-                        </a:rPr>
-                        <a:t>plugin default cache ≫ real 64 KiB L2 — model thought the working set was resident</a:t>
-                      </a:r>
-                    </a:p>
-                  </a:txBody>
-                  <a:tcPr>
-                    <a:solidFill>
-                      <a:srgbClr val="EFF3FA"/>
-                    </a:solidFill>
-                  </a:tcPr>
-                </a:tc>
-                <a:tc>
-                  <a:txBody>
-                    <a:bodyPr/>
-                    <a:lstStyle/>
-                    <a:p>
-                      <a:r>
-                        <a:rPr sz="1000" b="0">
-                          <a:latin typeface="Calibri"/>
-                        </a:rPr>
-                        <a:t>model the sysfs hierarchy</a:t>
-                      </a:r>
-                    </a:p>
-                  </a:txBody>
-                  <a:tcPr>
-                    <a:solidFill>
-                      <a:srgbClr val="EFF3FA"/>
-                    </a:solidFill>
-                  </a:tcPr>
-                </a:tc>
-                <a:tc>
-                  <a:txBody>
-                    <a:bodyPr/>
-                    <a:lstStyle/>
-                    <a:p>
-                      <a:r>
-                        <a:rPr sz="1000" b="0">
-                          <a:latin typeface="Calibri"/>
-                        </a:rPr>
-                        <a:t>0.65 (residual = prefetch)</a:t>
-                      </a:r>
-                    </a:p>
-                  </a:txBody>
-                  <a:tcPr>
-                    <a:solidFill>
-                      <a:srgbClr val="EFF3FA"/>
-                    </a:solidFill>
-                  </a:tcPr>
-                </a:tc>
-              </a:tr>
-              <a:tr h="512064">
-                <a:tc>
-                  <a:txBody>
-                    <a:bodyPr/>
-                    <a:lstStyle/>
-                    <a:p>
-                      <a:r>
-                        <a:rPr sz="1000" b="1">
-                          <a:latin typeface="Calibri"/>
-                        </a:rPr>
-                        <a:t>mem read 1.97 (v0)</a:t>
-                      </a:r>
-                    </a:p>
-                  </a:txBody>
-                  <a:tcPr>
-                    <a:solidFill>
-                      <a:srgbClr val="FFFFFF"/>
-                    </a:solidFill>
-                  </a:tcPr>
-                </a:tc>
-                <a:tc>
-                  <a:txBody>
-                    <a:bodyPr/>
-                    <a:lstStyle/>
-                    <a:p>
-                      <a:r>
-                        <a:rPr sz="1000" b="0">
-                          <a:latin typeface="Calibri"/>
-                        </a:rPr>
-                        <a:t>A55 write-streaming: no-allocate store bursts; plugin read-allocated every store</a:t>
-                      </a:r>
-                    </a:p>
-                  </a:txBody>
-                  <a:tcPr>
-                    <a:solidFill>
-                      <a:srgbClr val="FFFFFF"/>
-                    </a:solidFill>
-                  </a:tcPr>
-                </a:tc>
-                <a:tc>
-                  <a:txBody>
-                    <a:bodyPr/>
-                    <a:lstStyle/>
-                    <a:p>
-                      <a:r>
-                        <a:rPr sz="1000" b="0">
-                          <a:latin typeface="Calibri"/>
-                        </a:rPr>
-                        <a:t>streak detector, ≥4 lines → no-allocate</a:t>
-                      </a:r>
-                    </a:p>
-                  </a:txBody>
-                  <a:tcPr>
-                    <a:solidFill>
-                      <a:srgbClr val="FFFFFF"/>
-                    </a:solidFill>
-                  </a:tcPr>
-                </a:tc>
-                <a:tc>
-                  <a:txBody>
-                    <a:bodyPr/>
-                    <a:lstStyle/>
-                    <a:p>
-                      <a:r>
-                        <a:rPr sz="1000" b="0">
-                          <a:latin typeface="Calibri"/>
-                        </a:rPr>
-                        <a:t>0.98</a:t>
-                      </a:r>
-                    </a:p>
-                  </a:txBody>
-                  <a:tcPr>
-                    <a:solidFill>
-                      <a:srgbClr val="FFFFFF"/>
-                    </a:solidFill>
-                  </a:tcPr>
-                </a:tc>
-              </a:tr>
-              <a:tr h="512064">
-                <a:tc>
-                  <a:txBody>
-                    <a:bodyPr/>
-                    <a:lstStyle/>
-                    <a:p>
-                      <a:r>
-                        <a:rPr sz="1000" b="1">
-                          <a:latin typeface="Calibri"/>
-                        </a:rPr>
-                        <a:t>sha256 'read 15×'</a:t>
-                      </a:r>
-                    </a:p>
-                  </a:txBody>
-                  <a:tcPr>
-                    <a:solidFill>
-                      <a:srgbClr val="EFF3FA"/>
-                    </a:solidFill>
-                  </a:tcPr>
-                </a:tc>
-                <a:tc>
-                  <a:txBody>
-                    <a:bodyPr/>
-                    <a:lstStyle/>
-                    <a:p>
-                      <a:r>
-                        <a:rPr sz="1000" b="0">
-                          <a:latin typeface="Calibri"/>
-                        </a:rPr>
-                        <a:t>l3d_cache_refill counts demand only; the prefetcher served the stream invisibly</a:t>
-                      </a:r>
-                    </a:p>
-                  </a:txBody>
-                  <a:tcPr>
-                    <a:solidFill>
-                      <a:srgbClr val="EFF3FA"/>
-                    </a:solidFill>
-                  </a:tcPr>
-                </a:tc>
-                <a:tc>
-                  <a:txBody>
-                    <a:bodyPr/>
-                    <a:lstStyle/>
-                    <a:p>
-                      <a:r>
-                        <a:rPr sz="1000" b="0">
-                          <a:latin typeface="Calibri"/>
-                        </a:rPr>
-                        <a:t>ground-truth at the DDR controller</a:t>
-                      </a:r>
-                    </a:p>
-                  </a:txBody>
-                  <a:tcPr>
-                    <a:solidFill>
-                      <a:srgbClr val="EFF3FA"/>
-                    </a:solidFill>
-                  </a:tcPr>
-                </a:tc>
-                <a:tc>
-                  <a:txBody>
-                    <a:bodyPr/>
-                    <a:lstStyle/>
-                    <a:p>
-                      <a:r>
-                        <a:rPr sz="1000" b="0">
-                          <a:latin typeface="Calibri"/>
-                        </a:rPr>
-                        <a:t>0.77 (real gap, real sign)</a:t>
-                      </a:r>
-                    </a:p>
-                  </a:txBody>
-                  <a:tcPr>
-                    <a:solidFill>
-                      <a:srgbClr val="EFF3FA"/>
-                    </a:solidFill>
-                  </a:tcPr>
-                </a:tc>
-              </a:tr>
-              <a:tr h="512064">
-                <a:tc>
-                  <a:txBody>
-                    <a:bodyPr/>
-                    <a:lstStyle/>
-                    <a:p>
-                      <a:r>
-                        <a:rPr sz="1000" b="1">
-                          <a:latin typeface="Calibri"/>
-                        </a:rPr>
-                        <a:t>pacman/sqlite/lz4/lua ~0</a:t>
-                      </a:r>
-                    </a:p>
-                  </a:txBody>
-                  <a:tcPr>
-                    <a:solidFill>
-                      <a:srgbClr val="FFFFFF"/>
-                    </a:solidFill>
-                  </a:tcPr>
-                </a:tc>
-                <a:tc>
-                  <a:txBody>
-                    <a:bodyPr/>
-                    <a:lstStyle/>
-                    <a:p>
-                      <a:r>
-                        <a:rPr sz="1000" b="0">
-                          <a:latin typeface="Calibri"/>
-                        </a:rPr>
-                        <a:t>true traffic below the DDR counter's ~0.4 M-line/window noise floor (calibrated by alu)</a:t>
-                      </a:r>
-                    </a:p>
-                  </a:txBody>
-                  <a:tcPr>
-                    <a:solidFill>
-                      <a:srgbClr val="FFFFFF"/>
-                    </a:solidFill>
-                  </a:tcPr>
-                </a:tc>
-                <a:tc>
-                  <a:txBody>
-                    <a:bodyPr/>
-                    <a:lstStyle/>
-                    <a:p>
-                      <a:r>
-                        <a:rPr sz="1000" b="0">
-                          <a:latin typeface="Calibri"/>
-                        </a:rPr>
-                        <a:t>classify, don't fit</a:t>
-                      </a:r>
-                    </a:p>
-                  </a:txBody>
-                  <a:tcPr>
-                    <a:solidFill>
-                      <a:srgbClr val="FFFFFF"/>
-                    </a:solidFill>
-                  </a:tcPr>
-                </a:tc>
-                <a:tc>
-                  <a:txBody>
-                    <a:bodyPr/>
-                    <a:lstStyle/>
-                    <a:p>
-                      <a:r>
-                        <a:rPr sz="1000" b="0">
-                          <a:latin typeface="Calibri"/>
-                        </a:rPr>
-                        <a:t>correctly predicted quiet</a:t>
-                      </a:r>
-                    </a:p>
-                  </a:txBody>
-                  <a:tcPr>
-                    <a:solidFill>
-                      <a:srgbClr val="FFFFFF"/>
-                    </a:solidFill>
-                  </a:tcPr>
-                </a:tc>
-              </a:tr>
-              <a:tr h="512064">
-                <a:tc>
-                  <a:txBody>
-                    <a:bodyPr/>
-                    <a:lstStyle/>
-                    <a:p>
-                      <a:r>
-                        <a:rPr sz="1000" b="1">
-                          <a:latin typeface="Calibri"/>
-                        </a:rPr>
-                        <a:t>bzip2 0.49</a:t>
-                      </a:r>
-                    </a:p>
-                  </a:txBody>
-                  <a:tcPr>
-                    <a:solidFill>
-                      <a:srgbClr val="EFF3FA"/>
-                    </a:solidFill>
-                  </a:tcPr>
-                </a:tc>
-                <a:tc>
-                  <a:txBody>
-                    <a:bodyPr/>
-                    <a:lstStyle/>
-                    <a:p>
-                      <a:r>
-                        <a:rPr sz="1000" b="0">
-                          <a:latin typeface="Calibri"/>
-                        </a:rPr>
-                        <a:t>prefetcher over-fetch on semi-sequential patterns — silicon reads ~2× the demand traffic</a:t>
-                      </a:r>
-                    </a:p>
-                  </a:txBody>
-                  <a:tcPr>
-                    <a:solidFill>
-                      <a:srgbClr val="EFF3FA"/>
-                    </a:solidFill>
-                  </a:tcPr>
-                </a:tc>
-                <a:tc>
-                  <a:txBody>
-                    <a:bodyPr/>
-                    <a:lstStyle/>
-                    <a:p>
-                      <a:r>
-                        <a:rPr sz="1000" b="0">
-                          <a:latin typeface="Calibri"/>
-                        </a:rPr>
-                        <a:t>prefetch model, or per-class factor</a:t>
-                      </a:r>
-                    </a:p>
-                  </a:txBody>
-                  <a:tcPr>
-                    <a:solidFill>
-                      <a:srgbClr val="EFF3FA"/>
-                    </a:solidFill>
-                  </a:tcPr>
-                </a:tc>
-                <a:tc>
-                  <a:txBody>
-                    <a:bodyPr/>
-                    <a:lstStyle/>
-                    <a:p>
-                      <a:r>
-                        <a:rPr sz="1000" b="0">
-                          <a:latin typeface="Calibri"/>
-                        </a:rPr>
-                        <a:t>open, named</a:t>
-                      </a:r>
-                    </a:p>
-                  </a:txBody>
-                  <a:tcPr>
-                    <a:solidFill>
-                      <a:srgbClr val="EFF3FA"/>
-                    </a:solidFill>
-                  </a:tcPr>
-                </a:tc>
-              </a:tr>
-              <a:tr h="512064">
-                <a:tc>
-                  <a:txBody>
-                    <a:bodyPr/>
-                    <a:lstStyle/>
-                    <a:p>
-                      <a:r>
-                        <a:rPr sz="1000" b="1">
-                          <a:latin typeface="Calibri"/>
-                        </a:rPr>
-                        <a:t>writes 0.02–0.09 (v1)</a:t>
-                      </a:r>
-                    </a:p>
-                  </a:txBody>
-                  <a:tcPr>
-                    <a:solidFill>
-                      <a:srgbClr val="FFFFFF"/>
-                    </a:solidFill>
-                  </a:tcPr>
-                </a:tc>
-                <a:tc>
-                  <a:txBody>
-                    <a:bodyPr/>
-                    <a:lstStyle/>
-                    <a:p>
-                      <a:r>
-                        <a:rPr sz="1000" b="0">
-                          <a:latin typeface="Calibri"/>
-                        </a:rPr>
-                        <a:t>scattered stores exit DRAM as dirty EVICTIONS, which no allocation-time count can see</a:t>
-                      </a:r>
-                    </a:p>
-                  </a:txBody>
-                  <a:tcPr>
-                    <a:solidFill>
-                      <a:srgbClr val="FFFFFF"/>
-                    </a:solidFill>
-                  </a:tcPr>
-                </a:tc>
-                <a:tc>
-                  <a:txBody>
-                    <a:bodyPr/>
-                    <a:lstStyle/>
-                    <a:p>
-                      <a:r>
-                        <a:rPr sz="1000" b="0">
-                          <a:latin typeface="Calibri"/>
-                        </a:rPr>
-                        <a:t>X1: dirty-line set + last-level eviction counting</a:t>
-                      </a:r>
-                    </a:p>
-                  </a:txBody>
-                  <a:tcPr>
-                    <a:solidFill>
-                      <a:srgbClr val="FFFFFF"/>
-                    </a:solidFill>
-                  </a:tcPr>
-                </a:tc>
-                <a:tc>
-                  <a:txBody>
-                    <a:bodyPr/>
-                    <a:lstStyle/>
-                    <a:p>
-                      <a:r>
-                        <a:rPr sz="1000" b="0">
-                          <a:latin typeface="Calibri"/>
-                        </a:rPr>
-                        <a:t>0.90 ×/÷ 1.09</a:t>
-                      </a:r>
-                    </a:p>
-                  </a:txBody>
-                  <a:tcPr>
-                    <a:solidFill>
-                      <a:srgbClr val="FFFFFF"/>
-                    </a:solidFill>
-                  </a:tcPr>
-                </a:tc>
-              </a:tr>
-              <a:tr h="512064">
-                <a:tc>
-                  <a:txBody>
-                    <a:bodyPr/>
-                    <a:lstStyle/>
-                    <a:p>
-                      <a:r>
-                        <a:rPr sz="1000" b="1">
-                          <a:latin typeface="Calibri"/>
-                        </a:rPr>
-                        <a:t>sgm-mt insns 1.23 @4T</a:t>
-                      </a:r>
-                    </a:p>
-                  </a:txBody>
-                  <a:tcPr>
-                    <a:solidFill>
-                      <a:srgbClr val="EFF3FA"/>
-                    </a:solidFill>
-                  </a:tcPr>
-                </a:tc>
-                <a:tc>
-                  <a:txBody>
-                    <a:bodyPr/>
-                    <a:lstStyle/>
-                    <a:p>
-                      <a:r>
-                        <a:rPr sz="1000" b="0">
-                          <a:latin typeface="Calibri"/>
-                        </a:rPr>
-                        <a:t>OpenMP barrier SPIN — timing-dependent instructions, inflated by instrumentation skew</a:t>
-                      </a:r>
-                    </a:p>
-                  </a:txBody>
-                  <a:tcPr>
-                    <a:solidFill>
-                      <a:srgbClr val="EFF3FA"/>
-                    </a:solidFill>
-                  </a:tcPr>
-                </a:tc>
-                <a:tc>
-                  <a:txBody>
-                    <a:bodyPr/>
-                    <a:lstStyle/>
-                    <a:p>
-                      <a:r>
-                        <a:rPr sz="1000" b="0">
-                          <a:latin typeface="Calibri"/>
-                        </a:rPr>
-                        <a:t>X3: OMP_WAIT_POLICY=passive (proven, not argued)</a:t>
-                      </a:r>
-                    </a:p>
-                  </a:txBody>
-                  <a:tcPr>
-                    <a:solidFill>
-                      <a:srgbClr val="EFF3FA"/>
-                    </a:solidFill>
-                  </a:tcPr>
-                </a:tc>
-                <a:tc>
-                  <a:txBody>
-                    <a:bodyPr/>
-                    <a:lstStyle/>
-                    <a:p>
-                      <a:r>
-                        <a:rPr sz="1000" b="0">
-                          <a:latin typeface="Calibri"/>
-                        </a:rPr>
-                        <a:t>0.985; DRAM unmoved</a:t>
-                      </a:r>
-                    </a:p>
-                  </a:txBody>
-                  <a:tcPr>
-                    <a:solidFill>
-                      <a:srgbClr val="EFF3FA"/>
-                    </a:solidFill>
-                  </a:tcPr>
-                </a:tc>
-              </a:tr>
-              <a:tr h="512064">
-                <a:tc>
-                  <a:txBody>
-                    <a:bodyPr/>
-                    <a:lstStyle/>
-                    <a:p>
-                      <a:r>
-                        <a:rPr sz="1000" b="1">
-                          <a:latin typeface="Calibri"/>
-                        </a:rPr>
-                        <a:t>reads 0.49–0.77 (under)</a:t>
-                      </a:r>
-                    </a:p>
-                  </a:txBody>
-                  <a:tcPr>
-                    <a:solidFill>
-                      <a:srgbClr val="FFFFFF"/>
-                    </a:solidFill>
-                  </a:tcPr>
-                </a:tc>
-                <a:tc>
-                  <a:txBody>
-                    <a:bodyPr/>
-                    <a:lstStyle/>
-                    <a:p>
-                      <a:r>
-                        <a:rPr sz="1000" b="0">
-                          <a:latin typeface="Calibri"/>
-                        </a:rPr>
-                        <a:t>silicon prefetcher traffic the model never issued</a:t>
-                      </a:r>
-                    </a:p>
-                  </a:txBody>
-                  <a:tcPr>
-                    <a:solidFill>
-                      <a:srgbClr val="FFFFFF"/>
-                    </a:solidFill>
-                  </a:tcPr>
-                </a:tc>
-                <a:tc>
-                  <a:txBody>
-                    <a:bodyPr/>
-                    <a:lstStyle/>
-                    <a:p>
-                      <a:r>
-                        <a:rPr sz="1000" b="0">
-                          <a:latin typeface="Calibri"/>
-                        </a:rPr>
-                        <a:t>X4: 8-stream table, miss-trained, strict +1, ramped depth</a:t>
-                      </a:r>
-                    </a:p>
-                  </a:txBody>
-                  <a:tcPr>
-                    <a:solidFill>
-                      <a:srgbClr val="FFFFFF"/>
-                    </a:solidFill>
-                  </a:tcPr>
-                </a:tc>
-                <a:tc>
-                  <a:txBody>
-                    <a:bodyPr/>
-                    <a:lstStyle/>
-                    <a:p>
-                      <a:r>
-                        <a:rPr sz="1000" b="0">
-                          <a:latin typeface="Calibri"/>
-                        </a:rPr>
-                        <a:t>0.98 ×/÷ 1.14</a:t>
-                      </a:r>
-                    </a:p>
-                  </a:txBody>
-                  <a:tcPr>
-                    <a:solidFill>
-                      <a:srgbClr val="FFFFFF"/>
-                    </a:solidFill>
-                  </a:tcPr>
-                </a:tc>
-              </a:tr>
-            </a:tbl>
-          </a:graphicData>
-        </a:graphic>
-      </p:graphicFrame>
+        </p:nvPicPr>
+        <p:blipFill>
+          <a:blip r:embed="rId2"/>
+          <a:stretch>
+            <a:fillRect/>
+          </a:stretch>
+        </p:blipFill>
+        <p:spPr>
+          <a:xfrm>
+            <a:off x="1325880" y="1371600"/>
+            <a:ext cx="9509760" cy="4389120"/>
+          </a:xfrm>
+          <a:prstGeom prst="rect">
+            <a:avLst/>
+          </a:prstGeom>
+        </p:spPr>
+      </p:pic>
       <p:sp>
         <p:nvSpPr>
           <p:cNvPr id="9" name="TextBox 8"/>
@@ -7795,8 +7140,8 @@
         </p:nvSpPr>
         <p:spPr>
           <a:xfrm>
-            <a:off x="548640" y="5257800"/>
-            <a:ext cx="11064240" cy="731520"/>
+            <a:off x="548640" y="5989320"/>
+            <a:ext cx="11064240" cy="640080"/>
           </a:xfrm>
           <a:prstGeom prst="rect">
             <a:avLst/>
@@ -7811,13 +7156,13 @@
           <a:p>
             <a:pPr algn="l"/>
             <a:r>
-              <a:rPr sz="1150" b="0">
+              <a:rPr sz="1150" b="1">
                 <a:solidFill>
                   <a:srgbClr val="202124"/>
                 </a:solidFill>
                 <a:latin typeface="Calibri"/>
               </a:rPr>
-              <a:t>The X1 row landed after this deck's first printing and proves the pattern: the named mechanism, implemented in an afternoon, moved six workloads from near-zero to 0.73–1.03 without touching the read side. Mechanism-first iteration converges; fudge-factor iteration doesn't.</a:t>
+              <a:t>Held-out instructions 0.979 ×/÷ 1.04 (n=37) · held-out reads 0.91 ×/÷ 1.21 — the SAME spread as the fitted population · writes 0.83 ×/÷ 1.28 · every DRAM-quiet app correctly classified. A variance projection built on 14 applications predicted 36 it had never seen — the factors are properties of the model, not of the apps they were fitted on.</a:t>
             </a:r>
           </a:p>
         </p:txBody>
@@ -7913,7 +7258,7 @@
                 </a:solidFill>
                 <a:latin typeface="Calibri"/>
               </a:rPr>
-              <a:t>What this licenses, and what it does not</a:t>
+              <a:t>Every outlier resolved to a mechanism, not a fudge</a:t>
             </a:r>
           </a:p>
         </p:txBody>
@@ -7991,7 +7336,7 @@
                 </a:solidFill>
                 <a:latin typeface="Calibri"/>
               </a:rPr>
-              <a:t>The trust statement, quantity by quantity.</a:t>
+              <a:t>The band tightened from ×/÷2.4 to ×/÷1.26 in three fixes; each was falsifiable and predicted its own after-number.</a:t>
             </a:r>
           </a:p>
         </p:txBody>
@@ -8076,7 +7421,1028 @@
         </p:nvGraphicFramePr>
         <p:xfrm>
           <a:off x="548640" y="1463040"/>
-          <a:ext cx="11064240" cy="3803904"/>
+          <a:ext cx="11064240" cy="4608576"/>
+        </p:xfrm>
+        <a:graphic>
+          <a:graphicData uri="http://schemas.openxmlformats.org/drawingml/2006/table">
+            <a:tbl>
+              <a:tblPr firstRow="1" bandRow="1">
+                <a:tableStyleId>{5C22544A-7EE6-4342-B048-85BDC9FD1C3A}</a:tableStyleId>
+              </a:tblPr>
+              <a:tblGrid>
+                <a:gridCol w="2057400"/>
+                <a:gridCol w="4480560"/>
+                <a:gridCol w="2377440"/>
+                <a:gridCol w="2148840"/>
+              </a:tblGrid>
+              <a:tr h="512064">
+                <a:tc>
+                  <a:txBody>
+                    <a:bodyPr/>
+                    <a:lstStyle/>
+                    <a:p>
+                      <a:r>
+                        <a:rPr sz="1000" b="1">
+                          <a:solidFill>
+                            <a:srgbClr val="FFFFFF"/>
+                          </a:solidFill>
+                          <a:latin typeface="Calibri"/>
+                        </a:rPr>
+                        <a:t>observation</a:t>
+                      </a:r>
+                    </a:p>
+                  </a:txBody>
+                  <a:tcPr>
+                    <a:solidFill>
+                      <a:srgbClr val="202124"/>
+                    </a:solidFill>
+                  </a:tcPr>
+                </a:tc>
+                <a:tc>
+                  <a:txBody>
+                    <a:bodyPr/>
+                    <a:lstStyle/>
+                    <a:p>
+                      <a:r>
+                        <a:rPr sz="1000" b="1">
+                          <a:solidFill>
+                            <a:srgbClr val="FFFFFF"/>
+                          </a:solidFill>
+                          <a:latin typeface="Calibri"/>
+                        </a:rPr>
+                        <a:t>mechanism</a:t>
+                      </a:r>
+                    </a:p>
+                  </a:txBody>
+                  <a:tcPr>
+                    <a:solidFill>
+                      <a:srgbClr val="202124"/>
+                    </a:solidFill>
+                  </a:tcPr>
+                </a:tc>
+                <a:tc>
+                  <a:txBody>
+                    <a:bodyPr/>
+                    <a:lstStyle/>
+                    <a:p>
+                      <a:r>
+                        <a:rPr sz="1000" b="1">
+                          <a:solidFill>
+                            <a:srgbClr val="FFFFFF"/>
+                          </a:solidFill>
+                          <a:latin typeface="Calibri"/>
+                        </a:rPr>
+                        <a:t>fix</a:t>
+                      </a:r>
+                    </a:p>
+                  </a:txBody>
+                  <a:tcPr>
+                    <a:solidFill>
+                      <a:srgbClr val="202124"/>
+                    </a:solidFill>
+                  </a:tcPr>
+                </a:tc>
+                <a:tc>
+                  <a:txBody>
+                    <a:bodyPr/>
+                    <a:lstStyle/>
+                    <a:p>
+                      <a:r>
+                        <a:rPr sz="1000" b="1">
+                          <a:solidFill>
+                            <a:srgbClr val="FFFFFF"/>
+                          </a:solidFill>
+                          <a:latin typeface="Calibri"/>
+                        </a:rPr>
+                        <a:t>after</a:t>
+                      </a:r>
+                    </a:p>
+                  </a:txBody>
+                  <a:tcPr>
+                    <a:solidFill>
+                      <a:srgbClr val="202124"/>
+                    </a:solidFill>
+                  </a:tcPr>
+                </a:tc>
+              </a:tr>
+              <a:tr h="512064">
+                <a:tc>
+                  <a:txBody>
+                    <a:bodyPr/>
+                    <a:lstStyle/>
+                    <a:p>
+                      <a:r>
+                        <a:rPr sz="1000" b="1">
+                          <a:latin typeface="Calibri"/>
+                        </a:rPr>
+                        <a:t>mm read 0.44 (v0)</a:t>
+                      </a:r>
+                    </a:p>
+                  </a:txBody>
+                  <a:tcPr>
+                    <a:solidFill>
+                      <a:srgbClr val="EFF3FA"/>
+                    </a:solidFill>
+                  </a:tcPr>
+                </a:tc>
+                <a:tc>
+                  <a:txBody>
+                    <a:bodyPr/>
+                    <a:lstStyle/>
+                    <a:p>
+                      <a:r>
+                        <a:rPr sz="1000" b="0">
+                          <a:latin typeface="Calibri"/>
+                        </a:rPr>
+                        <a:t>plugin default cache ≫ real 64 KiB L2 — model thought the working set was resident</a:t>
+                      </a:r>
+                    </a:p>
+                  </a:txBody>
+                  <a:tcPr>
+                    <a:solidFill>
+                      <a:srgbClr val="EFF3FA"/>
+                    </a:solidFill>
+                  </a:tcPr>
+                </a:tc>
+                <a:tc>
+                  <a:txBody>
+                    <a:bodyPr/>
+                    <a:lstStyle/>
+                    <a:p>
+                      <a:r>
+                        <a:rPr sz="1000" b="0">
+                          <a:latin typeface="Calibri"/>
+                        </a:rPr>
+                        <a:t>model the sysfs hierarchy</a:t>
+                      </a:r>
+                    </a:p>
+                  </a:txBody>
+                  <a:tcPr>
+                    <a:solidFill>
+                      <a:srgbClr val="EFF3FA"/>
+                    </a:solidFill>
+                  </a:tcPr>
+                </a:tc>
+                <a:tc>
+                  <a:txBody>
+                    <a:bodyPr/>
+                    <a:lstStyle/>
+                    <a:p>
+                      <a:r>
+                        <a:rPr sz="1000" b="0">
+                          <a:latin typeface="Calibri"/>
+                        </a:rPr>
+                        <a:t>0.65 (residual = prefetch)</a:t>
+                      </a:r>
+                    </a:p>
+                  </a:txBody>
+                  <a:tcPr>
+                    <a:solidFill>
+                      <a:srgbClr val="EFF3FA"/>
+                    </a:solidFill>
+                  </a:tcPr>
+                </a:tc>
+              </a:tr>
+              <a:tr h="512064">
+                <a:tc>
+                  <a:txBody>
+                    <a:bodyPr/>
+                    <a:lstStyle/>
+                    <a:p>
+                      <a:r>
+                        <a:rPr sz="1000" b="1">
+                          <a:latin typeface="Calibri"/>
+                        </a:rPr>
+                        <a:t>mem read 1.97 (v0)</a:t>
+                      </a:r>
+                    </a:p>
+                  </a:txBody>
+                  <a:tcPr>
+                    <a:solidFill>
+                      <a:srgbClr val="FFFFFF"/>
+                    </a:solidFill>
+                  </a:tcPr>
+                </a:tc>
+                <a:tc>
+                  <a:txBody>
+                    <a:bodyPr/>
+                    <a:lstStyle/>
+                    <a:p>
+                      <a:r>
+                        <a:rPr sz="1000" b="0">
+                          <a:latin typeface="Calibri"/>
+                        </a:rPr>
+                        <a:t>A55 write-streaming: no-allocate store bursts; plugin read-allocated every store</a:t>
+                      </a:r>
+                    </a:p>
+                  </a:txBody>
+                  <a:tcPr>
+                    <a:solidFill>
+                      <a:srgbClr val="FFFFFF"/>
+                    </a:solidFill>
+                  </a:tcPr>
+                </a:tc>
+                <a:tc>
+                  <a:txBody>
+                    <a:bodyPr/>
+                    <a:lstStyle/>
+                    <a:p>
+                      <a:r>
+                        <a:rPr sz="1000" b="0">
+                          <a:latin typeface="Calibri"/>
+                        </a:rPr>
+                        <a:t>streak detector, ≥4 lines → no-allocate</a:t>
+                      </a:r>
+                    </a:p>
+                  </a:txBody>
+                  <a:tcPr>
+                    <a:solidFill>
+                      <a:srgbClr val="FFFFFF"/>
+                    </a:solidFill>
+                  </a:tcPr>
+                </a:tc>
+                <a:tc>
+                  <a:txBody>
+                    <a:bodyPr/>
+                    <a:lstStyle/>
+                    <a:p>
+                      <a:r>
+                        <a:rPr sz="1000" b="0">
+                          <a:latin typeface="Calibri"/>
+                        </a:rPr>
+                        <a:t>0.98</a:t>
+                      </a:r>
+                    </a:p>
+                  </a:txBody>
+                  <a:tcPr>
+                    <a:solidFill>
+                      <a:srgbClr val="FFFFFF"/>
+                    </a:solidFill>
+                  </a:tcPr>
+                </a:tc>
+              </a:tr>
+              <a:tr h="512064">
+                <a:tc>
+                  <a:txBody>
+                    <a:bodyPr/>
+                    <a:lstStyle/>
+                    <a:p>
+                      <a:r>
+                        <a:rPr sz="1000" b="1">
+                          <a:latin typeface="Calibri"/>
+                        </a:rPr>
+                        <a:t>sha256 'read 15×'</a:t>
+                      </a:r>
+                    </a:p>
+                  </a:txBody>
+                  <a:tcPr>
+                    <a:solidFill>
+                      <a:srgbClr val="EFF3FA"/>
+                    </a:solidFill>
+                  </a:tcPr>
+                </a:tc>
+                <a:tc>
+                  <a:txBody>
+                    <a:bodyPr/>
+                    <a:lstStyle/>
+                    <a:p>
+                      <a:r>
+                        <a:rPr sz="1000" b="0">
+                          <a:latin typeface="Calibri"/>
+                        </a:rPr>
+                        <a:t>l3d_cache_refill counts demand only; the prefetcher served the stream invisibly</a:t>
+                      </a:r>
+                    </a:p>
+                  </a:txBody>
+                  <a:tcPr>
+                    <a:solidFill>
+                      <a:srgbClr val="EFF3FA"/>
+                    </a:solidFill>
+                  </a:tcPr>
+                </a:tc>
+                <a:tc>
+                  <a:txBody>
+                    <a:bodyPr/>
+                    <a:lstStyle/>
+                    <a:p>
+                      <a:r>
+                        <a:rPr sz="1000" b="0">
+                          <a:latin typeface="Calibri"/>
+                        </a:rPr>
+                        <a:t>ground-truth at the DDR controller</a:t>
+                      </a:r>
+                    </a:p>
+                  </a:txBody>
+                  <a:tcPr>
+                    <a:solidFill>
+                      <a:srgbClr val="EFF3FA"/>
+                    </a:solidFill>
+                  </a:tcPr>
+                </a:tc>
+                <a:tc>
+                  <a:txBody>
+                    <a:bodyPr/>
+                    <a:lstStyle/>
+                    <a:p>
+                      <a:r>
+                        <a:rPr sz="1000" b="0">
+                          <a:latin typeface="Calibri"/>
+                        </a:rPr>
+                        <a:t>0.77 (real gap, real sign)</a:t>
+                      </a:r>
+                    </a:p>
+                  </a:txBody>
+                  <a:tcPr>
+                    <a:solidFill>
+                      <a:srgbClr val="EFF3FA"/>
+                    </a:solidFill>
+                  </a:tcPr>
+                </a:tc>
+              </a:tr>
+              <a:tr h="512064">
+                <a:tc>
+                  <a:txBody>
+                    <a:bodyPr/>
+                    <a:lstStyle/>
+                    <a:p>
+                      <a:r>
+                        <a:rPr sz="1000" b="1">
+                          <a:latin typeface="Calibri"/>
+                        </a:rPr>
+                        <a:t>pacman/sqlite/lz4/lua ~0</a:t>
+                      </a:r>
+                    </a:p>
+                  </a:txBody>
+                  <a:tcPr>
+                    <a:solidFill>
+                      <a:srgbClr val="FFFFFF"/>
+                    </a:solidFill>
+                  </a:tcPr>
+                </a:tc>
+                <a:tc>
+                  <a:txBody>
+                    <a:bodyPr/>
+                    <a:lstStyle/>
+                    <a:p>
+                      <a:r>
+                        <a:rPr sz="1000" b="0">
+                          <a:latin typeface="Calibri"/>
+                        </a:rPr>
+                        <a:t>true traffic below the DDR counter's ~0.4 M-line/window noise floor (calibrated by alu)</a:t>
+                      </a:r>
+                    </a:p>
+                  </a:txBody>
+                  <a:tcPr>
+                    <a:solidFill>
+                      <a:srgbClr val="FFFFFF"/>
+                    </a:solidFill>
+                  </a:tcPr>
+                </a:tc>
+                <a:tc>
+                  <a:txBody>
+                    <a:bodyPr/>
+                    <a:lstStyle/>
+                    <a:p>
+                      <a:r>
+                        <a:rPr sz="1000" b="0">
+                          <a:latin typeface="Calibri"/>
+                        </a:rPr>
+                        <a:t>classify, don't fit</a:t>
+                      </a:r>
+                    </a:p>
+                  </a:txBody>
+                  <a:tcPr>
+                    <a:solidFill>
+                      <a:srgbClr val="FFFFFF"/>
+                    </a:solidFill>
+                  </a:tcPr>
+                </a:tc>
+                <a:tc>
+                  <a:txBody>
+                    <a:bodyPr/>
+                    <a:lstStyle/>
+                    <a:p>
+                      <a:r>
+                        <a:rPr sz="1000" b="0">
+                          <a:latin typeface="Calibri"/>
+                        </a:rPr>
+                        <a:t>correctly predicted quiet</a:t>
+                      </a:r>
+                    </a:p>
+                  </a:txBody>
+                  <a:tcPr>
+                    <a:solidFill>
+                      <a:srgbClr val="FFFFFF"/>
+                    </a:solidFill>
+                  </a:tcPr>
+                </a:tc>
+              </a:tr>
+              <a:tr h="512064">
+                <a:tc>
+                  <a:txBody>
+                    <a:bodyPr/>
+                    <a:lstStyle/>
+                    <a:p>
+                      <a:r>
+                        <a:rPr sz="1000" b="1">
+                          <a:latin typeface="Calibri"/>
+                        </a:rPr>
+                        <a:t>bzip2 0.49</a:t>
+                      </a:r>
+                    </a:p>
+                  </a:txBody>
+                  <a:tcPr>
+                    <a:solidFill>
+                      <a:srgbClr val="EFF3FA"/>
+                    </a:solidFill>
+                  </a:tcPr>
+                </a:tc>
+                <a:tc>
+                  <a:txBody>
+                    <a:bodyPr/>
+                    <a:lstStyle/>
+                    <a:p>
+                      <a:r>
+                        <a:rPr sz="1000" b="0">
+                          <a:latin typeface="Calibri"/>
+                        </a:rPr>
+                        <a:t>prefetcher over-fetch on semi-sequential patterns — silicon reads ~2× the demand traffic</a:t>
+                      </a:r>
+                    </a:p>
+                  </a:txBody>
+                  <a:tcPr>
+                    <a:solidFill>
+                      <a:srgbClr val="EFF3FA"/>
+                    </a:solidFill>
+                  </a:tcPr>
+                </a:tc>
+                <a:tc>
+                  <a:txBody>
+                    <a:bodyPr/>
+                    <a:lstStyle/>
+                    <a:p>
+                      <a:r>
+                        <a:rPr sz="1000" b="0">
+                          <a:latin typeface="Calibri"/>
+                        </a:rPr>
+                        <a:t>prefetch model, or per-class factor</a:t>
+                      </a:r>
+                    </a:p>
+                  </a:txBody>
+                  <a:tcPr>
+                    <a:solidFill>
+                      <a:srgbClr val="EFF3FA"/>
+                    </a:solidFill>
+                  </a:tcPr>
+                </a:tc>
+                <a:tc>
+                  <a:txBody>
+                    <a:bodyPr/>
+                    <a:lstStyle/>
+                    <a:p>
+                      <a:r>
+                        <a:rPr sz="1000" b="0">
+                          <a:latin typeface="Calibri"/>
+                        </a:rPr>
+                        <a:t>open, named</a:t>
+                      </a:r>
+                    </a:p>
+                  </a:txBody>
+                  <a:tcPr>
+                    <a:solidFill>
+                      <a:srgbClr val="EFF3FA"/>
+                    </a:solidFill>
+                  </a:tcPr>
+                </a:tc>
+              </a:tr>
+              <a:tr h="512064">
+                <a:tc>
+                  <a:txBody>
+                    <a:bodyPr/>
+                    <a:lstStyle/>
+                    <a:p>
+                      <a:r>
+                        <a:rPr sz="1000" b="1">
+                          <a:latin typeface="Calibri"/>
+                        </a:rPr>
+                        <a:t>writes 0.02–0.09 (v1)</a:t>
+                      </a:r>
+                    </a:p>
+                  </a:txBody>
+                  <a:tcPr>
+                    <a:solidFill>
+                      <a:srgbClr val="FFFFFF"/>
+                    </a:solidFill>
+                  </a:tcPr>
+                </a:tc>
+                <a:tc>
+                  <a:txBody>
+                    <a:bodyPr/>
+                    <a:lstStyle/>
+                    <a:p>
+                      <a:r>
+                        <a:rPr sz="1000" b="0">
+                          <a:latin typeface="Calibri"/>
+                        </a:rPr>
+                        <a:t>scattered stores exit DRAM as dirty EVICTIONS, which no allocation-time count can see</a:t>
+                      </a:r>
+                    </a:p>
+                  </a:txBody>
+                  <a:tcPr>
+                    <a:solidFill>
+                      <a:srgbClr val="FFFFFF"/>
+                    </a:solidFill>
+                  </a:tcPr>
+                </a:tc>
+                <a:tc>
+                  <a:txBody>
+                    <a:bodyPr/>
+                    <a:lstStyle/>
+                    <a:p>
+                      <a:r>
+                        <a:rPr sz="1000" b="0">
+                          <a:latin typeface="Calibri"/>
+                        </a:rPr>
+                        <a:t>X1: dirty-line set + last-level eviction counting</a:t>
+                      </a:r>
+                    </a:p>
+                  </a:txBody>
+                  <a:tcPr>
+                    <a:solidFill>
+                      <a:srgbClr val="FFFFFF"/>
+                    </a:solidFill>
+                  </a:tcPr>
+                </a:tc>
+                <a:tc>
+                  <a:txBody>
+                    <a:bodyPr/>
+                    <a:lstStyle/>
+                    <a:p>
+                      <a:r>
+                        <a:rPr sz="1000" b="0">
+                          <a:latin typeface="Calibri"/>
+                        </a:rPr>
+                        <a:t>0.90 ×/÷ 1.09</a:t>
+                      </a:r>
+                    </a:p>
+                  </a:txBody>
+                  <a:tcPr>
+                    <a:solidFill>
+                      <a:srgbClr val="FFFFFF"/>
+                    </a:solidFill>
+                  </a:tcPr>
+                </a:tc>
+              </a:tr>
+              <a:tr h="512064">
+                <a:tc>
+                  <a:txBody>
+                    <a:bodyPr/>
+                    <a:lstStyle/>
+                    <a:p>
+                      <a:r>
+                        <a:rPr sz="1000" b="1">
+                          <a:latin typeface="Calibri"/>
+                        </a:rPr>
+                        <a:t>sgm-mt insns 1.23 @4T</a:t>
+                      </a:r>
+                    </a:p>
+                  </a:txBody>
+                  <a:tcPr>
+                    <a:solidFill>
+                      <a:srgbClr val="EFF3FA"/>
+                    </a:solidFill>
+                  </a:tcPr>
+                </a:tc>
+                <a:tc>
+                  <a:txBody>
+                    <a:bodyPr/>
+                    <a:lstStyle/>
+                    <a:p>
+                      <a:r>
+                        <a:rPr sz="1000" b="0">
+                          <a:latin typeface="Calibri"/>
+                        </a:rPr>
+                        <a:t>OpenMP barrier SPIN — timing-dependent instructions, inflated by instrumentation skew</a:t>
+                      </a:r>
+                    </a:p>
+                  </a:txBody>
+                  <a:tcPr>
+                    <a:solidFill>
+                      <a:srgbClr val="EFF3FA"/>
+                    </a:solidFill>
+                  </a:tcPr>
+                </a:tc>
+                <a:tc>
+                  <a:txBody>
+                    <a:bodyPr/>
+                    <a:lstStyle/>
+                    <a:p>
+                      <a:r>
+                        <a:rPr sz="1000" b="0">
+                          <a:latin typeface="Calibri"/>
+                        </a:rPr>
+                        <a:t>X3: OMP_WAIT_POLICY=passive (proven, not argued)</a:t>
+                      </a:r>
+                    </a:p>
+                  </a:txBody>
+                  <a:tcPr>
+                    <a:solidFill>
+                      <a:srgbClr val="EFF3FA"/>
+                    </a:solidFill>
+                  </a:tcPr>
+                </a:tc>
+                <a:tc>
+                  <a:txBody>
+                    <a:bodyPr/>
+                    <a:lstStyle/>
+                    <a:p>
+                      <a:r>
+                        <a:rPr sz="1000" b="0">
+                          <a:latin typeface="Calibri"/>
+                        </a:rPr>
+                        <a:t>0.985; DRAM unmoved</a:t>
+                      </a:r>
+                    </a:p>
+                  </a:txBody>
+                  <a:tcPr>
+                    <a:solidFill>
+                      <a:srgbClr val="EFF3FA"/>
+                    </a:solidFill>
+                  </a:tcPr>
+                </a:tc>
+              </a:tr>
+              <a:tr h="512064">
+                <a:tc>
+                  <a:txBody>
+                    <a:bodyPr/>
+                    <a:lstStyle/>
+                    <a:p>
+                      <a:r>
+                        <a:rPr sz="1000" b="1">
+                          <a:latin typeface="Calibri"/>
+                        </a:rPr>
+                        <a:t>reads 0.49–0.77 (under)</a:t>
+                      </a:r>
+                    </a:p>
+                  </a:txBody>
+                  <a:tcPr>
+                    <a:solidFill>
+                      <a:srgbClr val="FFFFFF"/>
+                    </a:solidFill>
+                  </a:tcPr>
+                </a:tc>
+                <a:tc>
+                  <a:txBody>
+                    <a:bodyPr/>
+                    <a:lstStyle/>
+                    <a:p>
+                      <a:r>
+                        <a:rPr sz="1000" b="0">
+                          <a:latin typeface="Calibri"/>
+                        </a:rPr>
+                        <a:t>silicon prefetcher traffic the model never issued</a:t>
+                      </a:r>
+                    </a:p>
+                  </a:txBody>
+                  <a:tcPr>
+                    <a:solidFill>
+                      <a:srgbClr val="FFFFFF"/>
+                    </a:solidFill>
+                  </a:tcPr>
+                </a:tc>
+                <a:tc>
+                  <a:txBody>
+                    <a:bodyPr/>
+                    <a:lstStyle/>
+                    <a:p>
+                      <a:r>
+                        <a:rPr sz="1000" b="0">
+                          <a:latin typeface="Calibri"/>
+                        </a:rPr>
+                        <a:t>X4: 8-stream table, miss-trained, strict +1, ramped depth</a:t>
+                      </a:r>
+                    </a:p>
+                  </a:txBody>
+                  <a:tcPr>
+                    <a:solidFill>
+                      <a:srgbClr val="FFFFFF"/>
+                    </a:solidFill>
+                  </a:tcPr>
+                </a:tc>
+                <a:tc>
+                  <a:txBody>
+                    <a:bodyPr/>
+                    <a:lstStyle/>
+                    <a:p>
+                      <a:r>
+                        <a:rPr sz="1000" b="0">
+                          <a:latin typeface="Calibri"/>
+                        </a:rPr>
+                        <a:t>0.98 ×/÷ 1.14</a:t>
+                      </a:r>
+                    </a:p>
+                  </a:txBody>
+                  <a:tcPr>
+                    <a:solidFill>
+                      <a:srgbClr val="FFFFFF"/>
+                    </a:solidFill>
+                  </a:tcPr>
+                </a:tc>
+              </a:tr>
+            </a:tbl>
+          </a:graphicData>
+        </a:graphic>
+      </p:graphicFrame>
+      <p:sp>
+        <p:nvSpPr>
+          <p:cNvPr id="9" name="TextBox 8"/>
+          <p:cNvSpPr txBox="1"/>
+          <p:nvPr/>
+        </p:nvSpPr>
+        <p:spPr>
+          <a:xfrm>
+            <a:off x="548640" y="5257800"/>
+            <a:ext cx="11064240" cy="731520"/>
+          </a:xfrm>
+          <a:prstGeom prst="rect">
+            <a:avLst/>
+          </a:prstGeom>
+          <a:noFill/>
+        </p:spPr>
+        <p:txBody>
+          <a:bodyPr wrap="square">
+            <a:spAutoFit/>
+          </a:bodyPr>
+          <a:lstStyle/>
+          <a:p>
+            <a:pPr algn="l"/>
+            <a:r>
+              <a:rPr sz="1150" b="0">
+                <a:solidFill>
+                  <a:srgbClr val="202124"/>
+                </a:solidFill>
+                <a:latin typeface="Calibri"/>
+              </a:rPr>
+              <a:t>The X1 row landed after this deck's first printing and proves the pattern: the named mechanism, implemented in an afternoon, moved six workloads from near-zero to 0.73–1.03 without touching the read side. Mechanism-first iteration converges; fudge-factor iteration doesn't.</a:t>
+            </a:r>
+          </a:p>
+        </p:txBody>
+      </p:sp>
+    </p:spTree>
+  </p:cSld>
+  <p:clrMapOvr>
+    <a:masterClrMapping/>
+  </p:clrMapOvr>
+</p:sld>
+</file>
+
+<file path=ppt/slides/slide8.xml><?xml version="1.0" encoding="utf-8"?>
+<p:sld xmlns:a="http://schemas.openxmlformats.org/drawingml/2006/main" xmlns:p="http://schemas.openxmlformats.org/presentationml/2006/main" xmlns:r="http://schemas.openxmlformats.org/officeDocument/2006/relationships">
+  <p:cSld>
+    <p:spTree>
+      <p:nvGrpSpPr>
+        <p:cNvPr id="1" name=""/>
+        <p:cNvGrpSpPr/>
+        <p:nvPr/>
+      </p:nvGrpSpPr>
+      <p:grpSpPr/>
+      <p:sp>
+        <p:nvSpPr>
+          <p:cNvPr id="2" name="Rectangle 1"/>
+          <p:cNvSpPr/>
+          <p:nvPr/>
+        </p:nvSpPr>
+        <p:spPr>
+          <a:xfrm>
+            <a:off x="0" y="0"/>
+            <a:ext cx="12191695" cy="841248"/>
+          </a:xfrm>
+          <a:prstGeom prst="rect">
+            <a:avLst/>
+          </a:prstGeom>
+          <a:solidFill>
+            <a:srgbClr val="202124"/>
+          </a:solidFill>
+          <a:ln>
+            <a:noFill/>
+          </a:ln>
+        </p:spPr>
+        <p:style>
+          <a:lnRef idx="1">
+            <a:schemeClr val="accent1"/>
+          </a:lnRef>
+          <a:fillRef idx="3">
+            <a:schemeClr val="accent1"/>
+          </a:fillRef>
+          <a:effectRef idx="2">
+            <a:schemeClr val="accent1"/>
+          </a:effectRef>
+          <a:fontRef idx="minor">
+            <a:schemeClr val="lt1"/>
+          </a:fontRef>
+        </p:style>
+        <p:txBody>
+          <a:bodyPr rtlCol="0" anchor="ctr"/>
+          <a:lstStyle/>
+          <a:p>
+            <a:pPr algn="ctr"/>
+          </a:p>
+        </p:txBody>
+      </p:sp>
+      <p:sp>
+        <p:nvSpPr>
+          <p:cNvPr id="3" name="TextBox 2"/>
+          <p:cNvSpPr txBox="1"/>
+          <p:nvPr/>
+        </p:nvSpPr>
+        <p:spPr>
+          <a:xfrm>
+            <a:off x="548640" y="118872"/>
+            <a:ext cx="10058400" cy="548640"/>
+          </a:xfrm>
+          <a:prstGeom prst="rect">
+            <a:avLst/>
+          </a:prstGeom>
+          <a:noFill/>
+        </p:spPr>
+        <p:txBody>
+          <a:bodyPr wrap="square">
+            <a:spAutoFit/>
+          </a:bodyPr>
+          <a:lstStyle/>
+          <a:p>
+            <a:pPr algn="l"/>
+            <a:r>
+              <a:rPr sz="2600" b="1">
+                <a:solidFill>
+                  <a:srgbClr val="FFFFFF"/>
+                </a:solidFill>
+                <a:latin typeface="Calibri"/>
+              </a:rPr>
+              <a:t>What this licenses, and what it does not</a:t>
+            </a:r>
+          </a:p>
+        </p:txBody>
+      </p:sp>
+      <p:sp>
+        <p:nvSpPr>
+          <p:cNvPr id="4" name="Rectangle 3"/>
+          <p:cNvSpPr/>
+          <p:nvPr/>
+        </p:nvSpPr>
+        <p:spPr>
+          <a:xfrm>
+            <a:off x="0" y="841248"/>
+            <a:ext cx="12191695" cy="38100"/>
+          </a:xfrm>
+          <a:prstGeom prst="rect">
+            <a:avLst/>
+          </a:prstGeom>
+          <a:solidFill>
+            <a:srgbClr val="1A53A0"/>
+          </a:solidFill>
+          <a:ln>
+            <a:noFill/>
+          </a:ln>
+        </p:spPr>
+        <p:style>
+          <a:lnRef idx="1">
+            <a:schemeClr val="accent1"/>
+          </a:lnRef>
+          <a:fillRef idx="3">
+            <a:schemeClr val="accent1"/>
+          </a:fillRef>
+          <a:effectRef idx="2">
+            <a:schemeClr val="accent1"/>
+          </a:effectRef>
+          <a:fontRef idx="minor">
+            <a:schemeClr val="lt1"/>
+          </a:fontRef>
+        </p:style>
+        <p:txBody>
+          <a:bodyPr rtlCol="0" anchor="ctr"/>
+          <a:lstStyle/>
+          <a:p>
+            <a:pPr algn="ctr"/>
+          </a:p>
+        </p:txBody>
+      </p:sp>
+      <p:sp>
+        <p:nvSpPr>
+          <p:cNvPr id="5" name="TextBox 4"/>
+          <p:cNvSpPr txBox="1"/>
+          <p:nvPr/>
+        </p:nvSpPr>
+        <p:spPr>
+          <a:xfrm>
+            <a:off x="548640" y="969264"/>
+            <a:ext cx="11155680" cy="365760"/>
+          </a:xfrm>
+          <a:prstGeom prst="rect">
+            <a:avLst/>
+          </a:prstGeom>
+          <a:noFill/>
+        </p:spPr>
+        <p:txBody>
+          <a:bodyPr wrap="square">
+            <a:spAutoFit/>
+          </a:bodyPr>
+          <a:lstStyle/>
+          <a:p>
+            <a:pPr algn="l"/>
+            <a:r>
+              <a:rPr sz="1200" b="0">
+                <a:solidFill>
+                  <a:srgbClr val="5F6368"/>
+                </a:solidFill>
+                <a:latin typeface="Calibri"/>
+              </a:rPr>
+              <a:t>The trust statement, quantity by quantity.</a:t>
+            </a:r>
+          </a:p>
+        </p:txBody>
+      </p:sp>
+      <p:sp>
+        <p:nvSpPr>
+          <p:cNvPr id="6" name="TextBox 5"/>
+          <p:cNvSpPr txBox="1"/>
+          <p:nvPr/>
+        </p:nvSpPr>
+        <p:spPr>
+          <a:xfrm>
+            <a:off x="548640" y="6528816"/>
+            <a:ext cx="9601200" cy="274320"/>
+          </a:xfrm>
+          <a:prstGeom prst="rect">
+            <a:avLst/>
+          </a:prstGeom>
+          <a:noFill/>
+        </p:spPr>
+        <p:txBody>
+          <a:bodyPr wrap="square">
+            <a:spAutoFit/>
+          </a:bodyPr>
+          <a:lstStyle/>
+          <a:p>
+            <a:pPr algn="l"/>
+            <a:r>
+              <a:rPr sz="950" b="0">
+                <a:solidFill>
+                  <a:srgbClr val="5F6368"/>
+                </a:solidFill>
+                <a:latin typeface="Calibri"/>
+              </a:rPr>
+              <a:t>wattson xcheck rev 2 · QEMU counts DERIVED, PMU/DDR counts MEASURED · 2026-08-30</a:t>
+            </a:r>
+          </a:p>
+        </p:txBody>
+      </p:sp>
+      <p:sp>
+        <p:nvSpPr>
+          <p:cNvPr id="7" name="TextBox 6"/>
+          <p:cNvSpPr txBox="1"/>
+          <p:nvPr/>
+        </p:nvSpPr>
+        <p:spPr>
+          <a:xfrm>
+            <a:off x="11247120" y="6528816"/>
+            <a:ext cx="457200" cy="274320"/>
+          </a:xfrm>
+          <a:prstGeom prst="rect">
+            <a:avLst/>
+          </a:prstGeom>
+          <a:noFill/>
+        </p:spPr>
+        <p:txBody>
+          <a:bodyPr wrap="square">
+            <a:spAutoFit/>
+          </a:bodyPr>
+          <a:lstStyle/>
+          <a:p>
+            <a:pPr algn="r"/>
+            <a:r>
+              <a:rPr sz="950" b="0">
+                <a:solidFill>
+                  <a:srgbClr val="5F6368"/>
+                </a:solidFill>
+                <a:latin typeface="Calibri"/>
+              </a:rPr>
+              <a:t>8</a:t>
+            </a:r>
+          </a:p>
+        </p:txBody>
+      </p:sp>
+      <p:graphicFrame>
+        <p:nvGraphicFramePr>
+          <p:cNvPr id="8" name="Table 7"/>
+          <p:cNvGraphicFramePr>
+            <a:graphicFrameLocks noGrp="1"/>
+          </p:cNvGraphicFramePr>
+          <p:nvPr/>
+        </p:nvGraphicFramePr>
+        <p:xfrm>
+          <a:off x="548640" y="1417320"/>
+          <a:ext cx="11064240" cy="3657600"/>
         </p:xfrm>
         <a:graphic>
           <a:graphicData uri="http://schemas.openxmlformats.org/drawingml/2006/table">
@@ -8089,14 +8455,14 @@
                 <a:gridCol w="2743200"/>
                 <a:gridCol w="5303520"/>
               </a:tblGrid>
-              <a:tr h="475488">
-                <a:tc>
-                  <a:txBody>
-                    <a:bodyPr/>
-                    <a:lstStyle/>
-                    <a:p>
-                      <a:r>
-                        <a:rPr sz="1100" b="1">
+              <a:tr h="457200">
+                <a:tc>
+                  <a:txBody>
+                    <a:bodyPr/>
+                    <a:lstStyle/>
+                    <a:p>
+                      <a:r>
+                        <a:rPr sz="1050" b="1">
                           <a:solidFill>
                             <a:srgbClr val="FFFFFF"/>
                           </a:solidFill>
@@ -8118,7 +8484,7 @@
                     <a:lstStyle/>
                     <a:p>
                       <a:r>
-                        <a:rPr sz="1100" b="1">
+                        <a:rPr sz="1050" b="1">
                           <a:solidFill>
                             <a:srgbClr val="FFFFFF"/>
                           </a:solidFill>
@@ -8140,7 +8506,7 @@
                     <a:lstStyle/>
                     <a:p>
                       <a:r>
-                        <a:rPr sz="1100" b="1">
+                        <a:rPr sz="1050" b="1">
                           <a:solidFill>
                             <a:srgbClr val="FFFFFF"/>
                           </a:solidFill>
@@ -8157,14 +8523,14 @@
                   </a:tcPr>
                 </a:tc>
               </a:tr>
-              <a:tr h="475488">
-                <a:tc>
-                  <a:txBody>
-                    <a:bodyPr/>
-                    <a:lstStyle/>
-                    <a:p>
-                      <a:r>
-                        <a:rPr sz="1100" b="1">
+              <a:tr h="457200">
+                <a:tc>
+                  <a:txBody>
+                    <a:bodyPr/>
+                    <a:lstStyle/>
+                    <a:p>
+                      <a:r>
+                        <a:rPr sz="1050" b="1">
                           <a:latin typeface="Calibri"/>
                         </a:rPr>
                         <a:t>Per-core instruction activity</a:t>
@@ -8183,7 +8549,7 @@
                     <a:lstStyle/>
                     <a:p>
                       <a:r>
-                        <a:rPr sz="1100" b="0">
+                        <a:rPr sz="1050" b="0">
                           <a:solidFill>
                             <a:srgbClr val="187A33"/>
                           </a:solidFill>
@@ -8205,7 +8571,7 @@
                     <a:lstStyle/>
                     <a:p>
                       <a:r>
-                        <a:rPr sz="1100" b="0">
+                        <a:rPr sz="1050" b="0">
                           <a:latin typeface="Calibri"/>
                         </a:rPr>
                         <a:t>±4% envelope held across every application class tested</a:t>
@@ -8219,14 +8585,14 @@
                   </a:tcPr>
                 </a:tc>
               </a:tr>
-              <a:tr h="475488">
-                <a:tc>
-                  <a:txBody>
-                    <a:bodyPr/>
-                    <a:lstStyle/>
-                    <a:p>
-                      <a:r>
-                        <a:rPr sz="1100" b="1">
+              <a:tr h="457200">
+                <a:tc>
+                  <a:txBody>
+                    <a:bodyPr/>
+                    <a:lstStyle/>
+                    <a:p>
+                      <a:r>
+                        <a:rPr sz="1050" b="1">
                           <a:latin typeface="Calibri"/>
                         </a:rPr>
                         <a:t>DRAM read transactions</a:t>
@@ -8245,7 +8611,7 @@
                     <a:lstStyle/>
                     <a:p>
                       <a:r>
-                        <a:rPr sz="1100" b="0">
+                        <a:rPr sz="1050" b="0">
                           <a:solidFill>
                             <a:srgbClr val="187A33"/>
                           </a:solidFill>
@@ -8267,7 +8633,7 @@
                     <a:lstStyle/>
                     <a:p>
                       <a:r>
-                        <a:rPr sz="1100" b="0">
+                        <a:rPr sz="1050" b="0">
                           <a:latin typeface="Calibri"/>
                         </a:rPr>
                         <a:t>carry the ×/÷1.14 band; latency/bandwidth-bound apps need almost none</a:t>
@@ -8281,14 +8647,14 @@
                   </a:tcPr>
                 </a:tc>
               </a:tr>
-              <a:tr h="475488">
-                <a:tc>
-                  <a:txBody>
-                    <a:bodyPr/>
-                    <a:lstStyle/>
-                    <a:p>
-                      <a:r>
-                        <a:rPr sz="1100" b="1">
+              <a:tr h="457200">
+                <a:tc>
+                  <a:txBody>
+                    <a:bodyPr/>
+                    <a:lstStyle/>
+                    <a:p>
+                      <a:r>
+                        <a:rPr sz="1050" b="1">
                           <a:latin typeface="Calibri"/>
                         </a:rPr>
                         <a:t>DRAM-quiet screening</a:t>
@@ -8307,7 +8673,7 @@
                     <a:lstStyle/>
                     <a:p>
                       <a:r>
-                        <a:rPr sz="1100" b="0">
+                        <a:rPr sz="1050" b="0">
                           <a:solidFill>
                             <a:srgbClr val="187A33"/>
                           </a:solidFill>
@@ -8329,7 +8695,7 @@
                     <a:lstStyle/>
                     <a:p>
                       <a:r>
-                        <a:rPr sz="1100" b="0">
+                        <a:rPr sz="1050" b="0">
                           <a:latin typeface="Calibri"/>
                         </a:rPr>
                         <a:t>proxy under ~1 M lines reliably means a DRAM-quiet application</a:t>
@@ -8343,14 +8709,14 @@
                   </a:tcPr>
                 </a:tc>
               </a:tr>
-              <a:tr h="475488">
-                <a:tc>
-                  <a:txBody>
-                    <a:bodyPr/>
-                    <a:lstStyle/>
-                    <a:p>
-                      <a:r>
-                        <a:rPr sz="1100" b="1">
+              <a:tr h="457200">
+                <a:tc>
+                  <a:txBody>
+                    <a:bodyPr/>
+                    <a:lstStyle/>
+                    <a:p>
+                      <a:r>
+                        <a:rPr sz="1050" b="1">
                           <a:latin typeface="Calibri"/>
                         </a:rPr>
                         <a:t>DRAM write transactions</a:t>
@@ -8369,13 +8735,13 @@
                     <a:lstStyle/>
                     <a:p>
                       <a:r>
-                        <a:rPr sz="1100" b="0">
+                        <a:rPr sz="1050" b="0">
                           <a:solidFill>
                             <a:srgbClr val="187A33"/>
                           </a:solidFill>
                           <a:latin typeface="Calibri"/>
                         </a:rPr>
-                        <a:t>use with ×0.68 correction</a:t>
+                        <a:t>use with ×1.11 correction (base pass)</a:t>
                       </a:r>
                     </a:p>
                   </a:txBody>
@@ -8391,10 +8757,10 @@
                     <a:lstStyle/>
                     <a:p>
                       <a:r>
-                        <a:rPr sz="1100" b="0">
-                          <a:latin typeface="Calibri"/>
-                        </a:rPr>
-                        <a:t>×/÷{SW:.2f} band above the write noise floor (X1 writeback model)</a:t>
+                        <a:rPr sz="1050" b="0">
+                          <a:latin typeface="Calibri"/>
+                        </a:rPr>
+                        <a:t>×/÷1.09 fitted, ×/÷1.28 held-out, above the write noise floor</a:t>
                       </a:r>
                     </a:p>
                   </a:txBody>
@@ -8405,14 +8771,14 @@
                   </a:tcPr>
                 </a:tc>
               </a:tr>
-              <a:tr h="475488">
-                <a:tc>
-                  <a:txBody>
-                    <a:bodyPr/>
-                    <a:lstStyle/>
-                    <a:p>
-                      <a:r>
-                        <a:rPr sz="1100" b="1">
+              <a:tr h="457200">
+                <a:tc>
+                  <a:txBody>
+                    <a:bodyPr/>
+                    <a:lstStyle/>
+                    <a:p>
+                      <a:r>
+                        <a:rPr sz="1050" b="1">
                           <a:latin typeface="Calibri"/>
                         </a:rPr>
                         <a:t>Network / DMA activity</a:t>
@@ -8431,7 +8797,7 @@
                     <a:lstStyle/>
                     <a:p>
                       <a:r>
-                        <a:rPr sz="1100" b="0">
+                        <a:rPr sz="1050" b="0">
                           <a:solidFill>
                             <a:srgbClr val="B31412"/>
                           </a:solidFill>
@@ -8453,7 +8819,7 @@
                     <a:lstStyle/>
                     <a:p>
                       <a:r>
-                        <a:rPr sz="1100" b="0">
+                        <a:rPr sz="1050" b="0">
                           <a:latin typeface="Calibri"/>
                         </a:rPr>
                         <a:t>system-mode harness (exists, boot-differential) required</a:t>
@@ -8467,14 +8833,14 @@
                   </a:tcPr>
                 </a:tc>
               </a:tr>
-              <a:tr h="475488">
-                <a:tc>
-                  <a:txBody>
-                    <a:bodyPr/>
-                    <a:lstStyle/>
-                    <a:p>
-                      <a:r>
-                        <a:rPr sz="1100" b="1">
+              <a:tr h="457200">
+                <a:tc>
+                  <a:txBody>
+                    <a:bodyPr/>
+                    <a:lstStyle/>
+                    <a:p>
+                      <a:r>
+                        <a:rPr sz="1050" b="1">
                           <a:latin typeface="Calibri"/>
                         </a:rPr>
                         <a:t>Multi-core</a:t>
@@ -8493,7 +8859,7 @@
                     <a:lstStyle/>
                     <a:p>
                       <a:r>
-                        <a:rPr sz="1100" b="0">
+                        <a:rPr sz="1050" b="0">
                           <a:solidFill>
                             <a:srgbClr val="187A33"/>
                           </a:solidFill>
@@ -8515,7 +8881,7 @@
                     <a:lstStyle/>
                     <a:p>
                       <a:r>
-                        <a:rPr sz="1100" b="0">
+                        <a:rPr sz="1050" b="0">
                           <a:latin typeface="Calibri"/>
                         </a:rPr>
                         <a:t>DRAM ratios thread-invariant 1–6T; spin-wait inflates insns 18–23% on barrier-heavy code otherwise</a:t>
@@ -8529,14 +8895,14 @@
                   </a:tcPr>
                 </a:tc>
               </a:tr>
-              <a:tr h="475488">
-                <a:tc>
-                  <a:txBody>
-                    <a:bodyPr/>
-                    <a:lstStyle/>
-                    <a:p>
-                      <a:r>
-                        <a:rPr sz="1100" b="1">
+              <a:tr h="457200">
+                <a:tc>
+                  <a:txBody>
+                    <a:bodyPr/>
+                    <a:lstStyle/>
+                    <a:p>
+                      <a:r>
+                        <a:rPr sz="1050" b="1">
                           <a:latin typeface="Calibri"/>
                         </a:rPr>
                         <a:t>Duty cycle</a:t>
@@ -8555,7 +8921,7 @@
                     <a:lstStyle/>
                     <a:p>
                       <a:r>
-                        <a:rPr sz="1100" b="0">
+                        <a:rPr sz="1050" b="0">
                           <a:solidFill>
                             <a:srgbClr val="B31412"/>
                           </a:solidFill>
@@ -8577,7 +8943,7 @@
                     <a:lstStyle/>
                     <a:p>
                       <a:r>
-                        <a:rPr sz="1100" b="0">
+                        <a:rPr sz="1050" b="0">
                           <a:latin typeface="Calibri"/>
                         </a:rPr>
                         <a:t>rides on the X2 system-mode harness</a:t>
@@ -8603,7 +8969,7 @@
         </p:nvSpPr>
         <p:spPr>
           <a:xfrm>
-            <a:off x="548640" y="4892040"/>
+            <a:off x="548640" y="5349240"/>
             <a:ext cx="11064240" cy="822960"/>
           </a:xfrm>
           <a:prstGeom prst="rect">
@@ -8638,7 +9004,7 @@
         </p:nvSpPr>
         <p:spPr>
           <a:xfrm>
-            <a:off x="548640" y="5806440"/>
+            <a:off x="548640" y="6263640"/>
             <a:ext cx="11064240" cy="457200"/>
           </a:xfrm>
           <a:prstGeom prst="rect">

--- a/xcheck/xcheck-correlation.pptx
+++ b/xcheck/xcheck-correlation.pptx
@@ -13,6 +13,7 @@
     <p:sldId id="261" r:id="rId12"/>
     <p:sldId id="262" r:id="rId13"/>
     <p:sldId id="263" r:id="rId14"/>
+    <p:sldId id="264" r:id="rId15"/>
   </p:sldIdLst>
   <p:sldSz cx="12191695" cy="6858000" type="screen4x3"/>
   <p:notesSz cx="6858000" cy="9144000"/>
@@ -3203,7 +3204,7 @@
                 </a:solidFill>
                 <a:latin typeface="Calibri"/>
               </a:rPr>
-              <a:t>wattson cross-check (xcheck) · rev 2 · fourteen applications, three hardware counters, one correction factor</a:t>
+              <a:t>wattson cross-check (xcheck) · rev 3 · tested DEEP (14 apps, mechanism by mechanism) and BROAD (36 more, never seen before)</a:t>
             </a:r>
           </a:p>
         </p:txBody>
@@ -8991,7 +8992,7 @@
                 </a:solidFill>
                 <a:latin typeface="Calibri"/>
               </a:rPr>
-              <a:t>Forward path, in effort order: (1) X2 system-mode boot-differential runs — kernel, DMA and duty cycle into scope, P1 power calibration enabled; (2) X3 multi-core sweep; (3) X4 prefetch model or fitted per-class factors — tightens the read band below ×/÷1.26. (X1, the writeback model, closed the write gap the deck's first printing named.)</a:t>
+              <a:t>Every gap this deck's first printing named has since been closed and is reflected above: X1 writeback model (writes, 0.02 → 0.90), X2 system-mode boot-differential (kernel share MEASURED, DMA boundary characterised), X3 multi-core sweep (spin-wait proven, not argued), X4 stride prefetcher (reads 0.81 → 0.98). What remains open is P1 — energy-per-event calibration — which is not ours to close: it needs a board with instrumented rails and belongs to the power team.</a:t>
             </a:r>
           </a:p>
         </p:txBody>
@@ -9027,6 +9028,1061 @@
                 <a:latin typeface="Calibri"/>
               </a:rPr>
               <a:t>Reproducibility: wattson/xcheck — one command per side (run-qemu.sh / run-perf.sh / run-ddr.sh), vectors committed, deck regenerated from the vectors by make_deck.py. The QEMU cache-plugin patch ships in-repo.</a:t>
+            </a:r>
+          </a:p>
+        </p:txBody>
+      </p:sp>
+    </p:spTree>
+  </p:cSld>
+  <p:clrMapOvr>
+    <a:masterClrMapping/>
+  </p:clrMapOvr>
+</p:sld>
+</file>
+
+<file path=ppt/slides/slide9.xml><?xml version="1.0" encoding="utf-8"?>
+<p:sld xmlns:a="http://schemas.openxmlformats.org/drawingml/2006/main" xmlns:p="http://schemas.openxmlformats.org/presentationml/2006/main" xmlns:r="http://schemas.openxmlformats.org/officeDocument/2006/relationships">
+  <p:cSld>
+    <p:spTree>
+      <p:nvGrpSpPr>
+        <p:cNvPr id="1" name=""/>
+        <p:cNvGrpSpPr/>
+        <p:nvPr/>
+      </p:nvGrpSpPr>
+      <p:grpSpPr/>
+      <p:sp>
+        <p:nvSpPr>
+          <p:cNvPr id="2" name="Rectangle 1"/>
+          <p:cNvSpPr/>
+          <p:nvPr/>
+        </p:nvSpPr>
+        <p:spPr>
+          <a:xfrm>
+            <a:off x="0" y="0"/>
+            <a:ext cx="12191695" cy="841248"/>
+          </a:xfrm>
+          <a:prstGeom prst="rect">
+            <a:avLst/>
+          </a:prstGeom>
+          <a:solidFill>
+            <a:srgbClr val="202124"/>
+          </a:solidFill>
+          <a:ln>
+            <a:noFill/>
+          </a:ln>
+        </p:spPr>
+        <p:style>
+          <a:lnRef idx="1">
+            <a:schemeClr val="accent1"/>
+          </a:lnRef>
+          <a:fillRef idx="3">
+            <a:schemeClr val="accent1"/>
+          </a:fillRef>
+          <a:effectRef idx="2">
+            <a:schemeClr val="accent1"/>
+          </a:effectRef>
+          <a:fontRef idx="minor">
+            <a:schemeClr val="lt1"/>
+          </a:fontRef>
+        </p:style>
+        <p:txBody>
+          <a:bodyPr rtlCol="0" anchor="ctr"/>
+          <a:lstStyle/>
+          <a:p>
+            <a:pPr algn="ctr"/>
+          </a:p>
+        </p:txBody>
+      </p:sp>
+      <p:sp>
+        <p:nvSpPr>
+          <p:cNvPr id="3" name="TextBox 2"/>
+          <p:cNvSpPr txBox="1"/>
+          <p:nvPr/>
+        </p:nvSpPr>
+        <p:spPr>
+          <a:xfrm>
+            <a:off x="548640" y="118872"/>
+            <a:ext cx="10058400" cy="548640"/>
+          </a:xfrm>
+          <a:prstGeom prst="rect">
+            <a:avLst/>
+          </a:prstGeom>
+          <a:noFill/>
+        </p:spPr>
+        <p:txBody>
+          <a:bodyPr wrap="square">
+            <a:spAutoFit/>
+          </a:bodyPr>
+          <a:lstStyle/>
+          <a:p>
+            <a:pPr algn="l"/>
+            <a:r>
+              <a:rPr sz="2600" b="1">
+                <a:solidFill>
+                  <a:srgbClr val="FFFFFF"/>
+                </a:solidFill>
+                <a:latin typeface="Calibri"/>
+              </a:rPr>
+              <a:t>Can a user get activity factors that match silicon?</a:t>
+            </a:r>
+          </a:p>
+        </p:txBody>
+      </p:sp>
+      <p:sp>
+        <p:nvSpPr>
+          <p:cNvPr id="4" name="Rectangle 3"/>
+          <p:cNvSpPr/>
+          <p:nvPr/>
+        </p:nvSpPr>
+        <p:spPr>
+          <a:xfrm>
+            <a:off x="0" y="841248"/>
+            <a:ext cx="12191695" cy="38100"/>
+          </a:xfrm>
+          <a:prstGeom prst="rect">
+            <a:avLst/>
+          </a:prstGeom>
+          <a:solidFill>
+            <a:srgbClr val="1A53A0"/>
+          </a:solidFill>
+          <a:ln>
+            <a:noFill/>
+          </a:ln>
+        </p:spPr>
+        <p:style>
+          <a:lnRef idx="1">
+            <a:schemeClr val="accent1"/>
+          </a:lnRef>
+          <a:fillRef idx="3">
+            <a:schemeClr val="accent1"/>
+          </a:fillRef>
+          <a:effectRef idx="2">
+            <a:schemeClr val="accent1"/>
+          </a:effectRef>
+          <a:fontRef idx="minor">
+            <a:schemeClr val="lt1"/>
+          </a:fontRef>
+        </p:style>
+        <p:txBody>
+          <a:bodyPr rtlCol="0" anchor="ctr"/>
+          <a:lstStyle/>
+          <a:p>
+            <a:pPr algn="ctr"/>
+          </a:p>
+        </p:txBody>
+      </p:sp>
+      <p:sp>
+        <p:nvSpPr>
+          <p:cNvPr id="5" name="TextBox 4"/>
+          <p:cNvSpPr txBox="1"/>
+          <p:nvPr/>
+        </p:nvSpPr>
+        <p:spPr>
+          <a:xfrm>
+            <a:off x="548640" y="969264"/>
+            <a:ext cx="11155680" cy="365760"/>
+          </a:xfrm>
+          <a:prstGeom prst="rect">
+            <a:avLst/>
+          </a:prstGeom>
+          <a:noFill/>
+        </p:spPr>
+        <p:txBody>
+          <a:bodyPr wrap="square">
+            <a:spAutoFit/>
+          </a:bodyPr>
+          <a:lstStyle/>
+          <a:p>
+            <a:pPr algn="l"/>
+            <a:r>
+              <a:rPr sz="1200" b="0">
+                <a:solidFill>
+                  <a:srgbClr val="5F6368"/>
+                </a:solidFill>
+                <a:latin typeface="Calibri"/>
+              </a:rPr>
+              <a:t>The question this whole campaign exists to answer, answered.</a:t>
+            </a:r>
+          </a:p>
+        </p:txBody>
+      </p:sp>
+      <p:sp>
+        <p:nvSpPr>
+          <p:cNvPr id="6" name="TextBox 5"/>
+          <p:cNvSpPr txBox="1"/>
+          <p:nvPr/>
+        </p:nvSpPr>
+        <p:spPr>
+          <a:xfrm>
+            <a:off x="548640" y="6528816"/>
+            <a:ext cx="9601200" cy="274320"/>
+          </a:xfrm>
+          <a:prstGeom prst="rect">
+            <a:avLst/>
+          </a:prstGeom>
+          <a:noFill/>
+        </p:spPr>
+        <p:txBody>
+          <a:bodyPr wrap="square">
+            <a:spAutoFit/>
+          </a:bodyPr>
+          <a:lstStyle/>
+          <a:p>
+            <a:pPr algn="l"/>
+            <a:r>
+              <a:rPr sz="950" b="0">
+                <a:solidFill>
+                  <a:srgbClr val="5F6368"/>
+                </a:solidFill>
+                <a:latin typeface="Calibri"/>
+              </a:rPr>
+              <a:t>wattson xcheck rev 2 · QEMU counts DERIVED, PMU/DDR counts MEASURED · 2026-08-30</a:t>
+            </a:r>
+          </a:p>
+        </p:txBody>
+      </p:sp>
+      <p:sp>
+        <p:nvSpPr>
+          <p:cNvPr id="7" name="TextBox 6"/>
+          <p:cNvSpPr txBox="1"/>
+          <p:nvPr/>
+        </p:nvSpPr>
+        <p:spPr>
+          <a:xfrm>
+            <a:off x="11247120" y="6528816"/>
+            <a:ext cx="457200" cy="274320"/>
+          </a:xfrm>
+          <a:prstGeom prst="rect">
+            <a:avLst/>
+          </a:prstGeom>
+          <a:noFill/>
+        </p:spPr>
+        <p:txBody>
+          <a:bodyPr wrap="square">
+            <a:spAutoFit/>
+          </a:bodyPr>
+          <a:lstStyle/>
+          <a:p>
+            <a:pPr algn="r"/>
+            <a:r>
+              <a:rPr sz="950" b="0">
+                <a:solidFill>
+                  <a:srgbClr val="5F6368"/>
+                </a:solidFill>
+                <a:latin typeface="Calibri"/>
+              </a:rPr>
+              <a:t>9</a:t>
+            </a:r>
+          </a:p>
+        </p:txBody>
+      </p:sp>
+      <p:sp>
+        <p:nvSpPr>
+          <p:cNvPr id="8" name="Rectangle 7"/>
+          <p:cNvSpPr/>
+          <p:nvPr/>
+        </p:nvSpPr>
+        <p:spPr>
+          <a:xfrm>
+            <a:off x="548640" y="1325880"/>
+            <a:ext cx="11064240" cy="960120"/>
+          </a:xfrm>
+          <a:prstGeom prst="rect">
+            <a:avLst/>
+          </a:prstGeom>
+          <a:solidFill>
+            <a:srgbClr val="0E5C2B"/>
+          </a:solidFill>
+          <a:ln>
+            <a:noFill/>
+          </a:ln>
+        </p:spPr>
+        <p:style>
+          <a:lnRef idx="1">
+            <a:schemeClr val="accent1"/>
+          </a:lnRef>
+          <a:fillRef idx="3">
+            <a:schemeClr val="accent1"/>
+          </a:fillRef>
+          <a:effectRef idx="2">
+            <a:schemeClr val="accent1"/>
+          </a:effectRef>
+          <a:fontRef idx="minor">
+            <a:schemeClr val="lt1"/>
+          </a:fontRef>
+        </p:style>
+        <p:txBody>
+          <a:bodyPr rtlCol="0" anchor="ctr"/>
+          <a:lstStyle/>
+          <a:p>
+            <a:pPr algn="ctr"/>
+          </a:p>
+        </p:txBody>
+      </p:sp>
+      <p:sp>
+        <p:nvSpPr>
+          <p:cNvPr id="9" name="TextBox 8"/>
+          <p:cNvSpPr txBox="1"/>
+          <p:nvPr/>
+        </p:nvSpPr>
+        <p:spPr>
+          <a:xfrm>
+            <a:off x="822960" y="1389888"/>
+            <a:ext cx="10607040" cy="411480"/>
+          </a:xfrm>
+          <a:prstGeom prst="rect">
+            <a:avLst/>
+          </a:prstGeom>
+          <a:noFill/>
+        </p:spPr>
+        <p:txBody>
+          <a:bodyPr wrap="square">
+            <a:spAutoFit/>
+          </a:bodyPr>
+          <a:lstStyle/>
+          <a:p>
+            <a:pPr algn="l"/>
+            <a:r>
+              <a:rPr sz="2000" b="1">
+                <a:solidFill>
+                  <a:srgbClr val="FFFFFF"/>
+                </a:solidFill>
+                <a:latin typeface="Calibri"/>
+              </a:rPr>
+              <a:t>YES — for CPU and DRAM activity, within the bands below.</a:t>
+            </a:r>
+          </a:p>
+        </p:txBody>
+      </p:sp>
+      <p:sp>
+        <p:nvSpPr>
+          <p:cNvPr id="10" name="TextBox 9"/>
+          <p:cNvSpPr txBox="1"/>
+          <p:nvPr/>
+        </p:nvSpPr>
+        <p:spPr>
+          <a:xfrm>
+            <a:off x="822960" y="1755648"/>
+            <a:ext cx="10607040" cy="365760"/>
+          </a:xfrm>
+          <a:prstGeom prst="rect">
+            <a:avLst/>
+          </a:prstGeom>
+          <a:noFill/>
+        </p:spPr>
+        <p:txBody>
+          <a:bodyPr wrap="square">
+            <a:spAutoFit/>
+          </a:bodyPr>
+          <a:lstStyle/>
+          <a:p>
+            <a:pPr algn="l"/>
+            <a:r>
+              <a:rPr sz="1150" b="0">
+                <a:solidFill>
+                  <a:srgbClr val="C9E4D4"/>
+                </a:solidFill>
+                <a:latin typeface="Calibri"/>
+              </a:rPr>
+              <a:t>Not 'yes in principle'. The corrections were fitted on 14 applications and then held on 36 the model had never seen, with the SAME spread — which is the user's situation exactly: an app nobody has measured.</a:t>
+            </a:r>
+          </a:p>
+        </p:txBody>
+      </p:sp>
+      <p:sp>
+        <p:nvSpPr>
+          <p:cNvPr id="11" name="TextBox 10"/>
+          <p:cNvSpPr txBox="1"/>
+          <p:nvPr/>
+        </p:nvSpPr>
+        <p:spPr>
+          <a:xfrm>
+            <a:off x="548640" y="2395728"/>
+            <a:ext cx="5486400" cy="274320"/>
+          </a:xfrm>
+          <a:prstGeom prst="rect">
+            <a:avLst/>
+          </a:prstGeom>
+          <a:noFill/>
+        </p:spPr>
+        <p:txBody>
+          <a:bodyPr wrap="square">
+            <a:spAutoFit/>
+          </a:bodyPr>
+          <a:lstStyle/>
+          <a:p>
+            <a:pPr algn="l"/>
+            <a:r>
+              <a:rPr sz="1200" b="1">
+                <a:solidFill>
+                  <a:srgbClr val="187A33"/>
+                </a:solidFill>
+                <a:latin typeface="Calibri"/>
+              </a:rPr>
+              <a:t>WHAT YOU GET, AND WHAT IT IS WORTH</a:t>
+            </a:r>
+          </a:p>
+        </p:txBody>
+      </p:sp>
+      <p:graphicFrame>
+        <p:nvGraphicFramePr>
+          <p:cNvPr id="12" name="Table 11"/>
+          <p:cNvGraphicFramePr>
+            <a:graphicFrameLocks noGrp="1"/>
+          </p:cNvGraphicFramePr>
+          <p:nvPr/>
+        </p:nvGraphicFramePr>
+        <p:xfrm>
+          <a:off x="548640" y="2697480"/>
+          <a:ext cx="5486400" cy="2103120"/>
+        </p:xfrm>
+        <a:graphic>
+          <a:graphicData uri="http://schemas.openxmlformats.org/drawingml/2006/table">
+            <a:tbl>
+              <a:tblPr firstRow="1" bandRow="1">
+                <a:tableStyleId>{5C22544A-7EE6-4342-B048-85BDC9FD1C3A}</a:tableStyleId>
+              </a:tblPr>
+              <a:tblGrid>
+                <a:gridCol w="2103120"/>
+                <a:gridCol w="1371600"/>
+                <a:gridCol w="2011680"/>
+              </a:tblGrid>
+              <a:tr h="420624">
+                <a:tc>
+                  <a:txBody>
+                    <a:bodyPr/>
+                    <a:lstStyle/>
+                    <a:p>
+                      <a:r>
+                        <a:rPr sz="950" b="1">
+                          <a:solidFill>
+                            <a:srgbClr val="FFFFFF"/>
+                          </a:solidFill>
+                          <a:latin typeface="Calibri"/>
+                        </a:rPr>
+                        <a:t>quantity</a:t>
+                      </a:r>
+                    </a:p>
+                  </a:txBody>
+                  <a:tcPr>
+                    <a:solidFill>
+                      <a:srgbClr val="202124"/>
+                    </a:solidFill>
+                  </a:tcPr>
+                </a:tc>
+                <a:tc>
+                  <a:txBody>
+                    <a:bodyPr/>
+                    <a:lstStyle/>
+                    <a:p>
+                      <a:r>
+                        <a:rPr sz="950" b="1">
+                          <a:solidFill>
+                            <a:srgbClr val="FFFFFF"/>
+                          </a:solidFill>
+                          <a:latin typeface="Calibri"/>
+                        </a:rPr>
+                        <a:t>apply</a:t>
+                      </a:r>
+                    </a:p>
+                  </a:txBody>
+                  <a:tcPr>
+                    <a:solidFill>
+                      <a:srgbClr val="202124"/>
+                    </a:solidFill>
+                  </a:tcPr>
+                </a:tc>
+                <a:tc>
+                  <a:txBody>
+                    <a:bodyPr/>
+                    <a:lstStyle/>
+                    <a:p>
+                      <a:r>
+                        <a:rPr sz="950" b="1">
+                          <a:solidFill>
+                            <a:srgbClr val="FFFFFF"/>
+                          </a:solidFill>
+                          <a:latin typeface="Calibri"/>
+                        </a:rPr>
+                        <a:t>held-out evidence</a:t>
+                      </a:r>
+                    </a:p>
+                  </a:txBody>
+                  <a:tcPr>
+                    <a:solidFill>
+                      <a:srgbClr val="202124"/>
+                    </a:solidFill>
+                  </a:tcPr>
+                </a:tc>
+              </a:tr>
+              <a:tr h="420624">
+                <a:tc>
+                  <a:txBody>
+                    <a:bodyPr/>
+                    <a:lstStyle/>
+                    <a:p>
+                      <a:r>
+                        <a:rPr sz="950" b="1">
+                          <a:latin typeface="Calibri"/>
+                        </a:rPr>
+                        <a:t>Instructions, per core</a:t>
+                      </a:r>
+                    </a:p>
+                  </a:txBody>
+                  <a:tcPr>
+                    <a:solidFill>
+                      <a:srgbClr val="EFF3FA"/>
+                    </a:solidFill>
+                  </a:tcPr>
+                </a:tc>
+                <a:tc>
+                  <a:txBody>
+                    <a:bodyPr/>
+                    <a:lstStyle/>
+                    <a:p>
+                      <a:r>
+                        <a:rPr sz="950" b="0">
+                          <a:latin typeface="Calibri"/>
+                        </a:rPr>
+                        <a:t>×1.00 — use raw</a:t>
+                      </a:r>
+                    </a:p>
+                  </a:txBody>
+                  <a:tcPr>
+                    <a:solidFill>
+                      <a:srgbClr val="EFF3FA"/>
+                    </a:solidFill>
+                  </a:tcPr>
+                </a:tc>
+                <a:tc>
+                  <a:txBody>
+                    <a:bodyPr/>
+                    <a:lstStyle/>
+                    <a:p>
+                      <a:r>
+                        <a:rPr sz="950" b="0">
+                          <a:latin typeface="Calibri"/>
+                        </a:rPr>
+                        <a:t>0.979 ×/÷1.04 on 36 unseen apps</a:t>
+                      </a:r>
+                    </a:p>
+                  </a:txBody>
+                  <a:tcPr>
+                    <a:solidFill>
+                      <a:srgbClr val="EFF3FA"/>
+                    </a:solidFill>
+                  </a:tcPr>
+                </a:tc>
+              </a:tr>
+              <a:tr h="420624">
+                <a:tc>
+                  <a:txBody>
+                    <a:bodyPr/>
+                    <a:lstStyle/>
+                    <a:p>
+                      <a:r>
+                        <a:rPr sz="950" b="1">
+                          <a:latin typeface="Calibri"/>
+                        </a:rPr>
+                        <a:t>DRAM reads</a:t>
+                      </a:r>
+                    </a:p>
+                  </a:txBody>
+                  <a:tcPr>
+                    <a:solidFill>
+                      <a:srgbClr val="FFFFFF"/>
+                    </a:solidFill>
+                  </a:tcPr>
+                </a:tc>
+                <a:tc>
+                  <a:txBody>
+                    <a:bodyPr/>
+                    <a:lstStyle/>
+                    <a:p>
+                      <a:r>
+                        <a:rPr sz="950" b="0">
+                          <a:latin typeface="Calibri"/>
+                        </a:rPr>
+                        <a:t>×1.02</a:t>
+                      </a:r>
+                    </a:p>
+                  </a:txBody>
+                  <a:tcPr>
+                    <a:solidFill>
+                      <a:srgbClr val="FFFFFF"/>
+                    </a:solidFill>
+                  </a:tcPr>
+                </a:tc>
+                <a:tc>
+                  <a:txBody>
+                    <a:bodyPr/>
+                    <a:lstStyle/>
+                    <a:p>
+                      <a:r>
+                        <a:rPr sz="950" b="0">
+                          <a:latin typeface="Calibri"/>
+                        </a:rPr>
+                        <a:t>×/÷1.21 held out — identical to the fitted set</a:t>
+                      </a:r>
+                    </a:p>
+                  </a:txBody>
+                  <a:tcPr>
+                    <a:solidFill>
+                      <a:srgbClr val="FFFFFF"/>
+                    </a:solidFill>
+                  </a:tcPr>
+                </a:tc>
+              </a:tr>
+              <a:tr h="420624">
+                <a:tc>
+                  <a:txBody>
+                    <a:bodyPr/>
+                    <a:lstStyle/>
+                    <a:p>
+                      <a:r>
+                        <a:rPr sz="950" b="1">
+                          <a:latin typeface="Calibri"/>
+                        </a:rPr>
+                        <a:t>DRAM writes</a:t>
+                      </a:r>
+                    </a:p>
+                  </a:txBody>
+                  <a:tcPr>
+                    <a:solidFill>
+                      <a:srgbClr val="EFF3FA"/>
+                    </a:solidFill>
+                  </a:tcPr>
+                </a:tc>
+                <a:tc>
+                  <a:txBody>
+                    <a:bodyPr/>
+                    <a:lstStyle/>
+                    <a:p>
+                      <a:r>
+                        <a:rPr sz="950" b="0">
+                          <a:latin typeface="Calibri"/>
+                        </a:rPr>
+                        <a:t>×1.11</a:t>
+                      </a:r>
+                    </a:p>
+                  </a:txBody>
+                  <a:tcPr>
+                    <a:solidFill>
+                      <a:srgbClr val="EFF3FA"/>
+                    </a:solidFill>
+                  </a:tcPr>
+                </a:tc>
+                <a:tc>
+                  <a:txBody>
+                    <a:bodyPr/>
+                    <a:lstStyle/>
+                    <a:p>
+                      <a:r>
+                        <a:rPr sz="950" b="0">
+                          <a:latin typeface="Calibri"/>
+                        </a:rPr>
+                        <a:t>×/÷1.28 held out — the widest band; treat as an envelope</a:t>
+                      </a:r>
+                    </a:p>
+                  </a:txBody>
+                  <a:tcPr>
+                    <a:solidFill>
+                      <a:srgbClr val="EFF3FA"/>
+                    </a:solidFill>
+                  </a:tcPr>
+                </a:tc>
+              </a:tr>
+              <a:tr h="420624">
+                <a:tc>
+                  <a:txBody>
+                    <a:bodyPr/>
+                    <a:lstStyle/>
+                    <a:p>
+                      <a:r>
+                        <a:rPr sz="950" b="1">
+                          <a:latin typeface="Calibri"/>
+                        </a:rPr>
+                        <a:t>Is this app DRAM-quiet?</a:t>
+                      </a:r>
+                    </a:p>
+                  </a:txBody>
+                  <a:tcPr>
+                    <a:solidFill>
+                      <a:srgbClr val="FFFFFF"/>
+                    </a:solidFill>
+                  </a:tcPr>
+                </a:tc>
+                <a:tc>
+                  <a:txBody>
+                    <a:bodyPr/>
+                    <a:lstStyle/>
+                    <a:p>
+                      <a:r>
+                        <a:rPr sz="950" b="0">
+                          <a:latin typeface="Calibri"/>
+                        </a:rPr>
+                        <a:t>yes/no, no correction</a:t>
+                      </a:r>
+                    </a:p>
+                  </a:txBody>
+                  <a:tcPr>
+                    <a:solidFill>
+                      <a:srgbClr val="FFFFFF"/>
+                    </a:solidFill>
+                  </a:tcPr>
+                </a:tc>
+                <a:tc>
+                  <a:txBody>
+                    <a:bodyPr/>
+                    <a:lstStyle/>
+                    <a:p>
+                      <a:r>
+                        <a:rPr sz="950" b="0">
+                          <a:latin typeface="Calibri"/>
+                        </a:rPr>
+                        <a:t>every quiet app classified correctly, both sets</a:t>
+                      </a:r>
+                    </a:p>
+                  </a:txBody>
+                  <a:tcPr>
+                    <a:solidFill>
+                      <a:srgbClr val="FFFFFF"/>
+                    </a:solidFill>
+                  </a:tcPr>
+                </a:tc>
+              </a:tr>
+            </a:tbl>
+          </a:graphicData>
+        </a:graphic>
+      </p:graphicFrame>
+      <p:sp>
+        <p:nvSpPr>
+          <p:cNvPr id="13" name="TextBox 12"/>
+          <p:cNvSpPr txBox="1"/>
+          <p:nvPr/>
+        </p:nvSpPr>
+        <p:spPr>
+          <a:xfrm>
+            <a:off x="6309360" y="2395728"/>
+            <a:ext cx="5303520" cy="274320"/>
+          </a:xfrm>
+          <a:prstGeom prst="rect">
+            <a:avLst/>
+          </a:prstGeom>
+          <a:noFill/>
+        </p:spPr>
+        <p:txBody>
+          <a:bodyPr wrap="square">
+            <a:spAutoFit/>
+          </a:bodyPr>
+          <a:lstStyle/>
+          <a:p>
+            <a:pPr algn="l"/>
+            <a:r>
+              <a:rPr sz="1200" b="1">
+                <a:solidFill>
+                  <a:srgbClr val="B31412"/>
+                </a:solidFill>
+                <a:latin typeface="Calibri"/>
+              </a:rPr>
+              <a:t>WHAT IT DOES NOT GIVE YOU</a:t>
+            </a:r>
+          </a:p>
+        </p:txBody>
+      </p:sp>
+      <p:graphicFrame>
+        <p:nvGraphicFramePr>
+          <p:cNvPr id="14" name="Table 13"/>
+          <p:cNvGraphicFramePr>
+            <a:graphicFrameLocks noGrp="1"/>
+          </p:cNvGraphicFramePr>
+          <p:nvPr/>
+        </p:nvGraphicFramePr>
+        <p:xfrm>
+          <a:off x="6309360" y="2697480"/>
+          <a:ext cx="5303520" cy="2267712"/>
+        </p:xfrm>
+        <a:graphic>
+          <a:graphicData uri="http://schemas.openxmlformats.org/drawingml/2006/table">
+            <a:tbl>
+              <a:tblPr firstRow="1" bandRow="1">
+                <a:tableStyleId>{5C22544A-7EE6-4342-B048-85BDC9FD1C3A}</a:tableStyleId>
+              </a:tblPr>
+              <a:tblGrid>
+                <a:gridCol w="1737360"/>
+                <a:gridCol w="3566160"/>
+              </a:tblGrid>
+              <a:tr h="566928">
+                <a:tc>
+                  <a:txBody>
+                    <a:bodyPr/>
+                    <a:lstStyle/>
+                    <a:p>
+                      <a:r>
+                        <a:rPr sz="950" b="1">
+                          <a:solidFill>
+                            <a:srgbClr val="FFFFFF"/>
+                          </a:solidFill>
+                          <a:latin typeface="Calibri"/>
+                        </a:rPr>
+                        <a:t>boundary</a:t>
+                      </a:r>
+                    </a:p>
+                  </a:txBody>
+                  <a:tcPr>
+                    <a:solidFill>
+                      <a:srgbClr val="202124"/>
+                    </a:solidFill>
+                  </a:tcPr>
+                </a:tc>
+                <a:tc>
+                  <a:txBody>
+                    <a:bodyPr/>
+                    <a:lstStyle/>
+                    <a:p>
+                      <a:r>
+                        <a:rPr sz="950" b="1">
+                          <a:solidFill>
+                            <a:srgbClr val="FFFFFF"/>
+                          </a:solidFill>
+                          <a:latin typeface="Calibri"/>
+                        </a:rPr>
+                        <a:t>why</a:t>
+                      </a:r>
+                    </a:p>
+                  </a:txBody>
+                  <a:tcPr>
+                    <a:solidFill>
+                      <a:srgbClr val="202124"/>
+                    </a:solidFill>
+                  </a:tcPr>
+                </a:tc>
+              </a:tr>
+              <a:tr h="566928">
+                <a:tc>
+                  <a:txBody>
+                    <a:bodyPr/>
+                    <a:lstStyle/>
+                    <a:p>
+                      <a:r>
+                        <a:rPr sz="950" b="1">
+                          <a:latin typeface="Calibri"/>
+                        </a:rPr>
+                        <a:t>Accelerator compute</a:t>
+                      </a:r>
+                    </a:p>
+                  </a:txBody>
+                  <a:tcPr>
+                    <a:solidFill>
+                      <a:srgbClr val="EFF3FA"/>
+                    </a:solidFill>
+                  </a:tcPr>
+                </a:tc>
+                <a:tc>
+                  <a:txBody>
+                    <a:bodyPr/>
+                    <a:lstStyle/>
+                    <a:p>
+                      <a:r>
+                        <a:rPr sz="950" b="0">
+                          <a:latin typeface="Calibri"/>
+                        </a:rPr>
+                        <a:t>GPU / VPU / NPU work is not modelled — the emulator does not execute it</a:t>
+                      </a:r>
+                    </a:p>
+                  </a:txBody>
+                  <a:tcPr>
+                    <a:solidFill>
+                      <a:srgbClr val="EFF3FA"/>
+                    </a:solidFill>
+                  </a:tcPr>
+                </a:tc>
+              </a:tr>
+              <a:tr h="566928">
+                <a:tc>
+                  <a:txBody>
+                    <a:bodyPr/>
+                    <a:lstStyle/>
+                    <a:p>
+                      <a:r>
+                        <a:rPr sz="950" b="1">
+                          <a:latin typeface="Calibri"/>
+                        </a:rPr>
+                        <a:t>Kernel &amp; DMA share</a:t>
+                      </a:r>
+                    </a:p>
+                  </a:txBody>
+                  <a:tcPr>
+                    <a:solidFill>
+                      <a:srgbClr val="FFFFFF"/>
+                    </a:solidFill>
+                  </a:tcPr>
+                </a:tc>
+                <a:tc>
+                  <a:txBody>
+                    <a:bodyPr/>
+                    <a:lstStyle/>
+                    <a:p>
+                      <a:r>
+                        <a:rPr sz="950" b="0">
+                          <a:latin typeface="Calibri"/>
+                        </a:rPr>
+                        <a:t>invisible from linux-user by construction; the system-mode harness exists and measures it (sha256: 10.0%)</a:t>
+                      </a:r>
+                    </a:p>
+                  </a:txBody>
+                  <a:tcPr>
+                    <a:solidFill>
+                      <a:srgbClr val="FFFFFF"/>
+                    </a:solidFill>
+                  </a:tcPr>
+                </a:tc>
+              </a:tr>
+              <a:tr h="566928">
+                <a:tc>
+                  <a:txBody>
+                    <a:bodyPr/>
+                    <a:lstStyle/>
+                    <a:p>
+                      <a:r>
+                        <a:rPr sz="950" b="1">
+                          <a:latin typeface="Calibri"/>
+                        </a:rPr>
+                        <a:t>Rates, and therefore watts</a:t>
+                      </a:r>
+                    </a:p>
+                  </a:txBody>
+                  <a:tcPr>
+                    <a:solidFill>
+                      <a:srgbClr val="EFF3FA"/>
+                    </a:solidFill>
+                  </a:tcPr>
+                </a:tc>
+                <a:tc>
+                  <a:txBody>
+                    <a:bodyPr/>
+                    <a:lstStyle/>
+                    <a:p>
+                      <a:r>
+                        <a:rPr sz="950" b="0">
+                          <a:latin typeface="Calibri"/>
+                        </a:rPr>
+                        <a:t>counts are time-free. A rate needs a duration, and an energy needs coefficients — both belong to the power team</a:t>
+                      </a:r>
+                    </a:p>
+                  </a:txBody>
+                  <a:tcPr>
+                    <a:solidFill>
+                      <a:srgbClr val="EFF3FA"/>
+                    </a:solidFill>
+                  </a:tcPr>
+                </a:tc>
+              </a:tr>
+            </a:tbl>
+          </a:graphicData>
+        </a:graphic>
+      </p:graphicFrame>
+      <p:sp>
+        <p:nvSpPr>
+          <p:cNvPr id="15" name="TextBox 14"/>
+          <p:cNvSpPr txBox="1"/>
+          <p:nvPr/>
+        </p:nvSpPr>
+        <p:spPr>
+          <a:xfrm>
+            <a:off x="548640" y="4846320"/>
+            <a:ext cx="11064240" cy="685800"/>
+          </a:xfrm>
+          <a:prstGeom prst="rect">
+            <a:avLst/>
+          </a:prstGeom>
+          <a:noFill/>
+        </p:spPr>
+        <p:txBody>
+          <a:bodyPr wrap="square">
+            <a:spAutoFit/>
+          </a:bodyPr>
+          <a:lstStyle/>
+          <a:p>
+            <a:pPr algn="l"/>
+            <a:r>
+              <a:rPr sz="1100" b="1">
+                <a:solidFill>
+                  <a:srgbClr val="202124"/>
+                </a:solidFill>
+                <a:latin typeface="Calibri"/>
+              </a:rPr>
+              <a:t>HOW THE TWO HALVES COMBINE. DEEP earned the corrections: 14 applications iterated mechanism by mechanism — a silicon-matched cache hierarchy, A55 write-streaming, a writeback model, a stride prefetcher — with five hypotheses falsified and recorded on the way. BROAD proved they are not curve-fits: 36 further applications, measured cold, land in the same bands. Deep alone would be a tuned demo; broad alone would be a coincidence. Together they are a licence to use the numbers on an application nobody has run yet.</a:t>
+            </a:r>
+          </a:p>
+        </p:txBody>
+      </p:sp>
+      <p:sp>
+        <p:nvSpPr>
+          <p:cNvPr id="16" name="TextBox 15"/>
+          <p:cNvSpPr txBox="1"/>
+          <p:nvPr/>
+        </p:nvSpPr>
+        <p:spPr>
+          <a:xfrm>
+            <a:off x="548640" y="5870448"/>
+            <a:ext cx="11064240" cy="457200"/>
+          </a:xfrm>
+          <a:prstGeom prst="rect">
+            <a:avLst/>
+          </a:prstGeom>
+          <a:noFill/>
+        </p:spPr>
+        <p:txBody>
+          <a:bodyPr wrap="square">
+            <a:spAutoFit/>
+          </a:bodyPr>
+          <a:lstStyle/>
+          <a:p>
+            <a:pPr algn="l"/>
+            <a:r>
+              <a:rPr sz="1100" b="1">
+                <a:solidFill>
+                  <a:srgbClr val="187A33"/>
+                </a:solidFill>
+                <a:latin typeface="Calibri"/>
+              </a:rPr>
+              <a:t>WHAT THE USER ACTUALLY RUNS:   afgen/afgen.sh my-apps.manifest afs/   →   one activity-factor JSON per application, every field provenance-tagged with its correction and band. Fifty apps in, fifty activity factors out.</a:t>
+            </a:r>
+          </a:p>
+        </p:txBody>
+      </p:sp>
+      <p:sp>
+        <p:nvSpPr>
+          <p:cNvPr id="17" name="TextBox 16"/>
+          <p:cNvSpPr txBox="1"/>
+          <p:nvPr/>
+        </p:nvSpPr>
+        <p:spPr>
+          <a:xfrm>
+            <a:off x="548640" y="6309360"/>
+            <a:ext cx="11064240" cy="365760"/>
+          </a:xfrm>
+          <a:prstGeom prst="rect">
+            <a:avLst/>
+          </a:prstGeom>
+          <a:noFill/>
+        </p:spPr>
+        <p:txBody>
+          <a:bodyPr wrap="square">
+            <a:spAutoFit/>
+          </a:bodyPr>
+          <a:lstStyle/>
+          <a:p>
+            <a:pPr algn="l"/>
+            <a:r>
+              <a:rPr sz="950" b="0">
+                <a:solidFill>
+                  <a:srgbClr val="5F6368"/>
+                </a:solidFill>
+                <a:latin typeface="Calibri"/>
+              </a:rPr>
+              <a:t>⚠️ These are ACTIVITY bands, not power bands: they license the count vector N in E = Σ eᵢ×Nᵢ. What a ×/÷1.21 read band costs a final energy number depends on the weights eᵢ — the power team's half, and why wattson never prints a watt.</a:t>
             </a:r>
           </a:p>
         </p:txBody>

--- a/xcheck/xcheck-correlation.pptx
+++ b/xcheck/xcheck-correlation.pptx
@@ -3371,7 +3371,7 @@
                 </a:solidFill>
                 <a:latin typeface="Calibri"/>
               </a:rPr>
-              <a:t>Executive summary</a:t>
+              <a:t>Can a user get activity factors that match silicon?</a:t>
             </a:r>
           </a:p>
         </p:txBody>
@@ -3449,7 +3449,7 @@
                 </a:solidFill>
                 <a:latin typeface="Calibri"/>
               </a:rPr>
-              <a:t>Everything on one slide; the rest of the deck is evidence.</a:t>
+              <a:t>The question this whole campaign exists to answer, answered.</a:t>
             </a:r>
           </a:p>
         </p:txBody>
@@ -3524,17 +3524,165 @@
           </a:p>
         </p:txBody>
       </p:sp>
+      <p:sp>
+        <p:nvSpPr>
+          <p:cNvPr id="8" name="Rectangle 7"/>
+          <p:cNvSpPr/>
+          <p:nvPr/>
+        </p:nvSpPr>
+        <p:spPr>
+          <a:xfrm>
+            <a:off x="548640" y="1325880"/>
+            <a:ext cx="11064240" cy="960120"/>
+          </a:xfrm>
+          <a:prstGeom prst="rect">
+            <a:avLst/>
+          </a:prstGeom>
+          <a:solidFill>
+            <a:srgbClr val="0E5C2B"/>
+          </a:solidFill>
+          <a:ln>
+            <a:noFill/>
+          </a:ln>
+        </p:spPr>
+        <p:style>
+          <a:lnRef idx="1">
+            <a:schemeClr val="accent1"/>
+          </a:lnRef>
+          <a:fillRef idx="3">
+            <a:schemeClr val="accent1"/>
+          </a:fillRef>
+          <a:effectRef idx="2">
+            <a:schemeClr val="accent1"/>
+          </a:effectRef>
+          <a:fontRef idx="minor">
+            <a:schemeClr val="lt1"/>
+          </a:fontRef>
+        </p:style>
+        <p:txBody>
+          <a:bodyPr rtlCol="0" anchor="ctr"/>
+          <a:lstStyle/>
+          <a:p>
+            <a:pPr algn="ctr"/>
+          </a:p>
+        </p:txBody>
+      </p:sp>
+      <p:sp>
+        <p:nvSpPr>
+          <p:cNvPr id="9" name="TextBox 8"/>
+          <p:cNvSpPr txBox="1"/>
+          <p:nvPr/>
+        </p:nvSpPr>
+        <p:spPr>
+          <a:xfrm>
+            <a:off x="822960" y="1389888"/>
+            <a:ext cx="10607040" cy="411480"/>
+          </a:xfrm>
+          <a:prstGeom prst="rect">
+            <a:avLst/>
+          </a:prstGeom>
+          <a:noFill/>
+        </p:spPr>
+        <p:txBody>
+          <a:bodyPr wrap="square">
+            <a:spAutoFit/>
+          </a:bodyPr>
+          <a:lstStyle/>
+          <a:p>
+            <a:pPr algn="l"/>
+            <a:r>
+              <a:rPr sz="2000" b="1">
+                <a:solidFill>
+                  <a:srgbClr val="FFFFFF"/>
+                </a:solidFill>
+                <a:latin typeface="Calibri"/>
+              </a:rPr>
+              <a:t>YES — for CPU and DRAM activity, within the bands below.</a:t>
+            </a:r>
+          </a:p>
+        </p:txBody>
+      </p:sp>
+      <p:sp>
+        <p:nvSpPr>
+          <p:cNvPr id="10" name="TextBox 9"/>
+          <p:cNvSpPr txBox="1"/>
+          <p:nvPr/>
+        </p:nvSpPr>
+        <p:spPr>
+          <a:xfrm>
+            <a:off x="822960" y="1755648"/>
+            <a:ext cx="10607040" cy="365760"/>
+          </a:xfrm>
+          <a:prstGeom prst="rect">
+            <a:avLst/>
+          </a:prstGeom>
+          <a:noFill/>
+        </p:spPr>
+        <p:txBody>
+          <a:bodyPr wrap="square">
+            <a:spAutoFit/>
+          </a:bodyPr>
+          <a:lstStyle/>
+          <a:p>
+            <a:pPr algn="l"/>
+            <a:r>
+              <a:rPr sz="1150" b="0">
+                <a:solidFill>
+                  <a:srgbClr val="C9E4D4"/>
+                </a:solidFill>
+                <a:latin typeface="Calibri"/>
+              </a:rPr>
+              <a:t>Not 'yes in principle'. The corrections were fitted on 14 applications and then held on 36 the model had never seen, with the SAME spread — which is the user's situation exactly: an app nobody has measured.</a:t>
+            </a:r>
+          </a:p>
+        </p:txBody>
+      </p:sp>
+      <p:sp>
+        <p:nvSpPr>
+          <p:cNvPr id="11" name="TextBox 10"/>
+          <p:cNvSpPr txBox="1"/>
+          <p:nvPr/>
+        </p:nvSpPr>
+        <p:spPr>
+          <a:xfrm>
+            <a:off x="548640" y="2395728"/>
+            <a:ext cx="5486400" cy="274320"/>
+          </a:xfrm>
+          <a:prstGeom prst="rect">
+            <a:avLst/>
+          </a:prstGeom>
+          <a:noFill/>
+        </p:spPr>
+        <p:txBody>
+          <a:bodyPr wrap="square">
+            <a:spAutoFit/>
+          </a:bodyPr>
+          <a:lstStyle/>
+          <a:p>
+            <a:pPr algn="l"/>
+            <a:r>
+              <a:rPr sz="1200" b="1">
+                <a:solidFill>
+                  <a:srgbClr val="187A33"/>
+                </a:solidFill>
+                <a:latin typeface="Calibri"/>
+              </a:rPr>
+              <a:t>WHAT YOU GET, AND WHAT IT IS WORTH</a:t>
+            </a:r>
+          </a:p>
+        </p:txBody>
+      </p:sp>
       <p:graphicFrame>
         <p:nvGraphicFramePr>
-          <p:cNvPr id="8" name="Table 7"/>
+          <p:cNvPr id="12" name="Table 11"/>
           <p:cNvGraphicFramePr>
             <a:graphicFrameLocks noGrp="1"/>
           </p:cNvGraphicFramePr>
           <p:nvPr/>
         </p:nvGraphicFramePr>
         <p:xfrm>
-          <a:off x="548640" y="1371600"/>
-          <a:ext cx="11064240" cy="3785616"/>
+          <a:off x="548640" y="2697480"/>
+          <a:ext cx="5486400" cy="2414016"/>
         </p:xfrm>
         <a:graphic>
           <a:graphicData uri="http://schemas.openxmlformats.org/drawingml/2006/table">
@@ -3543,18 +3691,18 @@
                 <a:tableStyleId>{5C22544A-7EE6-4342-B048-85BDC9FD1C3A}</a:tableStyleId>
               </a:tblPr>
               <a:tblGrid>
-                <a:gridCol w="2834640"/>
-                <a:gridCol w="5120640"/>
-                <a:gridCol w="3108960"/>
+                <a:gridCol w="2103120"/>
+                <a:gridCol w="1371600"/>
+                <a:gridCol w="2011680"/>
               </a:tblGrid>
-              <a:tr h="420624">
-                <a:tc>
-                  <a:txBody>
-                    <a:bodyPr/>
-                    <a:lstStyle/>
-                    <a:p>
-                      <a:r>
-                        <a:rPr sz="1000" b="1">
+              <a:tr h="402336">
+                <a:tc>
+                  <a:txBody>
+                    <a:bodyPr/>
+                    <a:lstStyle/>
+                    <a:p>
+                      <a:r>
+                        <a:rPr sz="850" b="1">
                           <a:solidFill>
                             <a:srgbClr val="FFFFFF"/>
                           </a:solidFill>
@@ -3576,13 +3724,13 @@
                     <a:lstStyle/>
                     <a:p>
                       <a:r>
-                        <a:rPr sz="1000" b="1">
+                        <a:rPr sz="850" b="1">
                           <a:solidFill>
                             <a:srgbClr val="FFFFFF"/>
                           </a:solidFill>
                           <a:latin typeface="Calibri"/>
                         </a:rPr>
-                        <a:t>result</a:t>
+                        <a:t>apply</a:t>
                       </a:r>
                     </a:p>
                   </a:txBody>
@@ -3598,13 +3746,13 @@
                     <a:lstStyle/>
                     <a:p>
                       <a:r>
-                        <a:rPr sz="1000" b="1">
+                        <a:rPr sz="850" b="1">
                           <a:solidFill>
                             <a:srgbClr val="FFFFFF"/>
                           </a:solidFill>
                           <a:latin typeface="Calibri"/>
                         </a:rPr>
-                        <a:t>status</a:t>
+                        <a:t>held-out evidence</a:t>
                       </a:r>
                     </a:p>
                   </a:txBody>
@@ -3615,17 +3763,17 @@
                   </a:tcPr>
                 </a:tc>
               </a:tr>
-              <a:tr h="420624">
-                <a:tc>
-                  <a:txBody>
-                    <a:bodyPr/>
-                    <a:lstStyle/>
-                    <a:p>
-                      <a:r>
-                        <a:rPr sz="1000" b="1">
-                          <a:latin typeface="Calibri"/>
-                        </a:rPr>
-                        <a:t>Generalization (the gate)</a:t>
+              <a:tr h="402336">
+                <a:tc>
+                  <a:txBody>
+                    <a:bodyPr/>
+                    <a:lstStyle/>
+                    <a:p>
+                      <a:r>
+                        <a:rPr sz="850" b="1">
+                          <a:latin typeface="Calibri"/>
+                        </a:rPr>
+                        <a:t>Instructions, per core</a:t>
                       </a:r>
                     </a:p>
                   </a:txBody>
@@ -3641,10 +3789,10 @@
                     <a:lstStyle/>
                     <a:p>
                       <a:r>
-                        <a:rPr sz="1000" b="0">
-                          <a:latin typeface="Calibri"/>
-                        </a:rPr>
-                        <a:t>corrections fitted on 14 apps HELD on 36 unseen apps: insns 0.979 ×/÷1.04, reads transfer with identical ×/÷1.21 spread</a:t>
+                        <a:rPr sz="850" b="0">
+                          <a:latin typeface="Calibri"/>
+                        </a:rPr>
+                        <a:t>×1.00 — use raw</a:t>
                       </a:r>
                     </a:p>
                   </a:txBody>
@@ -3660,13 +3808,10 @@
                     <a:lstStyle/>
                     <a:p>
                       <a:r>
-                        <a:rPr sz="1000" b="0">
-                          <a:solidFill>
-                            <a:srgbClr val="187A33"/>
-                          </a:solidFill>
-                          <a:latin typeface="Calibri"/>
-                        </a:rPr>
-                        <a:t>VALIDATED — 50-app held-out</a:t>
+                        <a:rPr sz="850" b="0">
+                          <a:latin typeface="Calibri"/>
+                        </a:rPr>
+                        <a:t>0.979 ×/÷1.04 on 36 unseen apps</a:t>
                       </a:r>
                     </a:p>
                   </a:txBody>
@@ -3677,17 +3822,17 @@
                   </a:tcPr>
                 </a:tc>
               </a:tr>
-              <a:tr h="420624">
-                <a:tc>
-                  <a:txBody>
-                    <a:bodyPr/>
-                    <a:lstStyle/>
-                    <a:p>
-                      <a:r>
-                        <a:rPr sz="1000" b="1">
-                          <a:latin typeface="Calibri"/>
-                        </a:rPr>
-                        <a:t>Instruction activity, per core</a:t>
+              <a:tr h="402336">
+                <a:tc>
+                  <a:txBody>
+                    <a:bodyPr/>
+                    <a:lstStyle/>
+                    <a:p>
+                      <a:r>
+                        <a:rPr sz="850" b="1">
+                          <a:latin typeface="Calibri"/>
+                        </a:rPr>
+                        <a:t>DRAM reads</a:t>
                       </a:r>
                     </a:p>
                   </a:txBody>
@@ -3703,10 +3848,10 @@
                     <a:lstStyle/>
                     <a:p>
                       <a:r>
-                        <a:rPr sz="1000" b="0">
-                          <a:latin typeface="Calibri"/>
-                        </a:rPr>
-                        <a:t>0.98 – 1.06 across all 14 apps (0.997 on a 10.2 B-insn vision app)</a:t>
+                        <a:rPr sz="850" b="0">
+                          <a:latin typeface="Calibri"/>
+                        </a:rPr>
+                        <a:t>×1.02</a:t>
                       </a:r>
                     </a:p>
                   </a:txBody>
@@ -3722,13 +3867,10 @@
                     <a:lstStyle/>
                     <a:p>
                       <a:r>
-                        <a:rPr sz="1000" b="0">
-                          <a:solidFill>
-                            <a:srgbClr val="187A33"/>
-                          </a:solidFill>
-                          <a:latin typeface="Calibri"/>
-                        </a:rPr>
-                        <a:t>VALIDATED — use as-is</a:t>
+                        <a:rPr sz="850" b="0">
+                          <a:latin typeface="Calibri"/>
+                        </a:rPr>
+                        <a:t>×/÷1.21 held out — identical to the fitted set</a:t>
                       </a:r>
                     </a:p>
                   </a:txBody>
@@ -3739,17 +3881,17 @@
                   </a:tcPr>
                 </a:tc>
               </a:tr>
-              <a:tr h="420624">
-                <a:tc>
-                  <a:txBody>
-                    <a:bodyPr/>
-                    <a:lstStyle/>
-                    <a:p>
-                      <a:r>
-                        <a:rPr sz="1000" b="1">
-                          <a:latin typeface="Calibri"/>
-                        </a:rPr>
-                        <a:t>DRAM read traffic</a:t>
+              <a:tr h="402336">
+                <a:tc>
+                  <a:txBody>
+                    <a:bodyPr/>
+                    <a:lstStyle/>
+                    <a:p>
+                      <a:r>
+                        <a:rPr sz="850" b="1">
+                          <a:latin typeface="Calibri"/>
+                        </a:rPr>
+                        <a:t>DRAM writes</a:t>
                       </a:r>
                     </a:p>
                   </a:txBody>
@@ -3765,10 +3907,10 @@
                     <a:lstStyle/>
                     <a:p>
                       <a:r>
-                        <a:rPr sz="1000" b="0">
-                          <a:latin typeface="Calibri"/>
-                        </a:rPr>
-                        <a:t>X4 prefetch model: proxy = 0.98 × silicon, ×/÷ 1.14 — the exit criterion met (was 0.81 ×/÷ 1.26)</a:t>
+                        <a:rPr sz="850" b="0">
+                          <a:latin typeface="Calibri"/>
+                        </a:rPr>
+                        <a:t>×1.11</a:t>
                       </a:r>
                     </a:p>
                   </a:txBody>
@@ -3784,13 +3926,10 @@
                     <a:lstStyle/>
                     <a:p>
                       <a:r>
-                        <a:rPr sz="1000" b="0">
-                          <a:solidFill>
-                            <a:srgbClr val="187A33"/>
-                          </a:solidFill>
-                          <a:latin typeface="Calibri"/>
-                        </a:rPr>
-                        <a:t>USABLE — correction ~1.0</a:t>
+                        <a:rPr sz="850" b="0">
+                          <a:latin typeface="Calibri"/>
+                        </a:rPr>
+                        <a:t>×/÷1.28 held out — the widest band; treat as an envelope</a:t>
                       </a:r>
                     </a:p>
                   </a:txBody>
@@ -3801,17 +3940,17 @@
                   </a:tcPr>
                 </a:tc>
               </a:tr>
-              <a:tr h="420624">
-                <a:tc>
-                  <a:txBody>
-                    <a:bodyPr/>
-                    <a:lstStyle/>
-                    <a:p>
-                      <a:r>
-                        <a:rPr sz="1000" b="1">
-                          <a:latin typeface="Calibri"/>
-                        </a:rPr>
-                        <a:t>DRAM-quiet classification</a:t>
+              <a:tr h="402336">
+                <a:tc>
+                  <a:txBody>
+                    <a:bodyPr/>
+                    <a:lstStyle/>
+                    <a:p>
+                      <a:r>
+                        <a:rPr sz="850" b="1">
+                          <a:latin typeface="Calibri"/>
+                        </a:rPr>
+                        <a:t>Is this app DRAM-quiet?</a:t>
                       </a:r>
                     </a:p>
                   </a:txBody>
@@ -3827,10 +3966,10 @@
                     <a:lstStyle/>
                     <a:p>
                       <a:r>
-                        <a:rPr sz="1000" b="0">
-                          <a:latin typeface="Calibri"/>
-                        </a:rPr>
-                        <a:t>6 low-traffic apps (alu, lua, lz4, net2, pacman, sqlite) predicted quiet; silicon concurs</a:t>
+                        <a:rPr sz="850" b="0">
+                          <a:latin typeface="Calibri"/>
+                        </a:rPr>
+                        <a:t>yes/no, no correction</a:t>
                       </a:r>
                     </a:p>
                   </a:txBody>
@@ -3846,13 +3985,10 @@
                     <a:lstStyle/>
                     <a:p>
                       <a:r>
-                        <a:rPr sz="1000" b="0">
-                          <a:solidFill>
-                            <a:srgbClr val="187A33"/>
-                          </a:solidFill>
-                          <a:latin typeface="Calibri"/>
-                        </a:rPr>
-                        <a:t>VALIDATED</a:t>
+                        <a:rPr sz="850" b="0">
+                          <a:latin typeface="Calibri"/>
+                        </a:rPr>
+                        <a:t>every quiet app classified correctly, both sets</a:t>
                       </a:r>
                     </a:p>
                   </a:txBody>
@@ -3863,17 +3999,17 @@
                   </a:tcPr>
                 </a:tc>
               </a:tr>
-              <a:tr h="420624">
-                <a:tc>
-                  <a:txBody>
-                    <a:bodyPr/>
-                    <a:lstStyle/>
-                    <a:p>
-                      <a:r>
-                        <a:rPr sz="1000" b="1">
-                          <a:latin typeface="Calibri"/>
-                        </a:rPr>
-                        <a:t>DRAM write traffic</a:t>
+              <a:tr h="402336">
+                <a:tc>
+                  <a:txBody>
+                    <a:bodyPr/>
+                    <a:lstStyle/>
+                    <a:p>
+                      <a:r>
+                        <a:rPr sz="850" b="1">
+                          <a:latin typeface="Calibri"/>
+                        </a:rPr>
+                        <a:t>User AND kernel instructions</a:t>
                       </a:r>
                     </a:p>
                   </a:txBody>
@@ -3889,10 +4025,10 @@
                     <a:lstStyle/>
                     <a:p>
                       <a:r>
-                        <a:rPr sz="1000" b="0">
-                          <a:latin typeface="Calibri"/>
-                        </a:rPr>
-                        <a:t>proxy = 0.90 × silicon, ×/÷ 1.09 (X1 writeback model, base pass); 0.83 ×/÷ 1.28 held-out</a:t>
+                        <a:rPr sz="850" b="0">
+                          <a:latin typeface="Calibri"/>
+                        </a:rPr>
+                        <a:t>boot-differential, system mode</a:t>
                       </a:r>
                     </a:p>
                   </a:txBody>
@@ -3908,205 +4044,16 @@
                     <a:lstStyle/>
                     <a:p>
                       <a:r>
-                        <a:rPr sz="1000" b="0">
-                          <a:solidFill>
-                            <a:srgbClr val="187A33"/>
-                          </a:solidFill>
-                          <a:latin typeface="Calibri"/>
-                        </a:rPr>
-                        <a:t>USABLE — apply ×1.11</a:t>
+                        <a:rPr sz="850" b="0">
+                          <a:latin typeface="Calibri"/>
+                        </a:rPr>
+                        <a:t>kernel+system share MEASURED: sha256 10.0%, networking 16.7%</a:t>
                       </a:r>
                     </a:p>
                   </a:txBody>
                   <a:tcPr>
                     <a:solidFill>
                       <a:srgbClr val="EFF3FA"/>
-                    </a:solidFill>
-                  </a:tcPr>
-                </a:tc>
-              </a:tr>
-              <a:tr h="420624">
-                <a:tc>
-                  <a:txBody>
-                    <a:bodyPr/>
-                    <a:lstStyle/>
-                    <a:p>
-                      <a:r>
-                        <a:rPr sz="1000" b="1">
-                          <a:latin typeface="Calibri"/>
-                        </a:rPr>
-                        <a:t>Kernel activity</a:t>
-                      </a:r>
-                    </a:p>
-                  </a:txBody>
-                  <a:tcPr>
-                    <a:solidFill>
-                      <a:srgbClr val="FFFFFF"/>
-                    </a:solidFill>
-                  </a:tcPr>
-                </a:tc>
-                <a:tc>
-                  <a:txBody>
-                    <a:bodyPr/>
-                    <a:lstStyle/>
-                    <a:p>
-                      <a:r>
-                        <a:rPr sz="1000" b="0">
-                          <a:latin typeface="Calibri"/>
-                        </a:rPr>
-                        <a:t>boot-differential harness live: sha256 kernel+system share MEASURED at 10.0% over user mode</a:t>
-                      </a:r>
-                    </a:p>
-                  </a:txBody>
-                  <a:tcPr>
-                    <a:solidFill>
-                      <a:srgbClr val="FFFFFF"/>
-                    </a:solidFill>
-                  </a:tcPr>
-                </a:tc>
-                <a:tc>
-                  <a:txBody>
-                    <a:bodyPr/>
-                    <a:lstStyle/>
-                    <a:p>
-                      <a:r>
-                        <a:rPr sz="1000" b="0">
-                          <a:solidFill>
-                            <a:srgbClr val="5F6368"/>
-                          </a:solidFill>
-                          <a:latin typeface="Calibri"/>
-                        </a:rPr>
-                        <a:t>MEASURABLE — X2a</a:t>
-                      </a:r>
-                    </a:p>
-                  </a:txBody>
-                  <a:tcPr>
-                    <a:solidFill>
-                      <a:srgbClr val="FFFFFF"/>
-                    </a:solidFill>
-                  </a:tcPr>
-                </a:tc>
-              </a:tr>
-              <a:tr h="420624">
-                <a:tc>
-                  <a:txBody>
-                    <a:bodyPr/>
-                    <a:lstStyle/>
-                    <a:p>
-                      <a:r>
-                        <a:rPr sz="1000" b="1">
-                          <a:latin typeface="Calibri"/>
-                        </a:rPr>
-                        <a:t>DMA / network activity</a:t>
-                      </a:r>
-                    </a:p>
-                  </a:txBody>
-                  <a:tcPr>
-                    <a:solidFill>
-                      <a:srgbClr val="EFF3FA"/>
-                    </a:solidFill>
-                  </a:tcPr>
-                </a:tc>
-                <a:tc>
-                  <a:txBody>
-                    <a:bodyPr/>
-                    <a:lstStyle/>
-                    <a:p>
-                      <a:r>
-                        <a:rPr sz="1000" b="0">
-                          <a:latin typeface="Calibri"/>
-                        </a:rPr>
-                        <a:t>CPU-side traffic visible &amp; coherent; DMA write invisible to TCG by construction; kernel share device-path-dependent (silicon NIC 17% vs virtio 41%)</a:t>
-                      </a:r>
-                    </a:p>
-                  </a:txBody>
-                  <a:tcPr>
-                    <a:solidFill>
-                      <a:srgbClr val="EFF3FA"/>
-                    </a:solidFill>
-                  </a:tcPr>
-                </a:tc>
-                <a:tc>
-                  <a:txBody>
-                    <a:bodyPr/>
-                    <a:lstStyle/>
-                    <a:p>
-                      <a:r>
-                        <a:rPr sz="1000" b="0">
-                          <a:solidFill>
-                            <a:srgbClr val="5F6368"/>
-                          </a:solidFill>
-                          <a:latin typeface="Calibri"/>
-                        </a:rPr>
-                        <a:t>CHARACTERIZED — model the target's own NIC</a:t>
-                      </a:r>
-                    </a:p>
-                  </a:txBody>
-                  <a:tcPr>
-                    <a:solidFill>
-                      <a:srgbClr val="EFF3FA"/>
-                    </a:solidFill>
-                  </a:tcPr>
-                </a:tc>
-              </a:tr>
-              <a:tr h="420624">
-                <a:tc>
-                  <a:txBody>
-                    <a:bodyPr/>
-                    <a:lstStyle/>
-                    <a:p>
-                      <a:r>
-                        <a:rPr sz="1000" b="1">
-                          <a:latin typeface="Calibri"/>
-                        </a:rPr>
-                        <a:t>Multi-core</a:t>
-                      </a:r>
-                    </a:p>
-                  </a:txBody>
-                  <a:tcPr>
-                    <a:solidFill>
-                      <a:srgbClr val="FFFFFF"/>
-                    </a:solidFill>
-                  </a:tcPr>
-                </a:tc>
-                <a:tc>
-                  <a:txBody>
-                    <a:bodyPr/>
-                    <a:lstStyle/>
-                    <a:p>
-                      <a:r>
-                        <a:rPr sz="1000" b="0">
-                          <a:latin typeface="Calibri"/>
-                        </a:rPr>
-                        <a:t>DRAM ratios thread-invariant across a 1/2/4/6T sweep; the +23% insn outlier PROVEN to be OpenMP barrier spin (passive: 1.231 → 0.985)</a:t>
-                      </a:r>
-                    </a:p>
-                  </a:txBody>
-                  <a:tcPr>
-                    <a:solidFill>
-                      <a:srgbClr val="FFFFFF"/>
-                    </a:solidFill>
-                  </a:tcPr>
-                </a:tc>
-                <a:tc>
-                  <a:txBody>
-                    <a:bodyPr/>
-                    <a:lstStyle/>
-                    <a:p>
-                      <a:r>
-                        <a:rPr sz="1000" b="0">
-                          <a:solidFill>
-                            <a:srgbClr val="187A33"/>
-                          </a:solidFill>
-                          <a:latin typeface="Calibri"/>
-                        </a:rPr>
-                        <a:t>USABLE — passive waiting on barrier-heavy code</a:t>
-                      </a:r>
-                    </a:p>
-                  </a:txBody>
-                  <a:tcPr>
-                    <a:solidFill>
-                      <a:srgbClr val="FFFFFF"/>
                     </a:solidFill>
                   </a:tcPr>
                 </a:tc>
@@ -4117,14 +4064,14 @@
       </p:graphicFrame>
       <p:sp>
         <p:nvSpPr>
-          <p:cNvPr id="9" name="TextBox 8"/>
+          <p:cNvPr id="13" name="TextBox 12"/>
           <p:cNvSpPr txBox="1"/>
           <p:nvPr/>
         </p:nvSpPr>
         <p:spPr>
           <a:xfrm>
-            <a:off x="548640" y="5486400"/>
-            <a:ext cx="11064240" cy="731520"/>
+            <a:off x="6309360" y="2395728"/>
+            <a:ext cx="5303520" cy="274320"/>
           </a:xfrm>
           <a:prstGeom prst="rect">
             <a:avLst/>
@@ -4139,27 +4086,219 @@
           <a:p>
             <a:pPr algn="l"/>
             <a:r>
-              <a:rPr sz="1150" b="0">
+              <a:rPr sz="1200" b="1">
                 <a:solidFill>
-                  <a:srgbClr val="202124"/>
+                  <a:srgbClr val="B31412"/>
                 </a:solidFill>
                 <a:latin typeface="Calibri"/>
               </a:rPr>
-              <a:t>Two instrument findings worth the price of admission: the A55 PMU's l3d_cache_refill counts only DEMAND refills — prefetched lines bypass it, so ground truth belongs at the DDR controller; and the A55's write-streaming (no-allocate) mode is a 2.0× error if unmodelled.</a:t>
-            </a:r>
-          </a:p>
-        </p:txBody>
-      </p:sp>
-      <p:sp>
-        <p:nvSpPr>
-          <p:cNvPr id="10" name="TextBox 9"/>
+              <a:t>TODAY'S BOUNDARIES</a:t>
+            </a:r>
+          </a:p>
+        </p:txBody>
+      </p:sp>
+      <p:graphicFrame>
+        <p:nvGraphicFramePr>
+          <p:cNvPr id="14" name="Table 13"/>
+          <p:cNvGraphicFramePr>
+            <a:graphicFrameLocks noGrp="1"/>
+          </p:cNvGraphicFramePr>
+          <p:nvPr/>
+        </p:nvGraphicFramePr>
+        <p:xfrm>
+          <a:off x="6309360" y="2697480"/>
+          <a:ext cx="5303520" cy="2267712"/>
+        </p:xfrm>
+        <a:graphic>
+          <a:graphicData uri="http://schemas.openxmlformats.org/drawingml/2006/table">
+            <a:tbl>
+              <a:tblPr firstRow="1" bandRow="1">
+                <a:tableStyleId>{5C22544A-7EE6-4342-B048-85BDC9FD1C3A}</a:tableStyleId>
+              </a:tblPr>
+              <a:tblGrid>
+                <a:gridCol w="1737360"/>
+                <a:gridCol w="3566160"/>
+              </a:tblGrid>
+              <a:tr h="566928">
+                <a:tc>
+                  <a:txBody>
+                    <a:bodyPr/>
+                    <a:lstStyle/>
+                    <a:p>
+                      <a:r>
+                        <a:rPr sz="850" b="1">
+                          <a:solidFill>
+                            <a:srgbClr val="FFFFFF"/>
+                          </a:solidFill>
+                          <a:latin typeface="Calibri"/>
+                        </a:rPr>
+                        <a:t>boundary</a:t>
+                      </a:r>
+                    </a:p>
+                  </a:txBody>
+                  <a:tcPr>
+                    <a:solidFill>
+                      <a:srgbClr val="202124"/>
+                    </a:solidFill>
+                  </a:tcPr>
+                </a:tc>
+                <a:tc>
+                  <a:txBody>
+                    <a:bodyPr/>
+                    <a:lstStyle/>
+                    <a:p>
+                      <a:r>
+                        <a:rPr sz="850" b="1">
+                          <a:solidFill>
+                            <a:srgbClr val="FFFFFF"/>
+                          </a:solidFill>
+                          <a:latin typeface="Calibri"/>
+                        </a:rPr>
+                        <a:t>why</a:t>
+                      </a:r>
+                    </a:p>
+                  </a:txBody>
+                  <a:tcPr>
+                    <a:solidFill>
+                      <a:srgbClr val="202124"/>
+                    </a:solidFill>
+                  </a:tcPr>
+                </a:tc>
+              </a:tr>
+              <a:tr h="566928">
+                <a:tc>
+                  <a:txBody>
+                    <a:bodyPr/>
+                    <a:lstStyle/>
+                    <a:p>
+                      <a:r>
+                        <a:rPr sz="850" b="1">
+                          <a:latin typeface="Calibri"/>
+                        </a:rPr>
+                        <a:t>Accelerator compute — TODAY</a:t>
+                      </a:r>
+                    </a:p>
+                  </a:txBody>
+                  <a:tcPr>
+                    <a:solidFill>
+                      <a:srgbClr val="EFF3FA"/>
+                    </a:solidFill>
+                  </a:tcPr>
+                </a:tc>
+                <a:tc>
+                  <a:txBody>
+                    <a:bodyPr/>
+                    <a:lstStyle/>
+                    <a:p>
+                      <a:r>
+                        <a:rPr sz="850" b="0">
+                          <a:latin typeface="Calibri"/>
+                        </a:rPr>
+                        <a:t>the emulator does not execute GPU/VPU/NPU work, so there is no activity to count. Moving: a Neutron NPU model is in build now; a GPU AF scope off the GLES command stream is the next investigation</a:t>
+                      </a:r>
+                    </a:p>
+                  </a:txBody>
+                  <a:tcPr>
+                    <a:solidFill>
+                      <a:srgbClr val="EFF3FA"/>
+                    </a:solidFill>
+                  </a:tcPr>
+                </a:tc>
+              </a:tr>
+              <a:tr h="566928">
+                <a:tc>
+                  <a:txBody>
+                    <a:bodyPr/>
+                    <a:lstStyle/>
+                    <a:p>
+                      <a:r>
+                        <a:rPr sz="850" b="1">
+                          <a:latin typeface="Calibri"/>
+                        </a:rPr>
+                        <a:t>DMA payload bytes</a:t>
+                      </a:r>
+                    </a:p>
+                  </a:txBody>
+                  <a:tcPr>
+                    <a:solidFill>
+                      <a:srgbClr val="FFFFFF"/>
+                    </a:solidFill>
+                  </a:tcPr>
+                </a:tc>
+                <a:tc>
+                  <a:txBody>
+                    <a:bodyPr/>
+                    <a:lstStyle/>
+                    <a:p>
+                      <a:r>
+                        <a:rPr sz="850" b="0">
+                          <a:latin typeface="Calibri"/>
+                        </a:rPr>
+                        <a:t>a device model writes guest memory without going through TCG, so no CPU-side plugin can see it. The bytes are known exactly to the device model — this is an instrumentation gap, not an unknown</a:t>
+                      </a:r>
+                    </a:p>
+                  </a:txBody>
+                  <a:tcPr>
+                    <a:solidFill>
+                      <a:srgbClr val="FFFFFF"/>
+                    </a:solidFill>
+                  </a:tcPr>
+                </a:tc>
+              </a:tr>
+              <a:tr h="566928">
+                <a:tc>
+                  <a:txBody>
+                    <a:bodyPr/>
+                    <a:lstStyle/>
+                    <a:p>
+                      <a:r>
+                        <a:rPr sz="850" b="1">
+                          <a:latin typeface="Calibri"/>
+                        </a:rPr>
+                        <a:t>Which core, at what DVFS point</a:t>
+                      </a:r>
+                    </a:p>
+                  </a:txBody>
+                  <a:tcPr>
+                    <a:solidFill>
+                      <a:srgbClr val="EFF3FA"/>
+                    </a:solidFill>
+                  </a:tcPr>
+                </a:tc>
+                <a:tc>
+                  <a:txBody>
+                    <a:bodyPr/>
+                    <a:lstStyle/>
+                    <a:p>
+                      <a:r>
+                        <a:rPr sz="850" b="0">
+                          <a:latin typeface="Calibri"/>
+                        </a:rPr>
+                        <a:t>QEMU has no frequency or core-type notion. Counts are per-vCPU and frequency-free; mapping them onto big/LITTLE and an OPP is the power model's job</a:t>
+                      </a:r>
+                    </a:p>
+                  </a:txBody>
+                  <a:tcPr>
+                    <a:solidFill>
+                      <a:srgbClr val="EFF3FA"/>
+                    </a:solidFill>
+                  </a:tcPr>
+                </a:tc>
+              </a:tr>
+            </a:tbl>
+          </a:graphicData>
+        </a:graphic>
+      </p:graphicFrame>
+      <p:sp>
+        <p:nvSpPr>
+          <p:cNvPr id="15" name="TextBox 14"/>
           <p:cNvSpPr txBox="1"/>
           <p:nvPr/>
         </p:nvSpPr>
         <p:spPr>
           <a:xfrm>
-            <a:off x="548640" y="6199632"/>
-            <a:ext cx="11064240" cy="548640"/>
+            <a:off x="548640" y="5212080"/>
+            <a:ext cx="11064240" cy="640080"/>
           </a:xfrm>
           <a:prstGeom prst="rect">
             <a:avLst/>
@@ -4174,13 +4313,83 @@
           <a:p>
             <a:pPr algn="l"/>
             <a:r>
-              <a:rPr sz="1100" b="0">
+              <a:rPr sz="1100" b="1">
+                <a:solidFill>
+                  <a:srgbClr val="202124"/>
+                </a:solidFill>
+                <a:latin typeface="Calibri"/>
+              </a:rPr>
+              <a:t>HOW THE TWO HALVES COMBINE. DEEP earned the corrections: 14 applications iterated mechanism by mechanism — a silicon-matched cache hierarchy, A55 write-streaming, a writeback model, a stride prefetcher — with five hypotheses falsified and recorded on the way. BROAD proved they are not curve-fits: 36 further applications, measured cold, land in the same bands. Deep alone would be a tuned demo; broad alone would be a coincidence. Together they are a licence to use the numbers on an application nobody has run yet.</a:t>
+            </a:r>
+          </a:p>
+        </p:txBody>
+      </p:sp>
+      <p:sp>
+        <p:nvSpPr>
+          <p:cNvPr id="16" name="TextBox 15"/>
+          <p:cNvSpPr txBox="1"/>
+          <p:nvPr/>
+        </p:nvSpPr>
+        <p:spPr>
+          <a:xfrm>
+            <a:off x="548640" y="6053328"/>
+            <a:ext cx="11064240" cy="411480"/>
+          </a:xfrm>
+          <a:prstGeom prst="rect">
+            <a:avLst/>
+          </a:prstGeom>
+          <a:noFill/>
+        </p:spPr>
+        <p:txBody>
+          <a:bodyPr wrap="square">
+            <a:spAutoFit/>
+          </a:bodyPr>
+          <a:lstStyle/>
+          <a:p>
+            <a:pPr algn="l"/>
+            <a:r>
+              <a:rPr sz="1050" b="1">
+                <a:solidFill>
+                  <a:srgbClr val="187A33"/>
+                </a:solidFill>
+                <a:latin typeface="Calibri"/>
+              </a:rPr>
+              <a:t>THE HANDOFF:   afgen/afgen.sh my-apps.manifest afs/   →   one activity-factor JSON per application — counts per run, ready to paste into the power team's spreadsheet as the N column of E = Σ eᵢ×Nᵢ. Fifty apps in, fifty AFs out.</a:t>
+            </a:r>
+          </a:p>
+        </p:txBody>
+      </p:sp>
+      <p:sp>
+        <p:nvSpPr>
+          <p:cNvPr id="17" name="TextBox 16"/>
+          <p:cNvSpPr txBox="1"/>
+          <p:nvPr/>
+        </p:nvSpPr>
+        <p:spPr>
+          <a:xfrm>
+            <a:off x="548640" y="6455664"/>
+            <a:ext cx="11064240" cy="320040"/>
+          </a:xfrm>
+          <a:prstGeom prst="rect">
+            <a:avLst/>
+          </a:prstGeom>
+          <a:noFill/>
+        </p:spPr>
+        <p:txBody>
+          <a:bodyPr wrap="square">
+            <a:spAutoFit/>
+          </a:bodyPr>
+          <a:lstStyle/>
+          <a:p>
+            <a:pPr algn="l"/>
+            <a:r>
+              <a:rPr sz="850" b="0">
                 <a:solidFill>
                   <a:srgbClr val="5F6368"/>
                 </a:solidFill>
                 <a:latin typeface="Calibri"/>
               </a:rPr>
-              <a:t>Scope discipline: these are ACTIVITY correlations. wattson never emits watts — energy-per-event coefficients belong to the power team, and QEMU-derived counts are never labelled as silicon measurements.</a:t>
+              <a:t>By design, wattson supplies N and never eᵢ: the energy coefficients are the power team's half of the equation. These bands are what the ACTIVITY column is worth.</a:t>
             </a:r>
           </a:p>
         </p:txBody>
@@ -4276,7 +4485,7 @@
                 </a:solidFill>
                 <a:latin typeface="Calibri"/>
               </a:rPr>
-              <a:t>Method — one binary, two observatories</a:t>
+              <a:t>Executive summary</a:t>
             </a:r>
           </a:p>
         </p:txBody>
@@ -4354,7 +4563,7 @@
                 </a:solidFill>
                 <a:latin typeface="Calibri"/>
               </a:rPr>
-              <a:t>Identical static aarch64 binaries; nothing recompiled between worlds.</a:t>
+              <a:t>Everything on one slide; the rest of the deck is evidence.</a:t>
             </a:r>
           </a:p>
         </p:txBody>
@@ -4425,6 +4634,911 @@
                 <a:latin typeface="Calibri"/>
               </a:rPr>
               <a:t>3</a:t>
+            </a:r>
+          </a:p>
+        </p:txBody>
+      </p:sp>
+      <p:graphicFrame>
+        <p:nvGraphicFramePr>
+          <p:cNvPr id="8" name="Table 7"/>
+          <p:cNvGraphicFramePr>
+            <a:graphicFrameLocks noGrp="1"/>
+          </p:cNvGraphicFramePr>
+          <p:nvPr/>
+        </p:nvGraphicFramePr>
+        <p:xfrm>
+          <a:off x="548640" y="1371600"/>
+          <a:ext cx="11064240" cy="3785616"/>
+        </p:xfrm>
+        <a:graphic>
+          <a:graphicData uri="http://schemas.openxmlformats.org/drawingml/2006/table">
+            <a:tbl>
+              <a:tblPr firstRow="1" bandRow="1">
+                <a:tableStyleId>{5C22544A-7EE6-4342-B048-85BDC9FD1C3A}</a:tableStyleId>
+              </a:tblPr>
+              <a:tblGrid>
+                <a:gridCol w="2834640"/>
+                <a:gridCol w="5120640"/>
+                <a:gridCol w="3108960"/>
+              </a:tblGrid>
+              <a:tr h="420624">
+                <a:tc>
+                  <a:txBody>
+                    <a:bodyPr/>
+                    <a:lstStyle/>
+                    <a:p>
+                      <a:r>
+                        <a:rPr sz="1000" b="1">
+                          <a:solidFill>
+                            <a:srgbClr val="FFFFFF"/>
+                          </a:solidFill>
+                          <a:latin typeface="Calibri"/>
+                        </a:rPr>
+                        <a:t>quantity</a:t>
+                      </a:r>
+                    </a:p>
+                  </a:txBody>
+                  <a:tcPr>
+                    <a:solidFill>
+                      <a:srgbClr val="202124"/>
+                    </a:solidFill>
+                  </a:tcPr>
+                </a:tc>
+                <a:tc>
+                  <a:txBody>
+                    <a:bodyPr/>
+                    <a:lstStyle/>
+                    <a:p>
+                      <a:r>
+                        <a:rPr sz="1000" b="1">
+                          <a:solidFill>
+                            <a:srgbClr val="FFFFFF"/>
+                          </a:solidFill>
+                          <a:latin typeface="Calibri"/>
+                        </a:rPr>
+                        <a:t>result</a:t>
+                      </a:r>
+                    </a:p>
+                  </a:txBody>
+                  <a:tcPr>
+                    <a:solidFill>
+                      <a:srgbClr val="202124"/>
+                    </a:solidFill>
+                  </a:tcPr>
+                </a:tc>
+                <a:tc>
+                  <a:txBody>
+                    <a:bodyPr/>
+                    <a:lstStyle/>
+                    <a:p>
+                      <a:r>
+                        <a:rPr sz="1000" b="1">
+                          <a:solidFill>
+                            <a:srgbClr val="FFFFFF"/>
+                          </a:solidFill>
+                          <a:latin typeface="Calibri"/>
+                        </a:rPr>
+                        <a:t>status</a:t>
+                      </a:r>
+                    </a:p>
+                  </a:txBody>
+                  <a:tcPr>
+                    <a:solidFill>
+                      <a:srgbClr val="202124"/>
+                    </a:solidFill>
+                  </a:tcPr>
+                </a:tc>
+              </a:tr>
+              <a:tr h="420624">
+                <a:tc>
+                  <a:txBody>
+                    <a:bodyPr/>
+                    <a:lstStyle/>
+                    <a:p>
+                      <a:r>
+                        <a:rPr sz="1000" b="1">
+                          <a:latin typeface="Calibri"/>
+                        </a:rPr>
+                        <a:t>Generalization (the gate)</a:t>
+                      </a:r>
+                    </a:p>
+                  </a:txBody>
+                  <a:tcPr>
+                    <a:solidFill>
+                      <a:srgbClr val="EFF3FA"/>
+                    </a:solidFill>
+                  </a:tcPr>
+                </a:tc>
+                <a:tc>
+                  <a:txBody>
+                    <a:bodyPr/>
+                    <a:lstStyle/>
+                    <a:p>
+                      <a:r>
+                        <a:rPr sz="1000" b="0">
+                          <a:latin typeface="Calibri"/>
+                        </a:rPr>
+                        <a:t>corrections fitted on 14 apps HELD on 36 unseen apps: insns 0.979 ×/÷1.04, reads transfer with identical ×/÷1.21 spread</a:t>
+                      </a:r>
+                    </a:p>
+                  </a:txBody>
+                  <a:tcPr>
+                    <a:solidFill>
+                      <a:srgbClr val="EFF3FA"/>
+                    </a:solidFill>
+                  </a:tcPr>
+                </a:tc>
+                <a:tc>
+                  <a:txBody>
+                    <a:bodyPr/>
+                    <a:lstStyle/>
+                    <a:p>
+                      <a:r>
+                        <a:rPr sz="1000" b="0">
+                          <a:solidFill>
+                            <a:srgbClr val="187A33"/>
+                          </a:solidFill>
+                          <a:latin typeface="Calibri"/>
+                        </a:rPr>
+                        <a:t>VALIDATED — 50-app held-out</a:t>
+                      </a:r>
+                    </a:p>
+                  </a:txBody>
+                  <a:tcPr>
+                    <a:solidFill>
+                      <a:srgbClr val="EFF3FA"/>
+                    </a:solidFill>
+                  </a:tcPr>
+                </a:tc>
+              </a:tr>
+              <a:tr h="420624">
+                <a:tc>
+                  <a:txBody>
+                    <a:bodyPr/>
+                    <a:lstStyle/>
+                    <a:p>
+                      <a:r>
+                        <a:rPr sz="1000" b="1">
+                          <a:latin typeface="Calibri"/>
+                        </a:rPr>
+                        <a:t>Instruction activity, per core</a:t>
+                      </a:r>
+                    </a:p>
+                  </a:txBody>
+                  <a:tcPr>
+                    <a:solidFill>
+                      <a:srgbClr val="FFFFFF"/>
+                    </a:solidFill>
+                  </a:tcPr>
+                </a:tc>
+                <a:tc>
+                  <a:txBody>
+                    <a:bodyPr/>
+                    <a:lstStyle/>
+                    <a:p>
+                      <a:r>
+                        <a:rPr sz="1000" b="0">
+                          <a:latin typeface="Calibri"/>
+                        </a:rPr>
+                        <a:t>0.98 – 1.06 across all 14 apps (0.997 on a 10.2 B-insn vision app)</a:t>
+                      </a:r>
+                    </a:p>
+                  </a:txBody>
+                  <a:tcPr>
+                    <a:solidFill>
+                      <a:srgbClr val="FFFFFF"/>
+                    </a:solidFill>
+                  </a:tcPr>
+                </a:tc>
+                <a:tc>
+                  <a:txBody>
+                    <a:bodyPr/>
+                    <a:lstStyle/>
+                    <a:p>
+                      <a:r>
+                        <a:rPr sz="1000" b="0">
+                          <a:solidFill>
+                            <a:srgbClr val="187A33"/>
+                          </a:solidFill>
+                          <a:latin typeface="Calibri"/>
+                        </a:rPr>
+                        <a:t>VALIDATED — use as-is</a:t>
+                      </a:r>
+                    </a:p>
+                  </a:txBody>
+                  <a:tcPr>
+                    <a:solidFill>
+                      <a:srgbClr val="FFFFFF"/>
+                    </a:solidFill>
+                  </a:tcPr>
+                </a:tc>
+              </a:tr>
+              <a:tr h="420624">
+                <a:tc>
+                  <a:txBody>
+                    <a:bodyPr/>
+                    <a:lstStyle/>
+                    <a:p>
+                      <a:r>
+                        <a:rPr sz="1000" b="1">
+                          <a:latin typeface="Calibri"/>
+                        </a:rPr>
+                        <a:t>DRAM read traffic</a:t>
+                      </a:r>
+                    </a:p>
+                  </a:txBody>
+                  <a:tcPr>
+                    <a:solidFill>
+                      <a:srgbClr val="EFF3FA"/>
+                    </a:solidFill>
+                  </a:tcPr>
+                </a:tc>
+                <a:tc>
+                  <a:txBody>
+                    <a:bodyPr/>
+                    <a:lstStyle/>
+                    <a:p>
+                      <a:r>
+                        <a:rPr sz="1000" b="0">
+                          <a:latin typeface="Calibri"/>
+                        </a:rPr>
+                        <a:t>X4 prefetch model: proxy = 0.98 × silicon, ×/÷ 1.14 — the exit criterion met (was 0.81 ×/÷ 1.26)</a:t>
+                      </a:r>
+                    </a:p>
+                  </a:txBody>
+                  <a:tcPr>
+                    <a:solidFill>
+                      <a:srgbClr val="EFF3FA"/>
+                    </a:solidFill>
+                  </a:tcPr>
+                </a:tc>
+                <a:tc>
+                  <a:txBody>
+                    <a:bodyPr/>
+                    <a:lstStyle/>
+                    <a:p>
+                      <a:r>
+                        <a:rPr sz="1000" b="0">
+                          <a:solidFill>
+                            <a:srgbClr val="187A33"/>
+                          </a:solidFill>
+                          <a:latin typeface="Calibri"/>
+                        </a:rPr>
+                        <a:t>USABLE — correction ~1.0</a:t>
+                      </a:r>
+                    </a:p>
+                  </a:txBody>
+                  <a:tcPr>
+                    <a:solidFill>
+                      <a:srgbClr val="EFF3FA"/>
+                    </a:solidFill>
+                  </a:tcPr>
+                </a:tc>
+              </a:tr>
+              <a:tr h="420624">
+                <a:tc>
+                  <a:txBody>
+                    <a:bodyPr/>
+                    <a:lstStyle/>
+                    <a:p>
+                      <a:r>
+                        <a:rPr sz="1000" b="1">
+                          <a:latin typeface="Calibri"/>
+                        </a:rPr>
+                        <a:t>DRAM-quiet classification</a:t>
+                      </a:r>
+                    </a:p>
+                  </a:txBody>
+                  <a:tcPr>
+                    <a:solidFill>
+                      <a:srgbClr val="FFFFFF"/>
+                    </a:solidFill>
+                  </a:tcPr>
+                </a:tc>
+                <a:tc>
+                  <a:txBody>
+                    <a:bodyPr/>
+                    <a:lstStyle/>
+                    <a:p>
+                      <a:r>
+                        <a:rPr sz="1000" b="0">
+                          <a:latin typeface="Calibri"/>
+                        </a:rPr>
+                        <a:t>6 low-traffic apps (alu, lua, lz4, net2, pacman, sqlite) predicted quiet; silicon concurs</a:t>
+                      </a:r>
+                    </a:p>
+                  </a:txBody>
+                  <a:tcPr>
+                    <a:solidFill>
+                      <a:srgbClr val="FFFFFF"/>
+                    </a:solidFill>
+                  </a:tcPr>
+                </a:tc>
+                <a:tc>
+                  <a:txBody>
+                    <a:bodyPr/>
+                    <a:lstStyle/>
+                    <a:p>
+                      <a:r>
+                        <a:rPr sz="1000" b="0">
+                          <a:solidFill>
+                            <a:srgbClr val="187A33"/>
+                          </a:solidFill>
+                          <a:latin typeface="Calibri"/>
+                        </a:rPr>
+                        <a:t>VALIDATED</a:t>
+                      </a:r>
+                    </a:p>
+                  </a:txBody>
+                  <a:tcPr>
+                    <a:solidFill>
+                      <a:srgbClr val="FFFFFF"/>
+                    </a:solidFill>
+                  </a:tcPr>
+                </a:tc>
+              </a:tr>
+              <a:tr h="420624">
+                <a:tc>
+                  <a:txBody>
+                    <a:bodyPr/>
+                    <a:lstStyle/>
+                    <a:p>
+                      <a:r>
+                        <a:rPr sz="1000" b="1">
+                          <a:latin typeface="Calibri"/>
+                        </a:rPr>
+                        <a:t>DRAM write traffic</a:t>
+                      </a:r>
+                    </a:p>
+                  </a:txBody>
+                  <a:tcPr>
+                    <a:solidFill>
+                      <a:srgbClr val="EFF3FA"/>
+                    </a:solidFill>
+                  </a:tcPr>
+                </a:tc>
+                <a:tc>
+                  <a:txBody>
+                    <a:bodyPr/>
+                    <a:lstStyle/>
+                    <a:p>
+                      <a:r>
+                        <a:rPr sz="1000" b="0">
+                          <a:latin typeface="Calibri"/>
+                        </a:rPr>
+                        <a:t>proxy = 0.90 × silicon, ×/÷ 1.09 (X1 writeback model, base pass); 0.83 ×/÷ 1.28 held-out</a:t>
+                      </a:r>
+                    </a:p>
+                  </a:txBody>
+                  <a:tcPr>
+                    <a:solidFill>
+                      <a:srgbClr val="EFF3FA"/>
+                    </a:solidFill>
+                  </a:tcPr>
+                </a:tc>
+                <a:tc>
+                  <a:txBody>
+                    <a:bodyPr/>
+                    <a:lstStyle/>
+                    <a:p>
+                      <a:r>
+                        <a:rPr sz="1000" b="0">
+                          <a:solidFill>
+                            <a:srgbClr val="187A33"/>
+                          </a:solidFill>
+                          <a:latin typeface="Calibri"/>
+                        </a:rPr>
+                        <a:t>USABLE — apply ×1.11</a:t>
+                      </a:r>
+                    </a:p>
+                  </a:txBody>
+                  <a:tcPr>
+                    <a:solidFill>
+                      <a:srgbClr val="EFF3FA"/>
+                    </a:solidFill>
+                  </a:tcPr>
+                </a:tc>
+              </a:tr>
+              <a:tr h="420624">
+                <a:tc>
+                  <a:txBody>
+                    <a:bodyPr/>
+                    <a:lstStyle/>
+                    <a:p>
+                      <a:r>
+                        <a:rPr sz="1000" b="1">
+                          <a:latin typeface="Calibri"/>
+                        </a:rPr>
+                        <a:t>Kernel activity</a:t>
+                      </a:r>
+                    </a:p>
+                  </a:txBody>
+                  <a:tcPr>
+                    <a:solidFill>
+                      <a:srgbClr val="FFFFFF"/>
+                    </a:solidFill>
+                  </a:tcPr>
+                </a:tc>
+                <a:tc>
+                  <a:txBody>
+                    <a:bodyPr/>
+                    <a:lstStyle/>
+                    <a:p>
+                      <a:r>
+                        <a:rPr sz="1000" b="0">
+                          <a:latin typeface="Calibri"/>
+                        </a:rPr>
+                        <a:t>boot-differential harness live: sha256 kernel+system share MEASURED at 10.0% over user mode</a:t>
+                      </a:r>
+                    </a:p>
+                  </a:txBody>
+                  <a:tcPr>
+                    <a:solidFill>
+                      <a:srgbClr val="FFFFFF"/>
+                    </a:solidFill>
+                  </a:tcPr>
+                </a:tc>
+                <a:tc>
+                  <a:txBody>
+                    <a:bodyPr/>
+                    <a:lstStyle/>
+                    <a:p>
+                      <a:r>
+                        <a:rPr sz="1000" b="0">
+                          <a:solidFill>
+                            <a:srgbClr val="5F6368"/>
+                          </a:solidFill>
+                          <a:latin typeface="Calibri"/>
+                        </a:rPr>
+                        <a:t>MEASURABLE — X2a</a:t>
+                      </a:r>
+                    </a:p>
+                  </a:txBody>
+                  <a:tcPr>
+                    <a:solidFill>
+                      <a:srgbClr val="FFFFFF"/>
+                    </a:solidFill>
+                  </a:tcPr>
+                </a:tc>
+              </a:tr>
+              <a:tr h="420624">
+                <a:tc>
+                  <a:txBody>
+                    <a:bodyPr/>
+                    <a:lstStyle/>
+                    <a:p>
+                      <a:r>
+                        <a:rPr sz="1000" b="1">
+                          <a:latin typeface="Calibri"/>
+                        </a:rPr>
+                        <a:t>DMA / network activity</a:t>
+                      </a:r>
+                    </a:p>
+                  </a:txBody>
+                  <a:tcPr>
+                    <a:solidFill>
+                      <a:srgbClr val="EFF3FA"/>
+                    </a:solidFill>
+                  </a:tcPr>
+                </a:tc>
+                <a:tc>
+                  <a:txBody>
+                    <a:bodyPr/>
+                    <a:lstStyle/>
+                    <a:p>
+                      <a:r>
+                        <a:rPr sz="1000" b="0">
+                          <a:latin typeface="Calibri"/>
+                        </a:rPr>
+                        <a:t>CPU-side traffic visible &amp; coherent; DMA write invisible to TCG by construction; kernel share device-path-dependent (silicon NIC 17% vs virtio 41%)</a:t>
+                      </a:r>
+                    </a:p>
+                  </a:txBody>
+                  <a:tcPr>
+                    <a:solidFill>
+                      <a:srgbClr val="EFF3FA"/>
+                    </a:solidFill>
+                  </a:tcPr>
+                </a:tc>
+                <a:tc>
+                  <a:txBody>
+                    <a:bodyPr/>
+                    <a:lstStyle/>
+                    <a:p>
+                      <a:r>
+                        <a:rPr sz="1000" b="0">
+                          <a:solidFill>
+                            <a:srgbClr val="5F6368"/>
+                          </a:solidFill>
+                          <a:latin typeface="Calibri"/>
+                        </a:rPr>
+                        <a:t>CHARACTERIZED — model the target's own NIC</a:t>
+                      </a:r>
+                    </a:p>
+                  </a:txBody>
+                  <a:tcPr>
+                    <a:solidFill>
+                      <a:srgbClr val="EFF3FA"/>
+                    </a:solidFill>
+                  </a:tcPr>
+                </a:tc>
+              </a:tr>
+              <a:tr h="420624">
+                <a:tc>
+                  <a:txBody>
+                    <a:bodyPr/>
+                    <a:lstStyle/>
+                    <a:p>
+                      <a:r>
+                        <a:rPr sz="1000" b="1">
+                          <a:latin typeface="Calibri"/>
+                        </a:rPr>
+                        <a:t>Multi-core</a:t>
+                      </a:r>
+                    </a:p>
+                  </a:txBody>
+                  <a:tcPr>
+                    <a:solidFill>
+                      <a:srgbClr val="FFFFFF"/>
+                    </a:solidFill>
+                  </a:tcPr>
+                </a:tc>
+                <a:tc>
+                  <a:txBody>
+                    <a:bodyPr/>
+                    <a:lstStyle/>
+                    <a:p>
+                      <a:r>
+                        <a:rPr sz="1000" b="0">
+                          <a:latin typeface="Calibri"/>
+                        </a:rPr>
+                        <a:t>DRAM ratios thread-invariant across a 1/2/4/6T sweep; the +23% insn outlier PROVEN to be OpenMP barrier spin (passive: 1.231 → 0.985)</a:t>
+                      </a:r>
+                    </a:p>
+                  </a:txBody>
+                  <a:tcPr>
+                    <a:solidFill>
+                      <a:srgbClr val="FFFFFF"/>
+                    </a:solidFill>
+                  </a:tcPr>
+                </a:tc>
+                <a:tc>
+                  <a:txBody>
+                    <a:bodyPr/>
+                    <a:lstStyle/>
+                    <a:p>
+                      <a:r>
+                        <a:rPr sz="1000" b="0">
+                          <a:solidFill>
+                            <a:srgbClr val="187A33"/>
+                          </a:solidFill>
+                          <a:latin typeface="Calibri"/>
+                        </a:rPr>
+                        <a:t>USABLE — passive waiting on barrier-heavy code</a:t>
+                      </a:r>
+                    </a:p>
+                  </a:txBody>
+                  <a:tcPr>
+                    <a:solidFill>
+                      <a:srgbClr val="FFFFFF"/>
+                    </a:solidFill>
+                  </a:tcPr>
+                </a:tc>
+              </a:tr>
+            </a:tbl>
+          </a:graphicData>
+        </a:graphic>
+      </p:graphicFrame>
+      <p:sp>
+        <p:nvSpPr>
+          <p:cNvPr id="9" name="TextBox 8"/>
+          <p:cNvSpPr txBox="1"/>
+          <p:nvPr/>
+        </p:nvSpPr>
+        <p:spPr>
+          <a:xfrm>
+            <a:off x="548640" y="5486400"/>
+            <a:ext cx="11064240" cy="731520"/>
+          </a:xfrm>
+          <a:prstGeom prst="rect">
+            <a:avLst/>
+          </a:prstGeom>
+          <a:noFill/>
+        </p:spPr>
+        <p:txBody>
+          <a:bodyPr wrap="square">
+            <a:spAutoFit/>
+          </a:bodyPr>
+          <a:lstStyle/>
+          <a:p>
+            <a:pPr algn="l"/>
+            <a:r>
+              <a:rPr sz="1150" b="0">
+                <a:solidFill>
+                  <a:srgbClr val="202124"/>
+                </a:solidFill>
+                <a:latin typeface="Calibri"/>
+              </a:rPr>
+              <a:t>Two instrument findings worth the price of admission: the A55 PMU's l3d_cache_refill counts only DEMAND refills — prefetched lines bypass it, so ground truth belongs at the DDR controller; and the A55's write-streaming (no-allocate) mode is a 2.0× error if unmodelled.</a:t>
+            </a:r>
+          </a:p>
+        </p:txBody>
+      </p:sp>
+      <p:sp>
+        <p:nvSpPr>
+          <p:cNvPr id="10" name="TextBox 9"/>
+          <p:cNvSpPr txBox="1"/>
+          <p:nvPr/>
+        </p:nvSpPr>
+        <p:spPr>
+          <a:xfrm>
+            <a:off x="548640" y="6199632"/>
+            <a:ext cx="11064240" cy="548640"/>
+          </a:xfrm>
+          <a:prstGeom prst="rect">
+            <a:avLst/>
+          </a:prstGeom>
+          <a:noFill/>
+        </p:spPr>
+        <p:txBody>
+          <a:bodyPr wrap="square">
+            <a:spAutoFit/>
+          </a:bodyPr>
+          <a:lstStyle/>
+          <a:p>
+            <a:pPr algn="l"/>
+            <a:r>
+              <a:rPr sz="1100" b="0">
+                <a:solidFill>
+                  <a:srgbClr val="5F6368"/>
+                </a:solidFill>
+                <a:latin typeface="Calibri"/>
+              </a:rPr>
+              <a:t>Scope discipline: these are ACTIVITY correlations. wattson never emits watts — energy-per-event coefficients belong to the power team, and QEMU-derived counts are never labelled as silicon measurements.</a:t>
+            </a:r>
+          </a:p>
+        </p:txBody>
+      </p:sp>
+    </p:spTree>
+  </p:cSld>
+  <p:clrMapOvr>
+    <a:masterClrMapping/>
+  </p:clrMapOvr>
+</p:sld>
+</file>
+
+<file path=ppt/slides/slide4.xml><?xml version="1.0" encoding="utf-8"?>
+<p:sld xmlns:a="http://schemas.openxmlformats.org/drawingml/2006/main" xmlns:p="http://schemas.openxmlformats.org/presentationml/2006/main" xmlns:r="http://schemas.openxmlformats.org/officeDocument/2006/relationships">
+  <p:cSld>
+    <p:spTree>
+      <p:nvGrpSpPr>
+        <p:cNvPr id="1" name=""/>
+        <p:cNvGrpSpPr/>
+        <p:nvPr/>
+      </p:nvGrpSpPr>
+      <p:grpSpPr/>
+      <p:sp>
+        <p:nvSpPr>
+          <p:cNvPr id="2" name="Rectangle 1"/>
+          <p:cNvSpPr/>
+          <p:nvPr/>
+        </p:nvSpPr>
+        <p:spPr>
+          <a:xfrm>
+            <a:off x="0" y="0"/>
+            <a:ext cx="12191695" cy="841248"/>
+          </a:xfrm>
+          <a:prstGeom prst="rect">
+            <a:avLst/>
+          </a:prstGeom>
+          <a:solidFill>
+            <a:srgbClr val="202124"/>
+          </a:solidFill>
+          <a:ln>
+            <a:noFill/>
+          </a:ln>
+        </p:spPr>
+        <p:style>
+          <a:lnRef idx="1">
+            <a:schemeClr val="accent1"/>
+          </a:lnRef>
+          <a:fillRef idx="3">
+            <a:schemeClr val="accent1"/>
+          </a:fillRef>
+          <a:effectRef idx="2">
+            <a:schemeClr val="accent1"/>
+          </a:effectRef>
+          <a:fontRef idx="minor">
+            <a:schemeClr val="lt1"/>
+          </a:fontRef>
+        </p:style>
+        <p:txBody>
+          <a:bodyPr rtlCol="0" anchor="ctr"/>
+          <a:lstStyle/>
+          <a:p>
+            <a:pPr algn="ctr"/>
+          </a:p>
+        </p:txBody>
+      </p:sp>
+      <p:sp>
+        <p:nvSpPr>
+          <p:cNvPr id="3" name="TextBox 2"/>
+          <p:cNvSpPr txBox="1"/>
+          <p:nvPr/>
+        </p:nvSpPr>
+        <p:spPr>
+          <a:xfrm>
+            <a:off x="548640" y="118872"/>
+            <a:ext cx="10058400" cy="548640"/>
+          </a:xfrm>
+          <a:prstGeom prst="rect">
+            <a:avLst/>
+          </a:prstGeom>
+          <a:noFill/>
+        </p:spPr>
+        <p:txBody>
+          <a:bodyPr wrap="square">
+            <a:spAutoFit/>
+          </a:bodyPr>
+          <a:lstStyle/>
+          <a:p>
+            <a:pPr algn="l"/>
+            <a:r>
+              <a:rPr sz="2600" b="1">
+                <a:solidFill>
+                  <a:srgbClr val="FFFFFF"/>
+                </a:solidFill>
+                <a:latin typeface="Calibri"/>
+              </a:rPr>
+              <a:t>Method — one binary, two observatories</a:t>
+            </a:r>
+          </a:p>
+        </p:txBody>
+      </p:sp>
+      <p:sp>
+        <p:nvSpPr>
+          <p:cNvPr id="4" name="Rectangle 3"/>
+          <p:cNvSpPr/>
+          <p:nvPr/>
+        </p:nvSpPr>
+        <p:spPr>
+          <a:xfrm>
+            <a:off x="0" y="841248"/>
+            <a:ext cx="12191695" cy="38100"/>
+          </a:xfrm>
+          <a:prstGeom prst="rect">
+            <a:avLst/>
+          </a:prstGeom>
+          <a:solidFill>
+            <a:srgbClr val="1A53A0"/>
+          </a:solidFill>
+          <a:ln>
+            <a:noFill/>
+          </a:ln>
+        </p:spPr>
+        <p:style>
+          <a:lnRef idx="1">
+            <a:schemeClr val="accent1"/>
+          </a:lnRef>
+          <a:fillRef idx="3">
+            <a:schemeClr val="accent1"/>
+          </a:fillRef>
+          <a:effectRef idx="2">
+            <a:schemeClr val="accent1"/>
+          </a:effectRef>
+          <a:fontRef idx="minor">
+            <a:schemeClr val="lt1"/>
+          </a:fontRef>
+        </p:style>
+        <p:txBody>
+          <a:bodyPr rtlCol="0" anchor="ctr"/>
+          <a:lstStyle/>
+          <a:p>
+            <a:pPr algn="ctr"/>
+          </a:p>
+        </p:txBody>
+      </p:sp>
+      <p:sp>
+        <p:nvSpPr>
+          <p:cNvPr id="5" name="TextBox 4"/>
+          <p:cNvSpPr txBox="1"/>
+          <p:nvPr/>
+        </p:nvSpPr>
+        <p:spPr>
+          <a:xfrm>
+            <a:off x="548640" y="969264"/>
+            <a:ext cx="11155680" cy="365760"/>
+          </a:xfrm>
+          <a:prstGeom prst="rect">
+            <a:avLst/>
+          </a:prstGeom>
+          <a:noFill/>
+        </p:spPr>
+        <p:txBody>
+          <a:bodyPr wrap="square">
+            <a:spAutoFit/>
+          </a:bodyPr>
+          <a:lstStyle/>
+          <a:p>
+            <a:pPr algn="l"/>
+            <a:r>
+              <a:rPr sz="1200" b="0">
+                <a:solidFill>
+                  <a:srgbClr val="5F6368"/>
+                </a:solidFill>
+                <a:latin typeface="Calibri"/>
+              </a:rPr>
+              <a:t>Identical static aarch64 binaries; nothing recompiled between worlds.</a:t>
+            </a:r>
+          </a:p>
+        </p:txBody>
+      </p:sp>
+      <p:sp>
+        <p:nvSpPr>
+          <p:cNvPr id="6" name="TextBox 5"/>
+          <p:cNvSpPr txBox="1"/>
+          <p:nvPr/>
+        </p:nvSpPr>
+        <p:spPr>
+          <a:xfrm>
+            <a:off x="548640" y="6528816"/>
+            <a:ext cx="9601200" cy="274320"/>
+          </a:xfrm>
+          <a:prstGeom prst="rect">
+            <a:avLst/>
+          </a:prstGeom>
+          <a:noFill/>
+        </p:spPr>
+        <p:txBody>
+          <a:bodyPr wrap="square">
+            <a:spAutoFit/>
+          </a:bodyPr>
+          <a:lstStyle/>
+          <a:p>
+            <a:pPr algn="l"/>
+            <a:r>
+              <a:rPr sz="950" b="0">
+                <a:solidFill>
+                  <a:srgbClr val="5F6368"/>
+                </a:solidFill>
+                <a:latin typeface="Calibri"/>
+              </a:rPr>
+              <a:t>wattson xcheck rev 2 · QEMU counts DERIVED, PMU/DDR counts MEASURED · 2026-08-30</a:t>
+            </a:r>
+          </a:p>
+        </p:txBody>
+      </p:sp>
+      <p:sp>
+        <p:nvSpPr>
+          <p:cNvPr id="7" name="TextBox 6"/>
+          <p:cNvSpPr txBox="1"/>
+          <p:nvPr/>
+        </p:nvSpPr>
+        <p:spPr>
+          <a:xfrm>
+            <a:off x="11247120" y="6528816"/>
+            <a:ext cx="457200" cy="274320"/>
+          </a:xfrm>
+          <a:prstGeom prst="rect">
+            <a:avLst/>
+          </a:prstGeom>
+          <a:noFill/>
+        </p:spPr>
+        <p:txBody>
+          <a:bodyPr wrap="square">
+            <a:spAutoFit/>
+          </a:bodyPr>
+          <a:lstStyle/>
+          <a:p>
+            <a:pPr algn="r"/>
+            <a:r>
+              <a:rPr sz="950" b="0">
+                <a:solidFill>
+                  <a:srgbClr val="5F6368"/>
+                </a:solidFill>
+                <a:latin typeface="Calibri"/>
+              </a:rPr>
+              <a:t>4</a:t>
             </a:r>
           </a:p>
         </p:txBody>
@@ -4847,7 +5961,7 @@
 </p:sld>
 </file>
 
-<file path=ppt/slides/slide4.xml><?xml version="1.0" encoding="utf-8"?>
+<file path=ppt/slides/slide5.xml><?xml version="1.0" encoding="utf-8"?>
 <p:sld xmlns:a="http://schemas.openxmlformats.org/drawingml/2006/main" xmlns:p="http://schemas.openxmlformats.org/presentationml/2006/main" xmlns:r="http://schemas.openxmlformats.org/officeDocument/2006/relationships">
   <p:cSld>
     <p:spTree>
@@ -5078,7 +6192,7 @@
                 </a:solidFill>
                 <a:latin typeface="Calibri"/>
               </a:rPr>
-              <a:t>4</a:t>
+              <a:t>5</a:t>
             </a:r>
           </a:p>
         </p:txBody>
@@ -6570,7 +7684,7 @@
 </p:sld>
 </file>
 
-<file path=ppt/slides/slide5.xml><?xml version="1.0" encoding="utf-8"?>
+<file path=ppt/slides/slide6.xml><?xml version="1.0" encoding="utf-8"?>
 <p:sld xmlns:a="http://schemas.openxmlformats.org/drawingml/2006/main" xmlns:p="http://schemas.openxmlformats.org/presentationml/2006/main" xmlns:r="http://schemas.openxmlformats.org/officeDocument/2006/relationships">
   <p:cSld>
     <p:spTree>
@@ -6801,7 +7915,7 @@
                 </a:solidFill>
                 <a:latin typeface="Calibri"/>
               </a:rPr>
-              <a:t>5</a:t>
+              <a:t>6</a:t>
             </a:r>
           </a:p>
         </p:txBody>
@@ -6873,7 +7987,7 @@
 </p:sld>
 </file>
 
-<file path=ppt/slides/slide6.xml><?xml version="1.0" encoding="utf-8"?>
+<file path=ppt/slides/slide7.xml><?xml version="1.0" encoding="utf-8"?>
 <p:sld xmlns:a="http://schemas.openxmlformats.org/drawingml/2006/main" xmlns:p="http://schemas.openxmlformats.org/presentationml/2006/main" xmlns:r="http://schemas.openxmlformats.org/officeDocument/2006/relationships">
   <p:cSld>
     <p:spTree>
@@ -7104,7 +8218,7 @@
                 </a:solidFill>
                 <a:latin typeface="Calibri"/>
               </a:rPr>
-              <a:t>6</a:t>
+              <a:t>7</a:t>
             </a:r>
           </a:p>
         </p:txBody>
@@ -7176,7 +8290,7 @@
 </p:sld>
 </file>
 
-<file path=ppt/slides/slide7.xml><?xml version="1.0" encoding="utf-8"?>
+<file path=ppt/slides/slide8.xml><?xml version="1.0" encoding="utf-8"?>
 <p:sld xmlns:a="http://schemas.openxmlformats.org/drawingml/2006/main" xmlns:p="http://schemas.openxmlformats.org/presentationml/2006/main" xmlns:r="http://schemas.openxmlformats.org/officeDocument/2006/relationships">
   <p:cSld>
     <p:spTree>
@@ -7407,7 +8521,7 @@
                 </a:solidFill>
                 <a:latin typeface="Calibri"/>
               </a:rPr>
-              <a:t>7</a:t>
+              <a:t>8</a:t>
             </a:r>
           </a:p>
         </p:txBody>
@@ -8197,7 +9311,7 @@
 </p:sld>
 </file>
 
-<file path=ppt/slides/slide8.xml><?xml version="1.0" encoding="utf-8"?>
+<file path=ppt/slides/slide9.xml><?xml version="1.0" encoding="utf-8"?>
 <p:sld xmlns:a="http://schemas.openxmlformats.org/drawingml/2006/main" xmlns:p="http://schemas.openxmlformats.org/presentationml/2006/main" xmlns:r="http://schemas.openxmlformats.org/officeDocument/2006/relationships">
   <p:cSld>
     <p:spTree>
@@ -8428,7 +9542,7 @@
                 </a:solidFill>
                 <a:latin typeface="Calibri"/>
               </a:rPr>
-              <a:t>8</a:t>
+              <a:t>9</a:t>
             </a:r>
           </a:p>
         </p:txBody>
@@ -9028,1061 +10142,6 @@
                 <a:latin typeface="Calibri"/>
               </a:rPr>
               <a:t>Reproducibility: wattson/xcheck — one command per side (run-qemu.sh / run-perf.sh / run-ddr.sh), vectors committed, deck regenerated from the vectors by make_deck.py. The QEMU cache-plugin patch ships in-repo.</a:t>
-            </a:r>
-          </a:p>
-        </p:txBody>
-      </p:sp>
-    </p:spTree>
-  </p:cSld>
-  <p:clrMapOvr>
-    <a:masterClrMapping/>
-  </p:clrMapOvr>
-</p:sld>
-</file>
-
-<file path=ppt/slides/slide9.xml><?xml version="1.0" encoding="utf-8"?>
-<p:sld xmlns:a="http://schemas.openxmlformats.org/drawingml/2006/main" xmlns:p="http://schemas.openxmlformats.org/presentationml/2006/main" xmlns:r="http://schemas.openxmlformats.org/officeDocument/2006/relationships">
-  <p:cSld>
-    <p:spTree>
-      <p:nvGrpSpPr>
-        <p:cNvPr id="1" name=""/>
-        <p:cNvGrpSpPr/>
-        <p:nvPr/>
-      </p:nvGrpSpPr>
-      <p:grpSpPr/>
-      <p:sp>
-        <p:nvSpPr>
-          <p:cNvPr id="2" name="Rectangle 1"/>
-          <p:cNvSpPr/>
-          <p:nvPr/>
-        </p:nvSpPr>
-        <p:spPr>
-          <a:xfrm>
-            <a:off x="0" y="0"/>
-            <a:ext cx="12191695" cy="841248"/>
-          </a:xfrm>
-          <a:prstGeom prst="rect">
-            <a:avLst/>
-          </a:prstGeom>
-          <a:solidFill>
-            <a:srgbClr val="202124"/>
-          </a:solidFill>
-          <a:ln>
-            <a:noFill/>
-          </a:ln>
-        </p:spPr>
-        <p:style>
-          <a:lnRef idx="1">
-            <a:schemeClr val="accent1"/>
-          </a:lnRef>
-          <a:fillRef idx="3">
-            <a:schemeClr val="accent1"/>
-          </a:fillRef>
-          <a:effectRef idx="2">
-            <a:schemeClr val="accent1"/>
-          </a:effectRef>
-          <a:fontRef idx="minor">
-            <a:schemeClr val="lt1"/>
-          </a:fontRef>
-        </p:style>
-        <p:txBody>
-          <a:bodyPr rtlCol="0" anchor="ctr"/>
-          <a:lstStyle/>
-          <a:p>
-            <a:pPr algn="ctr"/>
-          </a:p>
-        </p:txBody>
-      </p:sp>
-      <p:sp>
-        <p:nvSpPr>
-          <p:cNvPr id="3" name="TextBox 2"/>
-          <p:cNvSpPr txBox="1"/>
-          <p:nvPr/>
-        </p:nvSpPr>
-        <p:spPr>
-          <a:xfrm>
-            <a:off x="548640" y="118872"/>
-            <a:ext cx="10058400" cy="548640"/>
-          </a:xfrm>
-          <a:prstGeom prst="rect">
-            <a:avLst/>
-          </a:prstGeom>
-          <a:noFill/>
-        </p:spPr>
-        <p:txBody>
-          <a:bodyPr wrap="square">
-            <a:spAutoFit/>
-          </a:bodyPr>
-          <a:lstStyle/>
-          <a:p>
-            <a:pPr algn="l"/>
-            <a:r>
-              <a:rPr sz="2600" b="1">
-                <a:solidFill>
-                  <a:srgbClr val="FFFFFF"/>
-                </a:solidFill>
-                <a:latin typeface="Calibri"/>
-              </a:rPr>
-              <a:t>Can a user get activity factors that match silicon?</a:t>
-            </a:r>
-          </a:p>
-        </p:txBody>
-      </p:sp>
-      <p:sp>
-        <p:nvSpPr>
-          <p:cNvPr id="4" name="Rectangle 3"/>
-          <p:cNvSpPr/>
-          <p:nvPr/>
-        </p:nvSpPr>
-        <p:spPr>
-          <a:xfrm>
-            <a:off x="0" y="841248"/>
-            <a:ext cx="12191695" cy="38100"/>
-          </a:xfrm>
-          <a:prstGeom prst="rect">
-            <a:avLst/>
-          </a:prstGeom>
-          <a:solidFill>
-            <a:srgbClr val="1A53A0"/>
-          </a:solidFill>
-          <a:ln>
-            <a:noFill/>
-          </a:ln>
-        </p:spPr>
-        <p:style>
-          <a:lnRef idx="1">
-            <a:schemeClr val="accent1"/>
-          </a:lnRef>
-          <a:fillRef idx="3">
-            <a:schemeClr val="accent1"/>
-          </a:fillRef>
-          <a:effectRef idx="2">
-            <a:schemeClr val="accent1"/>
-          </a:effectRef>
-          <a:fontRef idx="minor">
-            <a:schemeClr val="lt1"/>
-          </a:fontRef>
-        </p:style>
-        <p:txBody>
-          <a:bodyPr rtlCol="0" anchor="ctr"/>
-          <a:lstStyle/>
-          <a:p>
-            <a:pPr algn="ctr"/>
-          </a:p>
-        </p:txBody>
-      </p:sp>
-      <p:sp>
-        <p:nvSpPr>
-          <p:cNvPr id="5" name="TextBox 4"/>
-          <p:cNvSpPr txBox="1"/>
-          <p:nvPr/>
-        </p:nvSpPr>
-        <p:spPr>
-          <a:xfrm>
-            <a:off x="548640" y="969264"/>
-            <a:ext cx="11155680" cy="365760"/>
-          </a:xfrm>
-          <a:prstGeom prst="rect">
-            <a:avLst/>
-          </a:prstGeom>
-          <a:noFill/>
-        </p:spPr>
-        <p:txBody>
-          <a:bodyPr wrap="square">
-            <a:spAutoFit/>
-          </a:bodyPr>
-          <a:lstStyle/>
-          <a:p>
-            <a:pPr algn="l"/>
-            <a:r>
-              <a:rPr sz="1200" b="0">
-                <a:solidFill>
-                  <a:srgbClr val="5F6368"/>
-                </a:solidFill>
-                <a:latin typeface="Calibri"/>
-              </a:rPr>
-              <a:t>The question this whole campaign exists to answer, answered.</a:t>
-            </a:r>
-          </a:p>
-        </p:txBody>
-      </p:sp>
-      <p:sp>
-        <p:nvSpPr>
-          <p:cNvPr id="6" name="TextBox 5"/>
-          <p:cNvSpPr txBox="1"/>
-          <p:nvPr/>
-        </p:nvSpPr>
-        <p:spPr>
-          <a:xfrm>
-            <a:off x="548640" y="6528816"/>
-            <a:ext cx="9601200" cy="274320"/>
-          </a:xfrm>
-          <a:prstGeom prst="rect">
-            <a:avLst/>
-          </a:prstGeom>
-          <a:noFill/>
-        </p:spPr>
-        <p:txBody>
-          <a:bodyPr wrap="square">
-            <a:spAutoFit/>
-          </a:bodyPr>
-          <a:lstStyle/>
-          <a:p>
-            <a:pPr algn="l"/>
-            <a:r>
-              <a:rPr sz="950" b="0">
-                <a:solidFill>
-                  <a:srgbClr val="5F6368"/>
-                </a:solidFill>
-                <a:latin typeface="Calibri"/>
-              </a:rPr>
-              <a:t>wattson xcheck rev 2 · QEMU counts DERIVED, PMU/DDR counts MEASURED · 2026-08-30</a:t>
-            </a:r>
-          </a:p>
-        </p:txBody>
-      </p:sp>
-      <p:sp>
-        <p:nvSpPr>
-          <p:cNvPr id="7" name="TextBox 6"/>
-          <p:cNvSpPr txBox="1"/>
-          <p:nvPr/>
-        </p:nvSpPr>
-        <p:spPr>
-          <a:xfrm>
-            <a:off x="11247120" y="6528816"/>
-            <a:ext cx="457200" cy="274320"/>
-          </a:xfrm>
-          <a:prstGeom prst="rect">
-            <a:avLst/>
-          </a:prstGeom>
-          <a:noFill/>
-        </p:spPr>
-        <p:txBody>
-          <a:bodyPr wrap="square">
-            <a:spAutoFit/>
-          </a:bodyPr>
-          <a:lstStyle/>
-          <a:p>
-            <a:pPr algn="r"/>
-            <a:r>
-              <a:rPr sz="950" b="0">
-                <a:solidFill>
-                  <a:srgbClr val="5F6368"/>
-                </a:solidFill>
-                <a:latin typeface="Calibri"/>
-              </a:rPr>
-              <a:t>9</a:t>
-            </a:r>
-          </a:p>
-        </p:txBody>
-      </p:sp>
-      <p:sp>
-        <p:nvSpPr>
-          <p:cNvPr id="8" name="Rectangle 7"/>
-          <p:cNvSpPr/>
-          <p:nvPr/>
-        </p:nvSpPr>
-        <p:spPr>
-          <a:xfrm>
-            <a:off x="548640" y="1325880"/>
-            <a:ext cx="11064240" cy="960120"/>
-          </a:xfrm>
-          <a:prstGeom prst="rect">
-            <a:avLst/>
-          </a:prstGeom>
-          <a:solidFill>
-            <a:srgbClr val="0E5C2B"/>
-          </a:solidFill>
-          <a:ln>
-            <a:noFill/>
-          </a:ln>
-        </p:spPr>
-        <p:style>
-          <a:lnRef idx="1">
-            <a:schemeClr val="accent1"/>
-          </a:lnRef>
-          <a:fillRef idx="3">
-            <a:schemeClr val="accent1"/>
-          </a:fillRef>
-          <a:effectRef idx="2">
-            <a:schemeClr val="accent1"/>
-          </a:effectRef>
-          <a:fontRef idx="minor">
-            <a:schemeClr val="lt1"/>
-          </a:fontRef>
-        </p:style>
-        <p:txBody>
-          <a:bodyPr rtlCol="0" anchor="ctr"/>
-          <a:lstStyle/>
-          <a:p>
-            <a:pPr algn="ctr"/>
-          </a:p>
-        </p:txBody>
-      </p:sp>
-      <p:sp>
-        <p:nvSpPr>
-          <p:cNvPr id="9" name="TextBox 8"/>
-          <p:cNvSpPr txBox="1"/>
-          <p:nvPr/>
-        </p:nvSpPr>
-        <p:spPr>
-          <a:xfrm>
-            <a:off x="822960" y="1389888"/>
-            <a:ext cx="10607040" cy="411480"/>
-          </a:xfrm>
-          <a:prstGeom prst="rect">
-            <a:avLst/>
-          </a:prstGeom>
-          <a:noFill/>
-        </p:spPr>
-        <p:txBody>
-          <a:bodyPr wrap="square">
-            <a:spAutoFit/>
-          </a:bodyPr>
-          <a:lstStyle/>
-          <a:p>
-            <a:pPr algn="l"/>
-            <a:r>
-              <a:rPr sz="2000" b="1">
-                <a:solidFill>
-                  <a:srgbClr val="FFFFFF"/>
-                </a:solidFill>
-                <a:latin typeface="Calibri"/>
-              </a:rPr>
-              <a:t>YES — for CPU and DRAM activity, within the bands below.</a:t>
-            </a:r>
-          </a:p>
-        </p:txBody>
-      </p:sp>
-      <p:sp>
-        <p:nvSpPr>
-          <p:cNvPr id="10" name="TextBox 9"/>
-          <p:cNvSpPr txBox="1"/>
-          <p:nvPr/>
-        </p:nvSpPr>
-        <p:spPr>
-          <a:xfrm>
-            <a:off x="822960" y="1755648"/>
-            <a:ext cx="10607040" cy="365760"/>
-          </a:xfrm>
-          <a:prstGeom prst="rect">
-            <a:avLst/>
-          </a:prstGeom>
-          <a:noFill/>
-        </p:spPr>
-        <p:txBody>
-          <a:bodyPr wrap="square">
-            <a:spAutoFit/>
-          </a:bodyPr>
-          <a:lstStyle/>
-          <a:p>
-            <a:pPr algn="l"/>
-            <a:r>
-              <a:rPr sz="1150" b="0">
-                <a:solidFill>
-                  <a:srgbClr val="C9E4D4"/>
-                </a:solidFill>
-                <a:latin typeface="Calibri"/>
-              </a:rPr>
-              <a:t>Not 'yes in principle'. The corrections were fitted on 14 applications and then held on 36 the model had never seen, with the SAME spread — which is the user's situation exactly: an app nobody has measured.</a:t>
-            </a:r>
-          </a:p>
-        </p:txBody>
-      </p:sp>
-      <p:sp>
-        <p:nvSpPr>
-          <p:cNvPr id="11" name="TextBox 10"/>
-          <p:cNvSpPr txBox="1"/>
-          <p:nvPr/>
-        </p:nvSpPr>
-        <p:spPr>
-          <a:xfrm>
-            <a:off x="548640" y="2395728"/>
-            <a:ext cx="5486400" cy="274320"/>
-          </a:xfrm>
-          <a:prstGeom prst="rect">
-            <a:avLst/>
-          </a:prstGeom>
-          <a:noFill/>
-        </p:spPr>
-        <p:txBody>
-          <a:bodyPr wrap="square">
-            <a:spAutoFit/>
-          </a:bodyPr>
-          <a:lstStyle/>
-          <a:p>
-            <a:pPr algn="l"/>
-            <a:r>
-              <a:rPr sz="1200" b="1">
-                <a:solidFill>
-                  <a:srgbClr val="187A33"/>
-                </a:solidFill>
-                <a:latin typeface="Calibri"/>
-              </a:rPr>
-              <a:t>WHAT YOU GET, AND WHAT IT IS WORTH</a:t>
-            </a:r>
-          </a:p>
-        </p:txBody>
-      </p:sp>
-      <p:graphicFrame>
-        <p:nvGraphicFramePr>
-          <p:cNvPr id="12" name="Table 11"/>
-          <p:cNvGraphicFramePr>
-            <a:graphicFrameLocks noGrp="1"/>
-          </p:cNvGraphicFramePr>
-          <p:nvPr/>
-        </p:nvGraphicFramePr>
-        <p:xfrm>
-          <a:off x="548640" y="2697480"/>
-          <a:ext cx="5486400" cy="2103120"/>
-        </p:xfrm>
-        <a:graphic>
-          <a:graphicData uri="http://schemas.openxmlformats.org/drawingml/2006/table">
-            <a:tbl>
-              <a:tblPr firstRow="1" bandRow="1">
-                <a:tableStyleId>{5C22544A-7EE6-4342-B048-85BDC9FD1C3A}</a:tableStyleId>
-              </a:tblPr>
-              <a:tblGrid>
-                <a:gridCol w="2103120"/>
-                <a:gridCol w="1371600"/>
-                <a:gridCol w="2011680"/>
-              </a:tblGrid>
-              <a:tr h="420624">
-                <a:tc>
-                  <a:txBody>
-                    <a:bodyPr/>
-                    <a:lstStyle/>
-                    <a:p>
-                      <a:r>
-                        <a:rPr sz="950" b="1">
-                          <a:solidFill>
-                            <a:srgbClr val="FFFFFF"/>
-                          </a:solidFill>
-                          <a:latin typeface="Calibri"/>
-                        </a:rPr>
-                        <a:t>quantity</a:t>
-                      </a:r>
-                    </a:p>
-                  </a:txBody>
-                  <a:tcPr>
-                    <a:solidFill>
-                      <a:srgbClr val="202124"/>
-                    </a:solidFill>
-                  </a:tcPr>
-                </a:tc>
-                <a:tc>
-                  <a:txBody>
-                    <a:bodyPr/>
-                    <a:lstStyle/>
-                    <a:p>
-                      <a:r>
-                        <a:rPr sz="950" b="1">
-                          <a:solidFill>
-                            <a:srgbClr val="FFFFFF"/>
-                          </a:solidFill>
-                          <a:latin typeface="Calibri"/>
-                        </a:rPr>
-                        <a:t>apply</a:t>
-                      </a:r>
-                    </a:p>
-                  </a:txBody>
-                  <a:tcPr>
-                    <a:solidFill>
-                      <a:srgbClr val="202124"/>
-                    </a:solidFill>
-                  </a:tcPr>
-                </a:tc>
-                <a:tc>
-                  <a:txBody>
-                    <a:bodyPr/>
-                    <a:lstStyle/>
-                    <a:p>
-                      <a:r>
-                        <a:rPr sz="950" b="1">
-                          <a:solidFill>
-                            <a:srgbClr val="FFFFFF"/>
-                          </a:solidFill>
-                          <a:latin typeface="Calibri"/>
-                        </a:rPr>
-                        <a:t>held-out evidence</a:t>
-                      </a:r>
-                    </a:p>
-                  </a:txBody>
-                  <a:tcPr>
-                    <a:solidFill>
-                      <a:srgbClr val="202124"/>
-                    </a:solidFill>
-                  </a:tcPr>
-                </a:tc>
-              </a:tr>
-              <a:tr h="420624">
-                <a:tc>
-                  <a:txBody>
-                    <a:bodyPr/>
-                    <a:lstStyle/>
-                    <a:p>
-                      <a:r>
-                        <a:rPr sz="950" b="1">
-                          <a:latin typeface="Calibri"/>
-                        </a:rPr>
-                        <a:t>Instructions, per core</a:t>
-                      </a:r>
-                    </a:p>
-                  </a:txBody>
-                  <a:tcPr>
-                    <a:solidFill>
-                      <a:srgbClr val="EFF3FA"/>
-                    </a:solidFill>
-                  </a:tcPr>
-                </a:tc>
-                <a:tc>
-                  <a:txBody>
-                    <a:bodyPr/>
-                    <a:lstStyle/>
-                    <a:p>
-                      <a:r>
-                        <a:rPr sz="950" b="0">
-                          <a:latin typeface="Calibri"/>
-                        </a:rPr>
-                        <a:t>×1.00 — use raw</a:t>
-                      </a:r>
-                    </a:p>
-                  </a:txBody>
-                  <a:tcPr>
-                    <a:solidFill>
-                      <a:srgbClr val="EFF3FA"/>
-                    </a:solidFill>
-                  </a:tcPr>
-                </a:tc>
-                <a:tc>
-                  <a:txBody>
-                    <a:bodyPr/>
-                    <a:lstStyle/>
-                    <a:p>
-                      <a:r>
-                        <a:rPr sz="950" b="0">
-                          <a:latin typeface="Calibri"/>
-                        </a:rPr>
-                        <a:t>0.979 ×/÷1.04 on 36 unseen apps</a:t>
-                      </a:r>
-                    </a:p>
-                  </a:txBody>
-                  <a:tcPr>
-                    <a:solidFill>
-                      <a:srgbClr val="EFF3FA"/>
-                    </a:solidFill>
-                  </a:tcPr>
-                </a:tc>
-              </a:tr>
-              <a:tr h="420624">
-                <a:tc>
-                  <a:txBody>
-                    <a:bodyPr/>
-                    <a:lstStyle/>
-                    <a:p>
-                      <a:r>
-                        <a:rPr sz="950" b="1">
-                          <a:latin typeface="Calibri"/>
-                        </a:rPr>
-                        <a:t>DRAM reads</a:t>
-                      </a:r>
-                    </a:p>
-                  </a:txBody>
-                  <a:tcPr>
-                    <a:solidFill>
-                      <a:srgbClr val="FFFFFF"/>
-                    </a:solidFill>
-                  </a:tcPr>
-                </a:tc>
-                <a:tc>
-                  <a:txBody>
-                    <a:bodyPr/>
-                    <a:lstStyle/>
-                    <a:p>
-                      <a:r>
-                        <a:rPr sz="950" b="0">
-                          <a:latin typeface="Calibri"/>
-                        </a:rPr>
-                        <a:t>×1.02</a:t>
-                      </a:r>
-                    </a:p>
-                  </a:txBody>
-                  <a:tcPr>
-                    <a:solidFill>
-                      <a:srgbClr val="FFFFFF"/>
-                    </a:solidFill>
-                  </a:tcPr>
-                </a:tc>
-                <a:tc>
-                  <a:txBody>
-                    <a:bodyPr/>
-                    <a:lstStyle/>
-                    <a:p>
-                      <a:r>
-                        <a:rPr sz="950" b="0">
-                          <a:latin typeface="Calibri"/>
-                        </a:rPr>
-                        <a:t>×/÷1.21 held out — identical to the fitted set</a:t>
-                      </a:r>
-                    </a:p>
-                  </a:txBody>
-                  <a:tcPr>
-                    <a:solidFill>
-                      <a:srgbClr val="FFFFFF"/>
-                    </a:solidFill>
-                  </a:tcPr>
-                </a:tc>
-              </a:tr>
-              <a:tr h="420624">
-                <a:tc>
-                  <a:txBody>
-                    <a:bodyPr/>
-                    <a:lstStyle/>
-                    <a:p>
-                      <a:r>
-                        <a:rPr sz="950" b="1">
-                          <a:latin typeface="Calibri"/>
-                        </a:rPr>
-                        <a:t>DRAM writes</a:t>
-                      </a:r>
-                    </a:p>
-                  </a:txBody>
-                  <a:tcPr>
-                    <a:solidFill>
-                      <a:srgbClr val="EFF3FA"/>
-                    </a:solidFill>
-                  </a:tcPr>
-                </a:tc>
-                <a:tc>
-                  <a:txBody>
-                    <a:bodyPr/>
-                    <a:lstStyle/>
-                    <a:p>
-                      <a:r>
-                        <a:rPr sz="950" b="0">
-                          <a:latin typeface="Calibri"/>
-                        </a:rPr>
-                        <a:t>×1.11</a:t>
-                      </a:r>
-                    </a:p>
-                  </a:txBody>
-                  <a:tcPr>
-                    <a:solidFill>
-                      <a:srgbClr val="EFF3FA"/>
-                    </a:solidFill>
-                  </a:tcPr>
-                </a:tc>
-                <a:tc>
-                  <a:txBody>
-                    <a:bodyPr/>
-                    <a:lstStyle/>
-                    <a:p>
-                      <a:r>
-                        <a:rPr sz="950" b="0">
-                          <a:latin typeface="Calibri"/>
-                        </a:rPr>
-                        <a:t>×/÷1.28 held out — the widest band; treat as an envelope</a:t>
-                      </a:r>
-                    </a:p>
-                  </a:txBody>
-                  <a:tcPr>
-                    <a:solidFill>
-                      <a:srgbClr val="EFF3FA"/>
-                    </a:solidFill>
-                  </a:tcPr>
-                </a:tc>
-              </a:tr>
-              <a:tr h="420624">
-                <a:tc>
-                  <a:txBody>
-                    <a:bodyPr/>
-                    <a:lstStyle/>
-                    <a:p>
-                      <a:r>
-                        <a:rPr sz="950" b="1">
-                          <a:latin typeface="Calibri"/>
-                        </a:rPr>
-                        <a:t>Is this app DRAM-quiet?</a:t>
-                      </a:r>
-                    </a:p>
-                  </a:txBody>
-                  <a:tcPr>
-                    <a:solidFill>
-                      <a:srgbClr val="FFFFFF"/>
-                    </a:solidFill>
-                  </a:tcPr>
-                </a:tc>
-                <a:tc>
-                  <a:txBody>
-                    <a:bodyPr/>
-                    <a:lstStyle/>
-                    <a:p>
-                      <a:r>
-                        <a:rPr sz="950" b="0">
-                          <a:latin typeface="Calibri"/>
-                        </a:rPr>
-                        <a:t>yes/no, no correction</a:t>
-                      </a:r>
-                    </a:p>
-                  </a:txBody>
-                  <a:tcPr>
-                    <a:solidFill>
-                      <a:srgbClr val="FFFFFF"/>
-                    </a:solidFill>
-                  </a:tcPr>
-                </a:tc>
-                <a:tc>
-                  <a:txBody>
-                    <a:bodyPr/>
-                    <a:lstStyle/>
-                    <a:p>
-                      <a:r>
-                        <a:rPr sz="950" b="0">
-                          <a:latin typeface="Calibri"/>
-                        </a:rPr>
-                        <a:t>every quiet app classified correctly, both sets</a:t>
-                      </a:r>
-                    </a:p>
-                  </a:txBody>
-                  <a:tcPr>
-                    <a:solidFill>
-                      <a:srgbClr val="FFFFFF"/>
-                    </a:solidFill>
-                  </a:tcPr>
-                </a:tc>
-              </a:tr>
-            </a:tbl>
-          </a:graphicData>
-        </a:graphic>
-      </p:graphicFrame>
-      <p:sp>
-        <p:nvSpPr>
-          <p:cNvPr id="13" name="TextBox 12"/>
-          <p:cNvSpPr txBox="1"/>
-          <p:nvPr/>
-        </p:nvSpPr>
-        <p:spPr>
-          <a:xfrm>
-            <a:off x="6309360" y="2395728"/>
-            <a:ext cx="5303520" cy="274320"/>
-          </a:xfrm>
-          <a:prstGeom prst="rect">
-            <a:avLst/>
-          </a:prstGeom>
-          <a:noFill/>
-        </p:spPr>
-        <p:txBody>
-          <a:bodyPr wrap="square">
-            <a:spAutoFit/>
-          </a:bodyPr>
-          <a:lstStyle/>
-          <a:p>
-            <a:pPr algn="l"/>
-            <a:r>
-              <a:rPr sz="1200" b="1">
-                <a:solidFill>
-                  <a:srgbClr val="B31412"/>
-                </a:solidFill>
-                <a:latin typeface="Calibri"/>
-              </a:rPr>
-              <a:t>WHAT IT DOES NOT GIVE YOU</a:t>
-            </a:r>
-          </a:p>
-        </p:txBody>
-      </p:sp>
-      <p:graphicFrame>
-        <p:nvGraphicFramePr>
-          <p:cNvPr id="14" name="Table 13"/>
-          <p:cNvGraphicFramePr>
-            <a:graphicFrameLocks noGrp="1"/>
-          </p:cNvGraphicFramePr>
-          <p:nvPr/>
-        </p:nvGraphicFramePr>
-        <p:xfrm>
-          <a:off x="6309360" y="2697480"/>
-          <a:ext cx="5303520" cy="2267712"/>
-        </p:xfrm>
-        <a:graphic>
-          <a:graphicData uri="http://schemas.openxmlformats.org/drawingml/2006/table">
-            <a:tbl>
-              <a:tblPr firstRow="1" bandRow="1">
-                <a:tableStyleId>{5C22544A-7EE6-4342-B048-85BDC9FD1C3A}</a:tableStyleId>
-              </a:tblPr>
-              <a:tblGrid>
-                <a:gridCol w="1737360"/>
-                <a:gridCol w="3566160"/>
-              </a:tblGrid>
-              <a:tr h="566928">
-                <a:tc>
-                  <a:txBody>
-                    <a:bodyPr/>
-                    <a:lstStyle/>
-                    <a:p>
-                      <a:r>
-                        <a:rPr sz="950" b="1">
-                          <a:solidFill>
-                            <a:srgbClr val="FFFFFF"/>
-                          </a:solidFill>
-                          <a:latin typeface="Calibri"/>
-                        </a:rPr>
-                        <a:t>boundary</a:t>
-                      </a:r>
-                    </a:p>
-                  </a:txBody>
-                  <a:tcPr>
-                    <a:solidFill>
-                      <a:srgbClr val="202124"/>
-                    </a:solidFill>
-                  </a:tcPr>
-                </a:tc>
-                <a:tc>
-                  <a:txBody>
-                    <a:bodyPr/>
-                    <a:lstStyle/>
-                    <a:p>
-                      <a:r>
-                        <a:rPr sz="950" b="1">
-                          <a:solidFill>
-                            <a:srgbClr val="FFFFFF"/>
-                          </a:solidFill>
-                          <a:latin typeface="Calibri"/>
-                        </a:rPr>
-                        <a:t>why</a:t>
-                      </a:r>
-                    </a:p>
-                  </a:txBody>
-                  <a:tcPr>
-                    <a:solidFill>
-                      <a:srgbClr val="202124"/>
-                    </a:solidFill>
-                  </a:tcPr>
-                </a:tc>
-              </a:tr>
-              <a:tr h="566928">
-                <a:tc>
-                  <a:txBody>
-                    <a:bodyPr/>
-                    <a:lstStyle/>
-                    <a:p>
-                      <a:r>
-                        <a:rPr sz="950" b="1">
-                          <a:latin typeface="Calibri"/>
-                        </a:rPr>
-                        <a:t>Accelerator compute</a:t>
-                      </a:r>
-                    </a:p>
-                  </a:txBody>
-                  <a:tcPr>
-                    <a:solidFill>
-                      <a:srgbClr val="EFF3FA"/>
-                    </a:solidFill>
-                  </a:tcPr>
-                </a:tc>
-                <a:tc>
-                  <a:txBody>
-                    <a:bodyPr/>
-                    <a:lstStyle/>
-                    <a:p>
-                      <a:r>
-                        <a:rPr sz="950" b="0">
-                          <a:latin typeface="Calibri"/>
-                        </a:rPr>
-                        <a:t>GPU / VPU / NPU work is not modelled — the emulator does not execute it</a:t>
-                      </a:r>
-                    </a:p>
-                  </a:txBody>
-                  <a:tcPr>
-                    <a:solidFill>
-                      <a:srgbClr val="EFF3FA"/>
-                    </a:solidFill>
-                  </a:tcPr>
-                </a:tc>
-              </a:tr>
-              <a:tr h="566928">
-                <a:tc>
-                  <a:txBody>
-                    <a:bodyPr/>
-                    <a:lstStyle/>
-                    <a:p>
-                      <a:r>
-                        <a:rPr sz="950" b="1">
-                          <a:latin typeface="Calibri"/>
-                        </a:rPr>
-                        <a:t>Kernel &amp; DMA share</a:t>
-                      </a:r>
-                    </a:p>
-                  </a:txBody>
-                  <a:tcPr>
-                    <a:solidFill>
-                      <a:srgbClr val="FFFFFF"/>
-                    </a:solidFill>
-                  </a:tcPr>
-                </a:tc>
-                <a:tc>
-                  <a:txBody>
-                    <a:bodyPr/>
-                    <a:lstStyle/>
-                    <a:p>
-                      <a:r>
-                        <a:rPr sz="950" b="0">
-                          <a:latin typeface="Calibri"/>
-                        </a:rPr>
-                        <a:t>invisible from linux-user by construction; the system-mode harness exists and measures it (sha256: 10.0%)</a:t>
-                      </a:r>
-                    </a:p>
-                  </a:txBody>
-                  <a:tcPr>
-                    <a:solidFill>
-                      <a:srgbClr val="FFFFFF"/>
-                    </a:solidFill>
-                  </a:tcPr>
-                </a:tc>
-              </a:tr>
-              <a:tr h="566928">
-                <a:tc>
-                  <a:txBody>
-                    <a:bodyPr/>
-                    <a:lstStyle/>
-                    <a:p>
-                      <a:r>
-                        <a:rPr sz="950" b="1">
-                          <a:latin typeface="Calibri"/>
-                        </a:rPr>
-                        <a:t>Rates, and therefore watts</a:t>
-                      </a:r>
-                    </a:p>
-                  </a:txBody>
-                  <a:tcPr>
-                    <a:solidFill>
-                      <a:srgbClr val="EFF3FA"/>
-                    </a:solidFill>
-                  </a:tcPr>
-                </a:tc>
-                <a:tc>
-                  <a:txBody>
-                    <a:bodyPr/>
-                    <a:lstStyle/>
-                    <a:p>
-                      <a:r>
-                        <a:rPr sz="950" b="0">
-                          <a:latin typeface="Calibri"/>
-                        </a:rPr>
-                        <a:t>counts are time-free. A rate needs a duration, and an energy needs coefficients — both belong to the power team</a:t>
-                      </a:r>
-                    </a:p>
-                  </a:txBody>
-                  <a:tcPr>
-                    <a:solidFill>
-                      <a:srgbClr val="EFF3FA"/>
-                    </a:solidFill>
-                  </a:tcPr>
-                </a:tc>
-              </a:tr>
-            </a:tbl>
-          </a:graphicData>
-        </a:graphic>
-      </p:graphicFrame>
-      <p:sp>
-        <p:nvSpPr>
-          <p:cNvPr id="15" name="TextBox 14"/>
-          <p:cNvSpPr txBox="1"/>
-          <p:nvPr/>
-        </p:nvSpPr>
-        <p:spPr>
-          <a:xfrm>
-            <a:off x="548640" y="4846320"/>
-            <a:ext cx="11064240" cy="685800"/>
-          </a:xfrm>
-          <a:prstGeom prst="rect">
-            <a:avLst/>
-          </a:prstGeom>
-          <a:noFill/>
-        </p:spPr>
-        <p:txBody>
-          <a:bodyPr wrap="square">
-            <a:spAutoFit/>
-          </a:bodyPr>
-          <a:lstStyle/>
-          <a:p>
-            <a:pPr algn="l"/>
-            <a:r>
-              <a:rPr sz="1100" b="1">
-                <a:solidFill>
-                  <a:srgbClr val="202124"/>
-                </a:solidFill>
-                <a:latin typeface="Calibri"/>
-              </a:rPr>
-              <a:t>HOW THE TWO HALVES COMBINE. DEEP earned the corrections: 14 applications iterated mechanism by mechanism — a silicon-matched cache hierarchy, A55 write-streaming, a writeback model, a stride prefetcher — with five hypotheses falsified and recorded on the way. BROAD proved they are not curve-fits: 36 further applications, measured cold, land in the same bands. Deep alone would be a tuned demo; broad alone would be a coincidence. Together they are a licence to use the numbers on an application nobody has run yet.</a:t>
-            </a:r>
-          </a:p>
-        </p:txBody>
-      </p:sp>
-      <p:sp>
-        <p:nvSpPr>
-          <p:cNvPr id="16" name="TextBox 15"/>
-          <p:cNvSpPr txBox="1"/>
-          <p:nvPr/>
-        </p:nvSpPr>
-        <p:spPr>
-          <a:xfrm>
-            <a:off x="548640" y="5870448"/>
-            <a:ext cx="11064240" cy="457200"/>
-          </a:xfrm>
-          <a:prstGeom prst="rect">
-            <a:avLst/>
-          </a:prstGeom>
-          <a:noFill/>
-        </p:spPr>
-        <p:txBody>
-          <a:bodyPr wrap="square">
-            <a:spAutoFit/>
-          </a:bodyPr>
-          <a:lstStyle/>
-          <a:p>
-            <a:pPr algn="l"/>
-            <a:r>
-              <a:rPr sz="1100" b="1">
-                <a:solidFill>
-                  <a:srgbClr val="187A33"/>
-                </a:solidFill>
-                <a:latin typeface="Calibri"/>
-              </a:rPr>
-              <a:t>WHAT THE USER ACTUALLY RUNS:   afgen/afgen.sh my-apps.manifest afs/   →   one activity-factor JSON per application, every field provenance-tagged with its correction and band. Fifty apps in, fifty activity factors out.</a:t>
-            </a:r>
-          </a:p>
-        </p:txBody>
-      </p:sp>
-      <p:sp>
-        <p:nvSpPr>
-          <p:cNvPr id="17" name="TextBox 16"/>
-          <p:cNvSpPr txBox="1"/>
-          <p:nvPr/>
-        </p:nvSpPr>
-        <p:spPr>
-          <a:xfrm>
-            <a:off x="548640" y="6309360"/>
-            <a:ext cx="11064240" cy="365760"/>
-          </a:xfrm>
-          <a:prstGeom prst="rect">
-            <a:avLst/>
-          </a:prstGeom>
-          <a:noFill/>
-        </p:spPr>
-        <p:txBody>
-          <a:bodyPr wrap="square">
-            <a:spAutoFit/>
-          </a:bodyPr>
-          <a:lstStyle/>
-          <a:p>
-            <a:pPr algn="l"/>
-            <a:r>
-              <a:rPr sz="950" b="0">
-                <a:solidFill>
-                  <a:srgbClr val="5F6368"/>
-                </a:solidFill>
-                <a:latin typeface="Calibri"/>
-              </a:rPr>
-              <a:t>⚠️ These are ACTIVITY bands, not power bands: they license the count vector N in E = Σ eᵢ×Nᵢ. What a ×/÷1.21 read band costs a final energy number depends on the weights eᵢ — the power team's half, and why wattson never prints a watt.</a:t>
             </a:r>
           </a:p>
         </p:txBody>

--- a/xcheck/xcheck-correlation.pptx
+++ b/xcheck/xcheck-correlation.pptx
@@ -3241,7 +3241,7 @@
                 </a:solidFill>
                 <a:latin typeface="Calibri"/>
               </a:rPr>
-              <a:t>Kyle Fox · 2026-08-30</a:t>
+              <a:t>Kyle Fox · 2026-08-31</a:t>
             </a:r>
           </a:p>
         </p:txBody>
@@ -3415,7 +3415,7 @@
                 </a:solidFill>
                 <a:latin typeface="Calibri"/>
               </a:rPr>
-              <a:t>wattson xcheck rev 2 · QEMU counts DERIVED, PMU/DDR counts MEASURED · 2026-08-30</a:t>
+              <a:t>wattson xcheck · QEMU counts DERIVED, PMU/DDR counts MEASURED · 2026-08-31</a:t>
             </a:r>
           </a:p>
         </p:txBody>
@@ -4358,7 +4358,7 @@
                 </a:solidFill>
                 <a:latin typeface="Calibri"/>
               </a:rPr>
-              <a:t>wattson xcheck rev 2 · QEMU counts DERIVED, PMU/DDR counts MEASURED · 2026-08-30</a:t>
+              <a:t>wattson xcheck · QEMU counts DERIVED, PMU/DDR counts MEASURED · 2026-08-31</a:t>
             </a:r>
           </a:p>
         </p:txBody>
@@ -5340,7 +5340,7 @@
                 </a:solidFill>
                 <a:latin typeface="Calibri"/>
               </a:rPr>
-              <a:t>wattson xcheck rev 2 · QEMU counts DERIVED, PMU/DDR counts MEASURED · 2026-08-30</a:t>
+              <a:t>wattson xcheck · QEMU counts DERIVED, PMU/DDR counts MEASURED · 2026-08-31</a:t>
             </a:r>
           </a:p>
         </p:txBody>
@@ -5503,7 +5503,7 @@
         </p:nvGraphicFramePr>
         <p:xfrm>
           <a:off x="548640" y="2157984"/>
-          <a:ext cx="5486400" cy="2304288"/>
+          <a:ext cx="5486400" cy="2523744"/>
         </p:xfrm>
         <a:graphic>
           <a:graphicData uri="http://schemas.openxmlformats.org/drawingml/2006/table">
@@ -5517,14 +5517,14 @@
                 <a:gridCol w="1051560"/>
                 <a:gridCol w="1051560"/>
               </a:tblGrid>
-              <a:tr h="384048">
-                <a:tc>
-                  <a:txBody>
-                    <a:bodyPr/>
-                    <a:lstStyle/>
-                    <a:p>
-                      <a:r>
-                        <a:rPr sz="1000" b="1">
+              <a:tr h="420624">
+                <a:tc>
+                  <a:txBody>
+                    <a:bodyPr/>
+                    <a:lstStyle/>
+                    <a:p>
+                      <a:r>
+                        <a:rPr sz="1050" b="1">
                           <a:solidFill>
                             <a:srgbClr val="FFFFFF"/>
                           </a:solidFill>
@@ -5546,7 +5546,7 @@
                     <a:lstStyle/>
                     <a:p>
                       <a:r>
-                        <a:rPr sz="1000" b="1">
+                        <a:rPr sz="1050" b="1">
                           <a:solidFill>
                             <a:srgbClr val="FFFFFF"/>
                           </a:solidFill>
@@ -5568,7 +5568,7 @@
                     <a:lstStyle/>
                     <a:p>
                       <a:r>
-                        <a:rPr sz="1000" b="1">
+                        <a:rPr sz="1050" b="1">
                           <a:solidFill>
                             <a:srgbClr val="FFFFFF"/>
                           </a:solidFill>
@@ -5590,7 +5590,7 @@
                     <a:lstStyle/>
                     <a:p>
                       <a:r>
-                        <a:rPr sz="1000" b="1">
+                        <a:rPr sz="1050" b="1">
                           <a:solidFill>
                             <a:srgbClr val="FFFFFF"/>
                           </a:solidFill>
@@ -5607,14 +5607,14 @@
                   </a:tcPr>
                 </a:tc>
               </a:tr>
-              <a:tr h="384048">
-                <a:tc>
-                  <a:txBody>
-                    <a:bodyPr/>
-                    <a:lstStyle/>
-                    <a:p>
-                      <a:r>
-                        <a:rPr sz="1000" b="1">
+              <a:tr h="420624">
+                <a:tc>
+                  <a:txBody>
+                    <a:bodyPr/>
+                    <a:lstStyle/>
+                    <a:p>
+                      <a:r>
+                        <a:rPr sz="1050" b="1">
                           <a:latin typeface="Calibri"/>
                         </a:rPr>
                         <a:t>Instructions, per core</a:t>
@@ -5633,7 +5633,7 @@
                     <a:lstStyle/>
                     <a:p>
                       <a:r>
-                        <a:rPr sz="1000" b="0">
+                        <a:rPr sz="1050" b="0">
                           <a:latin typeface="Calibri"/>
                         </a:rPr>
                         <a:t>use raw</a:t>
@@ -5652,7 +5652,7 @@
                     <a:lstStyle/>
                     <a:p>
                       <a:r>
-                        <a:rPr sz="1000" b="0">
+                        <a:rPr sz="1050" b="0">
                           <a:latin typeface="Calibri"/>
                         </a:rPr>
                         <a:t>0.979</a:t>
@@ -5671,7 +5671,7 @@
                     <a:lstStyle/>
                     <a:p>
                       <a:r>
-                        <a:rPr sz="1000" b="0">
+                        <a:rPr sz="1050" b="0">
                           <a:latin typeface="Calibri"/>
                         </a:rPr>
                         <a:t>×/÷1.04</a:t>
@@ -5685,14 +5685,14 @@
                   </a:tcPr>
                 </a:tc>
               </a:tr>
-              <a:tr h="384048">
-                <a:tc>
-                  <a:txBody>
-                    <a:bodyPr/>
-                    <a:lstStyle/>
-                    <a:p>
-                      <a:r>
-                        <a:rPr sz="1000" b="1">
+              <a:tr h="420624">
+                <a:tc>
+                  <a:txBody>
+                    <a:bodyPr/>
+                    <a:lstStyle/>
+                    <a:p>
+                      <a:r>
+                        <a:rPr sz="1050" b="1">
                           <a:latin typeface="Calibri"/>
                         </a:rPr>
                         <a:t>DRAM reads</a:t>
@@ -5711,7 +5711,7 @@
                     <a:lstStyle/>
                     <a:p>
                       <a:r>
-                        <a:rPr sz="1000" b="0">
+                        <a:rPr sz="1050" b="0">
                           <a:latin typeface="Calibri"/>
                         </a:rPr>
                         <a:t>×1.02</a:t>
@@ -5730,7 +5730,7 @@
                     <a:lstStyle/>
                     <a:p>
                       <a:r>
-                        <a:rPr sz="1000" b="0">
+                        <a:rPr sz="1050" b="0">
                           <a:latin typeface="Calibri"/>
                         </a:rPr>
                         <a:t>0.91</a:t>
@@ -5749,7 +5749,7 @@
                     <a:lstStyle/>
                     <a:p>
                       <a:r>
-                        <a:rPr sz="1000" b="0">
+                        <a:rPr sz="1050" b="0">
                           <a:latin typeface="Calibri"/>
                         </a:rPr>
                         <a:t>×/÷1.21</a:t>
@@ -5763,14 +5763,14 @@
                   </a:tcPr>
                 </a:tc>
               </a:tr>
-              <a:tr h="384048">
-                <a:tc>
-                  <a:txBody>
-                    <a:bodyPr/>
-                    <a:lstStyle/>
-                    <a:p>
-                      <a:r>
-                        <a:rPr sz="1000" b="1">
+              <a:tr h="420624">
+                <a:tc>
+                  <a:txBody>
+                    <a:bodyPr/>
+                    <a:lstStyle/>
+                    <a:p>
+                      <a:r>
+                        <a:rPr sz="1050" b="1">
                           <a:latin typeface="Calibri"/>
                         </a:rPr>
                         <a:t>DRAM writes</a:t>
@@ -5789,7 +5789,7 @@
                     <a:lstStyle/>
                     <a:p>
                       <a:r>
-                        <a:rPr sz="1000" b="0">
+                        <a:rPr sz="1050" b="0">
                           <a:latin typeface="Calibri"/>
                         </a:rPr>
                         <a:t>×1.11</a:t>
@@ -5808,7 +5808,7 @@
                     <a:lstStyle/>
                     <a:p>
                       <a:r>
-                        <a:rPr sz="1000" b="0">
+                        <a:rPr sz="1050" b="0">
                           <a:latin typeface="Calibri"/>
                         </a:rPr>
                         <a:t>0.83</a:t>
@@ -5827,7 +5827,7 @@
                     <a:lstStyle/>
                     <a:p>
                       <a:r>
-                        <a:rPr sz="1000" b="0">
+                        <a:rPr sz="1050" b="0">
                           <a:latin typeface="Calibri"/>
                         </a:rPr>
                         <a:t>×/÷1.28</a:t>
@@ -5841,14 +5841,14 @@
                   </a:tcPr>
                 </a:tc>
               </a:tr>
-              <a:tr h="384048">
-                <a:tc>
-                  <a:txBody>
-                    <a:bodyPr/>
-                    <a:lstStyle/>
-                    <a:p>
-                      <a:r>
-                        <a:rPr sz="1000" b="1">
+              <a:tr h="420624">
+                <a:tc>
+                  <a:txBody>
+                    <a:bodyPr/>
+                    <a:lstStyle/>
+                    <a:p>
+                      <a:r>
+                        <a:rPr sz="1050" b="1">
                           <a:latin typeface="Calibri"/>
                         </a:rPr>
                         <a:t>DRAM-quiet screening</a:t>
@@ -5867,7 +5867,7 @@
                     <a:lstStyle/>
                     <a:p>
                       <a:r>
-                        <a:rPr sz="1000" b="0">
+                        <a:rPr sz="1050" b="0">
                           <a:latin typeface="Calibri"/>
                         </a:rPr>
                         <a:t>yes/no</a:t>
@@ -5886,7 +5886,7 @@
                     <a:lstStyle/>
                     <a:p>
                       <a:r>
-                        <a:rPr sz="1000" b="0">
+                        <a:rPr sz="1050" b="0">
                           <a:latin typeface="Calibri"/>
                         </a:rPr>
                         <a:t>100%</a:t>
@@ -5905,7 +5905,7 @@
                     <a:lstStyle/>
                     <a:p>
                       <a:r>
-                        <a:rPr sz="1000" b="0">
+                        <a:rPr sz="1050" b="0">
                           <a:latin typeface="Calibri"/>
                         </a:rPr>
                         <a:t>—</a:t>
@@ -5919,14 +5919,14 @@
                   </a:tcPr>
                 </a:tc>
               </a:tr>
-              <a:tr h="384048">
-                <a:tc>
-                  <a:txBody>
-                    <a:bodyPr/>
-                    <a:lstStyle/>
-                    <a:p>
-                      <a:r>
-                        <a:rPr sz="1000" b="1">
+              <a:tr h="420624">
+                <a:tc>
+                  <a:txBody>
+                    <a:bodyPr/>
+                    <a:lstStyle/>
+                    <a:p>
+                      <a:r>
+                        <a:rPr sz="1050" b="1">
                           <a:latin typeface="Calibri"/>
                         </a:rPr>
                         <a:t>User + kernel instructions</a:t>
@@ -5945,7 +5945,7 @@
                     <a:lstStyle/>
                     <a:p>
                       <a:r>
-                        <a:rPr sz="1000" b="0">
+                        <a:rPr sz="1050" b="0">
                           <a:latin typeface="Calibri"/>
                         </a:rPr>
                         <a:t>system mode</a:t>
@@ -5964,7 +5964,7 @@
                     <a:lstStyle/>
                     <a:p>
                       <a:r>
-                        <a:rPr sz="1000" b="0">
+                        <a:rPr sz="1050" b="0">
                           <a:latin typeface="Calibri"/>
                         </a:rPr>
                         <a:t>10.0% kernel</a:t>
@@ -5983,7 +5983,7 @@
                     <a:lstStyle/>
                     <a:p>
                       <a:r>
-                        <a:rPr sz="1000" b="0">
+                        <a:rPr sz="1050" b="0">
                           <a:latin typeface="Calibri"/>
                         </a:rPr>
                         <a:t>measured</a:t>
@@ -6046,7 +6046,7 @@
         </p:nvGraphicFramePr>
         <p:xfrm>
           <a:off x="6309360" y="2157984"/>
-          <a:ext cx="5303520" cy="1536192"/>
+          <a:ext cx="5303520" cy="1682496"/>
         </p:xfrm>
         <a:graphic>
           <a:graphicData uri="http://schemas.openxmlformats.org/drawingml/2006/table">
@@ -6058,14 +6058,14 @@
                 <a:gridCol w="2194560"/>
                 <a:gridCol w="3108960"/>
               </a:tblGrid>
-              <a:tr h="384048">
-                <a:tc>
-                  <a:txBody>
-                    <a:bodyPr/>
-                    <a:lstStyle/>
-                    <a:p>
-                      <a:r>
-                        <a:rPr sz="1000" b="1">
+              <a:tr h="420624">
+                <a:tc>
+                  <a:txBody>
+                    <a:bodyPr/>
+                    <a:lstStyle/>
+                    <a:p>
+                      <a:r>
+                        <a:rPr sz="1050" b="1">
                           <a:solidFill>
                             <a:srgbClr val="FFFFFF"/>
                           </a:solidFill>
@@ -6087,7 +6087,7 @@
                     <a:lstStyle/>
                     <a:p>
                       <a:r>
-                        <a:rPr sz="1000" b="1">
+                        <a:rPr sz="1050" b="1">
                           <a:solidFill>
                             <a:srgbClr val="FFFFFF"/>
                           </a:solidFill>
@@ -6104,14 +6104,14 @@
                   </a:tcPr>
                 </a:tc>
               </a:tr>
-              <a:tr h="384048">
-                <a:tc>
-                  <a:txBody>
-                    <a:bodyPr/>
-                    <a:lstStyle/>
-                    <a:p>
-                      <a:r>
-                        <a:rPr sz="1000" b="1">
+              <a:tr h="420624">
+                <a:tc>
+                  <a:txBody>
+                    <a:bodyPr/>
+                    <a:lstStyle/>
+                    <a:p>
+                      <a:r>
+                        <a:rPr sz="1050" b="1">
                           <a:latin typeface="Calibri"/>
                         </a:rPr>
                         <a:t>Accelerator compute</a:t>
@@ -6130,7 +6130,7 @@
                     <a:lstStyle/>
                     <a:p>
                       <a:r>
-                        <a:rPr sz="1000" b="0">
+                        <a:rPr sz="1050" b="0">
                           <a:latin typeface="Calibri"/>
                         </a:rPr>
                         <a:t>NPU model in build; GPU next</a:t>
@@ -6144,14 +6144,14 @@
                   </a:tcPr>
                 </a:tc>
               </a:tr>
-              <a:tr h="384048">
-                <a:tc>
-                  <a:txBody>
-                    <a:bodyPr/>
-                    <a:lstStyle/>
-                    <a:p>
-                      <a:r>
-                        <a:rPr sz="1000" b="1">
+              <a:tr h="420624">
+                <a:tc>
+                  <a:txBody>
+                    <a:bodyPr/>
+                    <a:lstStyle/>
+                    <a:p>
+                      <a:r>
+                        <a:rPr sz="1050" b="1">
                           <a:latin typeface="Calibri"/>
                         </a:rPr>
                         <a:t>DMA payload bytes</a:t>
@@ -6170,7 +6170,7 @@
                     <a:lstStyle/>
                     <a:p>
                       <a:r>
-                        <a:rPr sz="1000" b="0">
+                        <a:rPr sz="1050" b="0">
                           <a:latin typeface="Calibri"/>
                         </a:rPr>
                         <a:t>known to the device model, not yet counted</a:t>
@@ -6184,14 +6184,14 @@
                   </a:tcPr>
                 </a:tc>
               </a:tr>
-              <a:tr h="384048">
-                <a:tc>
-                  <a:txBody>
-                    <a:bodyPr/>
-                    <a:lstStyle/>
-                    <a:p>
-                      <a:r>
-                        <a:rPr sz="1000" b="1">
+              <a:tr h="420624">
+                <a:tc>
+                  <a:txBody>
+                    <a:bodyPr/>
+                    <a:lstStyle/>
+                    <a:p>
+                      <a:r>
+                        <a:rPr sz="1050" b="1">
                           <a:latin typeface="Calibri"/>
                         </a:rPr>
                         <a:t>Core identity, DVFS point</a:t>
@@ -6210,7 +6210,7 @@
                     <a:lstStyle/>
                     <a:p>
                       <a:r>
-                        <a:rPr sz="1000" b="0">
+                        <a:rPr sz="1050" b="0">
                           <a:latin typeface="Calibri"/>
                         </a:rPr>
                         <a:t>QEMU has no frequency notion</a:t>
@@ -6236,7 +6236,7 @@
         </p:nvSpPr>
         <p:spPr>
           <a:xfrm>
-            <a:off x="548640" y="4590288"/>
+            <a:off x="548640" y="4773168"/>
             <a:ext cx="11064240" cy="292608"/>
           </a:xfrm>
           <a:prstGeom prst="rect">
@@ -6271,7 +6271,7 @@
         </p:nvSpPr>
         <p:spPr>
           <a:xfrm>
-            <a:off x="548640" y="4882896"/>
+            <a:off x="548640" y="5065776"/>
             <a:ext cx="11064240" cy="457200"/>
           </a:xfrm>
           <a:prstGeom prst="rect">
@@ -6306,7 +6306,7 @@
         </p:nvSpPr>
         <p:spPr>
           <a:xfrm>
-            <a:off x="548640" y="5504688"/>
+            <a:off x="548640" y="5669280"/>
             <a:ext cx="11064240" cy="274320"/>
           </a:xfrm>
           <a:prstGeom prst="rect">
@@ -6341,7 +6341,7 @@
         </p:nvSpPr>
         <p:spPr>
           <a:xfrm>
-            <a:off x="548640" y="5779008"/>
+            <a:off x="548640" y="5943600"/>
             <a:ext cx="11064240" cy="365760"/>
           </a:xfrm>
           <a:prstGeom prst="rect">
@@ -6376,8 +6376,8 @@
         </p:nvSpPr>
         <p:spPr>
           <a:xfrm>
-            <a:off x="548640" y="6181344"/>
-            <a:ext cx="11064240" cy="320040"/>
+            <a:off x="548640" y="6327648"/>
+            <a:ext cx="11064240" cy="292608"/>
           </a:xfrm>
           <a:prstGeom prst="rect">
             <a:avLst/>
@@ -6572,7 +6572,7 @@
                 </a:solidFill>
                 <a:latin typeface="Calibri"/>
               </a:rPr>
-              <a:t>wattson xcheck rev 2 · QEMU counts DERIVED, PMU/DDR counts MEASURED · 2026-08-30</a:t>
+              <a:t>wattson xcheck · QEMU counts DERIVED, PMU/DDR counts MEASURED · 2026-08-31</a:t>
             </a:r>
           </a:p>
         </p:txBody>
@@ -6620,8 +6620,8 @@
         </p:nvSpPr>
         <p:spPr>
           <a:xfrm>
-            <a:off x="548640" y="1060704"/>
-            <a:ext cx="11155680" cy="329184"/>
+            <a:off x="548640" y="1042415"/>
+            <a:ext cx="11155680" cy="310896"/>
           </a:xfrm>
           <a:prstGeom prst="rect">
             <a:avLst/>
@@ -6636,7 +6636,7 @@
           <a:p>
             <a:pPr algn="l"/>
             <a:r>
-              <a:rPr sz="1300" b="1">
+              <a:rPr sz="1250" b="1">
                 <a:solidFill>
                   <a:srgbClr val="202124"/>
                 </a:solidFill>
@@ -6656,8 +6656,8 @@
           <p:nvPr/>
         </p:nvGraphicFramePr>
         <p:xfrm>
-          <a:off x="548640" y="1481328"/>
-          <a:ext cx="11064240" cy="1609344"/>
+          <a:off x="548640" y="1572768"/>
+          <a:ext cx="11064240" cy="1682496"/>
         </p:xfrm>
         <a:graphic>
           <a:graphicData uri="http://schemas.openxmlformats.org/drawingml/2006/table">
@@ -6669,7 +6669,7 @@
                 <a:gridCol w="1828800"/>
                 <a:gridCol w="9235440"/>
               </a:tblGrid>
-              <a:tr h="402336">
+              <a:tr h="420624">
                 <a:tc>
                   <a:txBody>
                     <a:bodyPr/>
@@ -6715,7 +6715,7 @@
                   </a:tcPr>
                 </a:tc>
               </a:tr>
-              <a:tr h="402336">
+              <a:tr h="420624">
                 <a:tc>
                   <a:txBody>
                     <a:bodyPr/>
@@ -6755,7 +6755,7 @@
                   </a:tcPr>
                 </a:tc>
               </a:tr>
-              <a:tr h="402336">
+              <a:tr h="420624">
                 <a:tc>
                   <a:txBody>
                     <a:bodyPr/>
@@ -6795,7 +6795,7 @@
                   </a:tcPr>
                 </a:tc>
               </a:tr>
-              <a:tr h="402336">
+              <a:tr h="420624">
                 <a:tc>
                   <a:txBody>
                     <a:bodyPr/>
@@ -6847,7 +6847,7 @@
         </p:nvSpPr>
         <p:spPr>
           <a:xfrm>
-            <a:off x="548640" y="3063240"/>
+            <a:off x="548640" y="3127248"/>
             <a:ext cx="11064240" cy="1051560"/>
           </a:xfrm>
           <a:prstGeom prst="roundRect">
@@ -6892,7 +6892,7 @@
         </p:nvSpPr>
         <p:spPr>
           <a:xfrm>
-            <a:off x="822960" y="3182112"/>
+            <a:off x="822960" y="3246120"/>
             <a:ext cx="10515600" cy="365760"/>
           </a:xfrm>
           <a:prstGeom prst="rect">
@@ -6927,7 +6927,7 @@
         </p:nvSpPr>
         <p:spPr>
           <a:xfrm>
-            <a:off x="822960" y="3611880"/>
+            <a:off x="822960" y="3675887"/>
             <a:ext cx="10515600" cy="411480"/>
           </a:xfrm>
           <a:prstGeom prst="rect">
@@ -6963,8 +6963,8 @@
           <p:nvPr/>
         </p:nvGraphicFramePr>
         <p:xfrm>
-          <a:off x="548640" y="4261104"/>
-          <a:ext cx="11064240" cy="1920240"/>
+          <a:off x="548640" y="4297680"/>
+          <a:ext cx="11064240" cy="1828800"/>
         </p:xfrm>
         <a:graphic>
           <a:graphicData uri="http://schemas.openxmlformats.org/drawingml/2006/table">
@@ -6977,14 +6977,14 @@
                 <a:gridCol w="3931920"/>
                 <a:gridCol w="6675120"/>
               </a:tblGrid>
-              <a:tr h="384048">
-                <a:tc>
-                  <a:txBody>
-                    <a:bodyPr/>
-                    <a:lstStyle/>
-                    <a:p>
-                      <a:r>
-                        <a:rPr sz="1050" b="1">
+              <a:tr h="365760">
+                <a:tc>
+                  <a:txBody>
+                    <a:bodyPr/>
+                    <a:lstStyle/>
+                    <a:p>
+                      <a:r>
+                        <a:rPr sz="1000" b="1">
                           <a:solidFill>
                             <a:srgbClr val="FFFFFF"/>
                           </a:solidFill>
@@ -7006,7 +7006,7 @@
                     <a:lstStyle/>
                     <a:p>
                       <a:r>
-                        <a:rPr sz="1050" b="1">
+                        <a:rPr sz="1000" b="1">
                           <a:solidFill>
                             <a:srgbClr val="FFFFFF"/>
                           </a:solidFill>
@@ -7028,7 +7028,7 @@
                     <a:lstStyle/>
                     <a:p>
                       <a:r>
-                        <a:rPr sz="1050" b="1">
+                        <a:rPr sz="1000" b="1">
                           <a:solidFill>
                             <a:srgbClr val="FFFFFF"/>
                           </a:solidFill>
@@ -7045,14 +7045,14 @@
                   </a:tcPr>
                 </a:tc>
               </a:tr>
-              <a:tr h="384048">
-                <a:tc>
-                  <a:txBody>
-                    <a:bodyPr/>
-                    <a:lstStyle/>
-                    <a:p>
-                      <a:r>
-                        <a:rPr sz="1050" b="0">
+              <a:tr h="365760">
+                <a:tc>
+                  <a:txBody>
+                    <a:bodyPr/>
+                    <a:lstStyle/>
+                    <a:p>
+                      <a:r>
+                        <a:rPr sz="1000" b="0">
                           <a:latin typeface="Calibri"/>
                         </a:rPr>
                         <a:t>1</a:t>
@@ -7071,7 +7071,7 @@
                     <a:lstStyle/>
                     <a:p>
                       <a:r>
-                        <a:rPr sz="1050" b="1">
+                        <a:rPr sz="1000" b="1">
                           <a:latin typeface="Calibri"/>
                         </a:rPr>
                         <a:t>Pick the saturating reference per block</a:t>
@@ -7090,7 +7090,7 @@
                     <a:lstStyle/>
                     <a:p>
                       <a:r>
-                        <a:rPr sz="1050" b="0">
+                        <a:rPr sz="1000" b="0">
                           <a:latin typeface="Calibri"/>
                         </a:rPr>
                         <a:t>we ship the microbenches: alu saturates the pipeline, mem the memory system</a:t>
@@ -7104,14 +7104,14 @@
                   </a:tcPr>
                 </a:tc>
               </a:tr>
-              <a:tr h="384048">
-                <a:tc>
-                  <a:txBody>
-                    <a:bodyPr/>
-                    <a:lstStyle/>
-                    <a:p>
-                      <a:r>
-                        <a:rPr sz="1050" b="0">
+              <a:tr h="365760">
+                <a:tc>
+                  <a:txBody>
+                    <a:bodyPr/>
+                    <a:lstStyle/>
+                    <a:p>
+                      <a:r>
+                        <a:rPr sz="1000" b="0">
                           <a:latin typeface="Calibri"/>
                         </a:rPr>
                         <a:t>2</a:t>
@@ -7130,7 +7130,7 @@
                     <a:lstStyle/>
                     <a:p>
                       <a:r>
-                        <a:rPr sz="1050" b="1">
+                        <a:rPr sz="1000" b="1">
                           <a:latin typeface="Calibri"/>
                         </a:rPr>
                         <a:t>Measure the application</a:t>
@@ -7149,7 +7149,7 @@
                     <a:lstStyle/>
                     <a:p>
                       <a:r>
-                        <a:rPr sz="1050" b="0">
+                        <a:rPr sz="1000" b="0">
                           <a:latin typeface="Calibri"/>
                         </a:rPr>
                         <a:t>afgen gives counts; U = app activity ÷ saturating activity</a:t>
@@ -7163,14 +7163,14 @@
                   </a:tcPr>
                 </a:tc>
               </a:tr>
-              <a:tr h="384048">
-                <a:tc>
-                  <a:txBody>
-                    <a:bodyPr/>
-                    <a:lstStyle/>
-                    <a:p>
-                      <a:r>
-                        <a:rPr sz="1050" b="0">
+              <a:tr h="365760">
+                <a:tc>
+                  <a:txBody>
+                    <a:bodyPr/>
+                    <a:lstStyle/>
+                    <a:p>
+                      <a:r>
+                        <a:rPr sz="1000" b="0">
                           <a:latin typeface="Calibri"/>
                         </a:rPr>
                         <a:t>3</a:t>
@@ -7189,7 +7189,7 @@
                     <a:lstStyle/>
                     <a:p>
                       <a:r>
-                        <a:rPr sz="1050" b="1">
+                        <a:rPr sz="1000" b="1">
                           <a:latin typeface="Calibri"/>
                         </a:rPr>
                         <a:t>Scale your existing anchor</a:t>
@@ -7208,7 +7208,7 @@
                     <a:lstStyle/>
                     <a:p>
                       <a:r>
-                        <a:rPr sz="1050" b="0">
+                        <a:rPr sz="1000" b="0">
                           <a:latin typeface="Calibri"/>
                         </a:rPr>
                         <a:t>AF = 5% × U. Spreadsheet unchanged, physics unchanged, one guess replaced</a:t>
@@ -7222,14 +7222,14 @@
                   </a:tcPr>
                 </a:tc>
               </a:tr>
-              <a:tr h="384048">
-                <a:tc>
-                  <a:txBody>
-                    <a:bodyPr/>
-                    <a:lstStyle/>
-                    <a:p>
-                      <a:r>
-                        <a:rPr sz="1050" b="0">
+              <a:tr h="365760">
+                <a:tc>
+                  <a:txBody>
+                    <a:bodyPr/>
+                    <a:lstStyle/>
+                    <a:p>
+                      <a:r>
+                        <a:rPr sz="1000" b="0">
                           <a:latin typeface="Calibri"/>
                         </a:rPr>
                         <a:t>4</a:t>
@@ -7248,7 +7248,7 @@
                     <a:lstStyle/>
                     <a:p>
                       <a:r>
-                        <a:rPr sz="1050" b="1">
+                        <a:rPr sz="1000" b="1">
                           <a:latin typeface="Calibri"/>
                         </a:rPr>
                         <a:t>Validate once on silicon</a:t>
@@ -7267,7 +7267,7 @@
                     <a:lstStyle/>
                     <a:p>
                       <a:r>
-                        <a:rPr sz="1050" b="0">
+                        <a:rPr sz="1000" b="0">
                           <a:latin typeface="Calibri"/>
                         </a:rPr>
                         <a:t>two rail measurements — idle and saturated — confirm the anchor is linear in U</a:t>
@@ -7293,8 +7293,8 @@
         </p:nvSpPr>
         <p:spPr>
           <a:xfrm>
-            <a:off x="548640" y="6053328"/>
-            <a:ext cx="11064240" cy="384048"/>
+            <a:off x="548640" y="6163056"/>
+            <a:ext cx="11064240" cy="329184"/>
           </a:xfrm>
           <a:prstGeom prst="rect">
             <a:avLst/>
@@ -7309,13 +7309,13 @@
           <a:p>
             <a:pPr algn="l"/>
             <a:r>
-              <a:rPr sz="1300" b="1">
+              <a:rPr sz="1200" b="1">
                 <a:solidFill>
                   <a:srgbClr val="187A33"/>
                 </a:solidFill>
                 <a:latin typeface="Calibri"/>
               </a:rPr>
-              <a:t>THE TURN-AROUND:  today you assume 3% and get the power of an abstraction. This way you name an application — "what does Pac-Man cost?" — and get the power of that application.</a:t>
+              <a:t>THE TURN-AROUND: today you assume 3% and get the power of an abstraction. Name an application instead — "what does Pac-Man cost?" — and get the power of that application.</a:t>
             </a:r>
           </a:p>
         </p:txBody>
@@ -7489,7 +7489,7 @@
                 </a:solidFill>
                 <a:latin typeface="Calibri"/>
               </a:rPr>
-              <a:t>wattson xcheck rev 2 · QEMU counts DERIVED, PMU/DDR counts MEASURED · 2026-08-30</a:t>
+              <a:t>wattson xcheck · QEMU counts DERIVED, PMU/DDR counts MEASURED · 2026-08-31</a:t>
             </a:r>
           </a:p>
         </p:txBody>
@@ -7924,7 +7924,7 @@
         </p:nvSpPr>
         <p:spPr>
           <a:xfrm>
-            <a:off x="548640" y="3584448"/>
+            <a:off x="548640" y="3474720"/>
             <a:ext cx="11064240" cy="292608"/>
           </a:xfrm>
           <a:prstGeom prst="rect">
@@ -7960,8 +7960,8 @@
           <p:nvPr/>
         </p:nvGraphicFramePr>
         <p:xfrm>
-          <a:off x="548640" y="3877056"/>
-          <a:ext cx="6035040" cy="1975104"/>
+          <a:off x="548640" y="3767328"/>
+          <a:ext cx="6035040" cy="2304288"/>
         </p:xfrm>
         <a:graphic>
           <a:graphicData uri="http://schemas.openxmlformats.org/drawingml/2006/table">
@@ -7974,14 +7974,14 @@
                 <a:gridCol w="1828800"/>
                 <a:gridCol w="1828800"/>
               </a:tblGrid>
-              <a:tr h="329184">
-                <a:tc>
-                  <a:txBody>
-                    <a:bodyPr/>
-                    <a:lstStyle/>
-                    <a:p>
-                      <a:r>
-                        <a:rPr sz="1000" b="1">
+              <a:tr h="384048">
+                <a:tc>
+                  <a:txBody>
+                    <a:bodyPr/>
+                    <a:lstStyle/>
+                    <a:p>
+                      <a:r>
+                        <a:rPr sz="1050" b="1">
                           <a:solidFill>
                             <a:srgbClr val="FFFFFF"/>
                           </a:solidFill>
@@ -8003,7 +8003,7 @@
                     <a:lstStyle/>
                     <a:p>
                       <a:r>
-                        <a:rPr sz="1000" b="1">
+                        <a:rPr sz="1050" b="1">
                           <a:solidFill>
                             <a:srgbClr val="FFFFFF"/>
                           </a:solidFill>
@@ -8025,7 +8025,7 @@
                     <a:lstStyle/>
                     <a:p>
                       <a:r>
-                        <a:rPr sz="1000" b="1">
+                        <a:rPr sz="1050" b="1">
                           <a:solidFill>
                             <a:srgbClr val="FFFFFF"/>
                           </a:solidFill>
@@ -8042,14 +8042,14 @@
                   </a:tcPr>
                 </a:tc>
               </a:tr>
-              <a:tr h="329184">
-                <a:tc>
-                  <a:txBody>
-                    <a:bodyPr/>
-                    <a:lstStyle/>
-                    <a:p>
-                      <a:r>
-                        <a:rPr sz="1000" b="1">
+              <a:tr h="384048">
+                <a:tc>
+                  <a:txBody>
+                    <a:bodyPr/>
+                    <a:lstStyle/>
+                    <a:p>
+                      <a:r>
+                        <a:rPr sz="1050" b="1">
                           <a:latin typeface="Calibri"/>
                         </a:rPr>
                         <a:t>integer ALU</a:t>
@@ -8068,7 +8068,7 @@
                     <a:lstStyle/>
                     <a:p>
                       <a:r>
-                        <a:rPr sz="1000" b="0">
+                        <a:rPr sz="1050" b="0">
                           <a:latin typeface="Calibri"/>
                         </a:rPr>
                         <a:t>28.1%</a:t>
@@ -8087,7 +8087,7 @@
                     <a:lstStyle/>
                     <a:p>
                       <a:r>
-                        <a:rPr sz="1000" b="0">
+                        <a:rPr sz="1050" b="0">
                           <a:latin typeface="Calibri"/>
                         </a:rPr>
                         <a:t>36.9%</a:t>
@@ -8101,14 +8101,14 @@
                   </a:tcPr>
                 </a:tc>
               </a:tr>
-              <a:tr h="329184">
-                <a:tc>
-                  <a:txBody>
-                    <a:bodyPr/>
-                    <a:lstStyle/>
-                    <a:p>
-                      <a:r>
-                        <a:rPr sz="1000" b="1">
+              <a:tr h="384048">
+                <a:tc>
+                  <a:txBody>
+                    <a:bodyPr/>
+                    <a:lstStyle/>
+                    <a:p>
+                      <a:r>
+                        <a:rPr sz="1050" b="1">
                           <a:latin typeface="Calibri"/>
                         </a:rPr>
                         <a:t>load / store</a:t>
@@ -8127,7 +8127,7 @@
                     <a:lstStyle/>
                     <a:p>
                       <a:r>
-                        <a:rPr sz="1000" b="0">
+                        <a:rPr sz="1050" b="0">
                           <a:latin typeface="Calibri"/>
                         </a:rPr>
                         <a:t>52.2%</a:t>
@@ -8146,7 +8146,7 @@
                     <a:lstStyle/>
                     <a:p>
                       <a:r>
-                        <a:rPr sz="1000" b="0">
+                        <a:rPr sz="1050" b="0">
                           <a:latin typeface="Calibri"/>
                         </a:rPr>
                         <a:t>41.9%</a:t>
@@ -8160,14 +8160,14 @@
                   </a:tcPr>
                 </a:tc>
               </a:tr>
-              <a:tr h="329184">
-                <a:tc>
-                  <a:txBody>
-                    <a:bodyPr/>
-                    <a:lstStyle/>
-                    <a:p>
-                      <a:r>
-                        <a:rPr sz="1000" b="1">
+              <a:tr h="384048">
+                <a:tc>
+                  <a:txBody>
+                    <a:bodyPr/>
+                    <a:lstStyle/>
+                    <a:p>
+                      <a:r>
+                        <a:rPr sz="1050" b="1">
                           <a:latin typeface="Calibri"/>
                         </a:rPr>
                         <a:t>branch</a:t>
@@ -8186,7 +8186,7 @@
                     <a:lstStyle/>
                     <a:p>
                       <a:r>
-                        <a:rPr sz="1000" b="0">
+                        <a:rPr sz="1050" b="0">
                           <a:latin typeface="Calibri"/>
                         </a:rPr>
                         <a:t>19.7%</a:t>
@@ -8205,7 +8205,7 @@
                     <a:lstStyle/>
                     <a:p>
                       <a:r>
-                        <a:rPr sz="1000" b="0">
+                        <a:rPr sz="1050" b="0">
                           <a:latin typeface="Calibri"/>
                         </a:rPr>
                         <a:t>19.9%</a:t>
@@ -8219,14 +8219,14 @@
                   </a:tcPr>
                 </a:tc>
               </a:tr>
-              <a:tr h="329184">
-                <a:tc>
-                  <a:txBody>
-                    <a:bodyPr/>
-                    <a:lstStyle/>
-                    <a:p>
-                      <a:r>
-                        <a:rPr sz="1000" b="1">
+              <a:tr h="384048">
+                <a:tc>
+                  <a:txBody>
+                    <a:bodyPr/>
+                    <a:lstStyle/>
+                    <a:p>
+                      <a:r>
+                        <a:rPr sz="1050" b="1">
                           <a:latin typeface="Calibri"/>
                         </a:rPr>
                         <a:t>FP / SIMD</a:t>
@@ -8245,7 +8245,7 @@
                     <a:lstStyle/>
                     <a:p>
                       <a:r>
-                        <a:rPr sz="1000" b="0">
+                        <a:rPr sz="1050" b="0">
                           <a:latin typeface="Calibri"/>
                         </a:rPr>
                         <a:t>0.1%</a:t>
@@ -8264,7 +8264,7 @@
                     <a:lstStyle/>
                     <a:p>
                       <a:r>
-                        <a:rPr sz="1000" b="0">
+                        <a:rPr sz="1050" b="0">
                           <a:latin typeface="Calibri"/>
                         </a:rPr>
                         <a:t>1.3%</a:t>
@@ -8278,14 +8278,14 @@
                   </a:tcPr>
                 </a:tc>
               </a:tr>
-              <a:tr h="329184">
-                <a:tc>
-                  <a:txBody>
-                    <a:bodyPr/>
-                    <a:lstStyle/>
-                    <a:p>
-                      <a:r>
-                        <a:rPr sz="1000" b="1">
+              <a:tr h="384048">
+                <a:tc>
+                  <a:txBody>
+                    <a:bodyPr/>
+                    <a:lstStyle/>
+                    <a:p>
+                      <a:r>
+                        <a:rPr sz="1050" b="1">
                           <a:latin typeface="Calibri"/>
                         </a:rPr>
                         <a:t>total instructions</a:t>
@@ -8304,7 +8304,7 @@
                     <a:lstStyle/>
                     <a:p>
                       <a:r>
-                        <a:rPr sz="1000" b="0">
+                        <a:rPr sz="1050" b="0">
                           <a:latin typeface="Calibri"/>
                         </a:rPr>
                         <a:t>2.57 B</a:t>
@@ -8323,7 +8323,7 @@
                     <a:lstStyle/>
                     <a:p>
                       <a:r>
-                        <a:rPr sz="1000" b="0">
+                        <a:rPr sz="1050" b="0">
                           <a:latin typeface="Calibri"/>
                         </a:rPr>
                         <a:t>25.7 B</a:t>
@@ -8349,7 +8349,7 @@
         </p:nvSpPr>
         <p:spPr>
           <a:xfrm>
-            <a:off x="6858000" y="3877056"/>
+            <a:off x="6858000" y="3767328"/>
             <a:ext cx="4754880" cy="365760"/>
           </a:xfrm>
           <a:prstGeom prst="rect">
@@ -8384,7 +8384,7 @@
         </p:nvSpPr>
         <p:spPr>
           <a:xfrm>
-            <a:off x="6858000" y="4370832"/>
+            <a:off x="6858000" y="4261104"/>
             <a:ext cx="4754880" cy="1463040"/>
           </a:xfrm>
           <a:prstGeom prst="rect">
@@ -8419,7 +8419,7 @@
         </p:nvSpPr>
         <p:spPr>
           <a:xfrm>
-            <a:off x="548640" y="6053328"/>
+            <a:off x="548640" y="6126480"/>
             <a:ext cx="11064240" cy="365760"/>
           </a:xfrm>
           <a:prstGeom prst="rect">
@@ -8615,7 +8615,7 @@
                 </a:solidFill>
                 <a:latin typeface="Calibri"/>
               </a:rPr>
-              <a:t>wattson xcheck rev 2 · QEMU counts DERIVED, PMU/DDR counts MEASURED · 2026-08-30</a:t>
+              <a:t>wattson xcheck · QEMU counts DERIVED, PMU/DDR counts MEASURED · 2026-08-31</a:t>
             </a:r>
           </a:p>
         </p:txBody>
@@ -9450,7 +9450,7 @@
                 </a:solidFill>
                 <a:latin typeface="Calibri"/>
               </a:rPr>
-              <a:t>wattson xcheck rev 2 · QEMU counts DERIVED, PMU/DDR counts MEASURED · 2026-08-30</a:t>
+              <a:t>wattson xcheck · QEMU counts DERIVED, PMU/DDR counts MEASURED · 2026-08-31</a:t>
             </a:r>
           </a:p>
         </p:txBody>
@@ -9534,7 +9534,7 @@
         <p:spPr>
           <a:xfrm>
             <a:off x="548640" y="1444752"/>
-            <a:ext cx="5394960" cy="2514600"/>
+            <a:ext cx="5394960" cy="2240280"/>
           </a:xfrm>
           <a:prstGeom prst="roundRect">
             <a:avLst/>
@@ -9578,8 +9578,8 @@
         </p:nvSpPr>
         <p:spPr>
           <a:xfrm>
-            <a:off x="777240" y="1572768"/>
-            <a:ext cx="4937760" cy="320040"/>
+            <a:off x="777240" y="1536192"/>
+            <a:ext cx="4937760" cy="292608"/>
           </a:xfrm>
           <a:prstGeom prst="rect">
             <a:avLst/>
@@ -9594,7 +9594,7 @@
           <a:p>
             <a:pPr algn="l"/>
             <a:r>
-              <a:rPr sz="1500" b="1">
+              <a:rPr sz="1400" b="1">
                 <a:solidFill>
                   <a:srgbClr val="1A53A0"/>
                 </a:solidFill>
@@ -9613,8 +9613,8 @@
         </p:nvSpPr>
         <p:spPr>
           <a:xfrm>
-            <a:off x="777240" y="1965960"/>
-            <a:ext cx="5029200" cy="1737360"/>
+            <a:off x="777240" y="1847088"/>
+            <a:ext cx="4983480" cy="1828800"/>
           </a:xfrm>
           <a:prstGeom prst="rect">
             <a:avLst/>
@@ -9627,31 +9627,45 @@
           </a:bodyPr>
           <a:lstStyle/>
           <a:p>
-            <a:pPr algn="l"/>
-            <a:r>
-              <a:rPr sz="1100" b="0">
+            <a:pPr algn="l">
+              <a:spcAft>
+                <a:spcPts val="600"/>
+              </a:spcAft>
+            </a:pPr>
+            <a:r>
+              <a:rPr sz="1050" b="0">
                 <a:solidFill>
                   <a:srgbClr val="202124"/>
                 </a:solidFill>
                 <a:latin typeface="Calibri"/>
               </a:rPr>
-              <a:t>qemu-aarch64 + TCG plugins</a:t>
-            </a:r>
-          </a:p>
-          <a:p>
-            <a:r>
-              <a:rPr sz="1100">
+              <a:t>qemu-aarch64 + TCG plugins (libinsn, libcache)</a:t>
+            </a:r>
+          </a:p>
+          <a:p>
+            <a:pPr>
+              <a:spcAft>
+                <a:spcPts val="600"/>
+              </a:spcAft>
+            </a:pPr>
+            <a:r>
+              <a:rPr sz="1050">
                 <a:solidFill>
                   <a:srgbClr val="202124"/>
                 </a:solidFill>
                 <a:latin typeface="Calibri"/>
               </a:rPr>
-              <a:t>Cache model = the board's own hierarchy, from its sysfs:</a:t>
-            </a:r>
-          </a:p>
-          <a:p>
-            <a:r>
-              <a:rPr sz="1100">
+              <a:t>Cache model = the board's own hierarchy, read from its sysfs:</a:t>
+            </a:r>
+          </a:p>
+          <a:p>
+            <a:pPr>
+              <a:spcAft>
+                <a:spcPts val="600"/>
+              </a:spcAft>
+            </a:pPr>
+            <a:r>
+              <a:rPr sz="1050">
                 <a:solidFill>
                   <a:srgbClr val="202124"/>
                 </a:solidFill>
@@ -9661,25 +9675,67 @@
             </a:r>
           </a:p>
           <a:p>
-            <a:r>
-              <a:rPr sz="1100">
+            <a:pPr>
+              <a:spcAft>
+                <a:spcPts val="600"/>
+              </a:spcAft>
+            </a:pPr>
+            <a:r>
+              <a:rPr sz="1050">
                 <a:solidFill>
                   <a:srgbClr val="202124"/>
                 </a:solidFill>
                 <a:latin typeface="Calibri"/>
               </a:rPr>
-              <a:t>A55 write-streaming, writeback, stride prefetcher modelled</a:t>
-            </a:r>
-          </a:p>
-          <a:p>
-            <a:r>
-              <a:rPr sz="1100">
+              <a:t>A55 write-streaming, writeback and a stride prefetcher modelled</a:t>
+            </a:r>
+          </a:p>
+          <a:p>
+            <a:pPr>
+              <a:spcAft>
+                <a:spcPts val="600"/>
+              </a:spcAft>
+            </a:pPr>
+            <a:r>
+              <a:rPr sz="1050">
                 <a:solidFill>
                   <a:srgbClr val="202124"/>
                 </a:solidFill>
                 <a:latin typeface="Calibri"/>
               </a:rPr>
-              <a:t>L3 misses → read proxy · evictions → write proxy</a:t>
+              <a:t>L3 misses → DRAM-read proxy · evictions → DRAM-write proxy</a:t>
+            </a:r>
+          </a:p>
+          <a:p>
+            <a:pPr>
+              <a:spcAft>
+                <a:spcPts val="600"/>
+              </a:spcAft>
+            </a:pPr>
+            <a:r>
+              <a:rPr sz="1050">
+                <a:solidFill>
+                  <a:srgbClr val="202124"/>
+                </a:solidFill>
+                <a:latin typeface="Calibri"/>
+              </a:rPr>
+              <a:t>Two passes per app: prefetch pass for reads, base pass for writes</a:t>
+            </a:r>
+          </a:p>
+          <a:p>
+            <a:pPr>
+              <a:spcAft>
+                <a:spcPts val="600"/>
+              </a:spcAft>
+            </a:pPr>
+            <a:r>
+              <a:rPr sz="1050">
+                <a:solidFill>
+                  <a:srgbClr val="202124"/>
+                </a:solidFill>
+                <a:latin typeface="Calibri"/>
+              </a:rPr>
+              <a:t>Counts are per-run and frequency-free</a:t>
             </a:r>
           </a:p>
         </p:txBody>
@@ -9693,7 +9749,7 @@
         <p:spPr>
           <a:xfrm>
             <a:off x="6263640" y="1444752"/>
-            <a:ext cx="5394960" cy="2514600"/>
+            <a:ext cx="5394960" cy="2240280"/>
           </a:xfrm>
           <a:prstGeom prst="roundRect">
             <a:avLst/>
@@ -9737,8 +9793,8 @@
         </p:nvSpPr>
         <p:spPr>
           <a:xfrm>
-            <a:off x="6492240" y="1572768"/>
-            <a:ext cx="4937760" cy="320040"/>
+            <a:off x="6492240" y="1536192"/>
+            <a:ext cx="4937760" cy="292608"/>
           </a:xfrm>
           <a:prstGeom prst="rect">
             <a:avLst/>
@@ -9753,7 +9809,7 @@
           <a:p>
             <a:pPr algn="l"/>
             <a:r>
-              <a:rPr sz="1500" b="1">
+              <a:rPr sz="1400" b="1">
                 <a:solidFill>
                   <a:srgbClr val="1A53A0"/>
                 </a:solidFill>
@@ -9772,8 +9828,8 @@
         </p:nvSpPr>
         <p:spPr>
           <a:xfrm>
-            <a:off x="6492240" y="1965960"/>
-            <a:ext cx="5029200" cy="1737360"/>
+            <a:off x="6492240" y="1847088"/>
+            <a:ext cx="4983480" cy="1828800"/>
           </a:xfrm>
           <a:prstGeom prst="rect">
             <a:avLst/>
@@ -9786,9 +9842,13 @@
           </a:bodyPr>
           <a:lstStyle/>
           <a:p>
-            <a:pPr algn="l"/>
-            <a:r>
-              <a:rPr sz="1100" b="0">
+            <a:pPr algn="l">
+              <a:spcAft>
+                <a:spcPts val="600"/>
+              </a:spcAft>
+            </a:pPr>
+            <a:r>
+              <a:rPr sz="1050" b="0">
                 <a:solidFill>
                   <a:srgbClr val="202124"/>
                 </a:solidFill>
@@ -9798,19 +9858,29 @@
             </a:r>
           </a:p>
           <a:p>
-            <a:r>
-              <a:rPr sz="1100">
+            <a:pPr>
+              <a:spcAft>
+                <a:spcPts val="600"/>
+              </a:spcAft>
+            </a:pPr>
+            <a:r>
+              <a:rPr sz="1050">
                 <a:solidFill>
                   <a:srgbClr val="202124"/>
                 </a:solidFill>
                 <a:latin typeface="Calibri"/>
               </a:rPr>
-              <a:t>Core PMU: instructions, cycles, L1/L2/L3 refills</a:t>
-            </a:r>
-          </a:p>
-          <a:p>
-            <a:r>
-              <a:rPr sz="1100">
+              <a:t>Core PMU: instructions, cycles, L1/L2/L3 refill events</a:t>
+            </a:r>
+          </a:p>
+          <a:p>
+            <a:pPr>
+              <a:spcAft>
+                <a:spcPts val="600"/>
+              </a:spcAft>
+            </a:pPr>
+            <a:r>
+              <a:rPr sz="1050">
                 <a:solidFill>
                   <a:srgbClr val="202124"/>
                 </a:solidFill>
@@ -9820,8 +9890,13 @@
             </a:r>
           </a:p>
           <a:p>
-            <a:r>
-              <a:rPr sz="1100">
+            <a:pPr>
+              <a:spcAft>
+                <a:spcPts val="600"/>
+              </a:spcAft>
+            </a:pPr>
+            <a:r>
+              <a:rPr sz="1050">
                 <a:solidFill>
                   <a:srgbClr val="202124"/>
                 </a:solidFill>
@@ -9831,8 +9906,13 @@
             </a:r>
           </a:p>
           <a:p>
-            <a:r>
-              <a:rPr sz="1100">
+            <a:pPr>
+              <a:spcAft>
+                <a:spcPts val="600"/>
+              </a:spcAft>
+            </a:pPr>
+            <a:r>
+              <a:rPr sz="1050">
                 <a:solidFill>
                   <a:srgbClr val="202124"/>
                 </a:solidFill>
@@ -9841,18 +9921,95 @@
               <a:t>The DDR controller sees prefetch traffic the core PMU cannot</a:t>
             </a:r>
           </a:p>
-        </p:txBody>
-      </p:sp>
-      <p:sp>
-        <p:nvSpPr>
-          <p:cNvPr id="14" name="TextBox 13"/>
+          <a:p>
+            <a:pPr>
+              <a:spcAft>
+                <a:spcPts val="600"/>
+              </a:spcAft>
+            </a:pPr>
+            <a:r>
+              <a:rPr sz="1050">
+                <a:solidFill>
+                  <a:srgbClr val="202124"/>
+                </a:solidFill>
+                <a:latin typeface="Calibri"/>
+              </a:rPr>
+              <a:t>Medians of repeated runs, spreads recorded</a:t>
+            </a:r>
+          </a:p>
+          <a:p>
+            <a:pPr>
+              <a:spcAft>
+                <a:spcPts val="600"/>
+              </a:spcAft>
+            </a:pPr>
+            <a:r>
+              <a:rPr sz="1050">
+                <a:solidFill>
+                  <a:srgbClr val="202124"/>
+                </a:solidFill>
+                <a:latin typeface="Calibri"/>
+              </a:rPr>
+              <a:t>The same static binary is copied over, never rebuilt</a:t>
+            </a:r>
+          </a:p>
+        </p:txBody>
+      </p:sp>
+      <p:sp>
+        <p:nvSpPr>
+          <p:cNvPr id="14" name="Rounded Rectangle 13"/>
+          <p:cNvSpPr/>
+          <p:nvPr/>
+        </p:nvSpPr>
+        <p:spPr>
+          <a:xfrm>
+            <a:off x="548640" y="3858768"/>
+            <a:ext cx="5394960" cy="2267712"/>
+          </a:xfrm>
+          <a:prstGeom prst="roundRect">
+            <a:avLst/>
+          </a:prstGeom>
+          <a:solidFill>
+            <a:srgbClr val="FFFFFF"/>
+          </a:solidFill>
+          <a:ln w="12700">
+            <a:solidFill>
+              <a:srgbClr val="C4CEDB"/>
+            </a:solidFill>
+          </a:ln>
+        </p:spPr>
+        <p:style>
+          <a:lnRef idx="1">
+            <a:schemeClr val="accent1"/>
+          </a:lnRef>
+          <a:fillRef idx="3">
+            <a:schemeClr val="accent1"/>
+          </a:fillRef>
+          <a:effectRef idx="2">
+            <a:schemeClr val="accent1"/>
+          </a:effectRef>
+          <a:fontRef idx="minor">
+            <a:schemeClr val="lt1"/>
+          </a:fontRef>
+        </p:style>
+        <p:txBody>
+          <a:bodyPr rtlCol="0" anchor="ctr"/>
+          <a:lstStyle/>
+          <a:p>
+            <a:pPr algn="ctr"/>
+          </a:p>
+        </p:txBody>
+      </p:sp>
+      <p:sp>
+        <p:nvSpPr>
+          <p:cNvPr id="15" name="TextBox 14"/>
           <p:cNvSpPr txBox="1"/>
           <p:nvPr/>
         </p:nvSpPr>
         <p:spPr>
           <a:xfrm>
-            <a:off x="548640" y="4187952"/>
-            <a:ext cx="11064240" cy="292608"/>
+            <a:off x="777240" y="3950208"/>
+            <a:ext cx="4937760" cy="274320"/>
           </a:xfrm>
           <a:prstGeom prst="rect">
             <a:avLst/>
@@ -9880,14 +10037,14 @@
       </p:sp>
       <p:sp>
         <p:nvSpPr>
-          <p:cNvPr id="15" name="TextBox 14"/>
+          <p:cNvPr id="16" name="TextBox 15"/>
           <p:cNvSpPr txBox="1"/>
           <p:nvPr/>
         </p:nvSpPr>
         <p:spPr>
           <a:xfrm>
-            <a:off x="548640" y="4498848"/>
-            <a:ext cx="11064240" cy="822960"/>
+            <a:off x="777240" y="4261104"/>
+            <a:ext cx="4983480" cy="1783080"/>
           </a:xfrm>
           <a:prstGeom prst="rect">
             <a:avLst/>
@@ -9900,30 +10057,158 @@
           </a:bodyPr>
           <a:lstStyle/>
           <a:p>
-            <a:pPr algn="l"/>
-            <a:r>
-              <a:rPr sz="1200" b="0">
+            <a:pPr algn="l">
+              <a:spcAft>
+                <a:spcPts val="700"/>
+              </a:spcAft>
+            </a:pPr>
+            <a:r>
+              <a:rPr sz="1050" b="0">
                 <a:solidFill>
                   <a:srgbClr val="202124"/>
                 </a:solidFill>
                 <a:latin typeface="Calibri"/>
               </a:rPr>
-              <a:t>14 development apps: five microbench corners (ALU, streaming, pointer-chase, matmul, sort) plus stereo vision, two compressors, an interpreter, SHA-256, a JSON codec, SQLite, a game-AI trainer, an HTTP client.
-36 held-out apps, never seen by the model: busybox applets, crypto kernels, software renderers, bignum, hashing, parsers, sockets.</a:t>
-            </a:r>
-          </a:p>
-        </p:txBody>
-      </p:sp>
-      <p:sp>
-        <p:nvSpPr>
-          <p:cNvPr id="16" name="TextBox 15"/>
+              <a:t>14 development apps — five microbench corners (ALU, streaming,</a:t>
+            </a:r>
+          </a:p>
+          <a:p>
+            <a:pPr>
+              <a:spcAft>
+                <a:spcPts val="700"/>
+              </a:spcAft>
+            </a:pPr>
+            <a:r>
+              <a:rPr sz="1050">
+                <a:solidFill>
+                  <a:srgbClr val="202124"/>
+                </a:solidFill>
+                <a:latin typeface="Calibri"/>
+              </a:rPr>
+              <a:t>pointer-chase, matmul, sort) plus stereo vision, two compressors,</a:t>
+            </a:r>
+          </a:p>
+          <a:p>
+            <a:pPr>
+              <a:spcAft>
+                <a:spcPts val="700"/>
+              </a:spcAft>
+            </a:pPr>
+            <a:r>
+              <a:rPr sz="1050">
+                <a:solidFill>
+                  <a:srgbClr val="202124"/>
+                </a:solidFill>
+                <a:latin typeface="Calibri"/>
+              </a:rPr>
+              <a:t>an interpreter, SHA-256, a JSON codec, SQLite, a game-AI trainer</a:t>
+            </a:r>
+          </a:p>
+          <a:p>
+            <a:pPr>
+              <a:spcAft>
+                <a:spcPts val="700"/>
+              </a:spcAft>
+            </a:pPr>
+            <a:r>
+              <a:rPr sz="1050">
+                <a:solidFill>
+                  <a:srgbClr val="202124"/>
+                </a:solidFill>
+                <a:latin typeface="Calibri"/>
+              </a:rPr>
+              <a:t>and an HTTP client.</a:t>
+            </a:r>
+          </a:p>
+          <a:p>
+            <a:pPr>
+              <a:spcAft>
+                <a:spcPts val="700"/>
+              </a:spcAft>
+            </a:pPr>
+            <a:r>
+              <a:rPr sz="1050">
+                <a:solidFill>
+                  <a:srgbClr val="202124"/>
+                </a:solidFill>
+                <a:latin typeface="Calibri"/>
+              </a:rPr>
+              <a:t>36 held-out apps, never seen by the model — busybox applets,</a:t>
+            </a:r>
+          </a:p>
+          <a:p>
+            <a:pPr>
+              <a:spcAft>
+                <a:spcPts val="700"/>
+              </a:spcAft>
+            </a:pPr>
+            <a:r>
+              <a:rPr sz="1050">
+                <a:solidFill>
+                  <a:srgbClr val="202124"/>
+                </a:solidFill>
+                <a:latin typeface="Calibri"/>
+              </a:rPr>
+              <a:t>crypto kernels, software renderers, bignum, hashing, parsers, sockets.</a:t>
+            </a:r>
+          </a:p>
+        </p:txBody>
+      </p:sp>
+      <p:sp>
+        <p:nvSpPr>
+          <p:cNvPr id="17" name="Rounded Rectangle 16"/>
+          <p:cNvSpPr/>
+          <p:nvPr/>
+        </p:nvSpPr>
+        <p:spPr>
+          <a:xfrm>
+            <a:off x="6263640" y="3858768"/>
+            <a:ext cx="5394960" cy="2267712"/>
+          </a:xfrm>
+          <a:prstGeom prst="roundRect">
+            <a:avLst/>
+          </a:prstGeom>
+          <a:solidFill>
+            <a:srgbClr val="FFFFFF"/>
+          </a:solidFill>
+          <a:ln w="12700">
+            <a:solidFill>
+              <a:srgbClr val="C4CEDB"/>
+            </a:solidFill>
+          </a:ln>
+        </p:spPr>
+        <p:style>
+          <a:lnRef idx="1">
+            <a:schemeClr val="accent1"/>
+          </a:lnRef>
+          <a:fillRef idx="3">
+            <a:schemeClr val="accent1"/>
+          </a:fillRef>
+          <a:effectRef idx="2">
+            <a:schemeClr val="accent1"/>
+          </a:effectRef>
+          <a:fontRef idx="minor">
+            <a:schemeClr val="lt1"/>
+          </a:fontRef>
+        </p:style>
+        <p:txBody>
+          <a:bodyPr rtlCol="0" anchor="ctr"/>
+          <a:lstStyle/>
+          <a:p>
+            <a:pPr algn="ctr"/>
+          </a:p>
+        </p:txBody>
+      </p:sp>
+      <p:sp>
+        <p:nvSpPr>
+          <p:cNvPr id="18" name="TextBox 17"/>
           <p:cNvSpPr txBox="1"/>
           <p:nvPr/>
         </p:nvSpPr>
         <p:spPr>
           <a:xfrm>
-            <a:off x="548640" y="5989320"/>
-            <a:ext cx="11064240" cy="365760"/>
+            <a:off x="6492240" y="3950208"/>
+            <a:ext cx="4937760" cy="274320"/>
           </a:xfrm>
           <a:prstGeom prst="rect">
             <a:avLst/>
@@ -9938,13 +10223,132 @@
           <a:p>
             <a:pPr algn="l"/>
             <a:r>
-              <a:rPr sz="1150" b="0">
+              <a:rPr sz="1200" b="1">
                 <a:solidFill>
-                  <a:srgbClr val="5F6368"/>
+                  <a:srgbClr val="1A53A0"/>
                 </a:solidFill>
                 <a:latin typeface="Calibri"/>
               </a:rPr>
-              <a:t>Every app prints a checksum so dead-code elimination cannot fake a result; the vision app is hash-gated bit-exact against its published golden.</a:t>
+              <a:t>HOW A RUN IS ACCEPTED</a:t>
+            </a:r>
+          </a:p>
+        </p:txBody>
+      </p:sp>
+      <p:sp>
+        <p:nvSpPr>
+          <p:cNvPr id="19" name="TextBox 18"/>
+          <p:cNvSpPr txBox="1"/>
+          <p:nvPr/>
+        </p:nvSpPr>
+        <p:spPr>
+          <a:xfrm>
+            <a:off x="6492240" y="4261104"/>
+            <a:ext cx="4983480" cy="1783080"/>
+          </a:xfrm>
+          <a:prstGeom prst="rect">
+            <a:avLst/>
+          </a:prstGeom>
+          <a:noFill/>
+        </p:spPr>
+        <p:txBody>
+          <a:bodyPr wrap="square">
+            <a:spAutoFit/>
+          </a:bodyPr>
+          <a:lstStyle/>
+          <a:p>
+            <a:pPr algn="l">
+              <a:spcAft>
+                <a:spcPts val="700"/>
+              </a:spcAft>
+            </a:pPr>
+            <a:r>
+              <a:rPr sz="1050" b="0">
+                <a:solidFill>
+                  <a:srgbClr val="202124"/>
+                </a:solidFill>
+                <a:latin typeface="Calibri"/>
+              </a:rPr>
+              <a:t>Every app prints a checksum, so dead-code elimination cannot</a:t>
+            </a:r>
+          </a:p>
+          <a:p>
+            <a:pPr>
+              <a:spcAft>
+                <a:spcPts val="700"/>
+              </a:spcAft>
+            </a:pPr>
+            <a:r>
+              <a:rPr sz="1050">
+                <a:solidFill>
+                  <a:srgbClr val="202124"/>
+                </a:solidFill>
+                <a:latin typeface="Calibri"/>
+              </a:rPr>
+              <a:t>fake a result by optimising the work away.</a:t>
+            </a:r>
+          </a:p>
+          <a:p>
+            <a:pPr>
+              <a:spcAft>
+                <a:spcPts val="700"/>
+              </a:spcAft>
+            </a:pPr>
+            <a:r>
+              <a:rPr sz="1050">
+                <a:solidFill>
+                  <a:srgbClr val="202124"/>
+                </a:solidFill>
+                <a:latin typeface="Calibri"/>
+              </a:rPr>
+              <a:t>The vision app is hash-gated bit-exact against its published golden.</a:t>
+            </a:r>
+          </a:p>
+          <a:p>
+            <a:pPr>
+              <a:spcAft>
+                <a:spcPts val="700"/>
+              </a:spcAft>
+            </a:pPr>
+            <a:r>
+              <a:rPr sz="1050">
+                <a:solidFill>
+                  <a:srgbClr val="202124"/>
+                </a:solidFill>
+                <a:latin typeface="Calibri"/>
+              </a:rPr>
+              <a:t>Instruction agreement must pass before any cache-level number</a:t>
+            </a:r>
+          </a:p>
+          <a:p>
+            <a:pPr>
+              <a:spcAft>
+                <a:spcPts val="700"/>
+              </a:spcAft>
+            </a:pPr>
+            <a:r>
+              <a:rPr sz="1050">
+                <a:solidFill>
+                  <a:srgbClr val="202124"/>
+                </a:solidFill>
+                <a:latin typeface="Calibri"/>
+              </a:rPr>
+              <a:t>is read — a wrong instruction count invalidates everything downstream.</a:t>
+            </a:r>
+          </a:p>
+          <a:p>
+            <a:pPr>
+              <a:spcAft>
+                <a:spcPts val="700"/>
+              </a:spcAft>
+            </a:pPr>
+            <a:r>
+              <a:rPr sz="1050">
+                <a:solidFill>
+                  <a:srgbClr val="202124"/>
+                </a:solidFill>
+                <a:latin typeface="Calibri"/>
+              </a:rPr>
+              <a:t>DDR counts are idle-corrected over an equal-duration window.</a:t>
             </a:r>
           </a:p>
         </p:txBody>
@@ -10118,7 +10522,7 @@
                 </a:solidFill>
                 <a:latin typeface="Calibri"/>
               </a:rPr>
-              <a:t>wattson xcheck rev 2 · QEMU counts DERIVED, PMU/DDR counts MEASURED · 2026-08-30</a:t>
+              <a:t>wattson xcheck · QEMU counts DERIVED, PMU/DDR counts MEASURED · 2026-08-31</a:t>
             </a:r>
           </a:p>
         </p:txBody>
@@ -11841,7 +12245,7 @@
                 </a:solidFill>
                 <a:latin typeface="Calibri"/>
               </a:rPr>
-              <a:t>wattson xcheck rev 2 · QEMU counts DERIVED, PMU/DDR counts MEASURED · 2026-08-30</a:t>
+              <a:t>wattson xcheck · QEMU counts DERIVED, PMU/DDR counts MEASURED · 2026-08-31</a:t>
             </a:r>
           </a:p>
         </p:txBody>
@@ -12144,7 +12548,7 @@
                 </a:solidFill>
                 <a:latin typeface="Calibri"/>
               </a:rPr>
-              <a:t>wattson xcheck rev 2 · QEMU counts DERIVED, PMU/DDR counts MEASURED · 2026-08-30</a:t>
+              <a:t>wattson xcheck · QEMU counts DERIVED, PMU/DDR counts MEASURED · 2026-08-31</a:t>
             </a:r>
           </a:p>
         </p:txBody>
